--- a/docs/week-15/cen429-week-15-sunum.tr.pptx
+++ b/docs/week-15/cen429-week-15-sunum.tr.pptx
@@ -39,6 +39,10 @@
     <p:sldId id="287" r:id="rId39"/>
     <p:sldId id="288" r:id="rId40"/>
     <p:sldId id="289" r:id="rId41"/>
+    <p:sldId id="290" r:id="rId42"/>
+    <p:sldId id="291" r:id="rId43"/>
+    <p:sldId id="292" r:id="rId44"/>
+    <p:sldId id="293" r:id="rId45"/>
   </p:sldIdLst>
   <p:sldSz cx="12191695" cy="6858000" type="screen4x3"/>
   <p:notesSz cx="6858000" cy="9144000"/>
@@ -3973,7 +3977,7 @@
                   <a:srgbClr val="006D77"/>
                 </a:solidFill>
               </a:rPr>
-              <a:t>Final dönemi</a:t>
+              <a:t>Örnek sorular</a:t>
             </a:r>
           </a:p>
         </p:txBody>
@@ -3987,41 +3991,7 @@
         <p:spPr>
           <a:xfrm>
             <a:off x="640080" y="1325880"/>
-            <a:ext cx="10911535" cy="439928"/>
-          </a:xfrm>
-          <a:prstGeom prst="rect">
-            <a:avLst/>
-          </a:prstGeom>
-          <a:noFill/>
-        </p:spPr>
-        <p:txBody>
-          <a:bodyPr wrap="square" lIns="45720" rIns="45720">
-            <a:spAutoFit/>
-          </a:bodyPr>
-          <a:lstStyle/>
-          <a:p>
-            <a:pPr algn="l"/>
-            <a:r>
-              <a:rPr sz="2000" b="1">
-                <a:solidFill>
-                  <a:srgbClr val="1F2D3A"/>
-                </a:solidFill>
-              </a:rPr>
-              <a:t>Hafta 16 — Quiz-2</a:t>
-            </a:r>
-          </a:p>
-        </p:txBody>
-      </p:sp>
-      <p:sp>
-        <p:nvSpPr>
-          <p:cNvPr id="8" name="TextBox 7"/>
-          <p:cNvSpPr txBox="1"/>
-          <p:nvPr/>
-        </p:nvSpPr>
-        <p:spPr>
-          <a:xfrm>
-            <a:off x="640080" y="1875536"/>
-            <a:ext cx="10911535" cy="843280"/>
+            <a:ext cx="10911535" cy="2346960"/>
           </a:xfrm>
           <a:prstGeom prst="rect">
             <a:avLst/>
@@ -4053,7 +4023,7 @@
                   <a:srgbClr val="1F2D3A"/>
                 </a:solidFill>
               </a:rPr>
-              <a:t>Kapsam: 9–14. haftalar</a:t>
+              <a:t>Bu anahtar nereden türetiliyor, nerede duruyor, ne zaman siliniyor?</a:t>
             </a:r>
           </a:p>
           <a:p>
@@ -4076,7 +4046,99 @@
                   <a:srgbClr val="1F2D3A"/>
                 </a:solidFill>
               </a:rPr>
-              <a:t>Çalışma rehberi: 16. hafta sayfası</a:t>
+              <a:t>Zincir ve ad doğrulaması nerede?</a:t>
+            </a:r>
+          </a:p>
+          <a:p>
+            <a:pPr>
+              <a:spcAft>
+                <a:spcPts val="300"/>
+              </a:spcAft>
+            </a:pPr>
+            <a:r>
+              <a:rPr sz="2000" b="1">
+                <a:solidFill>
+                  <a:srgbClr val="006D77"/>
+                </a:solidFill>
+              </a:rPr>
+              <a:t>• </a:t>
+            </a:r>
+            <a:r>
+              <a:rPr sz="2000" b="0">
+                <a:solidFill>
+                  <a:srgbClr val="1F2D3A"/>
+                </a:solidFill>
+              </a:rPr>
+              <a:t>İmza doğrulaması başarısızsa ne oluyor? Eski imzalı sürüm yüklenebilir mi?</a:t>
+            </a:r>
+          </a:p>
+          <a:p>
+            <a:pPr>
+              <a:spcAft>
+                <a:spcPts val="300"/>
+              </a:spcAft>
+            </a:pPr>
+            <a:r>
+              <a:rPr sz="2000" b="1">
+                <a:solidFill>
+                  <a:srgbClr val="006D77"/>
+                </a:solidFill>
+              </a:rPr>
+              <a:t>• </a:t>
+            </a:r>
+            <a:r>
+              <a:rPr sz="2000" b="0">
+                <a:solidFill>
+                  <a:srgbClr val="1F2D3A"/>
+                </a:solidFill>
+              </a:rPr>
+              <a:t>Gizlemenin maliyetini ölçtünüz mü?</a:t>
+            </a:r>
+          </a:p>
+          <a:p>
+            <a:pPr>
+              <a:spcAft>
+                <a:spcPts val="300"/>
+              </a:spcAft>
+            </a:pPr>
+            <a:r>
+              <a:rPr sz="2000" b="1">
+                <a:solidFill>
+                  <a:srgbClr val="006D77"/>
+                </a:solidFill>
+              </a:rPr>
+              <a:t>• </a:t>
+            </a:r>
+            <a:r>
+              <a:rPr sz="2000" b="0">
+                <a:solidFill>
+                  <a:srgbClr val="1F2D3A"/>
+                </a:solidFill>
+              </a:rPr>
+              <a:t>Şu "karşılandı" satırının kanıtı nerede?</a:t>
+            </a:r>
+          </a:p>
+          <a:p>
+            <a:pPr>
+              <a:spcAft>
+                <a:spcPts val="300"/>
+              </a:spcAft>
+            </a:pPr>
+            <a:r>
+              <a:rPr sz="2000" b="1">
+                <a:solidFill>
+                  <a:srgbClr val="006D77"/>
+                </a:solidFill>
+              </a:rPr>
+              <a:t>• </a:t>
+            </a:r>
+            <a:r>
+              <a:rPr sz="2000" b="0">
+                <a:solidFill>
+                  <a:srgbClr val="1F2D3A"/>
+                </a:solidFill>
+              </a:rPr>
+              <a:t>Hangi gereksinimi devrettiniz, karşı taraf nasıl karşılayacak?</a:t>
             </a:r>
           </a:p>
         </p:txBody>
@@ -4092,14 +4154,6 @@
 <file path=ppt/slides/slide11.xml><?xml version="1.0" encoding="utf-8"?>
 <p:sld xmlns:a="http://schemas.openxmlformats.org/drawingml/2006/main" xmlns:p="http://schemas.openxmlformats.org/presentationml/2006/main" xmlns:r="http://schemas.openxmlformats.org/officeDocument/2006/relationships">
   <p:cSld>
-    <p:bg>
-      <p:bgPr>
-        <a:solidFill>
-          <a:srgbClr val="006D77"/>
-        </a:solidFill>
-        <a:effectLst/>
-      </p:bgPr>
-    </p:bg>
     <p:spTree>
       <p:nvGrpSpPr>
         <p:cNvPr id="1" name=""/>
@@ -4107,9 +4161,33 @@
         <p:nvPr/>
       </p:nvGrpSpPr>
       <p:grpSpPr/>
-      <p:sp>
-        <p:nvSpPr>
-          <p:cNvPr id="2" name="TextBox 1"/>
+      <p:pic>
+        <p:nvPicPr>
+          <p:cNvPr id="2" name="Picture 1" descr="rteu_logo_kucuk.jpg"/>
+          <p:cNvPicPr>
+            <a:picLocks noChangeAspect="1"/>
+          </p:cNvPicPr>
+          <p:nvPr/>
+        </p:nvPicPr>
+        <p:blipFill>
+          <a:blip r:embed="rId2"/>
+          <a:stretch>
+            <a:fillRect/>
+          </a:stretch>
+        </p:blipFill>
+        <p:spPr>
+          <a:xfrm>
+            <a:off x="640080" y="164592"/>
+            <a:ext cx="242773" cy="329184"/>
+          </a:xfrm>
+          <a:prstGeom prst="rect">
+            <a:avLst/>
+          </a:prstGeom>
+        </p:spPr>
+      </p:pic>
+      <p:sp>
+        <p:nvSpPr>
+          <p:cNvPr id="3" name="TextBox 2"/>
           <p:cNvSpPr txBox="1"/>
           <p:nvPr/>
         </p:nvSpPr>
@@ -4132,7 +4210,7 @@
             <a:r>
               <a:rPr sz="1100" b="0">
                 <a:solidFill>
-                  <a:srgbClr val="D8F0F2"/>
+                  <a:srgbClr val="5B6770"/>
                 </a:solidFill>
               </a:rPr>
               <a:t>CEN429 Güvenli Programlama · Hafta 15</a:t>
@@ -4142,7 +4220,7 @@
       </p:sp>
       <p:sp>
         <p:nvSpPr>
-          <p:cNvPr id="3" name="TextBox 2"/>
+          <p:cNvPr id="4" name="TextBox 3"/>
           <p:cNvSpPr txBox="1"/>
           <p:nvPr/>
         </p:nvSpPr>
@@ -4165,7 +4243,7 @@
             <a:r>
               <a:rPr sz="1000" b="0">
                 <a:solidFill>
-                  <a:srgbClr val="D8F0F2"/>
+                  <a:srgbClr val="5B6770"/>
                 </a:solidFill>
               </a:rPr>
               <a:t>RTEÜ Bilgisayar Mühendisliği · 2026-2027 Güz</a:t>
@@ -4175,7 +4253,7 @@
       </p:sp>
       <p:sp>
         <p:nvSpPr>
-          <p:cNvPr id="4" name="TextBox 3"/>
+          <p:cNvPr id="5" name="TextBox 4"/>
           <p:cNvSpPr txBox="1"/>
           <p:nvPr/>
         </p:nvSpPr>
@@ -4199,7 +4277,7 @@
             <a:r>
               <a:rPr sz="1000" b="0">
                 <a:solidFill>
-                  <a:srgbClr val="D8F0F2"/>
+                  <a:srgbClr val="5B6770"/>
                 </a:solidFill>
               </a:rPr>
               <a:t>11</a:t>
@@ -4209,38 +4287,403 @@
       </p:sp>
       <p:sp>
         <p:nvSpPr>
-          <p:cNvPr id="5" name="TextBox 4"/>
-          <p:cNvSpPr txBox="1"/>
-          <p:nvPr/>
-        </p:nvSpPr>
-        <p:spPr>
-          <a:xfrm>
-            <a:off x="640080" y="2743200"/>
-            <a:ext cx="10911535" cy="1280160"/>
-          </a:xfrm>
-          <a:prstGeom prst="rect">
-            <a:avLst/>
-          </a:prstGeom>
-          <a:noFill/>
-        </p:spPr>
-        <p:txBody>
-          <a:bodyPr wrap="square" lIns="45720" rIns="45720">
-            <a:spAutoFit/>
-          </a:bodyPr>
-          <a:lstStyle/>
-          <a:p>
-            <a:pPr algn="l"/>
-            <a:r>
-              <a:rPr sz="4000" b="1">
-                <a:solidFill>
-                  <a:srgbClr val="FFFFFF"/>
-                </a:solidFill>
-              </a:rPr>
-              <a:t>Ek · Final rubriği madde madde</a:t>
-            </a:r>
-          </a:p>
-        </p:txBody>
-      </p:sp>
+          <p:cNvPr id="6" name="TextBox 5"/>
+          <p:cNvSpPr txBox="1"/>
+          <p:nvPr/>
+        </p:nvSpPr>
+        <p:spPr>
+          <a:xfrm>
+            <a:off x="640080" y="548640"/>
+            <a:ext cx="10911535" cy="731520"/>
+          </a:xfrm>
+          <a:prstGeom prst="rect">
+            <a:avLst/>
+          </a:prstGeom>
+          <a:noFill/>
+        </p:spPr>
+        <p:txBody>
+          <a:bodyPr wrap="square" lIns="45720" rIns="45720" anchor="ctr">
+            <a:spAutoFit/>
+          </a:bodyPr>
+          <a:lstStyle/>
+          <a:p>
+            <a:r>
+              <a:rPr sz="2600" b="1">
+                <a:solidFill>
+                  <a:srgbClr val="006D77"/>
+                </a:solidFill>
+              </a:rPr>
+              <a:t>Sık yapılan hatalar</a:t>
+            </a:r>
+          </a:p>
+        </p:txBody>
+      </p:sp>
+      <p:graphicFrame>
+        <p:nvGraphicFramePr>
+          <p:cNvPr id="7" name="Table 6"/>
+          <p:cNvGraphicFramePr>
+            <a:graphicFrameLocks noGrp="1"/>
+          </p:cNvGraphicFramePr>
+          <p:nvPr/>
+        </p:nvGraphicFramePr>
+        <p:xfrm>
+          <a:off x="640080" y="1325880"/>
+          <a:ext cx="10911534" cy="2403043"/>
+        </p:xfrm>
+        <a:graphic>
+          <a:graphicData uri="http://schemas.openxmlformats.org/drawingml/2006/table">
+            <a:tbl>
+              <a:tblPr firstRow="1" bandRow="1">
+                <a:tableStyleId>{5C22544A-7EE6-4342-B048-85BDC9FD1C3A}</a:tableStyleId>
+              </a:tblPr>
+              <a:tblGrid>
+                <a:gridCol w="5101496"/>
+                <a:gridCol w="5810038"/>
+              </a:tblGrid>
+              <a:tr h="343291">
+                <a:tc>
+                  <a:txBody>
+                    <a:bodyPr wrap="square"/>
+                    <a:lstStyle/>
+                    <a:p>
+                      <a:r>
+                        <a:rPr sz="1296" b="1">
+                          <a:solidFill>
+                            <a:srgbClr val="FFFFFF"/>
+                          </a:solidFill>
+                        </a:rPr>
+                        <a:t>Hata</a:t>
+                      </a:r>
+                    </a:p>
+                  </a:txBody>
+                  <a:tcPr marL="54864" marR="54864" marT="27432" marB="27432" anchor="ctr">
+                    <a:solidFill>
+                      <a:srgbClr val="006D77"/>
+                    </a:solidFill>
+                  </a:tcPr>
+                </a:tc>
+                <a:tc>
+                  <a:txBody>
+                    <a:bodyPr wrap="square"/>
+                    <a:lstStyle/>
+                    <a:p>
+                      <a:r>
+                        <a:rPr sz="1296" b="1">
+                          <a:solidFill>
+                            <a:srgbClr val="FFFFFF"/>
+                          </a:solidFill>
+                        </a:rPr>
+                        <a:t>Neden sorun?</a:t>
+                      </a:r>
+                    </a:p>
+                  </a:txBody>
+                  <a:tcPr marL="54864" marR="54864" marT="27432" marB="27432" anchor="ctr">
+                    <a:solidFill>
+                      <a:srgbClr val="006D77"/>
+                    </a:solidFill>
+                  </a:tcPr>
+                </a:tc>
+              </a:tr>
+              <a:tr h="343291">
+                <a:tc>
+                  <a:txBody>
+                    <a:bodyPr wrap="square"/>
+                    <a:lstStyle/>
+                    <a:p>
+                      <a:r>
+                        <a:rPr sz="1296" b="0">
+                          <a:solidFill>
+                            <a:srgbClr val="1F2D3A"/>
+                          </a:solidFill>
+                        </a:rPr>
+                        <a:t>Test planı var, sonuç yok</a:t>
+                      </a:r>
+                    </a:p>
+                  </a:txBody>
+                  <a:tcPr marL="54864" marR="54864" marT="27432" marB="27432" anchor="ctr">
+                    <a:solidFill>
+                      <a:srgbClr val="FFFFFF"/>
+                    </a:solidFill>
+                  </a:tcPr>
+                </a:tc>
+                <a:tc>
+                  <a:txBody>
+                    <a:bodyPr wrap="square"/>
+                    <a:lstStyle/>
+                    <a:p>
+                      <a:r>
+                        <a:rPr sz="1296" b="0">
+                          <a:solidFill>
+                            <a:srgbClr val="1F2D3A"/>
+                          </a:solidFill>
+                        </a:rPr>
+                        <a:t>Finalde </a:t>
+                      </a:r>
+                      <a:r>
+                        <a:rPr sz="1296" b="1">
+                          <a:solidFill>
+                            <a:srgbClr val="1F2D3A"/>
+                          </a:solidFill>
+                        </a:rPr>
+                        <a:t>sonuç</a:t>
+                      </a:r>
+                      <a:r>
+                        <a:rPr sz="1296" b="0">
+                          <a:solidFill>
+                            <a:srgbClr val="1F2D3A"/>
+                          </a:solidFill>
+                        </a:rPr>
+                        <a:t> beklenir</a:t>
+                      </a:r>
+                    </a:p>
+                  </a:txBody>
+                  <a:tcPr marL="54864" marR="54864" marT="27432" marB="27432" anchor="ctr">
+                    <a:solidFill>
+                      <a:srgbClr val="FFFFFF"/>
+                    </a:solidFill>
+                  </a:tcPr>
+                </a:tc>
+              </a:tr>
+              <a:tr h="343291">
+                <a:tc>
+                  <a:txBody>
+                    <a:bodyPr wrap="square"/>
+                    <a:lstStyle/>
+                    <a:p>
+                      <a:r>
+                        <a:rPr sz="1296" b="0">
+                          <a:solidFill>
+                            <a:srgbClr val="1F2D3A"/>
+                          </a:solidFill>
+                        </a:rPr>
+                        <a:t>Kanıtsız "karşılandı"</a:t>
+                      </a:r>
+                    </a:p>
+                  </a:txBody>
+                  <a:tcPr marL="54864" marR="54864" marT="27432" marB="27432" anchor="ctr">
+                    <a:solidFill>
+                      <a:srgbClr val="EEF7F8"/>
+                    </a:solidFill>
+                  </a:tcPr>
+                </a:tc>
+                <a:tc>
+                  <a:txBody>
+                    <a:bodyPr wrap="square"/>
+                    <a:lstStyle/>
+                    <a:p>
+                      <a:r>
+                        <a:rPr sz="1296" b="0">
+                          <a:solidFill>
+                            <a:srgbClr val="1F2D3A"/>
+                          </a:solidFill>
+                        </a:rPr>
+                        <a:t>Karşılanmamış sayılır</a:t>
+                      </a:r>
+                    </a:p>
+                  </a:txBody>
+                  <a:tcPr marL="54864" marR="54864" marT="27432" marB="27432" anchor="ctr">
+                    <a:solidFill>
+                      <a:srgbClr val="EEF7F8"/>
+                    </a:solidFill>
+                  </a:tcPr>
+                </a:tc>
+              </a:tr>
+              <a:tr h="343291">
+                <a:tc>
+                  <a:txBody>
+                    <a:bodyPr wrap="square"/>
+                    <a:lstStyle/>
+                    <a:p>
+                      <a:r>
+                        <a:rPr sz="1296" b="0">
+                          <a:solidFill>
+                            <a:srgbClr val="1F2D3A"/>
+                          </a:solidFill>
+                        </a:rPr>
+                        <a:t>Kılavuz ile kod sürümü farklı</a:t>
+                      </a:r>
+                    </a:p>
+                  </a:txBody>
+                  <a:tcPr marL="54864" marR="54864" marT="27432" marB="27432" anchor="ctr">
+                    <a:solidFill>
+                      <a:srgbClr val="FFFFFF"/>
+                    </a:solidFill>
+                  </a:tcPr>
+                </a:tc>
+                <a:tc>
+                  <a:txBody>
+                    <a:bodyPr wrap="square"/>
+                    <a:lstStyle/>
+                    <a:p>
+                      <a:r>
+                        <a:rPr sz="1296" b="0">
+                          <a:solidFill>
+                            <a:srgbClr val="1F2D3A"/>
+                          </a:solidFill>
+                        </a:rPr>
+                        <a:t>Değerlendirilen ürün belirsiz</a:t>
+                      </a:r>
+                    </a:p>
+                  </a:txBody>
+                  <a:tcPr marL="54864" marR="54864" marT="27432" marB="27432" anchor="ctr">
+                    <a:solidFill>
+                      <a:srgbClr val="FFFFFF"/>
+                    </a:solidFill>
+                  </a:tcPr>
+                </a:tc>
+              </a:tr>
+              <a:tr h="343291">
+                <a:tc>
+                  <a:txBody>
+                    <a:bodyPr wrap="square"/>
+                    <a:lstStyle/>
+                    <a:p>
+                      <a:r>
+                        <a:rPr sz="1296" b="0">
+                          <a:solidFill>
+                            <a:srgbClr val="1F2D3A"/>
+                          </a:solidFill>
+                        </a:rPr>
+                        <a:t>Boş kalan risk bölümü</a:t>
+                      </a:r>
+                    </a:p>
+                  </a:txBody>
+                  <a:tcPr marL="54864" marR="54864" marT="27432" marB="27432" anchor="ctr">
+                    <a:solidFill>
+                      <a:srgbClr val="EEF7F8"/>
+                    </a:solidFill>
+                  </a:tcPr>
+                </a:tc>
+                <a:tc>
+                  <a:txBody>
+                    <a:bodyPr wrap="square"/>
+                    <a:lstStyle/>
+                    <a:p>
+                      <a:r>
+                        <a:rPr sz="1296" b="0">
+                          <a:solidFill>
+                            <a:srgbClr val="1F2D3A"/>
+                          </a:solidFill>
+                        </a:rPr>
+                        <a:t>Eksik analiz</a:t>
+                      </a:r>
+                    </a:p>
+                  </a:txBody>
+                  <a:tcPr marL="54864" marR="54864" marT="27432" marB="27432" anchor="ctr">
+                    <a:solidFill>
+                      <a:srgbClr val="EEF7F8"/>
+                    </a:solidFill>
+                  </a:tcPr>
+                </a:tc>
+              </a:tr>
+              <a:tr h="343291">
+                <a:tc>
+                  <a:txBody>
+                    <a:bodyPr wrap="square"/>
+                    <a:lstStyle/>
+                    <a:p>
+                      <a:r>
+                        <a:rPr sz="1296" b="0">
+                          <a:solidFill>
+                            <a:srgbClr val="1F2D3A"/>
+                          </a:solidFill>
+                        </a:rPr>
+                        <a:t>Vize geri bildirimi yok sayılmış</a:t>
+                      </a:r>
+                    </a:p>
+                  </a:txBody>
+                  <a:tcPr marL="54864" marR="54864" marT="27432" marB="27432" anchor="ctr">
+                    <a:solidFill>
+                      <a:srgbClr val="FFFFFF"/>
+                    </a:solidFill>
+                  </a:tcPr>
+                </a:tc>
+                <a:tc>
+                  <a:txBody>
+                    <a:bodyPr wrap="square"/>
+                    <a:lstStyle/>
+                    <a:p>
+                      <a:r>
+                        <a:rPr sz="1296" b="0">
+                          <a:solidFill>
+                            <a:srgbClr val="1F2D3A"/>
+                          </a:solidFill>
+                        </a:rPr>
+                        <a:t>Bulgu–aksiyon döngüsü sürecin parçası</a:t>
+                      </a:r>
+                    </a:p>
+                  </a:txBody>
+                  <a:tcPr marL="54864" marR="54864" marT="27432" marB="27432" anchor="ctr">
+                    <a:solidFill>
+                      <a:srgbClr val="FFFFFF"/>
+                    </a:solidFill>
+                  </a:tcPr>
+                </a:tc>
+              </a:tr>
+              <a:tr h="343297">
+                <a:tc>
+                  <a:txBody>
+                    <a:bodyPr wrap="square"/>
+                    <a:lstStyle/>
+                    <a:p>
+                      <a:r>
+                        <a:rPr sz="1296" b="0">
+                          <a:solidFill>
+                            <a:srgbClr val="1F2D3A"/>
+                          </a:solidFill>
+                        </a:rPr>
+                        <a:t>Depoda gerçek sır / kişisel veri</a:t>
+                      </a:r>
+                    </a:p>
+                  </a:txBody>
+                  <a:tcPr marL="54864" marR="54864" marT="27432" marB="27432" anchor="ctr">
+                    <a:solidFill>
+                      <a:srgbClr val="EEF7F8"/>
+                    </a:solidFill>
+                  </a:tcPr>
+                </a:tc>
+                <a:tc>
+                  <a:txBody>
+                    <a:bodyPr wrap="square"/>
+                    <a:lstStyle/>
+                    <a:p>
+                      <a:r>
+                        <a:rPr sz="1296" b="0">
+                          <a:solidFill>
+                            <a:srgbClr val="1F2D3A"/>
+                          </a:solidFill>
+                        </a:rPr>
+                        <a:t>Değerler </a:t>
+                      </a:r>
+                      <a:r>
+                        <a:rPr sz="1296" b="1">
+                          <a:solidFill>
+                            <a:srgbClr val="1F2D3A"/>
+                          </a:solidFill>
+                        </a:rPr>
+                        <a:t>sentetik</a:t>
+                      </a:r>
+                      <a:r>
+                        <a:rPr sz="1296" b="0">
+                          <a:solidFill>
+                            <a:srgbClr val="1F2D3A"/>
+                          </a:solidFill>
+                        </a:rPr>
+                        <a:t> olmalı</a:t>
+                      </a:r>
+                    </a:p>
+                  </a:txBody>
+                  <a:tcPr marL="54864" marR="54864" marT="27432" marB="27432" anchor="ctr">
+                    <a:solidFill>
+                      <a:srgbClr val="EEF7F8"/>
+                    </a:solidFill>
+                  </a:tcPr>
+                </a:tc>
+              </a:tr>
+            </a:tbl>
+          </a:graphicData>
+        </a:graphic>
+      </p:graphicFrame>
     </p:spTree>
   </p:cSld>
   <p:clrMapOvr>
@@ -4411,192 +4854,35 @@
                   <a:srgbClr val="006D77"/>
                 </a:solidFill>
               </a:rPr>
-              <a:t>Final neyi ölçer?</a:t>
-            </a:r>
-          </a:p>
-        </p:txBody>
-      </p:sp>
-      <p:sp>
-        <p:nvSpPr>
-          <p:cNvPr id="7" name="TextBox 6"/>
-          <p:cNvSpPr txBox="1"/>
-          <p:nvPr/>
-        </p:nvSpPr>
-        <p:spPr>
-          <a:xfrm>
-            <a:off x="640080" y="1325880"/>
-            <a:ext cx="10911535" cy="439928"/>
-          </a:xfrm>
-          <a:prstGeom prst="rect">
-            <a:avLst/>
-          </a:prstGeom>
-          <a:noFill/>
-        </p:spPr>
-        <p:txBody>
-          <a:bodyPr wrap="square" lIns="45720" rIns="45720">
-            <a:spAutoFit/>
-          </a:bodyPr>
-          <a:lstStyle/>
-          <a:p>
-            <a:pPr algn="l"/>
-            <a:r>
-              <a:rPr sz="2000" b="0">
-                <a:solidFill>
-                  <a:srgbClr val="1F2D3A"/>
-                </a:solidFill>
-              </a:rPr>
-              <a:t>Final gösterimi projenizin </a:t>
-            </a:r>
-            <a:r>
-              <a:rPr sz="2000" b="1">
-                <a:solidFill>
-                  <a:srgbClr val="1F2D3A"/>
-                </a:solidFill>
-              </a:rPr>
-              <a:t>tamamını</a:t>
-            </a:r>
-            <a:r>
-              <a:rPr sz="2000" b="0">
-                <a:solidFill>
-                  <a:srgbClr val="1F2D3A"/>
-                </a:solidFill>
-              </a:rPr>
-              <a:t> ölçer:</a:t>
-            </a:r>
-          </a:p>
-        </p:txBody>
-      </p:sp>
-      <p:sp>
-        <p:nvSpPr>
-          <p:cNvPr id="8" name="TextBox 7"/>
-          <p:cNvSpPr txBox="1"/>
-          <p:nvPr/>
-        </p:nvSpPr>
-        <p:spPr>
-          <a:xfrm>
-            <a:off x="640080" y="1875536"/>
-            <a:ext cx="10911535" cy="1595120"/>
-          </a:xfrm>
-          <a:prstGeom prst="rect">
-            <a:avLst/>
-          </a:prstGeom>
-          <a:noFill/>
-        </p:spPr>
-        <p:txBody>
-          <a:bodyPr wrap="square" lIns="45720" rIns="45720">
-            <a:spAutoFit/>
-          </a:bodyPr>
-          <a:lstStyle/>
-          <a:p>
-            <a:pPr>
-              <a:spcAft>
-                <a:spcPts val="300"/>
-              </a:spcAft>
-            </a:pPr>
-            <a:r>
-              <a:rPr sz="2000" b="1">
-                <a:solidFill>
-                  <a:srgbClr val="006D77"/>
-                </a:solidFill>
-              </a:rPr>
-              <a:t>• </a:t>
-            </a:r>
-            <a:r>
-              <a:rPr sz="2000" b="0">
-                <a:solidFill>
-                  <a:srgbClr val="1F2D3A"/>
-                </a:solidFill>
-              </a:rPr>
-              <a:t>kripto, güvenli iletişim</a:t>
-            </a:r>
-          </a:p>
-          <a:p>
-            <a:pPr>
-              <a:spcAft>
-                <a:spcPts val="300"/>
-              </a:spcAft>
-            </a:pPr>
-            <a:r>
-              <a:rPr sz="2000" b="1">
-                <a:solidFill>
-                  <a:srgbClr val="006D77"/>
-                </a:solidFill>
-              </a:rPr>
-              <a:t>• </a:t>
-            </a:r>
-            <a:r>
-              <a:rPr sz="2000" b="0">
-                <a:solidFill>
-                  <a:srgbClr val="1F2D3A"/>
-                </a:solidFill>
-              </a:rPr>
-              <a:t>varlık yönetimi (tam)</a:t>
-            </a:r>
-          </a:p>
-          <a:p>
-            <a:pPr>
-              <a:spcAft>
-                <a:spcPts val="300"/>
-              </a:spcAft>
-            </a:pPr>
-            <a:r>
-              <a:rPr sz="2000" b="1">
-                <a:solidFill>
-                  <a:srgbClr val="006D77"/>
-                </a:solidFill>
-              </a:rPr>
-              <a:t>• </a:t>
-            </a:r>
-            <a:r>
-              <a:rPr sz="2000" b="0">
-                <a:solidFill>
-                  <a:srgbClr val="1F2D3A"/>
-                </a:solidFill>
-              </a:rPr>
-              <a:t>ileri ikili korumalar</a:t>
-            </a:r>
-          </a:p>
-          <a:p>
-            <a:pPr>
-              <a:spcAft>
-                <a:spcPts val="300"/>
-              </a:spcAft>
-            </a:pPr>
-            <a:r>
-              <a:rPr sz="2000" b="1">
-                <a:solidFill>
-                  <a:srgbClr val="006D77"/>
-                </a:solidFill>
-              </a:rPr>
-              <a:t>• </a:t>
-            </a:r>
-            <a:r>
-              <a:rPr sz="2000" b="0">
-                <a:solidFill>
-                  <a:srgbClr val="1F2D3A"/>
-                </a:solidFill>
-              </a:rPr>
-              <a:t>test </a:t>
-            </a:r>
-            <a:r>
-              <a:rPr sz="2000" b="1">
-                <a:solidFill>
-                  <a:srgbClr val="1F2D3A"/>
-                </a:solidFill>
-              </a:rPr>
-              <a:t>sonuçları</a:t>
-            </a:r>
-            <a:r>
-              <a:rPr sz="2000" b="0">
-                <a:solidFill>
-                  <a:srgbClr val="1F2D3A"/>
-                </a:solidFill>
-              </a:rPr>
-              <a:t>, standartlar</a:t>
-            </a:r>
-          </a:p>
-        </p:txBody>
-      </p:sp>
+              <a:t>S16: plan değil sonuç — şema</a:t>
+            </a:r>
+          </a:p>
+        </p:txBody>
+      </p:sp>
+      <p:pic>
+        <p:nvPicPr>
+          <p:cNvPr id="7" name="Picture 6" descr="h15-04-s16.png"/>
+          <p:cNvPicPr>
+            <a:picLocks noChangeAspect="1"/>
+          </p:cNvPicPr>
+          <p:nvPr/>
+        </p:nvPicPr>
+        <p:blipFill>
+          <a:blip r:embed="rId3"/>
+          <a:stretch>
+            <a:fillRect/>
+          </a:stretch>
+        </p:blipFill>
+        <p:spPr>
+          <a:xfrm>
+            <a:off x="2046645" y="1325880"/>
+            <a:ext cx="8098404" cy="3473778"/>
+          </a:xfrm>
+          <a:prstGeom prst="rect">
+            <a:avLst/>
+          </a:prstGeom>
+        </p:spPr>
+      </p:pic>
     </p:spTree>
   </p:cSld>
   <p:clrMapOvr>
@@ -4767,7 +5053,7 @@
                   <a:srgbClr val="006D77"/>
                 </a:solidFill>
               </a:rPr>
-              <a:t>Madde · kriptografi</a:t>
+              <a:t>Dönem sonunda</a:t>
             </a:r>
           </a:p>
         </p:txBody>
@@ -4781,7 +5067,7 @@
         <p:spPr>
           <a:xfrm>
             <a:off x="640080" y="1325880"/>
-            <a:ext cx="10911535" cy="843280"/>
+            <a:ext cx="10911535" cy="1173480"/>
           </a:xfrm>
           <a:prstGeom prst="rect">
             <a:avLst/>
@@ -4813,7 +5099,23 @@
                   <a:srgbClr val="1F2D3A"/>
                 </a:solidFill>
               </a:rPr>
-              <a:t>Algoritma envanteri, anahtar yaşam döngüsü.</a:t>
+              <a:t>Kılavuzunuz = sertifikasyon belgelerinin küçük bir modeli → </a:t>
+            </a:r>
+            <a:r>
+              <a:rPr sz="2000" b="1">
+                <a:solidFill>
+                  <a:srgbClr val="1F2D3A"/>
+                </a:solidFill>
+              </a:rPr>
+              <a:t>portfolyo</a:t>
+            </a:r>
+            <a:r>
+              <a:rPr sz="2000" b="0">
+                <a:solidFill>
+                  <a:srgbClr val="1F2D3A"/>
+                </a:solidFill>
+              </a:rPr>
+              <a:t> (gizli bilgi içermediğinden emin olun)</a:t>
             </a:r>
           </a:p>
           <a:p>
@@ -4831,20 +5133,12 @@
               <a:t>• </a:t>
             </a:r>
             <a:r>
-              <a:rPr sz="2000" b="1">
+              <a:rPr sz="2000" b="0">
                 <a:solidFill>
                   <a:srgbClr val="1F2D3A"/>
                 </a:solidFill>
               </a:rPr>
-              <a:t>Kanıt:</a:t>
-            </a:r>
-            <a:r>
-              <a:rPr sz="2000" b="0">
-                <a:solidFill>
-                  <a:srgbClr val="1F2D3A"/>
-                </a:solidFill>
-              </a:rPr>
-              <a:t> S8 + testler.</a:t>
+              <a:t>Teslim edilen her satır açıklanabilmeli; her takım üyesine soru sorulabilir</a:t>
             </a:r>
           </a:p>
         </p:txBody>
@@ -5019,7 +5313,7 @@
                   <a:srgbClr val="006D77"/>
                 </a:solidFill>
               </a:rPr>
-              <a:t>Madde · güvenli iletişim</a:t>
+              <a:t>Final dönemi</a:t>
             </a:r>
           </a:p>
         </p:txBody>
@@ -5033,6 +5327,40 @@
         <p:spPr>
           <a:xfrm>
             <a:off x="640080" y="1325880"/>
+            <a:ext cx="10911535" cy="439928"/>
+          </a:xfrm>
+          <a:prstGeom prst="rect">
+            <a:avLst/>
+          </a:prstGeom>
+          <a:noFill/>
+        </p:spPr>
+        <p:txBody>
+          <a:bodyPr wrap="square" lIns="45720" rIns="45720">
+            <a:spAutoFit/>
+          </a:bodyPr>
+          <a:lstStyle/>
+          <a:p>
+            <a:pPr algn="l"/>
+            <a:r>
+              <a:rPr sz="2000" b="1">
+                <a:solidFill>
+                  <a:srgbClr val="1F2D3A"/>
+                </a:solidFill>
+              </a:rPr>
+              <a:t>Hafta 16 — Quiz-2</a:t>
+            </a:r>
+          </a:p>
+        </p:txBody>
+      </p:sp>
+      <p:sp>
+        <p:nvSpPr>
+          <p:cNvPr id="8" name="TextBox 7"/>
+          <p:cNvSpPr txBox="1"/>
+          <p:nvPr/>
+        </p:nvSpPr>
+        <p:spPr>
+          <a:xfrm>
+            <a:off x="640080" y="1875536"/>
             <a:ext cx="10911535" cy="843280"/>
           </a:xfrm>
           <a:prstGeom prst="rect">
@@ -5065,7 +5393,7 @@
                   <a:srgbClr val="1F2D3A"/>
                 </a:solidFill>
               </a:rPr>
-              <a:t>TLS, sabitleme, mesaj düzeyi.</a:t>
+              <a:t>Kapsam: 9–14. haftalar</a:t>
             </a:r>
           </a:p>
           <a:p>
@@ -5083,20 +5411,12 @@
               <a:t>• </a:t>
             </a:r>
             <a:r>
-              <a:rPr sz="2000" b="1">
+              <a:rPr sz="2000" b="0">
                 <a:solidFill>
                   <a:srgbClr val="1F2D3A"/>
                 </a:solidFill>
               </a:rPr>
-              <a:t>Kanıt:</a:t>
-            </a:r>
-            <a:r>
-              <a:rPr sz="2000" b="0">
-                <a:solidFill>
-                  <a:srgbClr val="1F2D3A"/>
-                </a:solidFill>
-              </a:rPr>
-              <a:t> S6, S11 + test.</a:t>
+              <a:t>Çalışma rehberi: 16. hafta sayfası</a:t>
             </a:r>
           </a:p>
         </p:txBody>
@@ -5112,6 +5432,14 @@
 <file path=ppt/slides/slide15.xml><?xml version="1.0" encoding="utf-8"?>
 <p:sld xmlns:a="http://schemas.openxmlformats.org/drawingml/2006/main" xmlns:p="http://schemas.openxmlformats.org/presentationml/2006/main" xmlns:r="http://schemas.openxmlformats.org/officeDocument/2006/relationships">
   <p:cSld>
+    <p:bg>
+      <p:bgPr>
+        <a:solidFill>
+          <a:srgbClr val="006D77"/>
+        </a:solidFill>
+        <a:effectLst/>
+      </p:bgPr>
+    </p:bg>
     <p:spTree>
       <p:nvGrpSpPr>
         <p:cNvPr id="1" name=""/>
@@ -5119,33 +5447,9 @@
         <p:nvPr/>
       </p:nvGrpSpPr>
       <p:grpSpPr/>
-      <p:pic>
-        <p:nvPicPr>
-          <p:cNvPr id="2" name="Picture 1" descr="rteu_logo_kucuk.jpg"/>
-          <p:cNvPicPr>
-            <a:picLocks noChangeAspect="1"/>
-          </p:cNvPicPr>
-          <p:nvPr/>
-        </p:nvPicPr>
-        <p:blipFill>
-          <a:blip r:embed="rId2"/>
-          <a:stretch>
-            <a:fillRect/>
-          </a:stretch>
-        </p:blipFill>
-        <p:spPr>
-          <a:xfrm>
-            <a:off x="640080" y="164592"/>
-            <a:ext cx="242773" cy="329184"/>
-          </a:xfrm>
-          <a:prstGeom prst="rect">
-            <a:avLst/>
-          </a:prstGeom>
-        </p:spPr>
-      </p:pic>
-      <p:sp>
-        <p:nvSpPr>
-          <p:cNvPr id="3" name="TextBox 2"/>
+      <p:sp>
+        <p:nvSpPr>
+          <p:cNvPr id="2" name="TextBox 1"/>
           <p:cNvSpPr txBox="1"/>
           <p:nvPr/>
         </p:nvSpPr>
@@ -5168,7 +5472,7 @@
             <a:r>
               <a:rPr sz="1100" b="0">
                 <a:solidFill>
-                  <a:srgbClr val="5B6770"/>
+                  <a:srgbClr val="D8F0F2"/>
                 </a:solidFill>
               </a:rPr>
               <a:t>CEN429 Güvenli Programlama · Hafta 15</a:t>
@@ -5178,7 +5482,7 @@
       </p:sp>
       <p:sp>
         <p:nvSpPr>
-          <p:cNvPr id="4" name="TextBox 3"/>
+          <p:cNvPr id="3" name="TextBox 2"/>
           <p:cNvSpPr txBox="1"/>
           <p:nvPr/>
         </p:nvSpPr>
@@ -5201,7 +5505,7 @@
             <a:r>
               <a:rPr sz="1000" b="0">
                 <a:solidFill>
-                  <a:srgbClr val="5B6770"/>
+                  <a:srgbClr val="D8F0F2"/>
                 </a:solidFill>
               </a:rPr>
               <a:t>RTEÜ Bilgisayar Mühendisliği · 2026-2027 Güz</a:t>
@@ -5211,7 +5515,7 @@
       </p:sp>
       <p:sp>
         <p:nvSpPr>
-          <p:cNvPr id="5" name="TextBox 4"/>
+          <p:cNvPr id="4" name="TextBox 3"/>
           <p:cNvSpPr txBox="1"/>
           <p:nvPr/>
         </p:nvSpPr>
@@ -5235,7 +5539,7 @@
             <a:r>
               <a:rPr sz="1000" b="0">
                 <a:solidFill>
-                  <a:srgbClr val="5B6770"/>
+                  <a:srgbClr val="D8F0F2"/>
                 </a:solidFill>
               </a:rPr>
               <a:t>15</a:t>
@@ -5245,47 +5549,14 @@
       </p:sp>
       <p:sp>
         <p:nvSpPr>
-          <p:cNvPr id="6" name="TextBox 5"/>
-          <p:cNvSpPr txBox="1"/>
-          <p:nvPr/>
-        </p:nvSpPr>
-        <p:spPr>
-          <a:xfrm>
-            <a:off x="640080" y="548640"/>
-            <a:ext cx="10911535" cy="731520"/>
-          </a:xfrm>
-          <a:prstGeom prst="rect">
-            <a:avLst/>
-          </a:prstGeom>
-          <a:noFill/>
-        </p:spPr>
-        <p:txBody>
-          <a:bodyPr wrap="square" lIns="45720" rIns="45720" anchor="ctr">
-            <a:spAutoFit/>
-          </a:bodyPr>
-          <a:lstStyle/>
-          <a:p>
-            <a:r>
-              <a:rPr sz="3000" b="1">
-                <a:solidFill>
-                  <a:srgbClr val="006D77"/>
-                </a:solidFill>
-              </a:rPr>
-              <a:t>Madde · ileri ikili korumalar</a:t>
-            </a:r>
-          </a:p>
-        </p:txBody>
-      </p:sp>
-      <p:sp>
-        <p:nvSpPr>
-          <p:cNvPr id="7" name="TextBox 6"/>
-          <p:cNvSpPr txBox="1"/>
-          <p:nvPr/>
-        </p:nvSpPr>
-        <p:spPr>
-          <a:xfrm>
-            <a:off x="640080" y="1325880"/>
-            <a:ext cx="10911535" cy="843280"/>
+          <p:cNvPr id="5" name="TextBox 4"/>
+          <p:cNvSpPr txBox="1"/>
+          <p:nvPr/>
+        </p:nvSpPr>
+        <p:spPr>
+          <a:xfrm>
+            <a:off x="640080" y="2743200"/>
+            <a:ext cx="10911535" cy="1280160"/>
           </a:xfrm>
           <a:prstGeom prst="rect">
             <a:avLst/>
@@ -5298,57 +5569,14 @@
           </a:bodyPr>
           <a:lstStyle/>
           <a:p>
-            <a:pPr>
-              <a:spcAft>
-                <a:spcPts val="300"/>
-              </a:spcAft>
-            </a:pPr>
-            <a:r>
-              <a:rPr sz="2000" b="1">
-                <a:solidFill>
-                  <a:srgbClr val="006D77"/>
-                </a:solidFill>
-              </a:rPr>
-              <a:t>• </a:t>
-            </a:r>
-            <a:r>
-              <a:rPr sz="2000" b="0">
-                <a:solidFill>
-                  <a:srgbClr val="1F2D3A"/>
-                </a:solidFill>
-              </a:rPr>
-              <a:t>Gizleme (S9 ileri), derleme hattı (S15).</a:t>
-            </a:r>
-          </a:p>
-          <a:p>
-            <a:pPr>
-              <a:spcAft>
-                <a:spcPts val="300"/>
-              </a:spcAft>
-            </a:pPr>
-            <a:r>
-              <a:rPr sz="2000" b="1">
-                <a:solidFill>
-                  <a:srgbClr val="006D77"/>
-                </a:solidFill>
-              </a:rPr>
-              <a:t>• </a:t>
-            </a:r>
-            <a:r>
-              <a:rPr sz="2000" b="1">
-                <a:solidFill>
-                  <a:srgbClr val="1F2D3A"/>
-                </a:solidFill>
-              </a:rPr>
-              <a:t>Kanıt:</a:t>
-            </a:r>
-            <a:r>
-              <a:rPr sz="2000" b="0">
-                <a:solidFill>
-                  <a:srgbClr val="1F2D3A"/>
-                </a:solidFill>
-              </a:rPr>
-              <a:t> ölçüm tablosu + imzalama.</a:t>
+            <a:pPr algn="l"/>
+            <a:r>
+              <a:rPr sz="4000" b="1">
+                <a:solidFill>
+                  <a:srgbClr val="FFFFFF"/>
+                </a:solidFill>
+              </a:rPr>
+              <a:t>Ek · Final rubriği madde madde</a:t>
             </a:r>
           </a:p>
         </p:txBody>
@@ -5523,7 +5751,7 @@
                   <a:srgbClr val="006D77"/>
                 </a:solidFill>
               </a:rPr>
-              <a:t>Madde · test ve doğrulama</a:t>
+              <a:t>Final neyi ölçer?</a:t>
             </a:r>
           </a:p>
         </p:txBody>
@@ -5537,7 +5765,57 @@
         <p:spPr>
           <a:xfrm>
             <a:off x="640080" y="1325880"/>
-            <a:ext cx="10911535" cy="843280"/>
+            <a:ext cx="10911535" cy="439928"/>
+          </a:xfrm>
+          <a:prstGeom prst="rect">
+            <a:avLst/>
+          </a:prstGeom>
+          <a:noFill/>
+        </p:spPr>
+        <p:txBody>
+          <a:bodyPr wrap="square" lIns="45720" rIns="45720">
+            <a:spAutoFit/>
+          </a:bodyPr>
+          <a:lstStyle/>
+          <a:p>
+            <a:pPr algn="l"/>
+            <a:r>
+              <a:rPr sz="2000" b="0">
+                <a:solidFill>
+                  <a:srgbClr val="1F2D3A"/>
+                </a:solidFill>
+              </a:rPr>
+              <a:t>Final gösterimi projenizin </a:t>
+            </a:r>
+            <a:r>
+              <a:rPr sz="2000" b="1">
+                <a:solidFill>
+                  <a:srgbClr val="1F2D3A"/>
+                </a:solidFill>
+              </a:rPr>
+              <a:t>tamamını</a:t>
+            </a:r>
+            <a:r>
+              <a:rPr sz="2000" b="0">
+                <a:solidFill>
+                  <a:srgbClr val="1F2D3A"/>
+                </a:solidFill>
+              </a:rPr>
+              <a:t> ölçer:</a:t>
+            </a:r>
+          </a:p>
+        </p:txBody>
+      </p:sp>
+      <p:sp>
+        <p:nvSpPr>
+          <p:cNvPr id="8" name="TextBox 7"/>
+          <p:cNvSpPr txBox="1"/>
+          <p:nvPr/>
+        </p:nvSpPr>
+        <p:spPr>
+          <a:xfrm>
+            <a:off x="640080" y="1875536"/>
+            <a:ext cx="10911535" cy="1595120"/>
           </a:xfrm>
           <a:prstGeom prst="rect">
             <a:avLst/>
@@ -5569,23 +5847,7 @@
                   <a:srgbClr val="1F2D3A"/>
                 </a:solidFill>
               </a:rPr>
-              <a:t>Test </a:t>
-            </a:r>
-            <a:r>
-              <a:rPr sz="2000" b="1">
-                <a:solidFill>
-                  <a:srgbClr val="1F2D3A"/>
-                </a:solidFill>
-              </a:rPr>
-              <a:t>sonuçları</a:t>
-            </a:r>
-            <a:r>
-              <a:rPr sz="2000" b="0">
-                <a:solidFill>
-                  <a:srgbClr val="1F2D3A"/>
-                </a:solidFill>
-              </a:rPr>
-              <a:t> (plan değil).</a:t>
+              <a:t>kripto, güvenli iletişim</a:t>
             </a:r>
           </a:p>
           <a:p>
@@ -5603,12 +5865,50 @@
               <a:t>• </a:t>
             </a:r>
             <a:r>
+              <a:rPr sz="2000" b="0">
+                <a:solidFill>
+                  <a:srgbClr val="1F2D3A"/>
+                </a:solidFill>
+              </a:rPr>
+              <a:t>varlık yönetimi (tam)</a:t>
+            </a:r>
+          </a:p>
+          <a:p>
+            <a:pPr>
+              <a:spcAft>
+                <a:spcPts val="300"/>
+              </a:spcAft>
+            </a:pPr>
+            <a:r>
               <a:rPr sz="2000" b="1">
                 <a:solidFill>
+                  <a:srgbClr val="006D77"/>
+                </a:solidFill>
+              </a:rPr>
+              <a:t>• </a:t>
+            </a:r>
+            <a:r>
+              <a:rPr sz="2000" b="0">
+                <a:solidFill>
                   <a:srgbClr val="1F2D3A"/>
                 </a:solidFill>
               </a:rPr>
-              <a:t>Kanıt:</a:t>
+              <a:t>ileri ikili korumalar</a:t>
+            </a:r>
+          </a:p>
+          <a:p>
+            <a:pPr>
+              <a:spcAft>
+                <a:spcPts val="300"/>
+              </a:spcAft>
+            </a:pPr>
+            <a:r>
+              <a:rPr sz="2000" b="1">
+                <a:solidFill>
+                  <a:srgbClr val="006D77"/>
+                </a:solidFill>
+              </a:rPr>
+              <a:t>• </a:t>
             </a:r>
             <a:r>
               <a:rPr sz="2000" b="0">
@@ -5616,7 +5916,23 @@
                   <a:srgbClr val="1F2D3A"/>
                 </a:solidFill>
               </a:rPr>
-              <a:t> S16.</a:t>
+              <a:t>test </a:t>
+            </a:r>
+            <a:r>
+              <a:rPr sz="2000" b="1">
+                <a:solidFill>
+                  <a:srgbClr val="1F2D3A"/>
+                </a:solidFill>
+              </a:rPr>
+              <a:t>sonuçları</a:t>
+            </a:r>
+            <a:r>
+              <a:rPr sz="2000" b="0">
+                <a:solidFill>
+                  <a:srgbClr val="1F2D3A"/>
+                </a:solidFill>
+              </a:rPr>
+              <a:t>, standartlar</a:t>
             </a:r>
           </a:p>
         </p:txBody>
@@ -5791,7 +6107,7 @@
                   <a:srgbClr val="006D77"/>
                 </a:solidFill>
               </a:rPr>
-              <a:t>Madde · standartlar ve uyum</a:t>
+              <a:t>Madde · kriptografi</a:t>
             </a:r>
           </a:p>
         </p:txBody>
@@ -5837,7 +6153,7 @@
                   <a:srgbClr val="1F2D3A"/>
                 </a:solidFill>
               </a:rPr>
-              <a:t>Uyum matrisi (S17), devredilenler (S14).</a:t>
+              <a:t>Algoritma envanteri, anahtar yaşam döngüsü.</a:t>
             </a:r>
           </a:p>
           <a:p>
@@ -5868,7 +6184,7 @@
                   <a:srgbClr val="1F2D3A"/>
                 </a:solidFill>
               </a:rPr>
-              <a:t> S14, S17.</a:t>
+              <a:t> S8 + testler.</a:t>
             </a:r>
           </a:p>
         </p:txBody>
@@ -5884,14 +6200,6 @@
 <file path=ppt/slides/slide18.xml><?xml version="1.0" encoding="utf-8"?>
 <p:sld xmlns:a="http://schemas.openxmlformats.org/drawingml/2006/main" xmlns:p="http://schemas.openxmlformats.org/presentationml/2006/main" xmlns:r="http://schemas.openxmlformats.org/officeDocument/2006/relationships">
   <p:cSld>
-    <p:bg>
-      <p:bgPr>
-        <a:solidFill>
-          <a:srgbClr val="006D77"/>
-        </a:solidFill>
-        <a:effectLst/>
-      </p:bgPr>
-    </p:bg>
     <p:spTree>
       <p:nvGrpSpPr>
         <p:cNvPr id="1" name=""/>
@@ -5899,9 +6207,33 @@
         <p:nvPr/>
       </p:nvGrpSpPr>
       <p:grpSpPr/>
-      <p:sp>
-        <p:nvSpPr>
-          <p:cNvPr id="2" name="TextBox 1"/>
+      <p:pic>
+        <p:nvPicPr>
+          <p:cNvPr id="2" name="Picture 1" descr="rteu_logo_kucuk.jpg"/>
+          <p:cNvPicPr>
+            <a:picLocks noChangeAspect="1"/>
+          </p:cNvPicPr>
+          <p:nvPr/>
+        </p:nvPicPr>
+        <p:blipFill>
+          <a:blip r:embed="rId2"/>
+          <a:stretch>
+            <a:fillRect/>
+          </a:stretch>
+        </p:blipFill>
+        <p:spPr>
+          <a:xfrm>
+            <a:off x="640080" y="164592"/>
+            <a:ext cx="242773" cy="329184"/>
+          </a:xfrm>
+          <a:prstGeom prst="rect">
+            <a:avLst/>
+          </a:prstGeom>
+        </p:spPr>
+      </p:pic>
+      <p:sp>
+        <p:nvSpPr>
+          <p:cNvPr id="3" name="TextBox 2"/>
           <p:cNvSpPr txBox="1"/>
           <p:nvPr/>
         </p:nvSpPr>
@@ -5924,7 +6256,7 @@
             <a:r>
               <a:rPr sz="1100" b="0">
                 <a:solidFill>
-                  <a:srgbClr val="D8F0F2"/>
+                  <a:srgbClr val="5B6770"/>
                 </a:solidFill>
               </a:rPr>
               <a:t>CEN429 Güvenli Programlama · Hafta 15</a:t>
@@ -5934,7 +6266,7 @@
       </p:sp>
       <p:sp>
         <p:nvSpPr>
-          <p:cNvPr id="3" name="TextBox 2"/>
+          <p:cNvPr id="4" name="TextBox 3"/>
           <p:cNvSpPr txBox="1"/>
           <p:nvPr/>
         </p:nvSpPr>
@@ -5957,7 +6289,7 @@
             <a:r>
               <a:rPr sz="1000" b="0">
                 <a:solidFill>
-                  <a:srgbClr val="D8F0F2"/>
+                  <a:srgbClr val="5B6770"/>
                 </a:solidFill>
               </a:rPr>
               <a:t>RTEÜ Bilgisayar Mühendisliği · 2026-2027 Güz</a:t>
@@ -5967,7 +6299,7 @@
       </p:sp>
       <p:sp>
         <p:nvSpPr>
-          <p:cNvPr id="4" name="TextBox 3"/>
+          <p:cNvPr id="5" name="TextBox 4"/>
           <p:cNvSpPr txBox="1"/>
           <p:nvPr/>
         </p:nvSpPr>
@@ -5991,7 +6323,7 @@
             <a:r>
               <a:rPr sz="1000" b="0">
                 <a:solidFill>
-                  <a:srgbClr val="D8F0F2"/>
+                  <a:srgbClr val="5B6770"/>
                 </a:solidFill>
               </a:rPr>
               <a:t>18</a:t>
@@ -6001,14 +6333,47 @@
       </p:sp>
       <p:sp>
         <p:nvSpPr>
-          <p:cNvPr id="5" name="TextBox 4"/>
-          <p:cNvSpPr txBox="1"/>
-          <p:nvPr/>
-        </p:nvSpPr>
-        <p:spPr>
-          <a:xfrm>
-            <a:off x="640080" y="2743200"/>
-            <a:ext cx="10911535" cy="1280160"/>
+          <p:cNvPr id="6" name="TextBox 5"/>
+          <p:cNvSpPr txBox="1"/>
+          <p:nvPr/>
+        </p:nvSpPr>
+        <p:spPr>
+          <a:xfrm>
+            <a:off x="640080" y="548640"/>
+            <a:ext cx="10911535" cy="731520"/>
+          </a:xfrm>
+          <a:prstGeom prst="rect">
+            <a:avLst/>
+          </a:prstGeom>
+          <a:noFill/>
+        </p:spPr>
+        <p:txBody>
+          <a:bodyPr wrap="square" lIns="45720" rIns="45720" anchor="ctr">
+            <a:spAutoFit/>
+          </a:bodyPr>
+          <a:lstStyle/>
+          <a:p>
+            <a:r>
+              <a:rPr sz="3000" b="1">
+                <a:solidFill>
+                  <a:srgbClr val="006D77"/>
+                </a:solidFill>
+              </a:rPr>
+              <a:t>Madde · güvenli iletişim</a:t>
+            </a:r>
+          </a:p>
+        </p:txBody>
+      </p:sp>
+      <p:sp>
+        <p:nvSpPr>
+          <p:cNvPr id="7" name="TextBox 6"/>
+          <p:cNvSpPr txBox="1"/>
+          <p:nvPr/>
+        </p:nvSpPr>
+        <p:spPr>
+          <a:xfrm>
+            <a:off x="640080" y="1325880"/>
+            <a:ext cx="10911535" cy="843280"/>
           </a:xfrm>
           <a:prstGeom prst="rect">
             <a:avLst/>
@@ -6021,14 +6386,57 @@
           </a:bodyPr>
           <a:lstStyle/>
           <a:p>
-            <a:pPr algn="l"/>
-            <a:r>
-              <a:rPr sz="4000" b="1">
-                <a:solidFill>
-                  <a:srgbClr val="FFFFFF"/>
-                </a:solidFill>
-              </a:rPr>
-              <a:t>Ek · Vizeden finale</a:t>
+            <a:pPr>
+              <a:spcAft>
+                <a:spcPts val="300"/>
+              </a:spcAft>
+            </a:pPr>
+            <a:r>
+              <a:rPr sz="2000" b="1">
+                <a:solidFill>
+                  <a:srgbClr val="006D77"/>
+                </a:solidFill>
+              </a:rPr>
+              <a:t>• </a:t>
+            </a:r>
+            <a:r>
+              <a:rPr sz="2000" b="0">
+                <a:solidFill>
+                  <a:srgbClr val="1F2D3A"/>
+                </a:solidFill>
+              </a:rPr>
+              <a:t>TLS, sabitleme, mesaj düzeyi.</a:t>
+            </a:r>
+          </a:p>
+          <a:p>
+            <a:pPr>
+              <a:spcAft>
+                <a:spcPts val="300"/>
+              </a:spcAft>
+            </a:pPr>
+            <a:r>
+              <a:rPr sz="2000" b="1">
+                <a:solidFill>
+                  <a:srgbClr val="006D77"/>
+                </a:solidFill>
+              </a:rPr>
+              <a:t>• </a:t>
+            </a:r>
+            <a:r>
+              <a:rPr sz="2000" b="1">
+                <a:solidFill>
+                  <a:srgbClr val="1F2D3A"/>
+                </a:solidFill>
+              </a:rPr>
+              <a:t>Kanıt:</a:t>
+            </a:r>
+            <a:r>
+              <a:rPr sz="2000" b="0">
+                <a:solidFill>
+                  <a:srgbClr val="1F2D3A"/>
+                </a:solidFill>
+              </a:rPr>
+              <a:t> S6, S11 + test.</a:t>
             </a:r>
           </a:p>
         </p:txBody>
@@ -6203,7 +6611,7 @@
                   <a:srgbClr val="006D77"/>
                 </a:solidFill>
               </a:rPr>
-              <a:t>Yeni bölümler</a:t>
+              <a:t>Madde · ileri ikili korumalar</a:t>
             </a:r>
           </a:p>
         </p:txBody>
@@ -6217,7 +6625,7 @@
         <p:spPr>
           <a:xfrm>
             <a:off x="640080" y="1325880"/>
-            <a:ext cx="10911535" cy="1971040"/>
+            <a:ext cx="10911535" cy="843280"/>
           </a:xfrm>
           <a:prstGeom prst="rect">
             <a:avLst/>
@@ -6249,7 +6657,7 @@
                   <a:srgbClr val="1F2D3A"/>
                 </a:solidFill>
               </a:rPr>
-              <a:t>S6 kimlik/bağlama</a:t>
+              <a:t>Gizleme (S9 ileri), derleme hattı (S15).</a:t>
             </a:r>
           </a:p>
           <a:p>
@@ -6267,81 +6675,20 @@
               <a:t>• </a:t>
             </a:r>
             <a:r>
+              <a:rPr sz="2000" b="1">
+                <a:solidFill>
+                  <a:srgbClr val="1F2D3A"/>
+                </a:solidFill>
+              </a:rPr>
+              <a:t>Kanıt:</a:t>
+            </a:r>
+            <a:r>
               <a:rPr sz="2000" b="0">
                 <a:solidFill>
                   <a:srgbClr val="1F2D3A"/>
                 </a:solidFill>
               </a:rPr>
-              <a:t>S8 kripto/anahtarlar</a:t>
-            </a:r>
-          </a:p>
-          <a:p>
-            <a:pPr>
-              <a:spcAft>
-                <a:spcPts val="300"/>
-              </a:spcAft>
-            </a:pPr>
-            <a:r>
-              <a:rPr sz="2000" b="1">
-                <a:solidFill>
-                  <a:srgbClr val="006D77"/>
-                </a:solidFill>
-              </a:rPr>
-              <a:t>• </a:t>
-            </a:r>
-            <a:r>
-              <a:rPr sz="2000" b="0">
-                <a:solidFill>
-                  <a:srgbClr val="1F2D3A"/>
-                </a:solidFill>
-              </a:rPr>
-              <a:t>S11 güvenli iletişim</a:t>
-            </a:r>
-          </a:p>
-          <a:p>
-            <a:pPr>
-              <a:spcAft>
-                <a:spcPts val="300"/>
-              </a:spcAft>
-            </a:pPr>
-            <a:r>
-              <a:rPr sz="2000" b="1">
-                <a:solidFill>
-                  <a:srgbClr val="006D77"/>
-                </a:solidFill>
-              </a:rPr>
-              <a:t>• </a:t>
-            </a:r>
-            <a:r>
-              <a:rPr sz="2000" b="0">
-                <a:solidFill>
-                  <a:srgbClr val="1F2D3A"/>
-                </a:solidFill>
-              </a:rPr>
-              <a:t>S14 varsayımlar/devredilenler</a:t>
-            </a:r>
-          </a:p>
-          <a:p>
-            <a:pPr>
-              <a:spcAft>
-                <a:spcPts val="300"/>
-              </a:spcAft>
-            </a:pPr>
-            <a:r>
-              <a:rPr sz="2000" b="1">
-                <a:solidFill>
-                  <a:srgbClr val="006D77"/>
-                </a:solidFill>
-              </a:rPr>
-              <a:t>• </a:t>
-            </a:r>
-            <a:r>
-              <a:rPr sz="2000" b="0">
-                <a:solidFill>
-                  <a:srgbClr val="1F2D3A"/>
-                </a:solidFill>
-              </a:rPr>
-              <a:t>S15 derleme/dağıtım hattı</a:t>
+              <a:t> ölçüm tablosu + imzalama.</a:t>
             </a:r>
           </a:p>
         </p:txBody>
@@ -6871,7 +7218,7 @@
                   <a:srgbClr val="006D77"/>
                 </a:solidFill>
               </a:rPr>
-              <a:t>Tamamlanacaklar</a:t>
+              <a:t>Madde · test ve doğrulama</a:t>
             </a:r>
           </a:p>
         </p:txBody>
@@ -6885,7 +7232,7 @@
         <p:spPr>
           <a:xfrm>
             <a:off x="640080" y="1325880"/>
-            <a:ext cx="10911535" cy="1971040"/>
+            <a:ext cx="10911535" cy="843280"/>
           </a:xfrm>
           <a:prstGeom prst="rect">
             <a:avLst/>
@@ -6917,7 +7264,23 @@
                   <a:srgbClr val="1F2D3A"/>
                 </a:solidFill>
               </a:rPr>
-              <a:t>S5 varlıklar (tam)</a:t>
+              <a:t>Test </a:t>
+            </a:r>
+            <a:r>
+              <a:rPr sz="2000" b="1">
+                <a:solidFill>
+                  <a:srgbClr val="1F2D3A"/>
+                </a:solidFill>
+              </a:rPr>
+              <a:t>sonuçları</a:t>
+            </a:r>
+            <a:r>
+              <a:rPr sz="2000" b="0">
+                <a:solidFill>
+                  <a:srgbClr val="1F2D3A"/>
+                </a:solidFill>
+              </a:rPr>
+              <a:t> (plan değil).</a:t>
             </a:r>
           </a:p>
           <a:p>
@@ -6935,89 +7298,20 @@
               <a:t>• </a:t>
             </a:r>
             <a:r>
+              <a:rPr sz="2000" b="1">
+                <a:solidFill>
+                  <a:srgbClr val="1F2D3A"/>
+                </a:solidFill>
+              </a:rPr>
+              <a:t>Kanıt:</a:t>
+            </a:r>
+            <a:r>
               <a:rPr sz="2000" b="0">
                 <a:solidFill>
                   <a:srgbClr val="1F2D3A"/>
                 </a:solidFill>
               </a:rPr>
-              <a:t>S9 sağlamlaştırma (ileri)</a:t>
-            </a:r>
-          </a:p>
-          <a:p>
-            <a:pPr>
-              <a:spcAft>
-                <a:spcPts val="300"/>
-              </a:spcAft>
-            </a:pPr>
-            <a:r>
-              <a:rPr sz="2000" b="1">
-                <a:solidFill>
-                  <a:srgbClr val="006D77"/>
-                </a:solidFill>
-              </a:rPr>
-              <a:t>• </a:t>
-            </a:r>
-            <a:r>
-              <a:rPr sz="2000" b="0">
-                <a:solidFill>
-                  <a:srgbClr val="1F2D3A"/>
-                </a:solidFill>
-              </a:rPr>
-              <a:t>S12 raporlama (tam)</a:t>
-            </a:r>
-          </a:p>
-          <a:p>
-            <a:pPr>
-              <a:spcAft>
-                <a:spcPts val="300"/>
-              </a:spcAft>
-            </a:pPr>
-            <a:r>
-              <a:rPr sz="2000" b="1">
-                <a:solidFill>
-                  <a:srgbClr val="006D77"/>
-                </a:solidFill>
-              </a:rPr>
-              <a:t>• </a:t>
-            </a:r>
-            <a:r>
-              <a:rPr sz="2000" b="0">
-                <a:solidFill>
-                  <a:srgbClr val="1F2D3A"/>
-                </a:solidFill>
-              </a:rPr>
-              <a:t>S16 </a:t>
-            </a:r>
-            <a:r>
-              <a:rPr sz="2000" b="1">
-                <a:solidFill>
-                  <a:srgbClr val="1F2D3A"/>
-                </a:solidFill>
-              </a:rPr>
-              <a:t>sonuçlar</a:t>
-            </a:r>
-          </a:p>
-          <a:p>
-            <a:pPr>
-              <a:spcAft>
-                <a:spcPts val="300"/>
-              </a:spcAft>
-            </a:pPr>
-            <a:r>
-              <a:rPr sz="2000" b="1">
-                <a:solidFill>
-                  <a:srgbClr val="006D77"/>
-                </a:solidFill>
-              </a:rPr>
-              <a:t>• </a:t>
-            </a:r>
-            <a:r>
-              <a:rPr sz="2000" b="0">
-                <a:solidFill>
-                  <a:srgbClr val="1F2D3A"/>
-                </a:solidFill>
-              </a:rPr>
-              <a:t>S17 tam matris</a:t>
+              <a:t> S16.</a:t>
             </a:r>
           </a:p>
         </p:txBody>
@@ -7192,7 +7486,7 @@
                   <a:srgbClr val="006D77"/>
                 </a:solidFill>
               </a:rPr>
-              <a:t>Bulgu–aksiyon (vizeden)</a:t>
+              <a:t>Madde · standartlar ve uyum</a:t>
             </a:r>
           </a:p>
         </p:txBody>
@@ -7206,7 +7500,7 @@
         <p:spPr>
           <a:xfrm>
             <a:off x="640080" y="1325880"/>
-            <a:ext cx="10911535" cy="1219200"/>
+            <a:ext cx="10911535" cy="843280"/>
           </a:xfrm>
           <a:prstGeom prst="rect">
             <a:avLst/>
@@ -7238,30 +7532,7 @@
                   <a:srgbClr val="1F2D3A"/>
                 </a:solidFill>
               </a:rPr>
-              <a:t>Vize geri bildirimleri bir tabloya:</a:t>
-            </a:r>
-          </a:p>
-          <a:p>
-            <a:pPr lvl="1">
-              <a:spcAft>
-                <a:spcPts val="300"/>
-              </a:spcAft>
-            </a:pPr>
-            <a:r>
-              <a:rPr sz="2000" b="1">
-                <a:solidFill>
-                  <a:srgbClr val="006D77"/>
-                </a:solidFill>
-              </a:rPr>
-              <a:t>    – </a:t>
-            </a:r>
-            <a:r>
-              <a:rPr sz="2000" b="0">
-                <a:solidFill>
-                  <a:srgbClr val="1F2D3A"/>
-                </a:solidFill>
-              </a:rPr>
-              <a:t>bulgu → aksiyon → kapanış.</a:t>
+              <a:t>Uyum matrisi (S17), devredilenler (S14).</a:t>
             </a:r>
           </a:p>
           <a:p>
@@ -7279,12 +7550,20 @@
               <a:t>• </a:t>
             </a:r>
             <a:r>
+              <a:rPr sz="2000" b="1">
+                <a:solidFill>
+                  <a:srgbClr val="1F2D3A"/>
+                </a:solidFill>
+              </a:rPr>
+              <a:t>Kanıt:</a:t>
+            </a:r>
+            <a:r>
               <a:rPr sz="2000" b="0">
                 <a:solidFill>
                   <a:srgbClr val="1F2D3A"/>
                 </a:solidFill>
               </a:rPr>
-              <a:t>Değerlendirici bu döngüyü arar.</a:t>
+              <a:t> S14, S17.</a:t>
             </a:r>
           </a:p>
         </p:txBody>
@@ -7444,7 +7723,7 @@
                   <a:srgbClr val="FFFFFF"/>
                 </a:solidFill>
               </a:rPr>
-              <a:t>Ek · Gösterim akışı</a:t>
+              <a:t>Ek · Vizeden finale</a:t>
             </a:r>
           </a:p>
         </p:txBody>
@@ -7619,7 +7898,7 @@
                   <a:srgbClr val="006D77"/>
                 </a:solidFill>
               </a:rPr>
-              <a:t>Akış · özet + vizeden bu yana</a:t>
+              <a:t>Yeni bölümler</a:t>
             </a:r>
           </a:p>
         </p:txBody>
@@ -7633,7 +7912,7 @@
         <p:spPr>
           <a:xfrm>
             <a:off x="640080" y="1325880"/>
-            <a:ext cx="10911535" cy="843280"/>
+            <a:ext cx="10911535" cy="1971040"/>
           </a:xfrm>
           <a:prstGeom prst="rect">
             <a:avLst/>
@@ -7665,7 +7944,7 @@
                   <a:srgbClr val="1F2D3A"/>
                 </a:solidFill>
               </a:rPr>
-              <a:t>Ürün, mimari, en kritik üç varlık.</a:t>
+              <a:t>S6 kimlik/bağlama</a:t>
             </a:r>
           </a:p>
           <a:p>
@@ -7688,7 +7967,76 @@
                   <a:srgbClr val="1F2D3A"/>
                 </a:solidFill>
               </a:rPr>
-              <a:t>Bulgu–aksiyon listesi.</a:t>
+              <a:t>S8 kripto/anahtarlar</a:t>
+            </a:r>
+          </a:p>
+          <a:p>
+            <a:pPr>
+              <a:spcAft>
+                <a:spcPts val="300"/>
+              </a:spcAft>
+            </a:pPr>
+            <a:r>
+              <a:rPr sz="2000" b="1">
+                <a:solidFill>
+                  <a:srgbClr val="006D77"/>
+                </a:solidFill>
+              </a:rPr>
+              <a:t>• </a:t>
+            </a:r>
+            <a:r>
+              <a:rPr sz="2000" b="0">
+                <a:solidFill>
+                  <a:srgbClr val="1F2D3A"/>
+                </a:solidFill>
+              </a:rPr>
+              <a:t>S11 güvenli iletişim</a:t>
+            </a:r>
+          </a:p>
+          <a:p>
+            <a:pPr>
+              <a:spcAft>
+                <a:spcPts val="300"/>
+              </a:spcAft>
+            </a:pPr>
+            <a:r>
+              <a:rPr sz="2000" b="1">
+                <a:solidFill>
+                  <a:srgbClr val="006D77"/>
+                </a:solidFill>
+              </a:rPr>
+              <a:t>• </a:t>
+            </a:r>
+            <a:r>
+              <a:rPr sz="2000" b="0">
+                <a:solidFill>
+                  <a:srgbClr val="1F2D3A"/>
+                </a:solidFill>
+              </a:rPr>
+              <a:t>S14 varsayımlar/devredilenler</a:t>
+            </a:r>
+          </a:p>
+          <a:p>
+            <a:pPr>
+              <a:spcAft>
+                <a:spcPts val="300"/>
+              </a:spcAft>
+            </a:pPr>
+            <a:r>
+              <a:rPr sz="2000" b="1">
+                <a:solidFill>
+                  <a:srgbClr val="006D77"/>
+                </a:solidFill>
+              </a:rPr>
+              <a:t>• </a:t>
+            </a:r>
+            <a:r>
+              <a:rPr sz="2000" b="0">
+                <a:solidFill>
+                  <a:srgbClr val="1F2D3A"/>
+                </a:solidFill>
+              </a:rPr>
+              <a:t>S15 derleme/dağıtım hattı</a:t>
             </a:r>
           </a:p>
         </p:txBody>
@@ -7863,7 +8211,7 @@
                   <a:srgbClr val="006D77"/>
                 </a:solidFill>
               </a:rPr>
-              <a:t>Akış · canlı gösterim</a:t>
+              <a:t>Tamamlanacaklar</a:t>
             </a:r>
           </a:p>
         </p:txBody>
@@ -7877,7 +8225,7 @@
         <p:spPr>
           <a:xfrm>
             <a:off x="640080" y="1325880"/>
-            <a:ext cx="10911535" cy="843280"/>
+            <a:ext cx="10911535" cy="1971040"/>
           </a:xfrm>
           <a:prstGeom prst="rect">
             <a:avLst/>
@@ -7909,23 +8257,7 @@
                   <a:srgbClr val="1F2D3A"/>
                 </a:solidFill>
               </a:rPr>
-              <a:t>Kripto, güvenli iletişim ve </a:t>
-            </a:r>
-            <a:r>
-              <a:rPr sz="2000" b="1">
-                <a:solidFill>
-                  <a:srgbClr val="1F2D3A"/>
-                </a:solidFill>
-              </a:rPr>
-              <a:t>bir koruma katmanı</a:t>
-            </a:r>
-            <a:r>
-              <a:rPr sz="2000" b="0">
-                <a:solidFill>
-                  <a:srgbClr val="1F2D3A"/>
-                </a:solidFill>
-              </a:rPr>
-              <a:t> çalışırken.</a:t>
+              <a:t>S5 varlıklar (tam)</a:t>
             </a:r>
           </a:p>
           <a:p>
@@ -7948,7 +8280,84 @@
                   <a:srgbClr val="1F2D3A"/>
                 </a:solidFill>
               </a:rPr>
-              <a:t>Ör. kurcalanmış dosyanın reddi.</a:t>
+              <a:t>S9 sağlamlaştırma (ileri)</a:t>
+            </a:r>
+          </a:p>
+          <a:p>
+            <a:pPr>
+              <a:spcAft>
+                <a:spcPts val="300"/>
+              </a:spcAft>
+            </a:pPr>
+            <a:r>
+              <a:rPr sz="2000" b="1">
+                <a:solidFill>
+                  <a:srgbClr val="006D77"/>
+                </a:solidFill>
+              </a:rPr>
+              <a:t>• </a:t>
+            </a:r>
+            <a:r>
+              <a:rPr sz="2000" b="0">
+                <a:solidFill>
+                  <a:srgbClr val="1F2D3A"/>
+                </a:solidFill>
+              </a:rPr>
+              <a:t>S12 raporlama (tam)</a:t>
+            </a:r>
+          </a:p>
+          <a:p>
+            <a:pPr>
+              <a:spcAft>
+                <a:spcPts val="300"/>
+              </a:spcAft>
+            </a:pPr>
+            <a:r>
+              <a:rPr sz="2000" b="1">
+                <a:solidFill>
+                  <a:srgbClr val="006D77"/>
+                </a:solidFill>
+              </a:rPr>
+              <a:t>• </a:t>
+            </a:r>
+            <a:r>
+              <a:rPr sz="2000" b="0">
+                <a:solidFill>
+                  <a:srgbClr val="1F2D3A"/>
+                </a:solidFill>
+              </a:rPr>
+              <a:t>S16 </a:t>
+            </a:r>
+            <a:r>
+              <a:rPr sz="2000" b="1">
+                <a:solidFill>
+                  <a:srgbClr val="1F2D3A"/>
+                </a:solidFill>
+              </a:rPr>
+              <a:t>sonuçlar</a:t>
+            </a:r>
+          </a:p>
+          <a:p>
+            <a:pPr>
+              <a:spcAft>
+                <a:spcPts val="300"/>
+              </a:spcAft>
+            </a:pPr>
+            <a:r>
+              <a:rPr sz="2000" b="1">
+                <a:solidFill>
+                  <a:srgbClr val="006D77"/>
+                </a:solidFill>
+              </a:rPr>
+              <a:t>• </a:t>
+            </a:r>
+            <a:r>
+              <a:rPr sz="2000" b="0">
+                <a:solidFill>
+                  <a:srgbClr val="1F2D3A"/>
+                </a:solidFill>
+              </a:rPr>
+              <a:t>S17 tam matris</a:t>
             </a:r>
           </a:p>
         </p:txBody>
@@ -8123,7 +8532,7 @@
                   <a:srgbClr val="006D77"/>
                 </a:solidFill>
               </a:rPr>
-              <a:t>Akış · kanıt + kalan risk</a:t>
+              <a:t>Bulgu–aksiyon (vizeden)</a:t>
             </a:r>
           </a:p>
         </p:txBody>
@@ -8137,7 +8546,7 @@
         <p:spPr>
           <a:xfrm>
             <a:off x="640080" y="1325880"/>
-            <a:ext cx="10911535" cy="843280"/>
+            <a:ext cx="10911535" cy="1219200"/>
           </a:xfrm>
           <a:prstGeom prst="rect">
             <a:avLst/>
@@ -8169,7 +8578,30 @@
                   <a:srgbClr val="1F2D3A"/>
                 </a:solidFill>
               </a:rPr>
-              <a:t>Testler, koruma tablosu, SBOM, uyum matrisi.</a:t>
+              <a:t>Vize geri bildirimleri bir tabloya:</a:t>
+            </a:r>
+          </a:p>
+          <a:p>
+            <a:pPr lvl="1">
+              <a:spcAft>
+                <a:spcPts val="300"/>
+              </a:spcAft>
+            </a:pPr>
+            <a:r>
+              <a:rPr sz="2000" b="1">
+                <a:solidFill>
+                  <a:srgbClr val="006D77"/>
+                </a:solidFill>
+              </a:rPr>
+              <a:t>    – </a:t>
+            </a:r>
+            <a:r>
+              <a:rPr sz="2000" b="0">
+                <a:solidFill>
+                  <a:srgbClr val="1F2D3A"/>
+                </a:solidFill>
+              </a:rPr>
+              <a:t>bulgu → aksiyon → kapanış.</a:t>
             </a:r>
           </a:p>
           <a:p>
@@ -8192,7 +8624,7 @@
                   <a:srgbClr val="1F2D3A"/>
                 </a:solidFill>
               </a:rPr>
-              <a:t>Kalan risk: bilerek kapsam dışı olanlar.</a:t>
+              <a:t>Değerlendirici bu döngüyü arar.</a:t>
             </a:r>
           </a:p>
         </p:txBody>
@@ -8352,7 +8784,7 @@
                   <a:srgbClr val="FFFFFF"/>
                 </a:solidFill>
               </a:rPr>
-              <a:t>Ek · Örnek sorular</a:t>
+              <a:t>Ek · Gösterim akışı</a:t>
             </a:r>
           </a:p>
         </p:txBody>
@@ -8527,7 +8959,7 @@
                   <a:srgbClr val="006D77"/>
                 </a:solidFill>
               </a:rPr>
-              <a:t>Soru 1</a:t>
+              <a:t>Akış · özet + vizeden bu yana</a:t>
             </a:r>
           </a:p>
         </p:txBody>
@@ -8541,7 +8973,7 @@
         <p:spPr>
           <a:xfrm>
             <a:off x="640080" y="1325880"/>
-            <a:ext cx="10911535" cy="439928"/>
+            <a:ext cx="10911535" cy="843280"/>
           </a:xfrm>
           <a:prstGeom prst="rect">
             <a:avLst/>
@@ -8554,14 +8986,49 @@
           </a:bodyPr>
           <a:lstStyle/>
           <a:p>
-            <a:pPr algn="l"/>
+            <a:pPr>
+              <a:spcAft>
+                <a:spcPts val="300"/>
+              </a:spcAft>
+            </a:pPr>
             <a:r>
               <a:rPr sz="2000" b="1">
                 <a:solidFill>
+                  <a:srgbClr val="006D77"/>
+                </a:solidFill>
+              </a:rPr>
+              <a:t>• </a:t>
+            </a:r>
+            <a:r>
+              <a:rPr sz="2000" b="0">
+                <a:solidFill>
                   <a:srgbClr val="1F2D3A"/>
                 </a:solidFill>
               </a:rPr>
-              <a:t>Bu anahtar hangi anahtardan türetiliyor, nerede duruyor, ne zaman siliniyor?</a:t>
+              <a:t>Ürün, mimari, en kritik üç varlık.</a:t>
+            </a:r>
+          </a:p>
+          <a:p>
+            <a:pPr>
+              <a:spcAft>
+                <a:spcPts val="300"/>
+              </a:spcAft>
+            </a:pPr>
+            <a:r>
+              <a:rPr sz="2000" b="1">
+                <a:solidFill>
+                  <a:srgbClr val="006D77"/>
+                </a:solidFill>
+              </a:rPr>
+              <a:t>• </a:t>
+            </a:r>
+            <a:r>
+              <a:rPr sz="2000" b="0">
+                <a:solidFill>
+                  <a:srgbClr val="1F2D3A"/>
+                </a:solidFill>
+              </a:rPr>
+              <a:t>Bulgu–aksiyon listesi.</a:t>
             </a:r>
           </a:p>
         </p:txBody>
@@ -8736,7 +9203,7 @@
                   <a:srgbClr val="006D77"/>
                 </a:solidFill>
               </a:rPr>
-              <a:t>Soru 2</a:t>
+              <a:t>Akış · canlı gösterim</a:t>
             </a:r>
           </a:p>
         </p:txBody>
@@ -8750,7 +9217,7 @@
         <p:spPr>
           <a:xfrm>
             <a:off x="640080" y="1325880"/>
-            <a:ext cx="10911535" cy="439928"/>
+            <a:ext cx="10911535" cy="843280"/>
           </a:xfrm>
           <a:prstGeom prst="rect">
             <a:avLst/>
@@ -8763,14 +9230,65 @@
           </a:bodyPr>
           <a:lstStyle/>
           <a:p>
-            <a:pPr algn="l"/>
+            <a:pPr>
+              <a:spcAft>
+                <a:spcPts val="300"/>
+              </a:spcAft>
+            </a:pPr>
             <a:r>
               <a:rPr sz="2000" b="1">
                 <a:solidFill>
+                  <a:srgbClr val="006D77"/>
+                </a:solidFill>
+              </a:rPr>
+              <a:t>• </a:t>
+            </a:r>
+            <a:r>
+              <a:rPr sz="2000" b="0">
+                <a:solidFill>
                   <a:srgbClr val="1F2D3A"/>
                 </a:solidFill>
               </a:rPr>
-              <a:t>Sertifika zinciri ve ad denetimi nerede yapılıyor?</a:t>
+              <a:t>Kripto, güvenli iletişim ve </a:t>
+            </a:r>
+            <a:r>
+              <a:rPr sz="2000" b="1">
+                <a:solidFill>
+                  <a:srgbClr val="1F2D3A"/>
+                </a:solidFill>
+              </a:rPr>
+              <a:t>bir koruma katmanı</a:t>
+            </a:r>
+            <a:r>
+              <a:rPr sz="2000" b="0">
+                <a:solidFill>
+                  <a:srgbClr val="1F2D3A"/>
+                </a:solidFill>
+              </a:rPr>
+              <a:t> çalışırken.</a:t>
+            </a:r>
+          </a:p>
+          <a:p>
+            <a:pPr>
+              <a:spcAft>
+                <a:spcPts val="300"/>
+              </a:spcAft>
+            </a:pPr>
+            <a:r>
+              <a:rPr sz="2000" b="1">
+                <a:solidFill>
+                  <a:srgbClr val="006D77"/>
+                </a:solidFill>
+              </a:rPr>
+              <a:t>• </a:t>
+            </a:r>
+            <a:r>
+              <a:rPr sz="2000" b="0">
+                <a:solidFill>
+                  <a:srgbClr val="1F2D3A"/>
+                </a:solidFill>
+              </a:rPr>
+              <a:t>Ör. kurcalanmış dosyanın reddi.</a:t>
             </a:r>
           </a:p>
         </p:txBody>
@@ -8945,7 +9463,7 @@
                   <a:srgbClr val="006D77"/>
                 </a:solidFill>
               </a:rPr>
-              <a:t>Soru 3</a:t>
+              <a:t>Akış · kanıt + kalan risk</a:t>
             </a:r>
           </a:p>
         </p:txBody>
@@ -8959,7 +9477,7 @@
         <p:spPr>
           <a:xfrm>
             <a:off x="640080" y="1325880"/>
-            <a:ext cx="10911535" cy="439928"/>
+            <a:ext cx="10911535" cy="843280"/>
           </a:xfrm>
           <a:prstGeom prst="rect">
             <a:avLst/>
@@ -8972,14 +9490,49 @@
           </a:bodyPr>
           <a:lstStyle/>
           <a:p>
-            <a:pPr algn="l"/>
+            <a:pPr>
+              <a:spcAft>
+                <a:spcPts val="300"/>
+              </a:spcAft>
+            </a:pPr>
             <a:r>
               <a:rPr sz="2000" b="1">
                 <a:solidFill>
+                  <a:srgbClr val="006D77"/>
+                </a:solidFill>
+              </a:rPr>
+              <a:t>• </a:t>
+            </a:r>
+            <a:r>
+              <a:rPr sz="2000" b="0">
+                <a:solidFill>
                   <a:srgbClr val="1F2D3A"/>
                 </a:solidFill>
               </a:rPr>
-              <a:t>İmza doğrulaması başarısızsa ne oluyor? Eski imzalı sürüm yüklenebilir mi?</a:t>
+              <a:t>Testler, koruma tablosu, SBOM, uyum matrisi.</a:t>
+            </a:r>
+          </a:p>
+          <a:p>
+            <a:pPr>
+              <a:spcAft>
+                <a:spcPts val="300"/>
+              </a:spcAft>
+            </a:pPr>
+            <a:r>
+              <a:rPr sz="2000" b="1">
+                <a:solidFill>
+                  <a:srgbClr val="006D77"/>
+                </a:solidFill>
+              </a:rPr>
+              <a:t>• </a:t>
+            </a:r>
+            <a:r>
+              <a:rPr sz="2000" b="0">
+                <a:solidFill>
+                  <a:srgbClr val="1F2D3A"/>
+                </a:solidFill>
+              </a:rPr>
+              <a:t>Kalan risk: bilerek kapsam dışı olanlar.</a:t>
             </a:r>
           </a:p>
         </p:txBody>
@@ -9725,6 +10278,14 @@
 <file path=ppt/slides/slide30.xml><?xml version="1.0" encoding="utf-8"?>
 <p:sld xmlns:a="http://schemas.openxmlformats.org/drawingml/2006/main" xmlns:p="http://schemas.openxmlformats.org/presentationml/2006/main" xmlns:r="http://schemas.openxmlformats.org/officeDocument/2006/relationships">
   <p:cSld>
+    <p:bg>
+      <p:bgPr>
+        <a:solidFill>
+          <a:srgbClr val="006D77"/>
+        </a:solidFill>
+        <a:effectLst/>
+      </p:bgPr>
+    </p:bg>
     <p:spTree>
       <p:nvGrpSpPr>
         <p:cNvPr id="1" name=""/>
@@ -9732,33 +10293,9 @@
         <p:nvPr/>
       </p:nvGrpSpPr>
       <p:grpSpPr/>
-      <p:pic>
-        <p:nvPicPr>
-          <p:cNvPr id="2" name="Picture 1" descr="rteu_logo_kucuk.jpg"/>
-          <p:cNvPicPr>
-            <a:picLocks noChangeAspect="1"/>
-          </p:cNvPicPr>
-          <p:nvPr/>
-        </p:nvPicPr>
-        <p:blipFill>
-          <a:blip r:embed="rId2"/>
-          <a:stretch>
-            <a:fillRect/>
-          </a:stretch>
-        </p:blipFill>
-        <p:spPr>
-          <a:xfrm>
-            <a:off x="640080" y="164592"/>
-            <a:ext cx="242773" cy="329184"/>
-          </a:xfrm>
-          <a:prstGeom prst="rect">
-            <a:avLst/>
-          </a:prstGeom>
-        </p:spPr>
-      </p:pic>
-      <p:sp>
-        <p:nvSpPr>
-          <p:cNvPr id="3" name="TextBox 2"/>
+      <p:sp>
+        <p:nvSpPr>
+          <p:cNvPr id="2" name="TextBox 1"/>
           <p:cNvSpPr txBox="1"/>
           <p:nvPr/>
         </p:nvSpPr>
@@ -9781,7 +10318,7 @@
             <a:r>
               <a:rPr sz="1100" b="0">
                 <a:solidFill>
-                  <a:srgbClr val="5B6770"/>
+                  <a:srgbClr val="D8F0F2"/>
                 </a:solidFill>
               </a:rPr>
               <a:t>CEN429 Güvenli Programlama · Hafta 15</a:t>
@@ -9791,7 +10328,7 @@
       </p:sp>
       <p:sp>
         <p:nvSpPr>
-          <p:cNvPr id="4" name="TextBox 3"/>
+          <p:cNvPr id="3" name="TextBox 2"/>
           <p:cNvSpPr txBox="1"/>
           <p:nvPr/>
         </p:nvSpPr>
@@ -9814,7 +10351,7 @@
             <a:r>
               <a:rPr sz="1000" b="0">
                 <a:solidFill>
-                  <a:srgbClr val="5B6770"/>
+                  <a:srgbClr val="D8F0F2"/>
                 </a:solidFill>
               </a:rPr>
               <a:t>RTEÜ Bilgisayar Mühendisliği · 2026-2027 Güz</a:t>
@@ -9824,7 +10361,7 @@
       </p:sp>
       <p:sp>
         <p:nvSpPr>
-          <p:cNvPr id="5" name="TextBox 4"/>
+          <p:cNvPr id="4" name="TextBox 3"/>
           <p:cNvSpPr txBox="1"/>
           <p:nvPr/>
         </p:nvSpPr>
@@ -9848,7 +10385,7 @@
             <a:r>
               <a:rPr sz="1000" b="0">
                 <a:solidFill>
-                  <a:srgbClr val="5B6770"/>
+                  <a:srgbClr val="D8F0F2"/>
                 </a:solidFill>
               </a:rPr>
               <a:t>30</a:t>
@@ -9858,47 +10395,14 @@
       </p:sp>
       <p:sp>
         <p:nvSpPr>
-          <p:cNvPr id="6" name="TextBox 5"/>
-          <p:cNvSpPr txBox="1"/>
-          <p:nvPr/>
-        </p:nvSpPr>
-        <p:spPr>
-          <a:xfrm>
-            <a:off x="640080" y="548640"/>
-            <a:ext cx="10911535" cy="731520"/>
-          </a:xfrm>
-          <a:prstGeom prst="rect">
-            <a:avLst/>
-          </a:prstGeom>
-          <a:noFill/>
-        </p:spPr>
-        <p:txBody>
-          <a:bodyPr wrap="square" lIns="45720" rIns="45720" anchor="ctr">
-            <a:spAutoFit/>
-          </a:bodyPr>
-          <a:lstStyle/>
-          <a:p>
-            <a:r>
-              <a:rPr sz="3000" b="1">
-                <a:solidFill>
-                  <a:srgbClr val="006D77"/>
-                </a:solidFill>
-              </a:rPr>
-              <a:t>Soru 4</a:t>
-            </a:r>
-          </a:p>
-        </p:txBody>
-      </p:sp>
-      <p:sp>
-        <p:nvSpPr>
-          <p:cNvPr id="7" name="TextBox 6"/>
-          <p:cNvSpPr txBox="1"/>
-          <p:nvPr/>
-        </p:nvSpPr>
-        <p:spPr>
-          <a:xfrm>
-            <a:off x="640080" y="1325880"/>
-            <a:ext cx="10911535" cy="439928"/>
+          <p:cNvPr id="5" name="TextBox 4"/>
+          <p:cNvSpPr txBox="1"/>
+          <p:nvPr/>
+        </p:nvSpPr>
+        <p:spPr>
+          <a:xfrm>
+            <a:off x="640080" y="2743200"/>
+            <a:ext cx="10911535" cy="1280160"/>
           </a:xfrm>
           <a:prstGeom prst="rect">
             <a:avLst/>
@@ -9913,12 +10417,12 @@
           <a:p>
             <a:pPr algn="l"/>
             <a:r>
-              <a:rPr sz="2000" b="1">
-                <a:solidFill>
-                  <a:srgbClr val="1F2D3A"/>
-                </a:solidFill>
-              </a:rPr>
-              <a:t>Gizlemenin maliyetini ölçtünüz mü? Hangi fonksiyonu neden gizlediniz?</a:t>
+              <a:rPr sz="4000" b="1">
+                <a:solidFill>
+                  <a:srgbClr val="FFFFFF"/>
+                </a:solidFill>
+              </a:rPr>
+              <a:t>Ek · Örnek sorular</a:t>
             </a:r>
           </a:p>
         </p:txBody>
@@ -10093,7 +10597,7 @@
                   <a:srgbClr val="006D77"/>
                 </a:solidFill>
               </a:rPr>
-              <a:t>Soru 5</a:t>
+              <a:t>Soru 1</a:t>
             </a:r>
           </a:p>
         </p:txBody>
@@ -10127,7 +10631,7 @@
                   <a:srgbClr val="1F2D3A"/>
                 </a:solidFill>
               </a:rPr>
-              <a:t>Uyum matrisinde şu "karşılandı" satırının kanıtı nerede?</a:t>
+              <a:t>Bu anahtar hangi anahtardan türetiliyor, nerede duruyor, ne zaman siliniyor?</a:t>
             </a:r>
           </a:p>
         </p:txBody>
@@ -10143,14 +10647,6 @@
 <file path=ppt/slides/slide32.xml><?xml version="1.0" encoding="utf-8"?>
 <p:sld xmlns:a="http://schemas.openxmlformats.org/drawingml/2006/main" xmlns:p="http://schemas.openxmlformats.org/presentationml/2006/main" xmlns:r="http://schemas.openxmlformats.org/officeDocument/2006/relationships">
   <p:cSld>
-    <p:bg>
-      <p:bgPr>
-        <a:solidFill>
-          <a:srgbClr val="006D77"/>
-        </a:solidFill>
-        <a:effectLst/>
-      </p:bgPr>
-    </p:bg>
     <p:spTree>
       <p:nvGrpSpPr>
         <p:cNvPr id="1" name=""/>
@@ -10158,9 +10654,33 @@
         <p:nvPr/>
       </p:nvGrpSpPr>
       <p:grpSpPr/>
-      <p:sp>
-        <p:nvSpPr>
-          <p:cNvPr id="2" name="TextBox 1"/>
+      <p:pic>
+        <p:nvPicPr>
+          <p:cNvPr id="2" name="Picture 1" descr="rteu_logo_kucuk.jpg"/>
+          <p:cNvPicPr>
+            <a:picLocks noChangeAspect="1"/>
+          </p:cNvPicPr>
+          <p:nvPr/>
+        </p:nvPicPr>
+        <p:blipFill>
+          <a:blip r:embed="rId2"/>
+          <a:stretch>
+            <a:fillRect/>
+          </a:stretch>
+        </p:blipFill>
+        <p:spPr>
+          <a:xfrm>
+            <a:off x="640080" y="164592"/>
+            <a:ext cx="242773" cy="329184"/>
+          </a:xfrm>
+          <a:prstGeom prst="rect">
+            <a:avLst/>
+          </a:prstGeom>
+        </p:spPr>
+      </p:pic>
+      <p:sp>
+        <p:nvSpPr>
+          <p:cNvPr id="3" name="TextBox 2"/>
           <p:cNvSpPr txBox="1"/>
           <p:nvPr/>
         </p:nvSpPr>
@@ -10183,7 +10703,7 @@
             <a:r>
               <a:rPr sz="1100" b="0">
                 <a:solidFill>
-                  <a:srgbClr val="D8F0F2"/>
+                  <a:srgbClr val="5B6770"/>
                 </a:solidFill>
               </a:rPr>
               <a:t>CEN429 Güvenli Programlama · Hafta 15</a:t>
@@ -10193,7 +10713,7 @@
       </p:sp>
       <p:sp>
         <p:nvSpPr>
-          <p:cNvPr id="3" name="TextBox 2"/>
+          <p:cNvPr id="4" name="TextBox 3"/>
           <p:cNvSpPr txBox="1"/>
           <p:nvPr/>
         </p:nvSpPr>
@@ -10216,7 +10736,7 @@
             <a:r>
               <a:rPr sz="1000" b="0">
                 <a:solidFill>
-                  <a:srgbClr val="D8F0F2"/>
+                  <a:srgbClr val="5B6770"/>
                 </a:solidFill>
               </a:rPr>
               <a:t>RTEÜ Bilgisayar Mühendisliği · 2026-2027 Güz</a:t>
@@ -10226,7 +10746,7 @@
       </p:sp>
       <p:sp>
         <p:nvSpPr>
-          <p:cNvPr id="4" name="TextBox 3"/>
+          <p:cNvPr id="5" name="TextBox 4"/>
           <p:cNvSpPr txBox="1"/>
           <p:nvPr/>
         </p:nvSpPr>
@@ -10250,7 +10770,7 @@
             <a:r>
               <a:rPr sz="1000" b="0">
                 <a:solidFill>
-                  <a:srgbClr val="D8F0F2"/>
+                  <a:srgbClr val="5B6770"/>
                 </a:solidFill>
               </a:rPr>
               <a:t>32</a:t>
@@ -10260,14 +10780,47 @@
       </p:sp>
       <p:sp>
         <p:nvSpPr>
-          <p:cNvPr id="5" name="TextBox 4"/>
-          <p:cNvSpPr txBox="1"/>
-          <p:nvPr/>
-        </p:nvSpPr>
-        <p:spPr>
-          <a:xfrm>
-            <a:off x="640080" y="2743200"/>
-            <a:ext cx="10911535" cy="1280160"/>
+          <p:cNvPr id="6" name="TextBox 5"/>
+          <p:cNvSpPr txBox="1"/>
+          <p:nvPr/>
+        </p:nvSpPr>
+        <p:spPr>
+          <a:xfrm>
+            <a:off x="640080" y="548640"/>
+            <a:ext cx="10911535" cy="731520"/>
+          </a:xfrm>
+          <a:prstGeom prst="rect">
+            <a:avLst/>
+          </a:prstGeom>
+          <a:noFill/>
+        </p:spPr>
+        <p:txBody>
+          <a:bodyPr wrap="square" lIns="45720" rIns="45720" anchor="ctr">
+            <a:spAutoFit/>
+          </a:bodyPr>
+          <a:lstStyle/>
+          <a:p>
+            <a:r>
+              <a:rPr sz="3000" b="1">
+                <a:solidFill>
+                  <a:srgbClr val="006D77"/>
+                </a:solidFill>
+              </a:rPr>
+              <a:t>Soru 2</a:t>
+            </a:r>
+          </a:p>
+        </p:txBody>
+      </p:sp>
+      <p:sp>
+        <p:nvSpPr>
+          <p:cNvPr id="7" name="TextBox 6"/>
+          <p:cNvSpPr txBox="1"/>
+          <p:nvPr/>
+        </p:nvSpPr>
+        <p:spPr>
+          <a:xfrm>
+            <a:off x="640080" y="1325880"/>
+            <a:ext cx="10911535" cy="439928"/>
           </a:xfrm>
           <a:prstGeom prst="rect">
             <a:avLst/>
@@ -10282,12 +10835,12 @@
           <a:p>
             <a:pPr algn="l"/>
             <a:r>
-              <a:rPr sz="4000" b="1">
-                <a:solidFill>
-                  <a:srgbClr val="FFFFFF"/>
-                </a:solidFill>
-              </a:rPr>
-              <a:t>Ek · Sık yapılan hatalar</a:t>
+              <a:rPr sz="2000" b="1">
+                <a:solidFill>
+                  <a:srgbClr val="1F2D3A"/>
+                </a:solidFill>
+              </a:rPr>
+              <a:t>Sertifika zinciri ve ad denetimi nerede yapılıyor?</a:t>
             </a:r>
           </a:p>
         </p:txBody>
@@ -10462,7 +11015,7 @@
                   <a:srgbClr val="006D77"/>
                 </a:solidFill>
               </a:rPr>
-              <a:t>Hata listesi</a:t>
+              <a:t>Soru 3</a:t>
             </a:r>
           </a:p>
         </p:txBody>
@@ -10476,7 +11029,7 @@
         <p:spPr>
           <a:xfrm>
             <a:off x="640080" y="1325880"/>
-            <a:ext cx="10911535" cy="2346960"/>
+            <a:ext cx="10911535" cy="439928"/>
           </a:xfrm>
           <a:prstGeom prst="rect">
             <a:avLst/>
@@ -10489,157 +11042,14 @@
           </a:bodyPr>
           <a:lstStyle/>
           <a:p>
-            <a:pPr>
-              <a:spcAft>
-                <a:spcPts val="300"/>
-              </a:spcAft>
-            </a:pPr>
+            <a:pPr algn="l"/>
             <a:r>
               <a:rPr sz="2000" b="1">
                 <a:solidFill>
-                  <a:srgbClr val="006D77"/>
-                </a:solidFill>
-              </a:rPr>
-              <a:t>• </a:t>
-            </a:r>
-            <a:r>
-              <a:rPr sz="2000" b="0">
-                <a:solidFill>
                   <a:srgbClr val="1F2D3A"/>
                 </a:solidFill>
               </a:rPr>
-              <a:t>Test planı var, </a:t>
-            </a:r>
-            <a:r>
-              <a:rPr sz="2000" b="1">
-                <a:solidFill>
-                  <a:srgbClr val="1F2D3A"/>
-                </a:solidFill>
-              </a:rPr>
-              <a:t>sonuç</a:t>
-            </a:r>
-            <a:r>
-              <a:rPr sz="2000" b="0">
-                <a:solidFill>
-                  <a:srgbClr val="1F2D3A"/>
-                </a:solidFill>
-              </a:rPr>
-              <a:t> yok.</a:t>
-            </a:r>
-          </a:p>
-          <a:p>
-            <a:pPr>
-              <a:spcAft>
-                <a:spcPts val="300"/>
-              </a:spcAft>
-            </a:pPr>
-            <a:r>
-              <a:rPr sz="2000" b="1">
-                <a:solidFill>
-                  <a:srgbClr val="006D77"/>
-                </a:solidFill>
-              </a:rPr>
-              <a:t>• </a:t>
-            </a:r>
-            <a:r>
-              <a:rPr sz="2000" b="0">
-                <a:solidFill>
-                  <a:srgbClr val="1F2D3A"/>
-                </a:solidFill>
-              </a:rPr>
-              <a:t>Kanıtsız "karşılandı".</a:t>
-            </a:r>
-          </a:p>
-          <a:p>
-            <a:pPr>
-              <a:spcAft>
-                <a:spcPts val="300"/>
-              </a:spcAft>
-            </a:pPr>
-            <a:r>
-              <a:rPr sz="2000" b="1">
-                <a:solidFill>
-                  <a:srgbClr val="006D77"/>
-                </a:solidFill>
-              </a:rPr>
-              <a:t>• </a:t>
-            </a:r>
-            <a:r>
-              <a:rPr sz="2000" b="0">
-                <a:solidFill>
-                  <a:srgbClr val="1F2D3A"/>
-                </a:solidFill>
-              </a:rPr>
-              <a:t>Kılavuz ile kod sürümü farklı.</a:t>
-            </a:r>
-          </a:p>
-          <a:p>
-            <a:pPr>
-              <a:spcAft>
-                <a:spcPts val="300"/>
-              </a:spcAft>
-            </a:pPr>
-            <a:r>
-              <a:rPr sz="2000" b="1">
-                <a:solidFill>
-                  <a:srgbClr val="006D77"/>
-                </a:solidFill>
-              </a:rPr>
-              <a:t>• </a:t>
-            </a:r>
-            <a:r>
-              <a:rPr sz="2000" b="0">
-                <a:solidFill>
-                  <a:srgbClr val="1F2D3A"/>
-                </a:solidFill>
-              </a:rPr>
-              <a:t>Kalan risk boş.</a:t>
-            </a:r>
-          </a:p>
-          <a:p>
-            <a:pPr>
-              <a:spcAft>
-                <a:spcPts val="300"/>
-              </a:spcAft>
-            </a:pPr>
-            <a:r>
-              <a:rPr sz="2000" b="1">
-                <a:solidFill>
-                  <a:srgbClr val="006D77"/>
-                </a:solidFill>
-              </a:rPr>
-              <a:t>• </a:t>
-            </a:r>
-            <a:r>
-              <a:rPr sz="2000" b="0">
-                <a:solidFill>
-                  <a:srgbClr val="1F2D3A"/>
-                </a:solidFill>
-              </a:rPr>
-              <a:t>Vize geri bildirimi yok sayılmış.</a:t>
-            </a:r>
-          </a:p>
-          <a:p>
-            <a:pPr>
-              <a:spcAft>
-                <a:spcPts val="300"/>
-              </a:spcAft>
-            </a:pPr>
-            <a:r>
-              <a:rPr sz="2000" b="1">
-                <a:solidFill>
-                  <a:srgbClr val="006D77"/>
-                </a:solidFill>
-              </a:rPr>
-              <a:t>• </a:t>
-            </a:r>
-            <a:r>
-              <a:rPr sz="2000" b="0">
-                <a:solidFill>
-                  <a:srgbClr val="1F2D3A"/>
-                </a:solidFill>
-              </a:rPr>
-              <a:t>Depoda gerçek sır/kişisel veri.</a:t>
+              <a:t>İmza doğrulaması başarısızsa ne oluyor? Eski imzalı sürüm yüklenebilir mi?</a:t>
             </a:r>
           </a:p>
         </p:txBody>
@@ -10814,6 +11224,936 @@
                   <a:srgbClr val="006D77"/>
                 </a:solidFill>
               </a:rPr>
+              <a:t>Soru 4</a:t>
+            </a:r>
+          </a:p>
+        </p:txBody>
+      </p:sp>
+      <p:sp>
+        <p:nvSpPr>
+          <p:cNvPr id="7" name="TextBox 6"/>
+          <p:cNvSpPr txBox="1"/>
+          <p:nvPr/>
+        </p:nvSpPr>
+        <p:spPr>
+          <a:xfrm>
+            <a:off x="640080" y="1325880"/>
+            <a:ext cx="10911535" cy="439928"/>
+          </a:xfrm>
+          <a:prstGeom prst="rect">
+            <a:avLst/>
+          </a:prstGeom>
+          <a:noFill/>
+        </p:spPr>
+        <p:txBody>
+          <a:bodyPr wrap="square" lIns="45720" rIns="45720">
+            <a:spAutoFit/>
+          </a:bodyPr>
+          <a:lstStyle/>
+          <a:p>
+            <a:pPr algn="l"/>
+            <a:r>
+              <a:rPr sz="2000" b="1">
+                <a:solidFill>
+                  <a:srgbClr val="1F2D3A"/>
+                </a:solidFill>
+              </a:rPr>
+              <a:t>Gizlemenin maliyetini ölçtünüz mü? Hangi fonksiyonu neden gizlediniz?</a:t>
+            </a:r>
+          </a:p>
+        </p:txBody>
+      </p:sp>
+    </p:spTree>
+  </p:cSld>
+  <p:clrMapOvr>
+    <a:masterClrMapping/>
+  </p:clrMapOvr>
+</p:sld>
+</file>
+
+<file path=ppt/slides/slide35.xml><?xml version="1.0" encoding="utf-8"?>
+<p:sld xmlns:a="http://schemas.openxmlformats.org/drawingml/2006/main" xmlns:p="http://schemas.openxmlformats.org/presentationml/2006/main" xmlns:r="http://schemas.openxmlformats.org/officeDocument/2006/relationships">
+  <p:cSld>
+    <p:spTree>
+      <p:nvGrpSpPr>
+        <p:cNvPr id="1" name=""/>
+        <p:cNvGrpSpPr/>
+        <p:nvPr/>
+      </p:nvGrpSpPr>
+      <p:grpSpPr/>
+      <p:pic>
+        <p:nvPicPr>
+          <p:cNvPr id="2" name="Picture 1" descr="rteu_logo_kucuk.jpg"/>
+          <p:cNvPicPr>
+            <a:picLocks noChangeAspect="1"/>
+          </p:cNvPicPr>
+          <p:nvPr/>
+        </p:nvPicPr>
+        <p:blipFill>
+          <a:blip r:embed="rId2"/>
+          <a:stretch>
+            <a:fillRect/>
+          </a:stretch>
+        </p:blipFill>
+        <p:spPr>
+          <a:xfrm>
+            <a:off x="640080" y="164592"/>
+            <a:ext cx="242773" cy="329184"/>
+          </a:xfrm>
+          <a:prstGeom prst="rect">
+            <a:avLst/>
+          </a:prstGeom>
+        </p:spPr>
+      </p:pic>
+      <p:sp>
+        <p:nvSpPr>
+          <p:cNvPr id="3" name="TextBox 2"/>
+          <p:cNvSpPr txBox="1"/>
+          <p:nvPr/>
+        </p:nvSpPr>
+        <p:spPr>
+          <a:xfrm>
+            <a:off x="1051560" y="182880"/>
+            <a:ext cx="7315200" cy="320040"/>
+          </a:xfrm>
+          <a:prstGeom prst="rect">
+            <a:avLst/>
+          </a:prstGeom>
+          <a:noFill/>
+        </p:spPr>
+        <p:txBody>
+          <a:bodyPr wrap="square" lIns="45720" rIns="45720">
+            <a:spAutoFit/>
+          </a:bodyPr>
+          <a:lstStyle/>
+          <a:p>
+            <a:r>
+              <a:rPr sz="1100" b="0">
+                <a:solidFill>
+                  <a:srgbClr val="5B6770"/>
+                </a:solidFill>
+              </a:rPr>
+              <a:t>CEN429 Güvenli Programlama · Hafta 15</a:t>
+            </a:r>
+          </a:p>
+        </p:txBody>
+      </p:sp>
+      <p:sp>
+        <p:nvSpPr>
+          <p:cNvPr id="4" name="TextBox 3"/>
+          <p:cNvSpPr txBox="1"/>
+          <p:nvPr/>
+        </p:nvSpPr>
+        <p:spPr>
+          <a:xfrm>
+            <a:off x="640080" y="6446520"/>
+            <a:ext cx="7315200" cy="274320"/>
+          </a:xfrm>
+          <a:prstGeom prst="rect">
+            <a:avLst/>
+          </a:prstGeom>
+          <a:noFill/>
+        </p:spPr>
+        <p:txBody>
+          <a:bodyPr wrap="square" lIns="45720" rIns="45720">
+            <a:spAutoFit/>
+          </a:bodyPr>
+          <a:lstStyle/>
+          <a:p>
+            <a:r>
+              <a:rPr sz="1000" b="0">
+                <a:solidFill>
+                  <a:srgbClr val="5B6770"/>
+                </a:solidFill>
+              </a:rPr>
+              <a:t>RTEÜ Bilgisayar Mühendisliği · 2026-2027 Güz</a:t>
+            </a:r>
+          </a:p>
+        </p:txBody>
+      </p:sp>
+      <p:sp>
+        <p:nvSpPr>
+          <p:cNvPr id="5" name="TextBox 4"/>
+          <p:cNvSpPr txBox="1"/>
+          <p:nvPr/>
+        </p:nvSpPr>
+        <p:spPr>
+          <a:xfrm>
+            <a:off x="10637215" y="6446520"/>
+            <a:ext cx="914400" cy="274320"/>
+          </a:xfrm>
+          <a:prstGeom prst="rect">
+            <a:avLst/>
+          </a:prstGeom>
+          <a:noFill/>
+        </p:spPr>
+        <p:txBody>
+          <a:bodyPr wrap="square" lIns="45720" rIns="45720">
+            <a:spAutoFit/>
+          </a:bodyPr>
+          <a:lstStyle/>
+          <a:p>
+            <a:pPr algn="r"/>
+            <a:r>
+              <a:rPr sz="1000" b="0">
+                <a:solidFill>
+                  <a:srgbClr val="5B6770"/>
+                </a:solidFill>
+              </a:rPr>
+              <a:t>35</a:t>
+            </a:r>
+          </a:p>
+        </p:txBody>
+      </p:sp>
+      <p:sp>
+        <p:nvSpPr>
+          <p:cNvPr id="6" name="TextBox 5"/>
+          <p:cNvSpPr txBox="1"/>
+          <p:nvPr/>
+        </p:nvSpPr>
+        <p:spPr>
+          <a:xfrm>
+            <a:off x="640080" y="548640"/>
+            <a:ext cx="10911535" cy="731520"/>
+          </a:xfrm>
+          <a:prstGeom prst="rect">
+            <a:avLst/>
+          </a:prstGeom>
+          <a:noFill/>
+        </p:spPr>
+        <p:txBody>
+          <a:bodyPr wrap="square" lIns="45720" rIns="45720" anchor="ctr">
+            <a:spAutoFit/>
+          </a:bodyPr>
+          <a:lstStyle/>
+          <a:p>
+            <a:r>
+              <a:rPr sz="3000" b="1">
+                <a:solidFill>
+                  <a:srgbClr val="006D77"/>
+                </a:solidFill>
+              </a:rPr>
+              <a:t>Soru 5</a:t>
+            </a:r>
+          </a:p>
+        </p:txBody>
+      </p:sp>
+      <p:sp>
+        <p:nvSpPr>
+          <p:cNvPr id="7" name="TextBox 6"/>
+          <p:cNvSpPr txBox="1"/>
+          <p:nvPr/>
+        </p:nvSpPr>
+        <p:spPr>
+          <a:xfrm>
+            <a:off x="640080" y="1325880"/>
+            <a:ext cx="10911535" cy="439928"/>
+          </a:xfrm>
+          <a:prstGeom prst="rect">
+            <a:avLst/>
+          </a:prstGeom>
+          <a:noFill/>
+        </p:spPr>
+        <p:txBody>
+          <a:bodyPr wrap="square" lIns="45720" rIns="45720">
+            <a:spAutoFit/>
+          </a:bodyPr>
+          <a:lstStyle/>
+          <a:p>
+            <a:pPr algn="l"/>
+            <a:r>
+              <a:rPr sz="2000" b="1">
+                <a:solidFill>
+                  <a:srgbClr val="1F2D3A"/>
+                </a:solidFill>
+              </a:rPr>
+              <a:t>Uyum matrisinde şu "karşılandı" satırının kanıtı nerede?</a:t>
+            </a:r>
+          </a:p>
+        </p:txBody>
+      </p:sp>
+    </p:spTree>
+  </p:cSld>
+  <p:clrMapOvr>
+    <a:masterClrMapping/>
+  </p:clrMapOvr>
+</p:sld>
+</file>
+
+<file path=ppt/slides/slide36.xml><?xml version="1.0" encoding="utf-8"?>
+<p:sld xmlns:a="http://schemas.openxmlformats.org/drawingml/2006/main" xmlns:p="http://schemas.openxmlformats.org/presentationml/2006/main" xmlns:r="http://schemas.openxmlformats.org/officeDocument/2006/relationships">
+  <p:cSld>
+    <p:bg>
+      <p:bgPr>
+        <a:solidFill>
+          <a:srgbClr val="006D77"/>
+        </a:solidFill>
+        <a:effectLst/>
+      </p:bgPr>
+    </p:bg>
+    <p:spTree>
+      <p:nvGrpSpPr>
+        <p:cNvPr id="1" name=""/>
+        <p:cNvGrpSpPr/>
+        <p:nvPr/>
+      </p:nvGrpSpPr>
+      <p:grpSpPr/>
+      <p:sp>
+        <p:nvSpPr>
+          <p:cNvPr id="2" name="TextBox 1"/>
+          <p:cNvSpPr txBox="1"/>
+          <p:nvPr/>
+        </p:nvSpPr>
+        <p:spPr>
+          <a:xfrm>
+            <a:off x="1051560" y="182880"/>
+            <a:ext cx="7315200" cy="320040"/>
+          </a:xfrm>
+          <a:prstGeom prst="rect">
+            <a:avLst/>
+          </a:prstGeom>
+          <a:noFill/>
+        </p:spPr>
+        <p:txBody>
+          <a:bodyPr wrap="square" lIns="45720" rIns="45720">
+            <a:spAutoFit/>
+          </a:bodyPr>
+          <a:lstStyle/>
+          <a:p>
+            <a:r>
+              <a:rPr sz="1100" b="0">
+                <a:solidFill>
+                  <a:srgbClr val="D8F0F2"/>
+                </a:solidFill>
+              </a:rPr>
+              <a:t>CEN429 Güvenli Programlama · Hafta 15</a:t>
+            </a:r>
+          </a:p>
+        </p:txBody>
+      </p:sp>
+      <p:sp>
+        <p:nvSpPr>
+          <p:cNvPr id="3" name="TextBox 2"/>
+          <p:cNvSpPr txBox="1"/>
+          <p:nvPr/>
+        </p:nvSpPr>
+        <p:spPr>
+          <a:xfrm>
+            <a:off x="640080" y="6446520"/>
+            <a:ext cx="7315200" cy="274320"/>
+          </a:xfrm>
+          <a:prstGeom prst="rect">
+            <a:avLst/>
+          </a:prstGeom>
+          <a:noFill/>
+        </p:spPr>
+        <p:txBody>
+          <a:bodyPr wrap="square" lIns="45720" rIns="45720">
+            <a:spAutoFit/>
+          </a:bodyPr>
+          <a:lstStyle/>
+          <a:p>
+            <a:r>
+              <a:rPr sz="1000" b="0">
+                <a:solidFill>
+                  <a:srgbClr val="D8F0F2"/>
+                </a:solidFill>
+              </a:rPr>
+              <a:t>RTEÜ Bilgisayar Mühendisliği · 2026-2027 Güz</a:t>
+            </a:r>
+          </a:p>
+        </p:txBody>
+      </p:sp>
+      <p:sp>
+        <p:nvSpPr>
+          <p:cNvPr id="4" name="TextBox 3"/>
+          <p:cNvSpPr txBox="1"/>
+          <p:nvPr/>
+        </p:nvSpPr>
+        <p:spPr>
+          <a:xfrm>
+            <a:off x="10637215" y="6446520"/>
+            <a:ext cx="914400" cy="274320"/>
+          </a:xfrm>
+          <a:prstGeom prst="rect">
+            <a:avLst/>
+          </a:prstGeom>
+          <a:noFill/>
+        </p:spPr>
+        <p:txBody>
+          <a:bodyPr wrap="square" lIns="45720" rIns="45720">
+            <a:spAutoFit/>
+          </a:bodyPr>
+          <a:lstStyle/>
+          <a:p>
+            <a:pPr algn="r"/>
+            <a:r>
+              <a:rPr sz="1000" b="0">
+                <a:solidFill>
+                  <a:srgbClr val="D8F0F2"/>
+                </a:solidFill>
+              </a:rPr>
+              <a:t>36</a:t>
+            </a:r>
+          </a:p>
+        </p:txBody>
+      </p:sp>
+      <p:sp>
+        <p:nvSpPr>
+          <p:cNvPr id="5" name="TextBox 4"/>
+          <p:cNvSpPr txBox="1"/>
+          <p:nvPr/>
+        </p:nvSpPr>
+        <p:spPr>
+          <a:xfrm>
+            <a:off x="640080" y="2743200"/>
+            <a:ext cx="10911535" cy="1280160"/>
+          </a:xfrm>
+          <a:prstGeom prst="rect">
+            <a:avLst/>
+          </a:prstGeom>
+          <a:noFill/>
+        </p:spPr>
+        <p:txBody>
+          <a:bodyPr wrap="square" lIns="45720" rIns="45720">
+            <a:spAutoFit/>
+          </a:bodyPr>
+          <a:lstStyle/>
+          <a:p>
+            <a:pPr algn="l"/>
+            <a:r>
+              <a:rPr sz="4000" b="1">
+                <a:solidFill>
+                  <a:srgbClr val="FFFFFF"/>
+                </a:solidFill>
+              </a:rPr>
+              <a:t>Ek · Sık yapılan hatalar</a:t>
+            </a:r>
+          </a:p>
+        </p:txBody>
+      </p:sp>
+    </p:spTree>
+  </p:cSld>
+  <p:clrMapOvr>
+    <a:masterClrMapping/>
+  </p:clrMapOvr>
+</p:sld>
+</file>
+
+<file path=ppt/slides/slide37.xml><?xml version="1.0" encoding="utf-8"?>
+<p:sld xmlns:a="http://schemas.openxmlformats.org/drawingml/2006/main" xmlns:p="http://schemas.openxmlformats.org/presentationml/2006/main" xmlns:r="http://schemas.openxmlformats.org/officeDocument/2006/relationships">
+  <p:cSld>
+    <p:spTree>
+      <p:nvGrpSpPr>
+        <p:cNvPr id="1" name=""/>
+        <p:cNvGrpSpPr/>
+        <p:nvPr/>
+      </p:nvGrpSpPr>
+      <p:grpSpPr/>
+      <p:pic>
+        <p:nvPicPr>
+          <p:cNvPr id="2" name="Picture 1" descr="rteu_logo_kucuk.jpg"/>
+          <p:cNvPicPr>
+            <a:picLocks noChangeAspect="1"/>
+          </p:cNvPicPr>
+          <p:nvPr/>
+        </p:nvPicPr>
+        <p:blipFill>
+          <a:blip r:embed="rId2"/>
+          <a:stretch>
+            <a:fillRect/>
+          </a:stretch>
+        </p:blipFill>
+        <p:spPr>
+          <a:xfrm>
+            <a:off x="640080" y="164592"/>
+            <a:ext cx="242773" cy="329184"/>
+          </a:xfrm>
+          <a:prstGeom prst="rect">
+            <a:avLst/>
+          </a:prstGeom>
+        </p:spPr>
+      </p:pic>
+      <p:sp>
+        <p:nvSpPr>
+          <p:cNvPr id="3" name="TextBox 2"/>
+          <p:cNvSpPr txBox="1"/>
+          <p:nvPr/>
+        </p:nvSpPr>
+        <p:spPr>
+          <a:xfrm>
+            <a:off x="1051560" y="182880"/>
+            <a:ext cx="7315200" cy="320040"/>
+          </a:xfrm>
+          <a:prstGeom prst="rect">
+            <a:avLst/>
+          </a:prstGeom>
+          <a:noFill/>
+        </p:spPr>
+        <p:txBody>
+          <a:bodyPr wrap="square" lIns="45720" rIns="45720">
+            <a:spAutoFit/>
+          </a:bodyPr>
+          <a:lstStyle/>
+          <a:p>
+            <a:r>
+              <a:rPr sz="1100" b="0">
+                <a:solidFill>
+                  <a:srgbClr val="5B6770"/>
+                </a:solidFill>
+              </a:rPr>
+              <a:t>CEN429 Güvenli Programlama · Hafta 15</a:t>
+            </a:r>
+          </a:p>
+        </p:txBody>
+      </p:sp>
+      <p:sp>
+        <p:nvSpPr>
+          <p:cNvPr id="4" name="TextBox 3"/>
+          <p:cNvSpPr txBox="1"/>
+          <p:nvPr/>
+        </p:nvSpPr>
+        <p:spPr>
+          <a:xfrm>
+            <a:off x="640080" y="6446520"/>
+            <a:ext cx="7315200" cy="274320"/>
+          </a:xfrm>
+          <a:prstGeom prst="rect">
+            <a:avLst/>
+          </a:prstGeom>
+          <a:noFill/>
+        </p:spPr>
+        <p:txBody>
+          <a:bodyPr wrap="square" lIns="45720" rIns="45720">
+            <a:spAutoFit/>
+          </a:bodyPr>
+          <a:lstStyle/>
+          <a:p>
+            <a:r>
+              <a:rPr sz="1000" b="0">
+                <a:solidFill>
+                  <a:srgbClr val="5B6770"/>
+                </a:solidFill>
+              </a:rPr>
+              <a:t>RTEÜ Bilgisayar Mühendisliği · 2026-2027 Güz</a:t>
+            </a:r>
+          </a:p>
+        </p:txBody>
+      </p:sp>
+      <p:sp>
+        <p:nvSpPr>
+          <p:cNvPr id="5" name="TextBox 4"/>
+          <p:cNvSpPr txBox="1"/>
+          <p:nvPr/>
+        </p:nvSpPr>
+        <p:spPr>
+          <a:xfrm>
+            <a:off x="10637215" y="6446520"/>
+            <a:ext cx="914400" cy="274320"/>
+          </a:xfrm>
+          <a:prstGeom prst="rect">
+            <a:avLst/>
+          </a:prstGeom>
+          <a:noFill/>
+        </p:spPr>
+        <p:txBody>
+          <a:bodyPr wrap="square" lIns="45720" rIns="45720">
+            <a:spAutoFit/>
+          </a:bodyPr>
+          <a:lstStyle/>
+          <a:p>
+            <a:pPr algn="r"/>
+            <a:r>
+              <a:rPr sz="1000" b="0">
+                <a:solidFill>
+                  <a:srgbClr val="5B6770"/>
+                </a:solidFill>
+              </a:rPr>
+              <a:t>37</a:t>
+            </a:r>
+          </a:p>
+        </p:txBody>
+      </p:sp>
+      <p:sp>
+        <p:nvSpPr>
+          <p:cNvPr id="6" name="TextBox 5"/>
+          <p:cNvSpPr txBox="1"/>
+          <p:nvPr/>
+        </p:nvSpPr>
+        <p:spPr>
+          <a:xfrm>
+            <a:off x="640080" y="548640"/>
+            <a:ext cx="10911535" cy="731520"/>
+          </a:xfrm>
+          <a:prstGeom prst="rect">
+            <a:avLst/>
+          </a:prstGeom>
+          <a:noFill/>
+        </p:spPr>
+        <p:txBody>
+          <a:bodyPr wrap="square" lIns="45720" rIns="45720" anchor="ctr">
+            <a:spAutoFit/>
+          </a:bodyPr>
+          <a:lstStyle/>
+          <a:p>
+            <a:r>
+              <a:rPr sz="3000" b="1">
+                <a:solidFill>
+                  <a:srgbClr val="006D77"/>
+                </a:solidFill>
+              </a:rPr>
+              <a:t>Hata listesi</a:t>
+            </a:r>
+          </a:p>
+        </p:txBody>
+      </p:sp>
+      <p:sp>
+        <p:nvSpPr>
+          <p:cNvPr id="7" name="TextBox 6"/>
+          <p:cNvSpPr txBox="1"/>
+          <p:nvPr/>
+        </p:nvSpPr>
+        <p:spPr>
+          <a:xfrm>
+            <a:off x="640080" y="1325880"/>
+            <a:ext cx="10911535" cy="2346960"/>
+          </a:xfrm>
+          <a:prstGeom prst="rect">
+            <a:avLst/>
+          </a:prstGeom>
+          <a:noFill/>
+        </p:spPr>
+        <p:txBody>
+          <a:bodyPr wrap="square" lIns="45720" rIns="45720">
+            <a:spAutoFit/>
+          </a:bodyPr>
+          <a:lstStyle/>
+          <a:p>
+            <a:pPr>
+              <a:spcAft>
+                <a:spcPts val="300"/>
+              </a:spcAft>
+            </a:pPr>
+            <a:r>
+              <a:rPr sz="2000" b="1">
+                <a:solidFill>
+                  <a:srgbClr val="006D77"/>
+                </a:solidFill>
+              </a:rPr>
+              <a:t>• </a:t>
+            </a:r>
+            <a:r>
+              <a:rPr sz="2000" b="0">
+                <a:solidFill>
+                  <a:srgbClr val="1F2D3A"/>
+                </a:solidFill>
+              </a:rPr>
+              <a:t>Test planı var, </a:t>
+            </a:r>
+            <a:r>
+              <a:rPr sz="2000" b="1">
+                <a:solidFill>
+                  <a:srgbClr val="1F2D3A"/>
+                </a:solidFill>
+              </a:rPr>
+              <a:t>sonuç</a:t>
+            </a:r>
+            <a:r>
+              <a:rPr sz="2000" b="0">
+                <a:solidFill>
+                  <a:srgbClr val="1F2D3A"/>
+                </a:solidFill>
+              </a:rPr>
+              <a:t> yok.</a:t>
+            </a:r>
+          </a:p>
+          <a:p>
+            <a:pPr>
+              <a:spcAft>
+                <a:spcPts val="300"/>
+              </a:spcAft>
+            </a:pPr>
+            <a:r>
+              <a:rPr sz="2000" b="1">
+                <a:solidFill>
+                  <a:srgbClr val="006D77"/>
+                </a:solidFill>
+              </a:rPr>
+              <a:t>• </a:t>
+            </a:r>
+            <a:r>
+              <a:rPr sz="2000" b="0">
+                <a:solidFill>
+                  <a:srgbClr val="1F2D3A"/>
+                </a:solidFill>
+              </a:rPr>
+              <a:t>Kanıtsız "karşılandı".</a:t>
+            </a:r>
+          </a:p>
+          <a:p>
+            <a:pPr>
+              <a:spcAft>
+                <a:spcPts val="300"/>
+              </a:spcAft>
+            </a:pPr>
+            <a:r>
+              <a:rPr sz="2000" b="1">
+                <a:solidFill>
+                  <a:srgbClr val="006D77"/>
+                </a:solidFill>
+              </a:rPr>
+              <a:t>• </a:t>
+            </a:r>
+            <a:r>
+              <a:rPr sz="2000" b="0">
+                <a:solidFill>
+                  <a:srgbClr val="1F2D3A"/>
+                </a:solidFill>
+              </a:rPr>
+              <a:t>Kılavuz ile kod sürümü farklı.</a:t>
+            </a:r>
+          </a:p>
+          <a:p>
+            <a:pPr>
+              <a:spcAft>
+                <a:spcPts val="300"/>
+              </a:spcAft>
+            </a:pPr>
+            <a:r>
+              <a:rPr sz="2000" b="1">
+                <a:solidFill>
+                  <a:srgbClr val="006D77"/>
+                </a:solidFill>
+              </a:rPr>
+              <a:t>• </a:t>
+            </a:r>
+            <a:r>
+              <a:rPr sz="2000" b="0">
+                <a:solidFill>
+                  <a:srgbClr val="1F2D3A"/>
+                </a:solidFill>
+              </a:rPr>
+              <a:t>Kalan risk boş.</a:t>
+            </a:r>
+          </a:p>
+          <a:p>
+            <a:pPr>
+              <a:spcAft>
+                <a:spcPts val="300"/>
+              </a:spcAft>
+            </a:pPr>
+            <a:r>
+              <a:rPr sz="2000" b="1">
+                <a:solidFill>
+                  <a:srgbClr val="006D77"/>
+                </a:solidFill>
+              </a:rPr>
+              <a:t>• </a:t>
+            </a:r>
+            <a:r>
+              <a:rPr sz="2000" b="0">
+                <a:solidFill>
+                  <a:srgbClr val="1F2D3A"/>
+                </a:solidFill>
+              </a:rPr>
+              <a:t>Vize geri bildirimi yok sayılmış.</a:t>
+            </a:r>
+          </a:p>
+          <a:p>
+            <a:pPr>
+              <a:spcAft>
+                <a:spcPts val="300"/>
+              </a:spcAft>
+            </a:pPr>
+            <a:r>
+              <a:rPr sz="2000" b="1">
+                <a:solidFill>
+                  <a:srgbClr val="006D77"/>
+                </a:solidFill>
+              </a:rPr>
+              <a:t>• </a:t>
+            </a:r>
+            <a:r>
+              <a:rPr sz="2000" b="0">
+                <a:solidFill>
+                  <a:srgbClr val="1F2D3A"/>
+                </a:solidFill>
+              </a:rPr>
+              <a:t>Depoda gerçek sır/kişisel veri.</a:t>
+            </a:r>
+          </a:p>
+        </p:txBody>
+      </p:sp>
+    </p:spTree>
+  </p:cSld>
+  <p:clrMapOvr>
+    <a:masterClrMapping/>
+  </p:clrMapOvr>
+</p:sld>
+</file>
+
+<file path=ppt/slides/slide38.xml><?xml version="1.0" encoding="utf-8"?>
+<p:sld xmlns:a="http://schemas.openxmlformats.org/drawingml/2006/main" xmlns:p="http://schemas.openxmlformats.org/presentationml/2006/main" xmlns:r="http://schemas.openxmlformats.org/officeDocument/2006/relationships">
+  <p:cSld>
+    <p:spTree>
+      <p:nvGrpSpPr>
+        <p:cNvPr id="1" name=""/>
+        <p:cNvGrpSpPr/>
+        <p:nvPr/>
+      </p:nvGrpSpPr>
+      <p:grpSpPr/>
+      <p:pic>
+        <p:nvPicPr>
+          <p:cNvPr id="2" name="Picture 1" descr="rteu_logo_kucuk.jpg"/>
+          <p:cNvPicPr>
+            <a:picLocks noChangeAspect="1"/>
+          </p:cNvPicPr>
+          <p:nvPr/>
+        </p:nvPicPr>
+        <p:blipFill>
+          <a:blip r:embed="rId2"/>
+          <a:stretch>
+            <a:fillRect/>
+          </a:stretch>
+        </p:blipFill>
+        <p:spPr>
+          <a:xfrm>
+            <a:off x="640080" y="164592"/>
+            <a:ext cx="242773" cy="329184"/>
+          </a:xfrm>
+          <a:prstGeom prst="rect">
+            <a:avLst/>
+          </a:prstGeom>
+        </p:spPr>
+      </p:pic>
+      <p:sp>
+        <p:nvSpPr>
+          <p:cNvPr id="3" name="TextBox 2"/>
+          <p:cNvSpPr txBox="1"/>
+          <p:nvPr/>
+        </p:nvSpPr>
+        <p:spPr>
+          <a:xfrm>
+            <a:off x="1051560" y="182880"/>
+            <a:ext cx="7315200" cy="320040"/>
+          </a:xfrm>
+          <a:prstGeom prst="rect">
+            <a:avLst/>
+          </a:prstGeom>
+          <a:noFill/>
+        </p:spPr>
+        <p:txBody>
+          <a:bodyPr wrap="square" lIns="45720" rIns="45720">
+            <a:spAutoFit/>
+          </a:bodyPr>
+          <a:lstStyle/>
+          <a:p>
+            <a:r>
+              <a:rPr sz="1100" b="0">
+                <a:solidFill>
+                  <a:srgbClr val="5B6770"/>
+                </a:solidFill>
+              </a:rPr>
+              <a:t>CEN429 Güvenli Programlama · Hafta 15</a:t>
+            </a:r>
+          </a:p>
+        </p:txBody>
+      </p:sp>
+      <p:sp>
+        <p:nvSpPr>
+          <p:cNvPr id="4" name="TextBox 3"/>
+          <p:cNvSpPr txBox="1"/>
+          <p:nvPr/>
+        </p:nvSpPr>
+        <p:spPr>
+          <a:xfrm>
+            <a:off x="640080" y="6446520"/>
+            <a:ext cx="7315200" cy="274320"/>
+          </a:xfrm>
+          <a:prstGeom prst="rect">
+            <a:avLst/>
+          </a:prstGeom>
+          <a:noFill/>
+        </p:spPr>
+        <p:txBody>
+          <a:bodyPr wrap="square" lIns="45720" rIns="45720">
+            <a:spAutoFit/>
+          </a:bodyPr>
+          <a:lstStyle/>
+          <a:p>
+            <a:r>
+              <a:rPr sz="1000" b="0">
+                <a:solidFill>
+                  <a:srgbClr val="5B6770"/>
+                </a:solidFill>
+              </a:rPr>
+              <a:t>RTEÜ Bilgisayar Mühendisliği · 2026-2027 Güz</a:t>
+            </a:r>
+          </a:p>
+        </p:txBody>
+      </p:sp>
+      <p:sp>
+        <p:nvSpPr>
+          <p:cNvPr id="5" name="TextBox 4"/>
+          <p:cNvSpPr txBox="1"/>
+          <p:nvPr/>
+        </p:nvSpPr>
+        <p:spPr>
+          <a:xfrm>
+            <a:off x="10637215" y="6446520"/>
+            <a:ext cx="914400" cy="274320"/>
+          </a:xfrm>
+          <a:prstGeom prst="rect">
+            <a:avLst/>
+          </a:prstGeom>
+          <a:noFill/>
+        </p:spPr>
+        <p:txBody>
+          <a:bodyPr wrap="square" lIns="45720" rIns="45720">
+            <a:spAutoFit/>
+          </a:bodyPr>
+          <a:lstStyle/>
+          <a:p>
+            <a:pPr algn="r"/>
+            <a:r>
+              <a:rPr sz="1000" b="0">
+                <a:solidFill>
+                  <a:srgbClr val="5B6770"/>
+                </a:solidFill>
+              </a:rPr>
+              <a:t>38</a:t>
+            </a:r>
+          </a:p>
+        </p:txBody>
+      </p:sp>
+      <p:sp>
+        <p:nvSpPr>
+          <p:cNvPr id="6" name="TextBox 5"/>
+          <p:cNvSpPr txBox="1"/>
+          <p:nvPr/>
+        </p:nvSpPr>
+        <p:spPr>
+          <a:xfrm>
+            <a:off x="640080" y="548640"/>
+            <a:ext cx="10911535" cy="731520"/>
+          </a:xfrm>
+          <a:prstGeom prst="rect">
+            <a:avLst/>
+          </a:prstGeom>
+          <a:noFill/>
+        </p:spPr>
+        <p:txBody>
+          <a:bodyPr wrap="square" lIns="45720" rIns="45720" anchor="ctr">
+            <a:spAutoFit/>
+          </a:bodyPr>
+          <a:lstStyle/>
+          <a:p>
+            <a:r>
+              <a:rPr sz="3000" b="1">
+                <a:solidFill>
+                  <a:srgbClr val="006D77"/>
+                </a:solidFill>
+              </a:rPr>
               <a:t>Son söz (RAP2)</a:t>
             </a:r>
           </a:p>
@@ -11076,6 +12416,205 @@
                 </a:solidFill>
               </a:rPr>
               <a:t>4</a:t>
+            </a:r>
+          </a:p>
+        </p:txBody>
+      </p:sp>
+      <p:sp>
+        <p:nvSpPr>
+          <p:cNvPr id="6" name="TextBox 5"/>
+          <p:cNvSpPr txBox="1"/>
+          <p:nvPr/>
+        </p:nvSpPr>
+        <p:spPr>
+          <a:xfrm>
+            <a:off x="640080" y="548640"/>
+            <a:ext cx="10911535" cy="731520"/>
+          </a:xfrm>
+          <a:prstGeom prst="rect">
+            <a:avLst/>
+          </a:prstGeom>
+          <a:noFill/>
+        </p:spPr>
+        <p:txBody>
+          <a:bodyPr wrap="square" lIns="45720" rIns="45720" anchor="ctr">
+            <a:spAutoFit/>
+          </a:bodyPr>
+          <a:lstStyle/>
+          <a:p>
+            <a:r>
+              <a:rPr sz="3000" b="1">
+                <a:solidFill>
+                  <a:srgbClr val="006D77"/>
+                </a:solidFill>
+              </a:rPr>
+              <a:t>Kılavuz haritası S0–S17 — şema</a:t>
+            </a:r>
+          </a:p>
+        </p:txBody>
+      </p:sp>
+      <p:pic>
+        <p:nvPicPr>
+          <p:cNvPr id="7" name="Picture 6" descr="h15-02-kilavuz-haritasi.png"/>
+          <p:cNvPicPr>
+            <a:picLocks noChangeAspect="1"/>
+          </p:cNvPicPr>
+          <p:nvPr/>
+        </p:nvPicPr>
+        <p:blipFill>
+          <a:blip r:embed="rId3"/>
+          <a:stretch>
+            <a:fillRect/>
+          </a:stretch>
+        </p:blipFill>
+        <p:spPr>
+          <a:xfrm>
+            <a:off x="2187499" y="1325880"/>
+            <a:ext cx="7816696" cy="4937760"/>
+          </a:xfrm>
+          <a:prstGeom prst="rect">
+            <a:avLst/>
+          </a:prstGeom>
+        </p:spPr>
+      </p:pic>
+    </p:spTree>
+  </p:cSld>
+  <p:clrMapOvr>
+    <a:masterClrMapping/>
+  </p:clrMapOvr>
+</p:sld>
+</file>
+
+<file path=ppt/slides/slide5.xml><?xml version="1.0" encoding="utf-8"?>
+<p:sld xmlns:a="http://schemas.openxmlformats.org/drawingml/2006/main" xmlns:p="http://schemas.openxmlformats.org/presentationml/2006/main" xmlns:r="http://schemas.openxmlformats.org/officeDocument/2006/relationships">
+  <p:cSld>
+    <p:spTree>
+      <p:nvGrpSpPr>
+        <p:cNvPr id="1" name=""/>
+        <p:cNvGrpSpPr/>
+        <p:nvPr/>
+      </p:nvGrpSpPr>
+      <p:grpSpPr/>
+      <p:pic>
+        <p:nvPicPr>
+          <p:cNvPr id="2" name="Picture 1" descr="rteu_logo_kucuk.jpg"/>
+          <p:cNvPicPr>
+            <a:picLocks noChangeAspect="1"/>
+          </p:cNvPicPr>
+          <p:nvPr/>
+        </p:nvPicPr>
+        <p:blipFill>
+          <a:blip r:embed="rId2"/>
+          <a:stretch>
+            <a:fillRect/>
+          </a:stretch>
+        </p:blipFill>
+        <p:spPr>
+          <a:xfrm>
+            <a:off x="640080" y="164592"/>
+            <a:ext cx="242773" cy="329184"/>
+          </a:xfrm>
+          <a:prstGeom prst="rect">
+            <a:avLst/>
+          </a:prstGeom>
+        </p:spPr>
+      </p:pic>
+      <p:sp>
+        <p:nvSpPr>
+          <p:cNvPr id="3" name="TextBox 2"/>
+          <p:cNvSpPr txBox="1"/>
+          <p:nvPr/>
+        </p:nvSpPr>
+        <p:spPr>
+          <a:xfrm>
+            <a:off x="1051560" y="182880"/>
+            <a:ext cx="7315200" cy="320040"/>
+          </a:xfrm>
+          <a:prstGeom prst="rect">
+            <a:avLst/>
+          </a:prstGeom>
+          <a:noFill/>
+        </p:spPr>
+        <p:txBody>
+          <a:bodyPr wrap="square" lIns="45720" rIns="45720">
+            <a:spAutoFit/>
+          </a:bodyPr>
+          <a:lstStyle/>
+          <a:p>
+            <a:r>
+              <a:rPr sz="1100" b="0">
+                <a:solidFill>
+                  <a:srgbClr val="5B6770"/>
+                </a:solidFill>
+              </a:rPr>
+              <a:t>CEN429 Güvenli Programlama · Hafta 15</a:t>
+            </a:r>
+          </a:p>
+        </p:txBody>
+      </p:sp>
+      <p:sp>
+        <p:nvSpPr>
+          <p:cNvPr id="4" name="TextBox 3"/>
+          <p:cNvSpPr txBox="1"/>
+          <p:nvPr/>
+        </p:nvSpPr>
+        <p:spPr>
+          <a:xfrm>
+            <a:off x="640080" y="6446520"/>
+            <a:ext cx="7315200" cy="274320"/>
+          </a:xfrm>
+          <a:prstGeom prst="rect">
+            <a:avLst/>
+          </a:prstGeom>
+          <a:noFill/>
+        </p:spPr>
+        <p:txBody>
+          <a:bodyPr wrap="square" lIns="45720" rIns="45720">
+            <a:spAutoFit/>
+          </a:bodyPr>
+          <a:lstStyle/>
+          <a:p>
+            <a:r>
+              <a:rPr sz="1000" b="0">
+                <a:solidFill>
+                  <a:srgbClr val="5B6770"/>
+                </a:solidFill>
+              </a:rPr>
+              <a:t>RTEÜ Bilgisayar Mühendisliği · 2026-2027 Güz</a:t>
+            </a:r>
+          </a:p>
+        </p:txBody>
+      </p:sp>
+      <p:sp>
+        <p:nvSpPr>
+          <p:cNvPr id="5" name="TextBox 4"/>
+          <p:cNvSpPr txBox="1"/>
+          <p:nvPr/>
+        </p:nvSpPr>
+        <p:spPr>
+          <a:xfrm>
+            <a:off x="10637215" y="6446520"/>
+            <a:ext cx="914400" cy="274320"/>
+          </a:xfrm>
+          <a:prstGeom prst="rect">
+            <a:avLst/>
+          </a:prstGeom>
+          <a:noFill/>
+        </p:spPr>
+        <p:txBody>
+          <a:bodyPr wrap="square" lIns="45720" rIns="45720">
+            <a:spAutoFit/>
+          </a:bodyPr>
+          <a:lstStyle/>
+          <a:p>
+            <a:pPr algn="r"/>
+            <a:r>
+              <a:rPr sz="1000" b="0">
+                <a:solidFill>
+                  <a:srgbClr val="5B6770"/>
+                </a:solidFill>
+              </a:rPr>
+              <a:t>5</a:t>
             </a:r>
           </a:p>
         </p:txBody>
@@ -11427,7 +12966,7 @@
 </p:sld>
 </file>
 
-<file path=ppt/slides/slide5.xml><?xml version="1.0" encoding="utf-8"?>
+<file path=ppt/slides/slide6.xml><?xml version="1.0" encoding="utf-8"?>
 <p:sld xmlns:a="http://schemas.openxmlformats.org/drawingml/2006/main" xmlns:p="http://schemas.openxmlformats.org/presentationml/2006/main" xmlns:r="http://schemas.openxmlformats.org/officeDocument/2006/relationships">
   <p:cSld>
     <p:spTree>
@@ -11556,7 +13095,206 @@
                   <a:srgbClr val="5B6770"/>
                 </a:solidFill>
               </a:rPr>
-              <a:t>5</a:t>
+              <a:t>6</a:t>
+            </a:r>
+          </a:p>
+        </p:txBody>
+      </p:sp>
+      <p:sp>
+        <p:nvSpPr>
+          <p:cNvPr id="6" name="TextBox 5"/>
+          <p:cNvSpPr txBox="1"/>
+          <p:nvPr/>
+        </p:nvSpPr>
+        <p:spPr>
+          <a:xfrm>
+            <a:off x="640080" y="548640"/>
+            <a:ext cx="10911535" cy="731520"/>
+          </a:xfrm>
+          <a:prstGeom prst="rect">
+            <a:avLst/>
+          </a:prstGeom>
+          <a:noFill/>
+        </p:spPr>
+        <p:txBody>
+          <a:bodyPr wrap="square" lIns="45720" rIns="45720" anchor="ctr">
+            <a:spAutoFit/>
+          </a:bodyPr>
+          <a:lstStyle/>
+          <a:p>
+            <a:r>
+              <a:rPr sz="3000" b="1">
+                <a:solidFill>
+                  <a:srgbClr val="006D77"/>
+                </a:solidFill>
+              </a:rPr>
+              <a:t>RAP2 teslimi — şema</a:t>
+            </a:r>
+          </a:p>
+        </p:txBody>
+      </p:sp>
+      <p:pic>
+        <p:nvPicPr>
+          <p:cNvPr id="7" name="Picture 6" descr="h15-01-rap2.png"/>
+          <p:cNvPicPr>
+            <a:picLocks noChangeAspect="1"/>
+          </p:cNvPicPr>
+          <p:nvPr/>
+        </p:nvPicPr>
+        <p:blipFill>
+          <a:blip r:embed="rId3"/>
+          <a:stretch>
+            <a:fillRect/>
+          </a:stretch>
+        </p:blipFill>
+        <p:spPr>
+          <a:xfrm>
+            <a:off x="2046645" y="1325880"/>
+            <a:ext cx="8098404" cy="3778947"/>
+          </a:xfrm>
+          <a:prstGeom prst="rect">
+            <a:avLst/>
+          </a:prstGeom>
+        </p:spPr>
+      </p:pic>
+    </p:spTree>
+  </p:cSld>
+  <p:clrMapOvr>
+    <a:masterClrMapping/>
+  </p:clrMapOvr>
+</p:sld>
+</file>
+
+<file path=ppt/slides/slide7.xml><?xml version="1.0" encoding="utf-8"?>
+<p:sld xmlns:a="http://schemas.openxmlformats.org/drawingml/2006/main" xmlns:p="http://schemas.openxmlformats.org/presentationml/2006/main" xmlns:r="http://schemas.openxmlformats.org/officeDocument/2006/relationships">
+  <p:cSld>
+    <p:spTree>
+      <p:nvGrpSpPr>
+        <p:cNvPr id="1" name=""/>
+        <p:cNvGrpSpPr/>
+        <p:nvPr/>
+      </p:nvGrpSpPr>
+      <p:grpSpPr/>
+      <p:pic>
+        <p:nvPicPr>
+          <p:cNvPr id="2" name="Picture 1" descr="rteu_logo_kucuk.jpg"/>
+          <p:cNvPicPr>
+            <a:picLocks noChangeAspect="1"/>
+          </p:cNvPicPr>
+          <p:nvPr/>
+        </p:nvPicPr>
+        <p:blipFill>
+          <a:blip r:embed="rId2"/>
+          <a:stretch>
+            <a:fillRect/>
+          </a:stretch>
+        </p:blipFill>
+        <p:spPr>
+          <a:xfrm>
+            <a:off x="640080" y="164592"/>
+            <a:ext cx="242773" cy="329184"/>
+          </a:xfrm>
+          <a:prstGeom prst="rect">
+            <a:avLst/>
+          </a:prstGeom>
+        </p:spPr>
+      </p:pic>
+      <p:sp>
+        <p:nvSpPr>
+          <p:cNvPr id="3" name="TextBox 2"/>
+          <p:cNvSpPr txBox="1"/>
+          <p:nvPr/>
+        </p:nvSpPr>
+        <p:spPr>
+          <a:xfrm>
+            <a:off x="1051560" y="182880"/>
+            <a:ext cx="7315200" cy="320040"/>
+          </a:xfrm>
+          <a:prstGeom prst="rect">
+            <a:avLst/>
+          </a:prstGeom>
+          <a:noFill/>
+        </p:spPr>
+        <p:txBody>
+          <a:bodyPr wrap="square" lIns="45720" rIns="45720">
+            <a:spAutoFit/>
+          </a:bodyPr>
+          <a:lstStyle/>
+          <a:p>
+            <a:r>
+              <a:rPr sz="1100" b="0">
+                <a:solidFill>
+                  <a:srgbClr val="5B6770"/>
+                </a:solidFill>
+              </a:rPr>
+              <a:t>CEN429 Güvenli Programlama · Hafta 15</a:t>
+            </a:r>
+          </a:p>
+        </p:txBody>
+      </p:sp>
+      <p:sp>
+        <p:nvSpPr>
+          <p:cNvPr id="4" name="TextBox 3"/>
+          <p:cNvSpPr txBox="1"/>
+          <p:nvPr/>
+        </p:nvSpPr>
+        <p:spPr>
+          <a:xfrm>
+            <a:off x="640080" y="6446520"/>
+            <a:ext cx="7315200" cy="274320"/>
+          </a:xfrm>
+          <a:prstGeom prst="rect">
+            <a:avLst/>
+          </a:prstGeom>
+          <a:noFill/>
+        </p:spPr>
+        <p:txBody>
+          <a:bodyPr wrap="square" lIns="45720" rIns="45720">
+            <a:spAutoFit/>
+          </a:bodyPr>
+          <a:lstStyle/>
+          <a:p>
+            <a:r>
+              <a:rPr sz="1000" b="0">
+                <a:solidFill>
+                  <a:srgbClr val="5B6770"/>
+                </a:solidFill>
+              </a:rPr>
+              <a:t>RTEÜ Bilgisayar Mühendisliği · 2026-2027 Güz</a:t>
+            </a:r>
+          </a:p>
+        </p:txBody>
+      </p:sp>
+      <p:sp>
+        <p:nvSpPr>
+          <p:cNvPr id="5" name="TextBox 4"/>
+          <p:cNvSpPr txBox="1"/>
+          <p:nvPr/>
+        </p:nvSpPr>
+        <p:spPr>
+          <a:xfrm>
+            <a:off x="10637215" y="6446520"/>
+            <a:ext cx="914400" cy="274320"/>
+          </a:xfrm>
+          <a:prstGeom prst="rect">
+            <a:avLst/>
+          </a:prstGeom>
+          <a:noFill/>
+        </p:spPr>
+        <p:txBody>
+          <a:bodyPr wrap="square" lIns="45720" rIns="45720">
+            <a:spAutoFit/>
+          </a:bodyPr>
+          <a:lstStyle/>
+          <a:p>
+            <a:pPr algn="r"/>
+            <a:r>
+              <a:rPr sz="1000" b="0">
+                <a:solidFill>
+                  <a:srgbClr val="5B6770"/>
+                </a:solidFill>
+              </a:rPr>
+              <a:t>7</a:t>
             </a:r>
           </a:p>
         </p:txBody>
@@ -11908,703 +13646,6 @@
 </p:sld>
 </file>
 
-<file path=ppt/slides/slide6.xml><?xml version="1.0" encoding="utf-8"?>
-<p:sld xmlns:a="http://schemas.openxmlformats.org/drawingml/2006/main" xmlns:p="http://schemas.openxmlformats.org/presentationml/2006/main" xmlns:r="http://schemas.openxmlformats.org/officeDocument/2006/relationships">
-  <p:cSld>
-    <p:spTree>
-      <p:nvGrpSpPr>
-        <p:cNvPr id="1" name=""/>
-        <p:cNvGrpSpPr/>
-        <p:nvPr/>
-      </p:nvGrpSpPr>
-      <p:grpSpPr/>
-      <p:pic>
-        <p:nvPicPr>
-          <p:cNvPr id="2" name="Picture 1" descr="rteu_logo_kucuk.jpg"/>
-          <p:cNvPicPr>
-            <a:picLocks noChangeAspect="1"/>
-          </p:cNvPicPr>
-          <p:nvPr/>
-        </p:nvPicPr>
-        <p:blipFill>
-          <a:blip r:embed="rId2"/>
-          <a:stretch>
-            <a:fillRect/>
-          </a:stretch>
-        </p:blipFill>
-        <p:spPr>
-          <a:xfrm>
-            <a:off x="640080" y="164592"/>
-            <a:ext cx="242773" cy="329184"/>
-          </a:xfrm>
-          <a:prstGeom prst="rect">
-            <a:avLst/>
-          </a:prstGeom>
-        </p:spPr>
-      </p:pic>
-      <p:sp>
-        <p:nvSpPr>
-          <p:cNvPr id="3" name="TextBox 2"/>
-          <p:cNvSpPr txBox="1"/>
-          <p:nvPr/>
-        </p:nvSpPr>
-        <p:spPr>
-          <a:xfrm>
-            <a:off x="1051560" y="182880"/>
-            <a:ext cx="7315200" cy="320040"/>
-          </a:xfrm>
-          <a:prstGeom prst="rect">
-            <a:avLst/>
-          </a:prstGeom>
-          <a:noFill/>
-        </p:spPr>
-        <p:txBody>
-          <a:bodyPr wrap="square" lIns="45720" rIns="45720">
-            <a:spAutoFit/>
-          </a:bodyPr>
-          <a:lstStyle/>
-          <a:p>
-            <a:r>
-              <a:rPr sz="1100" b="0">
-                <a:solidFill>
-                  <a:srgbClr val="5B6770"/>
-                </a:solidFill>
-              </a:rPr>
-              <a:t>CEN429 Güvenli Programlama · Hafta 15</a:t>
-            </a:r>
-          </a:p>
-        </p:txBody>
-      </p:sp>
-      <p:sp>
-        <p:nvSpPr>
-          <p:cNvPr id="4" name="TextBox 3"/>
-          <p:cNvSpPr txBox="1"/>
-          <p:nvPr/>
-        </p:nvSpPr>
-        <p:spPr>
-          <a:xfrm>
-            <a:off x="640080" y="6446520"/>
-            <a:ext cx="7315200" cy="274320"/>
-          </a:xfrm>
-          <a:prstGeom prst="rect">
-            <a:avLst/>
-          </a:prstGeom>
-          <a:noFill/>
-        </p:spPr>
-        <p:txBody>
-          <a:bodyPr wrap="square" lIns="45720" rIns="45720">
-            <a:spAutoFit/>
-          </a:bodyPr>
-          <a:lstStyle/>
-          <a:p>
-            <a:r>
-              <a:rPr sz="1000" b="0">
-                <a:solidFill>
-                  <a:srgbClr val="5B6770"/>
-                </a:solidFill>
-              </a:rPr>
-              <a:t>RTEÜ Bilgisayar Mühendisliği · 2026-2027 Güz</a:t>
-            </a:r>
-          </a:p>
-        </p:txBody>
-      </p:sp>
-      <p:sp>
-        <p:nvSpPr>
-          <p:cNvPr id="5" name="TextBox 4"/>
-          <p:cNvSpPr txBox="1"/>
-          <p:nvPr/>
-        </p:nvSpPr>
-        <p:spPr>
-          <a:xfrm>
-            <a:off x="10637215" y="6446520"/>
-            <a:ext cx="914400" cy="274320"/>
-          </a:xfrm>
-          <a:prstGeom prst="rect">
-            <a:avLst/>
-          </a:prstGeom>
-          <a:noFill/>
-        </p:spPr>
-        <p:txBody>
-          <a:bodyPr wrap="square" lIns="45720" rIns="45720">
-            <a:spAutoFit/>
-          </a:bodyPr>
-          <a:lstStyle/>
-          <a:p>
-            <a:pPr algn="r"/>
-            <a:r>
-              <a:rPr sz="1000" b="0">
-                <a:solidFill>
-                  <a:srgbClr val="5B6770"/>
-                </a:solidFill>
-              </a:rPr>
-              <a:t>6</a:t>
-            </a:r>
-          </a:p>
-        </p:txBody>
-      </p:sp>
-      <p:sp>
-        <p:nvSpPr>
-          <p:cNvPr id="6" name="TextBox 5"/>
-          <p:cNvSpPr txBox="1"/>
-          <p:nvPr/>
-        </p:nvSpPr>
-        <p:spPr>
-          <a:xfrm>
-            <a:off x="640080" y="548640"/>
-            <a:ext cx="10911535" cy="731520"/>
-          </a:xfrm>
-          <a:prstGeom prst="rect">
-            <a:avLst/>
-          </a:prstGeom>
-          <a:noFill/>
-        </p:spPr>
-        <p:txBody>
-          <a:bodyPr wrap="square" lIns="45720" rIns="45720" anchor="ctr">
-            <a:spAutoFit/>
-          </a:bodyPr>
-          <a:lstStyle/>
-          <a:p>
-            <a:r>
-              <a:rPr sz="3000" b="1">
-                <a:solidFill>
-                  <a:srgbClr val="006D77"/>
-                </a:solidFill>
-              </a:rPr>
-              <a:t>Önerilen gösterim akışı</a:t>
-            </a:r>
-          </a:p>
-        </p:txBody>
-      </p:sp>
-      <p:sp>
-        <p:nvSpPr>
-          <p:cNvPr id="7" name="TextBox 6"/>
-          <p:cNvSpPr txBox="1"/>
-          <p:nvPr/>
-        </p:nvSpPr>
-        <p:spPr>
-          <a:xfrm>
-            <a:off x="640080" y="1325880"/>
-            <a:ext cx="10911535" cy="1971040"/>
-          </a:xfrm>
-          <a:prstGeom prst="rect">
-            <a:avLst/>
-          </a:prstGeom>
-          <a:noFill/>
-        </p:spPr>
-        <p:txBody>
-          <a:bodyPr wrap="square" lIns="45720" rIns="45720">
-            <a:spAutoFit/>
-          </a:bodyPr>
-          <a:lstStyle/>
-          <a:p>
-            <a:pPr>
-              <a:spcAft>
-                <a:spcPts val="300"/>
-              </a:spcAft>
-            </a:pPr>
-            <a:r>
-              <a:rPr sz="2000" b="1">
-                <a:solidFill>
-                  <a:srgbClr val="006D77"/>
-                </a:solidFill>
-              </a:rPr>
-              <a:t>1. </a:t>
-            </a:r>
-            <a:r>
-              <a:rPr sz="2000" b="1">
-                <a:solidFill>
-                  <a:srgbClr val="1F2D3A"/>
-                </a:solidFill>
-              </a:rPr>
-              <a:t>Özet:</a:t>
-            </a:r>
-            <a:r>
-              <a:rPr sz="2000" b="0">
-                <a:solidFill>
-                  <a:srgbClr val="1F2D3A"/>
-                </a:solidFill>
-              </a:rPr>
-              <a:t> ürün, mimari, en kritik üç varlık</a:t>
-            </a:r>
-          </a:p>
-          <a:p>
-            <a:pPr>
-              <a:spcAft>
-                <a:spcPts val="300"/>
-              </a:spcAft>
-            </a:pPr>
-            <a:r>
-              <a:rPr sz="2000" b="1">
-                <a:solidFill>
-                  <a:srgbClr val="006D77"/>
-                </a:solidFill>
-              </a:rPr>
-              <a:t>2. </a:t>
-            </a:r>
-            <a:r>
-              <a:rPr sz="2000" b="1">
-                <a:solidFill>
-                  <a:srgbClr val="1F2D3A"/>
-                </a:solidFill>
-              </a:rPr>
-              <a:t>Vizeden bu yana:</a:t>
-            </a:r>
-            <a:r>
-              <a:rPr sz="2000" b="0">
-                <a:solidFill>
-                  <a:srgbClr val="1F2D3A"/>
-                </a:solidFill>
-              </a:rPr>
-              <a:t> bulgu–aksiyon listesi</a:t>
-            </a:r>
-          </a:p>
-          <a:p>
-            <a:pPr>
-              <a:spcAft>
-                <a:spcPts val="300"/>
-              </a:spcAft>
-            </a:pPr>
-            <a:r>
-              <a:rPr sz="2000" b="1">
-                <a:solidFill>
-                  <a:srgbClr val="006D77"/>
-                </a:solidFill>
-              </a:rPr>
-              <a:t>3. </a:t>
-            </a:r>
-            <a:r>
-              <a:rPr sz="2000" b="1">
-                <a:solidFill>
-                  <a:srgbClr val="1F2D3A"/>
-                </a:solidFill>
-              </a:rPr>
-              <a:t>Canlı gösterim:</a:t>
-            </a:r>
-            <a:r>
-              <a:rPr sz="2000" b="0">
-                <a:solidFill>
-                  <a:srgbClr val="1F2D3A"/>
-                </a:solidFill>
-              </a:rPr>
-              <a:t> kripto, güvenli iletişim, bir koruma katmanı </a:t>
-            </a:r>
-            <a:r>
-              <a:rPr sz="2000" b="1">
-                <a:solidFill>
-                  <a:srgbClr val="1F2D3A"/>
-                </a:solidFill>
-              </a:rPr>
-              <a:t>çalışırken</a:t>
-            </a:r>
-          </a:p>
-          <a:p>
-            <a:pPr>
-              <a:spcAft>
-                <a:spcPts val="300"/>
-              </a:spcAft>
-            </a:pPr>
-            <a:r>
-              <a:rPr sz="2000" b="1">
-                <a:solidFill>
-                  <a:srgbClr val="006D77"/>
-                </a:solidFill>
-              </a:rPr>
-              <a:t>4. </a:t>
-            </a:r>
-            <a:r>
-              <a:rPr sz="2000" b="1">
-                <a:solidFill>
-                  <a:srgbClr val="1F2D3A"/>
-                </a:solidFill>
-              </a:rPr>
-              <a:t>Kanıt:</a:t>
-            </a:r>
-            <a:r>
-              <a:rPr sz="2000" b="0">
-                <a:solidFill>
-                  <a:srgbClr val="1F2D3A"/>
-                </a:solidFill>
-              </a:rPr>
-              <a:t> testler, koruma tablosu, SBOM, uyum matrisi</a:t>
-            </a:r>
-          </a:p>
-          <a:p>
-            <a:pPr>
-              <a:spcAft>
-                <a:spcPts val="300"/>
-              </a:spcAft>
-            </a:pPr>
-            <a:r>
-              <a:rPr sz="2000" b="1">
-                <a:solidFill>
-                  <a:srgbClr val="006D77"/>
-                </a:solidFill>
-              </a:rPr>
-              <a:t>5. </a:t>
-            </a:r>
-            <a:r>
-              <a:rPr sz="2000" b="1">
-                <a:solidFill>
-                  <a:srgbClr val="1F2D3A"/>
-                </a:solidFill>
-              </a:rPr>
-              <a:t>Kalan risk:</a:t>
-            </a:r>
-            <a:r>
-              <a:rPr sz="2000" b="0">
-                <a:solidFill>
-                  <a:srgbClr val="1F2D3A"/>
-                </a:solidFill>
-              </a:rPr>
-              <a:t> bilerek kapsam dışı olanlar ve nedenleri</a:t>
-            </a:r>
-          </a:p>
-        </p:txBody>
-      </p:sp>
-    </p:spTree>
-  </p:cSld>
-  <p:clrMapOvr>
-    <a:masterClrMapping/>
-  </p:clrMapOvr>
-</p:sld>
-</file>
-
-<file path=ppt/slides/slide7.xml><?xml version="1.0" encoding="utf-8"?>
-<p:sld xmlns:a="http://schemas.openxmlformats.org/drawingml/2006/main" xmlns:p="http://schemas.openxmlformats.org/presentationml/2006/main" xmlns:r="http://schemas.openxmlformats.org/officeDocument/2006/relationships">
-  <p:cSld>
-    <p:spTree>
-      <p:nvGrpSpPr>
-        <p:cNvPr id="1" name=""/>
-        <p:cNvGrpSpPr/>
-        <p:nvPr/>
-      </p:nvGrpSpPr>
-      <p:grpSpPr/>
-      <p:pic>
-        <p:nvPicPr>
-          <p:cNvPr id="2" name="Picture 1" descr="rteu_logo_kucuk.jpg"/>
-          <p:cNvPicPr>
-            <a:picLocks noChangeAspect="1"/>
-          </p:cNvPicPr>
-          <p:nvPr/>
-        </p:nvPicPr>
-        <p:blipFill>
-          <a:blip r:embed="rId2"/>
-          <a:stretch>
-            <a:fillRect/>
-          </a:stretch>
-        </p:blipFill>
-        <p:spPr>
-          <a:xfrm>
-            <a:off x="640080" y="164592"/>
-            <a:ext cx="242773" cy="329184"/>
-          </a:xfrm>
-          <a:prstGeom prst="rect">
-            <a:avLst/>
-          </a:prstGeom>
-        </p:spPr>
-      </p:pic>
-      <p:sp>
-        <p:nvSpPr>
-          <p:cNvPr id="3" name="TextBox 2"/>
-          <p:cNvSpPr txBox="1"/>
-          <p:nvPr/>
-        </p:nvSpPr>
-        <p:spPr>
-          <a:xfrm>
-            <a:off x="1051560" y="182880"/>
-            <a:ext cx="7315200" cy="320040"/>
-          </a:xfrm>
-          <a:prstGeom prst="rect">
-            <a:avLst/>
-          </a:prstGeom>
-          <a:noFill/>
-        </p:spPr>
-        <p:txBody>
-          <a:bodyPr wrap="square" lIns="45720" rIns="45720">
-            <a:spAutoFit/>
-          </a:bodyPr>
-          <a:lstStyle/>
-          <a:p>
-            <a:r>
-              <a:rPr sz="1100" b="0">
-                <a:solidFill>
-                  <a:srgbClr val="5B6770"/>
-                </a:solidFill>
-              </a:rPr>
-              <a:t>CEN429 Güvenli Programlama · Hafta 15</a:t>
-            </a:r>
-          </a:p>
-        </p:txBody>
-      </p:sp>
-      <p:sp>
-        <p:nvSpPr>
-          <p:cNvPr id="4" name="TextBox 3"/>
-          <p:cNvSpPr txBox="1"/>
-          <p:nvPr/>
-        </p:nvSpPr>
-        <p:spPr>
-          <a:xfrm>
-            <a:off x="640080" y="6446520"/>
-            <a:ext cx="7315200" cy="274320"/>
-          </a:xfrm>
-          <a:prstGeom prst="rect">
-            <a:avLst/>
-          </a:prstGeom>
-          <a:noFill/>
-        </p:spPr>
-        <p:txBody>
-          <a:bodyPr wrap="square" lIns="45720" rIns="45720">
-            <a:spAutoFit/>
-          </a:bodyPr>
-          <a:lstStyle/>
-          <a:p>
-            <a:r>
-              <a:rPr sz="1000" b="0">
-                <a:solidFill>
-                  <a:srgbClr val="5B6770"/>
-                </a:solidFill>
-              </a:rPr>
-              <a:t>RTEÜ Bilgisayar Mühendisliği · 2026-2027 Güz</a:t>
-            </a:r>
-          </a:p>
-        </p:txBody>
-      </p:sp>
-      <p:sp>
-        <p:nvSpPr>
-          <p:cNvPr id="5" name="TextBox 4"/>
-          <p:cNvSpPr txBox="1"/>
-          <p:nvPr/>
-        </p:nvSpPr>
-        <p:spPr>
-          <a:xfrm>
-            <a:off x="10637215" y="6446520"/>
-            <a:ext cx="914400" cy="274320"/>
-          </a:xfrm>
-          <a:prstGeom prst="rect">
-            <a:avLst/>
-          </a:prstGeom>
-          <a:noFill/>
-        </p:spPr>
-        <p:txBody>
-          <a:bodyPr wrap="square" lIns="45720" rIns="45720">
-            <a:spAutoFit/>
-          </a:bodyPr>
-          <a:lstStyle/>
-          <a:p>
-            <a:pPr algn="r"/>
-            <a:r>
-              <a:rPr sz="1000" b="0">
-                <a:solidFill>
-                  <a:srgbClr val="5B6770"/>
-                </a:solidFill>
-              </a:rPr>
-              <a:t>7</a:t>
-            </a:r>
-          </a:p>
-        </p:txBody>
-      </p:sp>
-      <p:sp>
-        <p:nvSpPr>
-          <p:cNvPr id="6" name="TextBox 5"/>
-          <p:cNvSpPr txBox="1"/>
-          <p:nvPr/>
-        </p:nvSpPr>
-        <p:spPr>
-          <a:xfrm>
-            <a:off x="640080" y="548640"/>
-            <a:ext cx="10911535" cy="731520"/>
-          </a:xfrm>
-          <a:prstGeom prst="rect">
-            <a:avLst/>
-          </a:prstGeom>
-          <a:noFill/>
-        </p:spPr>
-        <p:txBody>
-          <a:bodyPr wrap="square" lIns="45720" rIns="45720" anchor="ctr">
-            <a:spAutoFit/>
-          </a:bodyPr>
-          <a:lstStyle/>
-          <a:p>
-            <a:r>
-              <a:rPr sz="3000" b="1">
-                <a:solidFill>
-                  <a:srgbClr val="006D77"/>
-                </a:solidFill>
-              </a:rPr>
-              <a:t>Örnek sorular</a:t>
-            </a:r>
-          </a:p>
-        </p:txBody>
-      </p:sp>
-      <p:sp>
-        <p:nvSpPr>
-          <p:cNvPr id="7" name="TextBox 6"/>
-          <p:cNvSpPr txBox="1"/>
-          <p:nvPr/>
-        </p:nvSpPr>
-        <p:spPr>
-          <a:xfrm>
-            <a:off x="640080" y="1325880"/>
-            <a:ext cx="10911535" cy="2346960"/>
-          </a:xfrm>
-          <a:prstGeom prst="rect">
-            <a:avLst/>
-          </a:prstGeom>
-          <a:noFill/>
-        </p:spPr>
-        <p:txBody>
-          <a:bodyPr wrap="square" lIns="45720" rIns="45720">
-            <a:spAutoFit/>
-          </a:bodyPr>
-          <a:lstStyle/>
-          <a:p>
-            <a:pPr>
-              <a:spcAft>
-                <a:spcPts val="300"/>
-              </a:spcAft>
-            </a:pPr>
-            <a:r>
-              <a:rPr sz="2000" b="1">
-                <a:solidFill>
-                  <a:srgbClr val="006D77"/>
-                </a:solidFill>
-              </a:rPr>
-              <a:t>• </a:t>
-            </a:r>
-            <a:r>
-              <a:rPr sz="2000" b="0">
-                <a:solidFill>
-                  <a:srgbClr val="1F2D3A"/>
-                </a:solidFill>
-              </a:rPr>
-              <a:t>Bu anahtar nereden türetiliyor, nerede duruyor, ne zaman siliniyor?</a:t>
-            </a:r>
-          </a:p>
-          <a:p>
-            <a:pPr>
-              <a:spcAft>
-                <a:spcPts val="300"/>
-              </a:spcAft>
-            </a:pPr>
-            <a:r>
-              <a:rPr sz="2000" b="1">
-                <a:solidFill>
-                  <a:srgbClr val="006D77"/>
-                </a:solidFill>
-              </a:rPr>
-              <a:t>• </a:t>
-            </a:r>
-            <a:r>
-              <a:rPr sz="2000" b="0">
-                <a:solidFill>
-                  <a:srgbClr val="1F2D3A"/>
-                </a:solidFill>
-              </a:rPr>
-              <a:t>Zincir ve ad doğrulaması nerede?</a:t>
-            </a:r>
-          </a:p>
-          <a:p>
-            <a:pPr>
-              <a:spcAft>
-                <a:spcPts val="300"/>
-              </a:spcAft>
-            </a:pPr>
-            <a:r>
-              <a:rPr sz="2000" b="1">
-                <a:solidFill>
-                  <a:srgbClr val="006D77"/>
-                </a:solidFill>
-              </a:rPr>
-              <a:t>• </a:t>
-            </a:r>
-            <a:r>
-              <a:rPr sz="2000" b="0">
-                <a:solidFill>
-                  <a:srgbClr val="1F2D3A"/>
-                </a:solidFill>
-              </a:rPr>
-              <a:t>İmza doğrulaması başarısızsa ne oluyor? Eski imzalı sürüm yüklenebilir mi?</a:t>
-            </a:r>
-          </a:p>
-          <a:p>
-            <a:pPr>
-              <a:spcAft>
-                <a:spcPts val="300"/>
-              </a:spcAft>
-            </a:pPr>
-            <a:r>
-              <a:rPr sz="2000" b="1">
-                <a:solidFill>
-                  <a:srgbClr val="006D77"/>
-                </a:solidFill>
-              </a:rPr>
-              <a:t>• </a:t>
-            </a:r>
-            <a:r>
-              <a:rPr sz="2000" b="0">
-                <a:solidFill>
-                  <a:srgbClr val="1F2D3A"/>
-                </a:solidFill>
-              </a:rPr>
-              <a:t>Gizlemenin maliyetini ölçtünüz mü?</a:t>
-            </a:r>
-          </a:p>
-          <a:p>
-            <a:pPr>
-              <a:spcAft>
-                <a:spcPts val="300"/>
-              </a:spcAft>
-            </a:pPr>
-            <a:r>
-              <a:rPr sz="2000" b="1">
-                <a:solidFill>
-                  <a:srgbClr val="006D77"/>
-                </a:solidFill>
-              </a:rPr>
-              <a:t>• </a:t>
-            </a:r>
-            <a:r>
-              <a:rPr sz="2000" b="0">
-                <a:solidFill>
-                  <a:srgbClr val="1F2D3A"/>
-                </a:solidFill>
-              </a:rPr>
-              <a:t>Şu "karşılandı" satırının kanıtı nerede?</a:t>
-            </a:r>
-          </a:p>
-          <a:p>
-            <a:pPr>
-              <a:spcAft>
-                <a:spcPts val="300"/>
-              </a:spcAft>
-            </a:pPr>
-            <a:r>
-              <a:rPr sz="2000" b="1">
-                <a:solidFill>
-                  <a:srgbClr val="006D77"/>
-                </a:solidFill>
-              </a:rPr>
-              <a:t>• </a:t>
-            </a:r>
-            <a:r>
-              <a:rPr sz="2000" b="0">
-                <a:solidFill>
-                  <a:srgbClr val="1F2D3A"/>
-                </a:solidFill>
-              </a:rPr>
-              <a:t>Hangi gereksinimi devrettiniz, karşı taraf nasıl karşılayacak?</a:t>
-            </a:r>
-          </a:p>
-        </p:txBody>
-      </p:sp>
-    </p:spTree>
-  </p:cSld>
-  <p:clrMapOvr>
-    <a:masterClrMapping/>
-  </p:clrMapOvr>
-</p:sld>
-</file>
-
 <file path=ppt/slides/slide8.xml><?xml version="1.0" encoding="utf-8"?>
 <p:sld xmlns:a="http://schemas.openxmlformats.org/drawingml/2006/main" xmlns:p="http://schemas.openxmlformats.org/presentationml/2006/main" xmlns:r="http://schemas.openxmlformats.org/officeDocument/2006/relationships">
   <p:cSld>
@@ -12762,382 +13803,202 @@
           <a:lstStyle/>
           <a:p>
             <a:r>
-              <a:rPr sz="2600" b="1">
+              <a:rPr sz="3000" b="1">
                 <a:solidFill>
                   <a:srgbClr val="006D77"/>
                 </a:solidFill>
               </a:rPr>
-              <a:t>Sık yapılan hatalar</a:t>
-            </a:r>
-          </a:p>
-        </p:txBody>
-      </p:sp>
-      <p:graphicFrame>
-        <p:nvGraphicFramePr>
-          <p:cNvPr id="7" name="Table 6"/>
-          <p:cNvGraphicFramePr>
-            <a:graphicFrameLocks noGrp="1"/>
-          </p:cNvGraphicFramePr>
-          <p:nvPr/>
-        </p:nvGraphicFramePr>
-        <p:xfrm>
-          <a:off x="640080" y="1325880"/>
-          <a:ext cx="10911534" cy="2403043"/>
-        </p:xfrm>
-        <a:graphic>
-          <a:graphicData uri="http://schemas.openxmlformats.org/drawingml/2006/table">
-            <a:tbl>
-              <a:tblPr firstRow="1" bandRow="1">
-                <a:tableStyleId>{5C22544A-7EE6-4342-B048-85BDC9FD1C3A}</a:tableStyleId>
-              </a:tblPr>
-              <a:tblGrid>
-                <a:gridCol w="5101496"/>
-                <a:gridCol w="5810038"/>
-              </a:tblGrid>
-              <a:tr h="343291">
-                <a:tc>
-                  <a:txBody>
-                    <a:bodyPr wrap="square"/>
-                    <a:lstStyle/>
-                    <a:p>
-                      <a:r>
-                        <a:rPr sz="1296" b="1">
-                          <a:solidFill>
-                            <a:srgbClr val="FFFFFF"/>
-                          </a:solidFill>
-                        </a:rPr>
-                        <a:t>Hata</a:t>
-                      </a:r>
-                    </a:p>
-                  </a:txBody>
-                  <a:tcPr marL="54864" marR="54864" marT="27432" marB="27432" anchor="ctr">
-                    <a:solidFill>
-                      <a:srgbClr val="006D77"/>
-                    </a:solidFill>
-                  </a:tcPr>
-                </a:tc>
-                <a:tc>
-                  <a:txBody>
-                    <a:bodyPr wrap="square"/>
-                    <a:lstStyle/>
-                    <a:p>
-                      <a:r>
-                        <a:rPr sz="1296" b="1">
-                          <a:solidFill>
-                            <a:srgbClr val="FFFFFF"/>
-                          </a:solidFill>
-                        </a:rPr>
-                        <a:t>Neden sorun?</a:t>
-                      </a:r>
-                    </a:p>
-                  </a:txBody>
-                  <a:tcPr marL="54864" marR="54864" marT="27432" marB="27432" anchor="ctr">
-                    <a:solidFill>
-                      <a:srgbClr val="006D77"/>
-                    </a:solidFill>
-                  </a:tcPr>
-                </a:tc>
-              </a:tr>
-              <a:tr h="343291">
-                <a:tc>
-                  <a:txBody>
-                    <a:bodyPr wrap="square"/>
-                    <a:lstStyle/>
-                    <a:p>
-                      <a:r>
-                        <a:rPr sz="1296" b="0">
-                          <a:solidFill>
-                            <a:srgbClr val="1F2D3A"/>
-                          </a:solidFill>
-                        </a:rPr>
-                        <a:t>Test planı var, sonuç yok</a:t>
-                      </a:r>
-                    </a:p>
-                  </a:txBody>
-                  <a:tcPr marL="54864" marR="54864" marT="27432" marB="27432" anchor="ctr">
-                    <a:solidFill>
-                      <a:srgbClr val="FFFFFF"/>
-                    </a:solidFill>
-                  </a:tcPr>
-                </a:tc>
-                <a:tc>
-                  <a:txBody>
-                    <a:bodyPr wrap="square"/>
-                    <a:lstStyle/>
-                    <a:p>
-                      <a:r>
-                        <a:rPr sz="1296" b="0">
-                          <a:solidFill>
-                            <a:srgbClr val="1F2D3A"/>
-                          </a:solidFill>
-                        </a:rPr>
-                        <a:t>Finalde </a:t>
-                      </a:r>
-                      <a:r>
-                        <a:rPr sz="1296" b="1">
-                          <a:solidFill>
-                            <a:srgbClr val="1F2D3A"/>
-                          </a:solidFill>
-                        </a:rPr>
-                        <a:t>sonuç</a:t>
-                      </a:r>
-                      <a:r>
-                        <a:rPr sz="1296" b="0">
-                          <a:solidFill>
-                            <a:srgbClr val="1F2D3A"/>
-                          </a:solidFill>
-                        </a:rPr>
-                        <a:t> beklenir</a:t>
-                      </a:r>
-                    </a:p>
-                  </a:txBody>
-                  <a:tcPr marL="54864" marR="54864" marT="27432" marB="27432" anchor="ctr">
-                    <a:solidFill>
-                      <a:srgbClr val="FFFFFF"/>
-                    </a:solidFill>
-                  </a:tcPr>
-                </a:tc>
-              </a:tr>
-              <a:tr h="343291">
-                <a:tc>
-                  <a:txBody>
-                    <a:bodyPr wrap="square"/>
-                    <a:lstStyle/>
-                    <a:p>
-                      <a:r>
-                        <a:rPr sz="1296" b="0">
-                          <a:solidFill>
-                            <a:srgbClr val="1F2D3A"/>
-                          </a:solidFill>
-                        </a:rPr>
-                        <a:t>Kanıtsız "karşılandı"</a:t>
-                      </a:r>
-                    </a:p>
-                  </a:txBody>
-                  <a:tcPr marL="54864" marR="54864" marT="27432" marB="27432" anchor="ctr">
-                    <a:solidFill>
-                      <a:srgbClr val="EEF7F8"/>
-                    </a:solidFill>
-                  </a:tcPr>
-                </a:tc>
-                <a:tc>
-                  <a:txBody>
-                    <a:bodyPr wrap="square"/>
-                    <a:lstStyle/>
-                    <a:p>
-                      <a:r>
-                        <a:rPr sz="1296" b="0">
-                          <a:solidFill>
-                            <a:srgbClr val="1F2D3A"/>
-                          </a:solidFill>
-                        </a:rPr>
-                        <a:t>Karşılanmamış sayılır</a:t>
-                      </a:r>
-                    </a:p>
-                  </a:txBody>
-                  <a:tcPr marL="54864" marR="54864" marT="27432" marB="27432" anchor="ctr">
-                    <a:solidFill>
-                      <a:srgbClr val="EEF7F8"/>
-                    </a:solidFill>
-                  </a:tcPr>
-                </a:tc>
-              </a:tr>
-              <a:tr h="343291">
-                <a:tc>
-                  <a:txBody>
-                    <a:bodyPr wrap="square"/>
-                    <a:lstStyle/>
-                    <a:p>
-                      <a:r>
-                        <a:rPr sz="1296" b="0">
-                          <a:solidFill>
-                            <a:srgbClr val="1F2D3A"/>
-                          </a:solidFill>
-                        </a:rPr>
-                        <a:t>Kılavuz ile kod sürümü farklı</a:t>
-                      </a:r>
-                    </a:p>
-                  </a:txBody>
-                  <a:tcPr marL="54864" marR="54864" marT="27432" marB="27432" anchor="ctr">
-                    <a:solidFill>
-                      <a:srgbClr val="FFFFFF"/>
-                    </a:solidFill>
-                  </a:tcPr>
-                </a:tc>
-                <a:tc>
-                  <a:txBody>
-                    <a:bodyPr wrap="square"/>
-                    <a:lstStyle/>
-                    <a:p>
-                      <a:r>
-                        <a:rPr sz="1296" b="0">
-                          <a:solidFill>
-                            <a:srgbClr val="1F2D3A"/>
-                          </a:solidFill>
-                        </a:rPr>
-                        <a:t>Değerlendirilen ürün belirsiz</a:t>
-                      </a:r>
-                    </a:p>
-                  </a:txBody>
-                  <a:tcPr marL="54864" marR="54864" marT="27432" marB="27432" anchor="ctr">
-                    <a:solidFill>
-                      <a:srgbClr val="FFFFFF"/>
-                    </a:solidFill>
-                  </a:tcPr>
-                </a:tc>
-              </a:tr>
-              <a:tr h="343291">
-                <a:tc>
-                  <a:txBody>
-                    <a:bodyPr wrap="square"/>
-                    <a:lstStyle/>
-                    <a:p>
-                      <a:r>
-                        <a:rPr sz="1296" b="0">
-                          <a:solidFill>
-                            <a:srgbClr val="1F2D3A"/>
-                          </a:solidFill>
-                        </a:rPr>
-                        <a:t>Boş kalan risk bölümü</a:t>
-                      </a:r>
-                    </a:p>
-                  </a:txBody>
-                  <a:tcPr marL="54864" marR="54864" marT="27432" marB="27432" anchor="ctr">
-                    <a:solidFill>
-                      <a:srgbClr val="EEF7F8"/>
-                    </a:solidFill>
-                  </a:tcPr>
-                </a:tc>
-                <a:tc>
-                  <a:txBody>
-                    <a:bodyPr wrap="square"/>
-                    <a:lstStyle/>
-                    <a:p>
-                      <a:r>
-                        <a:rPr sz="1296" b="0">
-                          <a:solidFill>
-                            <a:srgbClr val="1F2D3A"/>
-                          </a:solidFill>
-                        </a:rPr>
-                        <a:t>Eksik analiz</a:t>
-                      </a:r>
-                    </a:p>
-                  </a:txBody>
-                  <a:tcPr marL="54864" marR="54864" marT="27432" marB="27432" anchor="ctr">
-                    <a:solidFill>
-                      <a:srgbClr val="EEF7F8"/>
-                    </a:solidFill>
-                  </a:tcPr>
-                </a:tc>
-              </a:tr>
-              <a:tr h="343291">
-                <a:tc>
-                  <a:txBody>
-                    <a:bodyPr wrap="square"/>
-                    <a:lstStyle/>
-                    <a:p>
-                      <a:r>
-                        <a:rPr sz="1296" b="0">
-                          <a:solidFill>
-                            <a:srgbClr val="1F2D3A"/>
-                          </a:solidFill>
-                        </a:rPr>
-                        <a:t>Vize geri bildirimi yok sayılmış</a:t>
-                      </a:r>
-                    </a:p>
-                  </a:txBody>
-                  <a:tcPr marL="54864" marR="54864" marT="27432" marB="27432" anchor="ctr">
-                    <a:solidFill>
-                      <a:srgbClr val="FFFFFF"/>
-                    </a:solidFill>
-                  </a:tcPr>
-                </a:tc>
-                <a:tc>
-                  <a:txBody>
-                    <a:bodyPr wrap="square"/>
-                    <a:lstStyle/>
-                    <a:p>
-                      <a:r>
-                        <a:rPr sz="1296" b="0">
-                          <a:solidFill>
-                            <a:srgbClr val="1F2D3A"/>
-                          </a:solidFill>
-                        </a:rPr>
-                        <a:t>Bulgu–aksiyon döngüsü sürecin parçası</a:t>
-                      </a:r>
-                    </a:p>
-                  </a:txBody>
-                  <a:tcPr marL="54864" marR="54864" marT="27432" marB="27432" anchor="ctr">
-                    <a:solidFill>
-                      <a:srgbClr val="FFFFFF"/>
-                    </a:solidFill>
-                  </a:tcPr>
-                </a:tc>
-              </a:tr>
-              <a:tr h="343297">
-                <a:tc>
-                  <a:txBody>
-                    <a:bodyPr wrap="square"/>
-                    <a:lstStyle/>
-                    <a:p>
-                      <a:r>
-                        <a:rPr sz="1296" b="0">
-                          <a:solidFill>
-                            <a:srgbClr val="1F2D3A"/>
-                          </a:solidFill>
-                        </a:rPr>
-                        <a:t>Depoda gerçek sır / kişisel veri</a:t>
-                      </a:r>
-                    </a:p>
-                  </a:txBody>
-                  <a:tcPr marL="54864" marR="54864" marT="27432" marB="27432" anchor="ctr">
-                    <a:solidFill>
-                      <a:srgbClr val="EEF7F8"/>
-                    </a:solidFill>
-                  </a:tcPr>
-                </a:tc>
-                <a:tc>
-                  <a:txBody>
-                    <a:bodyPr wrap="square"/>
-                    <a:lstStyle/>
-                    <a:p>
-                      <a:r>
-                        <a:rPr sz="1296" b="0">
-                          <a:solidFill>
-                            <a:srgbClr val="1F2D3A"/>
-                          </a:solidFill>
-                        </a:rPr>
-                        <a:t>Değerler </a:t>
-                      </a:r>
-                      <a:r>
-                        <a:rPr sz="1296" b="1">
-                          <a:solidFill>
-                            <a:srgbClr val="1F2D3A"/>
-                          </a:solidFill>
-                        </a:rPr>
-                        <a:t>sentetik</a:t>
-                      </a:r>
-                      <a:r>
-                        <a:rPr sz="1296" b="0">
-                          <a:solidFill>
-                            <a:srgbClr val="1F2D3A"/>
-                          </a:solidFill>
-                        </a:rPr>
-                        <a:t> olmalı</a:t>
-                      </a:r>
-                    </a:p>
-                  </a:txBody>
-                  <a:tcPr marL="54864" marR="54864" marT="27432" marB="27432" anchor="ctr">
-                    <a:solidFill>
-                      <a:srgbClr val="EEF7F8"/>
-                    </a:solidFill>
-                  </a:tcPr>
-                </a:tc>
-              </a:tr>
-            </a:tbl>
-          </a:graphicData>
-        </a:graphic>
-      </p:graphicFrame>
+              <a:t>Önerilen gösterim akışı</a:t>
+            </a:r>
+          </a:p>
+        </p:txBody>
+      </p:sp>
+      <p:sp>
+        <p:nvSpPr>
+          <p:cNvPr id="7" name="TextBox 6"/>
+          <p:cNvSpPr txBox="1"/>
+          <p:nvPr/>
+        </p:nvSpPr>
+        <p:spPr>
+          <a:xfrm>
+            <a:off x="640080" y="1325880"/>
+            <a:ext cx="10911535" cy="1971040"/>
+          </a:xfrm>
+          <a:prstGeom prst="rect">
+            <a:avLst/>
+          </a:prstGeom>
+          <a:noFill/>
+        </p:spPr>
+        <p:txBody>
+          <a:bodyPr wrap="square" lIns="45720" rIns="45720">
+            <a:spAutoFit/>
+          </a:bodyPr>
+          <a:lstStyle/>
+          <a:p>
+            <a:pPr>
+              <a:spcAft>
+                <a:spcPts val="300"/>
+              </a:spcAft>
+            </a:pPr>
+            <a:r>
+              <a:rPr sz="2000" b="1">
+                <a:solidFill>
+                  <a:srgbClr val="006D77"/>
+                </a:solidFill>
+              </a:rPr>
+              <a:t>1. </a:t>
+            </a:r>
+            <a:r>
+              <a:rPr sz="2000" b="1">
+                <a:solidFill>
+                  <a:srgbClr val="1F2D3A"/>
+                </a:solidFill>
+              </a:rPr>
+              <a:t>Özet:</a:t>
+            </a:r>
+            <a:r>
+              <a:rPr sz="2000" b="0">
+                <a:solidFill>
+                  <a:srgbClr val="1F2D3A"/>
+                </a:solidFill>
+              </a:rPr>
+              <a:t> ürün, mimari, en kritik üç varlık</a:t>
+            </a:r>
+          </a:p>
+          <a:p>
+            <a:pPr>
+              <a:spcAft>
+                <a:spcPts val="300"/>
+              </a:spcAft>
+            </a:pPr>
+            <a:r>
+              <a:rPr sz="2000" b="1">
+                <a:solidFill>
+                  <a:srgbClr val="006D77"/>
+                </a:solidFill>
+              </a:rPr>
+              <a:t>2. </a:t>
+            </a:r>
+            <a:r>
+              <a:rPr sz="2000" b="1">
+                <a:solidFill>
+                  <a:srgbClr val="1F2D3A"/>
+                </a:solidFill>
+              </a:rPr>
+              <a:t>Vizeden bu yana:</a:t>
+            </a:r>
+            <a:r>
+              <a:rPr sz="2000" b="0">
+                <a:solidFill>
+                  <a:srgbClr val="1F2D3A"/>
+                </a:solidFill>
+              </a:rPr>
+              <a:t> bulgu–aksiyon listesi</a:t>
+            </a:r>
+          </a:p>
+          <a:p>
+            <a:pPr>
+              <a:spcAft>
+                <a:spcPts val="300"/>
+              </a:spcAft>
+            </a:pPr>
+            <a:r>
+              <a:rPr sz="2000" b="1">
+                <a:solidFill>
+                  <a:srgbClr val="006D77"/>
+                </a:solidFill>
+              </a:rPr>
+              <a:t>3. </a:t>
+            </a:r>
+            <a:r>
+              <a:rPr sz="2000" b="1">
+                <a:solidFill>
+                  <a:srgbClr val="1F2D3A"/>
+                </a:solidFill>
+              </a:rPr>
+              <a:t>Canlı gösterim:</a:t>
+            </a:r>
+            <a:r>
+              <a:rPr sz="2000" b="0">
+                <a:solidFill>
+                  <a:srgbClr val="1F2D3A"/>
+                </a:solidFill>
+              </a:rPr>
+              <a:t> kripto, güvenli iletişim, bir koruma katmanı </a:t>
+            </a:r>
+            <a:r>
+              <a:rPr sz="2000" b="1">
+                <a:solidFill>
+                  <a:srgbClr val="1F2D3A"/>
+                </a:solidFill>
+              </a:rPr>
+              <a:t>çalışırken</a:t>
+            </a:r>
+          </a:p>
+          <a:p>
+            <a:pPr>
+              <a:spcAft>
+                <a:spcPts val="300"/>
+              </a:spcAft>
+            </a:pPr>
+            <a:r>
+              <a:rPr sz="2000" b="1">
+                <a:solidFill>
+                  <a:srgbClr val="006D77"/>
+                </a:solidFill>
+              </a:rPr>
+              <a:t>4. </a:t>
+            </a:r>
+            <a:r>
+              <a:rPr sz="2000" b="1">
+                <a:solidFill>
+                  <a:srgbClr val="1F2D3A"/>
+                </a:solidFill>
+              </a:rPr>
+              <a:t>Kanıt:</a:t>
+            </a:r>
+            <a:r>
+              <a:rPr sz="2000" b="0">
+                <a:solidFill>
+                  <a:srgbClr val="1F2D3A"/>
+                </a:solidFill>
+              </a:rPr>
+              <a:t> testler, koruma tablosu, SBOM, uyum matrisi</a:t>
+            </a:r>
+          </a:p>
+          <a:p>
+            <a:pPr>
+              <a:spcAft>
+                <a:spcPts val="300"/>
+              </a:spcAft>
+            </a:pPr>
+            <a:r>
+              <a:rPr sz="2000" b="1">
+                <a:solidFill>
+                  <a:srgbClr val="006D77"/>
+                </a:solidFill>
+              </a:rPr>
+              <a:t>5. </a:t>
+            </a:r>
+            <a:r>
+              <a:rPr sz="2000" b="1">
+                <a:solidFill>
+                  <a:srgbClr val="1F2D3A"/>
+                </a:solidFill>
+              </a:rPr>
+              <a:t>Kalan risk:</a:t>
+            </a:r>
+            <a:r>
+              <a:rPr sz="2000" b="0">
+                <a:solidFill>
+                  <a:srgbClr val="1F2D3A"/>
+                </a:solidFill>
+              </a:rPr>
+              <a:t> bilerek kapsam dışı olanlar ve nedenleri</a:t>
+            </a:r>
+          </a:p>
+        </p:txBody>
+      </p:sp>
     </p:spTree>
   </p:cSld>
   <p:clrMapOvr>
@@ -13308,96 +14169,35 @@
                   <a:srgbClr val="006D77"/>
                 </a:solidFill>
               </a:rPr>
-              <a:t>Dönem sonunda</a:t>
-            </a:r>
-          </a:p>
-        </p:txBody>
-      </p:sp>
-      <p:sp>
-        <p:nvSpPr>
-          <p:cNvPr id="7" name="TextBox 6"/>
-          <p:cNvSpPr txBox="1"/>
-          <p:nvPr/>
-        </p:nvSpPr>
-        <p:spPr>
-          <a:xfrm>
-            <a:off x="640080" y="1325880"/>
-            <a:ext cx="10911535" cy="1173480"/>
-          </a:xfrm>
-          <a:prstGeom prst="rect">
-            <a:avLst/>
-          </a:prstGeom>
-          <a:noFill/>
-        </p:spPr>
-        <p:txBody>
-          <a:bodyPr wrap="square" lIns="45720" rIns="45720">
-            <a:spAutoFit/>
-          </a:bodyPr>
-          <a:lstStyle/>
-          <a:p>
-            <a:pPr>
-              <a:spcAft>
-                <a:spcPts val="300"/>
-              </a:spcAft>
-            </a:pPr>
-            <a:r>
-              <a:rPr sz="2000" b="1">
-                <a:solidFill>
-                  <a:srgbClr val="006D77"/>
-                </a:solidFill>
-              </a:rPr>
-              <a:t>• </a:t>
-            </a:r>
-            <a:r>
-              <a:rPr sz="2000" b="0">
-                <a:solidFill>
-                  <a:srgbClr val="1F2D3A"/>
-                </a:solidFill>
-              </a:rPr>
-              <a:t>Kılavuzunuz = sertifikasyon belgelerinin küçük bir modeli → </a:t>
-            </a:r>
-            <a:r>
-              <a:rPr sz="2000" b="1">
-                <a:solidFill>
-                  <a:srgbClr val="1F2D3A"/>
-                </a:solidFill>
-              </a:rPr>
-              <a:t>portfolyo</a:t>
-            </a:r>
-            <a:r>
-              <a:rPr sz="2000" b="0">
-                <a:solidFill>
-                  <a:srgbClr val="1F2D3A"/>
-                </a:solidFill>
-              </a:rPr>
-              <a:t> (gizli bilgi içermediğinden emin olun)</a:t>
-            </a:r>
-          </a:p>
-          <a:p>
-            <a:pPr>
-              <a:spcAft>
-                <a:spcPts val="300"/>
-              </a:spcAft>
-            </a:pPr>
-            <a:r>
-              <a:rPr sz="2000" b="1">
-                <a:solidFill>
-                  <a:srgbClr val="006D77"/>
-                </a:solidFill>
-              </a:rPr>
-              <a:t>• </a:t>
-            </a:r>
-            <a:r>
-              <a:rPr sz="2000" b="0">
-                <a:solidFill>
-                  <a:srgbClr val="1F2D3A"/>
-                </a:solidFill>
-              </a:rPr>
-              <a:t>Teslim edilen her satır açıklanabilmeli; her takım üyesine soru sorulabilir</a:t>
-            </a:r>
-          </a:p>
-        </p:txBody>
-      </p:sp>
+              <a:t>Final gösterimi — şema</a:t>
+            </a:r>
+          </a:p>
+        </p:txBody>
+      </p:sp>
+      <p:pic>
+        <p:nvPicPr>
+          <p:cNvPr id="7" name="Picture 6" descr="h15-03-gosterim.png"/>
+          <p:cNvPicPr>
+            <a:picLocks noChangeAspect="1"/>
+          </p:cNvPicPr>
+          <p:nvPr/>
+        </p:nvPicPr>
+        <p:blipFill>
+          <a:blip r:embed="rId3"/>
+          <a:stretch>
+            <a:fillRect/>
+          </a:stretch>
+        </p:blipFill>
+        <p:spPr>
+          <a:xfrm>
+            <a:off x="2046645" y="1325880"/>
+            <a:ext cx="8098404" cy="3210484"/>
+          </a:xfrm>
+          <a:prstGeom prst="rect">
+            <a:avLst/>
+          </a:prstGeom>
+        </p:spPr>
+      </p:pic>
     </p:spTree>
   </p:cSld>
   <p:clrMapOvr>

--- a/docs/week-15/cen429-week-15-sunum.tr.pptx
+++ b/docs/week-15/cen429-week-15-sunum.tr.pptx
@@ -19,30 +19,6 @@
     <p:sldId id="267" r:id="rId19"/>
     <p:sldId id="268" r:id="rId20"/>
     <p:sldId id="269" r:id="rId21"/>
-    <p:sldId id="270" r:id="rId22"/>
-    <p:sldId id="271" r:id="rId23"/>
-    <p:sldId id="272" r:id="rId24"/>
-    <p:sldId id="273" r:id="rId25"/>
-    <p:sldId id="274" r:id="rId26"/>
-    <p:sldId id="275" r:id="rId27"/>
-    <p:sldId id="276" r:id="rId28"/>
-    <p:sldId id="277" r:id="rId29"/>
-    <p:sldId id="278" r:id="rId30"/>
-    <p:sldId id="279" r:id="rId31"/>
-    <p:sldId id="280" r:id="rId32"/>
-    <p:sldId id="281" r:id="rId33"/>
-    <p:sldId id="282" r:id="rId34"/>
-    <p:sldId id="283" r:id="rId35"/>
-    <p:sldId id="284" r:id="rId36"/>
-    <p:sldId id="285" r:id="rId37"/>
-    <p:sldId id="286" r:id="rId38"/>
-    <p:sldId id="287" r:id="rId39"/>
-    <p:sldId id="288" r:id="rId40"/>
-    <p:sldId id="289" r:id="rId41"/>
-    <p:sldId id="290" r:id="rId42"/>
-    <p:sldId id="291" r:id="rId43"/>
-    <p:sldId id="292" r:id="rId44"/>
-    <p:sldId id="293" r:id="rId45"/>
   </p:sldIdLst>
   <p:sldSz cx="12191695" cy="6858000" type="screen4x3"/>
   <p:notesSz cx="6858000" cy="9144000"/>
@@ -540,76 +516,6 @@
           <a:p>
             <a:r>
               <a:t>Final gösterim haftası: her takım güvenlik kılavuzunun tamamını, korumalı uygulamasını ve test sonuçlarını gösterir.</a:t>
-            </a:r>
-          </a:p>
-        </p:txBody>
-      </p:sp>
-      <p:sp>
-        <p:nvSpPr>
-          <p:cNvPr id="4" name="Slide Number Placeholder 3"/>
-          <p:cNvSpPr>
-            <a:spLocks noGrp="1"/>
-          </p:cNvSpPr>
-          <p:nvPr>
-            <p:ph type="sldNum" idx="5" sz="quarter"/>
-          </p:nvPr>
-        </p:nvSpPr>
-        <p:spPr/>
-      </p:sp>
-    </p:spTree>
-  </p:cSld>
-  <p:clrMapOvr>
-    <a:masterClrMapping/>
-  </p:clrMapOvr>
-</p:notes>
-</file>
-
-<file path=ppt/notesSlides/notesSlide2.xml><?xml version="1.0" encoding="utf-8"?>
-<p:notes xmlns:a="http://schemas.openxmlformats.org/drawingml/2006/main" xmlns:p="http://schemas.openxmlformats.org/presentationml/2006/main" xmlns:r="http://schemas.openxmlformats.org/officeDocument/2006/relationships">
-  <p:cSld>
-    <p:spTree>
-      <p:nvGrpSpPr>
-        <p:cNvPr id="1" name=""/>
-        <p:cNvGrpSpPr/>
-        <p:nvPr/>
-      </p:nvGrpSpPr>
-      <p:grpSpPr>
-        <a:xfrm>
-          <a:off x="0" y="0"/>
-          <a:ext cx="0" cy="0"/>
-          <a:chOff x="0" y="0"/>
-          <a:chExt cx="0" cy="0"/>
-        </a:xfrm>
-      </p:grpSpPr>
-      <p:sp>
-        <p:nvSpPr>
-          <p:cNvPr id="2" name="Slide Image Placeholder 1"/>
-          <p:cNvSpPr>
-            <a:spLocks noGrp="1"/>
-          </p:cNvSpPr>
-          <p:nvPr>
-            <p:ph type="sldImg" idx="2"/>
-          </p:nvPr>
-        </p:nvSpPr>
-        <p:spPr/>
-      </p:sp>
-      <p:sp>
-        <p:nvSpPr>
-          <p:cNvPr id="3" name="Notes Placeholder 2"/>
-          <p:cNvSpPr>
-            <a:spLocks noGrp="1"/>
-          </p:cNvSpPr>
-          <p:nvPr>
-            <p:ph type="body" idx="3" sz="quarter"/>
-          </p:nvPr>
-        </p:nvSpPr>
-        <p:spPr/>
-        <p:txBody>
-          <a:bodyPr/>
-          <a:lstStyle/>
-          <a:p>
-            <a:r>
-              <a:t>Final gösteriminde (RAP2) tüm bölümler TAM beklenir; her maddeyi ne kanıtlayacağınızı açıklıyoruz.</a:t>
             </a:r>
           </a:p>
         </p:txBody>
@@ -4023,7 +3929,7 @@
                   <a:srgbClr val="1F2D3A"/>
                 </a:solidFill>
               </a:rPr>
-              <a:t>Bu anahtar nereden türetiliyor, nerede duruyor, ne zaman siliniyor?</a:t>
+              <a:t>Bu anahtar hangi anahtardan türetiliyor, nerede duruyor, ne zaman siliniyor?</a:t>
             </a:r>
           </a:p>
           <a:p>
@@ -4046,7 +3952,7 @@
                   <a:srgbClr val="1F2D3A"/>
                 </a:solidFill>
               </a:rPr>
-              <a:t>Zincir ve ad doğrulaması nerede?</a:t>
+              <a:t>Sertifika zincirinizi nasıl doğruluyorsunuz? Ad denetimi nerede yapılıyor?</a:t>
             </a:r>
           </a:p>
           <a:p>
@@ -4092,7 +3998,7 @@
                   <a:srgbClr val="1F2D3A"/>
                 </a:solidFill>
               </a:rPr>
-              <a:t>Gizlemenin maliyetini ölçtünüz mü?</a:t>
+              <a:t>Gizlemenin maliyetini ölçtünüz mü? Hangi fonksiyonu neden gizlediniz?</a:t>
             </a:r>
           </a:p>
           <a:p>
@@ -4115,7 +4021,7 @@
                   <a:srgbClr val="1F2D3A"/>
                 </a:solidFill>
               </a:rPr>
-              <a:t>Şu "karşılandı" satırının kanıtı nerede?</a:t>
+              <a:t>Uyum matrisinde şu "karşılandı" satırının kanıtı nerede?</a:t>
             </a:r>
           </a:p>
           <a:p>
@@ -4854,14 +4760,48 @@
                   <a:srgbClr val="006D77"/>
                 </a:solidFill>
               </a:rPr>
-              <a:t>S16: plan değil sonuç — şema</a:t>
+              <a:t>Akademik dürüstlük</a:t>
+            </a:r>
+          </a:p>
+        </p:txBody>
+      </p:sp>
+      <p:sp>
+        <p:nvSpPr>
+          <p:cNvPr id="7" name="TextBox 6"/>
+          <p:cNvSpPr txBox="1"/>
+          <p:nvPr/>
+        </p:nvSpPr>
+        <p:spPr>
+          <a:xfrm>
+            <a:off x="640080" y="1325880"/>
+            <a:ext cx="10911535" cy="770128"/>
+          </a:xfrm>
+          <a:prstGeom prst="rect">
+            <a:avLst/>
+          </a:prstGeom>
+          <a:noFill/>
+        </p:spPr>
+        <p:txBody>
+          <a:bodyPr wrap="square" lIns="45720" rIns="45720">
+            <a:spAutoFit/>
+          </a:bodyPr>
+          <a:lstStyle/>
+          <a:p>
+            <a:pPr algn="l"/>
+            <a:r>
+              <a:rPr sz="2000" b="0">
+                <a:solidFill>
+                  <a:srgbClr val="1F2D3A"/>
+                </a:solidFill>
+              </a:rPr>
+              <a:t>İzlencenin "Akademik Dürüstlük" bölümü projede de geçerlidir; teslim edilen her satır açıklanabilmeli, gösterimde takımın her üyesine soru sorulabilir.</a:t>
             </a:r>
           </a:p>
         </p:txBody>
       </p:sp>
       <p:pic>
         <p:nvPicPr>
-          <p:cNvPr id="7" name="Picture 6" descr="h15-04-s16.png"/>
+          <p:cNvPr id="8" name="Picture 7" descr="h15-04-s16.png"/>
           <p:cNvPicPr>
             <a:picLocks noChangeAspect="1"/>
           </p:cNvPicPr>
@@ -4875,8 +4815,8 @@
         </p:blipFill>
         <p:spPr>
           <a:xfrm>
-            <a:off x="2046645" y="1325880"/>
-            <a:ext cx="8098404" cy="3473778"/>
+            <a:off x="1055461" y="2205736"/>
+            <a:ext cx="10080772" cy="3948176"/>
           </a:xfrm>
           <a:prstGeom prst="rect">
             <a:avLst/>
@@ -5067,7 +5007,7 @@
         <p:spPr>
           <a:xfrm>
             <a:off x="640080" y="1325880"/>
-            <a:ext cx="10911535" cy="1173480"/>
+            <a:ext cx="10911535" cy="797560"/>
           </a:xfrm>
           <a:prstGeom prst="rect">
             <a:avLst/>
@@ -5118,19 +5058,65 @@
               <a:t> (gizli bilgi içermediğinden emin olun)</a:t>
             </a:r>
           </a:p>
-          <a:p>
-            <a:pPr>
-              <a:spcAft>
-                <a:spcPts val="300"/>
-              </a:spcAft>
-            </a:pPr>
+        </p:txBody>
+      </p:sp>
+      <p:sp>
+        <p:nvSpPr>
+          <p:cNvPr id="8" name="Rectangle 7"/>
+          <p:cNvSpPr/>
+          <p:nvPr/>
+        </p:nvSpPr>
+        <p:spPr>
+          <a:xfrm>
+            <a:off x="640080" y="2233168"/>
+            <a:ext cx="10911535" cy="934719"/>
+          </a:xfrm>
+          <a:prstGeom prst="rect">
+            <a:avLst/>
+          </a:prstGeom>
+          <a:solidFill>
+            <a:srgbClr val="EEF7F8"/>
+          </a:solidFill>
+          <a:ln>
+            <a:solidFill>
+              <a:srgbClr val="006D77"/>
+            </a:solidFill>
+          </a:ln>
+        </p:spPr>
+        <p:style>
+          <a:lnRef idx="1">
+            <a:schemeClr val="accent1"/>
+          </a:lnRef>
+          <a:fillRef idx="3">
+            <a:schemeClr val="accent1"/>
+          </a:fillRef>
+          <a:effectRef idx="2">
+            <a:schemeClr val="accent1"/>
+          </a:effectRef>
+          <a:fontRef idx="minor">
+            <a:schemeClr val="lt1"/>
+          </a:fontRef>
+        </p:style>
+        <p:txBody>
+          <a:bodyPr rtlCol="0" anchor="ctr" wrap="square" lIns="182880"/>
+          <a:lstStyle/>
+          <a:p>
+            <a:pPr algn="l"/>
+            <a:r>
+              <a:rPr sz="2000" b="0">
+                <a:solidFill>
+                  <a:srgbClr val="1F2D3A"/>
+                </a:solidFill>
+              </a:rPr>
+              <a:t>Finalde </a:t>
+            </a:r>
             <a:r>
               <a:rPr sz="2000" b="1">
                 <a:solidFill>
-                  <a:srgbClr val="006D77"/>
-                </a:solidFill>
-              </a:rPr>
-              <a:t>• </a:t>
+                  <a:srgbClr val="1F2D3A"/>
+                </a:solidFill>
+              </a:rPr>
+              <a:t>sonuç</a:t>
             </a:r>
             <a:r>
               <a:rPr sz="2000" b="0">
@@ -5138,7 +5124,7 @@
                   <a:srgbClr val="1F2D3A"/>
                 </a:solidFill>
               </a:rPr>
-              <a:t>Teslim edilen her satır açıklanabilmeli; her takım üyesine soru sorulabilir</a:t>
+              <a:t> beklenir: her koruma çalışırken gösterilir, her gereksinim kanıtla bağlanır.</a:t>
             </a:r>
           </a:p>
         </p:txBody>
@@ -5293,8 +5279,8 @@
         </p:nvSpPr>
         <p:spPr>
           <a:xfrm>
-            <a:off x="640080" y="548640"/>
-            <a:ext cx="10911535" cy="731520"/>
+            <a:off x="640080" y="2194560"/>
+            <a:ext cx="10911535" cy="1280160"/>
           </a:xfrm>
           <a:prstGeom prst="rect">
             <a:avLst/>
@@ -5302,18 +5288,19 @@
           <a:noFill/>
         </p:spPr>
         <p:txBody>
-          <a:bodyPr wrap="square" lIns="45720" rIns="45720" anchor="ctr">
+          <a:bodyPr wrap="square" lIns="45720" rIns="45720">
             <a:spAutoFit/>
           </a:bodyPr>
           <a:lstStyle/>
           <a:p>
-            <a:r>
-              <a:rPr sz="3000" b="1">
+            <a:pPr algn="ctr"/>
+            <a:r>
+              <a:rPr sz="4000" b="1">
                 <a:solidFill>
                   <a:srgbClr val="006D77"/>
                 </a:solidFill>
               </a:rPr>
-              <a:t>Final dönemi</a:t>
+              <a:t>Bir sonraki hafta</a:t>
             </a:r>
           </a:p>
         </p:txBody>
@@ -5326,7 +5313,7 @@
         </p:nvSpPr>
         <p:spPr>
           <a:xfrm>
-            <a:off x="640080" y="1325880"/>
+            <a:off x="640080" y="3566160"/>
             <a:ext cx="10911535" cy="439928"/>
           </a:xfrm>
           <a:prstGeom prst="rect">
@@ -5340,7 +5327,7 @@
           </a:bodyPr>
           <a:lstStyle/>
           <a:p>
-            <a:pPr algn="l"/>
+            <a:pPr algn="ctr"/>
             <a:r>
               <a:rPr sz="2000" b="1">
                 <a:solidFill>
@@ -5360,8 +5347,8 @@
         </p:nvSpPr>
         <p:spPr>
           <a:xfrm>
-            <a:off x="640080" y="1875536"/>
-            <a:ext cx="10911535" cy="843280"/>
+            <a:off x="640080" y="4051808"/>
+            <a:ext cx="10911535" cy="770128"/>
           </a:xfrm>
           <a:prstGeom prst="rect">
             <a:avLst/>
@@ -5374,1321 +5361,14 @@
           </a:bodyPr>
           <a:lstStyle/>
           <a:p>
-            <a:pPr>
-              <a:spcAft>
-                <a:spcPts val="300"/>
-              </a:spcAft>
-            </a:pPr>
-            <a:r>
-              <a:rPr sz="2000" b="1">
-                <a:solidFill>
-                  <a:srgbClr val="006D77"/>
-                </a:solidFill>
-              </a:rPr>
-              <a:t>• </a:t>
-            </a:r>
+            <a:pPr algn="ctr"/>
             <a:r>
               <a:rPr sz="2000" b="0">
                 <a:solidFill>
                   <a:srgbClr val="1F2D3A"/>
                 </a:solidFill>
               </a:rPr>
-              <a:t>Kapsam: 9–14. haftalar</a:t>
-            </a:r>
-          </a:p>
-          <a:p>
-            <a:pPr>
-              <a:spcAft>
-                <a:spcPts val="300"/>
-              </a:spcAft>
-            </a:pPr>
-            <a:r>
-              <a:rPr sz="2000" b="1">
-                <a:solidFill>
-                  <a:srgbClr val="006D77"/>
-                </a:solidFill>
-              </a:rPr>
-              <a:t>• </a:t>
-            </a:r>
-            <a:r>
-              <a:rPr sz="2000" b="0">
-                <a:solidFill>
-                  <a:srgbClr val="1F2D3A"/>
-                </a:solidFill>
-              </a:rPr>
-              <a:t>Çalışma rehberi: 16. hafta sayfası</a:t>
-            </a:r>
-          </a:p>
-        </p:txBody>
-      </p:sp>
-    </p:spTree>
-  </p:cSld>
-  <p:clrMapOvr>
-    <a:masterClrMapping/>
-  </p:clrMapOvr>
-</p:sld>
-</file>
-
-<file path=ppt/slides/slide15.xml><?xml version="1.0" encoding="utf-8"?>
-<p:sld xmlns:a="http://schemas.openxmlformats.org/drawingml/2006/main" xmlns:p="http://schemas.openxmlformats.org/presentationml/2006/main" xmlns:r="http://schemas.openxmlformats.org/officeDocument/2006/relationships">
-  <p:cSld>
-    <p:bg>
-      <p:bgPr>
-        <a:solidFill>
-          <a:srgbClr val="006D77"/>
-        </a:solidFill>
-        <a:effectLst/>
-      </p:bgPr>
-    </p:bg>
-    <p:spTree>
-      <p:nvGrpSpPr>
-        <p:cNvPr id="1" name=""/>
-        <p:cNvGrpSpPr/>
-        <p:nvPr/>
-      </p:nvGrpSpPr>
-      <p:grpSpPr/>
-      <p:sp>
-        <p:nvSpPr>
-          <p:cNvPr id="2" name="TextBox 1"/>
-          <p:cNvSpPr txBox="1"/>
-          <p:nvPr/>
-        </p:nvSpPr>
-        <p:spPr>
-          <a:xfrm>
-            <a:off x="1051560" y="182880"/>
-            <a:ext cx="7315200" cy="320040"/>
-          </a:xfrm>
-          <a:prstGeom prst="rect">
-            <a:avLst/>
-          </a:prstGeom>
-          <a:noFill/>
-        </p:spPr>
-        <p:txBody>
-          <a:bodyPr wrap="square" lIns="45720" rIns="45720">
-            <a:spAutoFit/>
-          </a:bodyPr>
-          <a:lstStyle/>
-          <a:p>
-            <a:r>
-              <a:rPr sz="1100" b="0">
-                <a:solidFill>
-                  <a:srgbClr val="D8F0F2"/>
-                </a:solidFill>
-              </a:rPr>
-              <a:t>CEN429 Güvenli Programlama · Hafta 15</a:t>
-            </a:r>
-          </a:p>
-        </p:txBody>
-      </p:sp>
-      <p:sp>
-        <p:nvSpPr>
-          <p:cNvPr id="3" name="TextBox 2"/>
-          <p:cNvSpPr txBox="1"/>
-          <p:nvPr/>
-        </p:nvSpPr>
-        <p:spPr>
-          <a:xfrm>
-            <a:off x="640080" y="6446520"/>
-            <a:ext cx="7315200" cy="274320"/>
-          </a:xfrm>
-          <a:prstGeom prst="rect">
-            <a:avLst/>
-          </a:prstGeom>
-          <a:noFill/>
-        </p:spPr>
-        <p:txBody>
-          <a:bodyPr wrap="square" lIns="45720" rIns="45720">
-            <a:spAutoFit/>
-          </a:bodyPr>
-          <a:lstStyle/>
-          <a:p>
-            <a:r>
-              <a:rPr sz="1000" b="0">
-                <a:solidFill>
-                  <a:srgbClr val="D8F0F2"/>
-                </a:solidFill>
-              </a:rPr>
-              <a:t>RTEÜ Bilgisayar Mühendisliği · 2026-2027 Güz</a:t>
-            </a:r>
-          </a:p>
-        </p:txBody>
-      </p:sp>
-      <p:sp>
-        <p:nvSpPr>
-          <p:cNvPr id="4" name="TextBox 3"/>
-          <p:cNvSpPr txBox="1"/>
-          <p:nvPr/>
-        </p:nvSpPr>
-        <p:spPr>
-          <a:xfrm>
-            <a:off x="10637215" y="6446520"/>
-            <a:ext cx="914400" cy="274320"/>
-          </a:xfrm>
-          <a:prstGeom prst="rect">
-            <a:avLst/>
-          </a:prstGeom>
-          <a:noFill/>
-        </p:spPr>
-        <p:txBody>
-          <a:bodyPr wrap="square" lIns="45720" rIns="45720">
-            <a:spAutoFit/>
-          </a:bodyPr>
-          <a:lstStyle/>
-          <a:p>
-            <a:pPr algn="r"/>
-            <a:r>
-              <a:rPr sz="1000" b="0">
-                <a:solidFill>
-                  <a:srgbClr val="D8F0F2"/>
-                </a:solidFill>
-              </a:rPr>
-              <a:t>15</a:t>
-            </a:r>
-          </a:p>
-        </p:txBody>
-      </p:sp>
-      <p:sp>
-        <p:nvSpPr>
-          <p:cNvPr id="5" name="TextBox 4"/>
-          <p:cNvSpPr txBox="1"/>
-          <p:nvPr/>
-        </p:nvSpPr>
-        <p:spPr>
-          <a:xfrm>
-            <a:off x="640080" y="2743200"/>
-            <a:ext cx="10911535" cy="1280160"/>
-          </a:xfrm>
-          <a:prstGeom prst="rect">
-            <a:avLst/>
-          </a:prstGeom>
-          <a:noFill/>
-        </p:spPr>
-        <p:txBody>
-          <a:bodyPr wrap="square" lIns="45720" rIns="45720">
-            <a:spAutoFit/>
-          </a:bodyPr>
-          <a:lstStyle/>
-          <a:p>
-            <a:pPr algn="l"/>
-            <a:r>
-              <a:rPr sz="4000" b="1">
-                <a:solidFill>
-                  <a:srgbClr val="FFFFFF"/>
-                </a:solidFill>
-              </a:rPr>
-              <a:t>Ek · Final rubriği madde madde</a:t>
-            </a:r>
-          </a:p>
-        </p:txBody>
-      </p:sp>
-    </p:spTree>
-  </p:cSld>
-  <p:clrMapOvr>
-    <a:masterClrMapping/>
-  </p:clrMapOvr>
-</p:sld>
-</file>
-
-<file path=ppt/slides/slide16.xml><?xml version="1.0" encoding="utf-8"?>
-<p:sld xmlns:a="http://schemas.openxmlformats.org/drawingml/2006/main" xmlns:p="http://schemas.openxmlformats.org/presentationml/2006/main" xmlns:r="http://schemas.openxmlformats.org/officeDocument/2006/relationships">
-  <p:cSld>
-    <p:spTree>
-      <p:nvGrpSpPr>
-        <p:cNvPr id="1" name=""/>
-        <p:cNvGrpSpPr/>
-        <p:nvPr/>
-      </p:nvGrpSpPr>
-      <p:grpSpPr/>
-      <p:pic>
-        <p:nvPicPr>
-          <p:cNvPr id="2" name="Picture 1" descr="rteu_logo_kucuk.jpg"/>
-          <p:cNvPicPr>
-            <a:picLocks noChangeAspect="1"/>
-          </p:cNvPicPr>
-          <p:nvPr/>
-        </p:nvPicPr>
-        <p:blipFill>
-          <a:blip r:embed="rId2"/>
-          <a:stretch>
-            <a:fillRect/>
-          </a:stretch>
-        </p:blipFill>
-        <p:spPr>
-          <a:xfrm>
-            <a:off x="640080" y="164592"/>
-            <a:ext cx="242773" cy="329184"/>
-          </a:xfrm>
-          <a:prstGeom prst="rect">
-            <a:avLst/>
-          </a:prstGeom>
-        </p:spPr>
-      </p:pic>
-      <p:sp>
-        <p:nvSpPr>
-          <p:cNvPr id="3" name="TextBox 2"/>
-          <p:cNvSpPr txBox="1"/>
-          <p:nvPr/>
-        </p:nvSpPr>
-        <p:spPr>
-          <a:xfrm>
-            <a:off x="1051560" y="182880"/>
-            <a:ext cx="7315200" cy="320040"/>
-          </a:xfrm>
-          <a:prstGeom prst="rect">
-            <a:avLst/>
-          </a:prstGeom>
-          <a:noFill/>
-        </p:spPr>
-        <p:txBody>
-          <a:bodyPr wrap="square" lIns="45720" rIns="45720">
-            <a:spAutoFit/>
-          </a:bodyPr>
-          <a:lstStyle/>
-          <a:p>
-            <a:r>
-              <a:rPr sz="1100" b="0">
-                <a:solidFill>
-                  <a:srgbClr val="5B6770"/>
-                </a:solidFill>
-              </a:rPr>
-              <a:t>CEN429 Güvenli Programlama · Hafta 15</a:t>
-            </a:r>
-          </a:p>
-        </p:txBody>
-      </p:sp>
-      <p:sp>
-        <p:nvSpPr>
-          <p:cNvPr id="4" name="TextBox 3"/>
-          <p:cNvSpPr txBox="1"/>
-          <p:nvPr/>
-        </p:nvSpPr>
-        <p:spPr>
-          <a:xfrm>
-            <a:off x="640080" y="6446520"/>
-            <a:ext cx="7315200" cy="274320"/>
-          </a:xfrm>
-          <a:prstGeom prst="rect">
-            <a:avLst/>
-          </a:prstGeom>
-          <a:noFill/>
-        </p:spPr>
-        <p:txBody>
-          <a:bodyPr wrap="square" lIns="45720" rIns="45720">
-            <a:spAutoFit/>
-          </a:bodyPr>
-          <a:lstStyle/>
-          <a:p>
-            <a:r>
-              <a:rPr sz="1000" b="0">
-                <a:solidFill>
-                  <a:srgbClr val="5B6770"/>
-                </a:solidFill>
-              </a:rPr>
-              <a:t>RTEÜ Bilgisayar Mühendisliği · 2026-2027 Güz</a:t>
-            </a:r>
-          </a:p>
-        </p:txBody>
-      </p:sp>
-      <p:sp>
-        <p:nvSpPr>
-          <p:cNvPr id="5" name="TextBox 4"/>
-          <p:cNvSpPr txBox="1"/>
-          <p:nvPr/>
-        </p:nvSpPr>
-        <p:spPr>
-          <a:xfrm>
-            <a:off x="10637215" y="6446520"/>
-            <a:ext cx="914400" cy="274320"/>
-          </a:xfrm>
-          <a:prstGeom prst="rect">
-            <a:avLst/>
-          </a:prstGeom>
-          <a:noFill/>
-        </p:spPr>
-        <p:txBody>
-          <a:bodyPr wrap="square" lIns="45720" rIns="45720">
-            <a:spAutoFit/>
-          </a:bodyPr>
-          <a:lstStyle/>
-          <a:p>
-            <a:pPr algn="r"/>
-            <a:r>
-              <a:rPr sz="1000" b="0">
-                <a:solidFill>
-                  <a:srgbClr val="5B6770"/>
-                </a:solidFill>
-              </a:rPr>
-              <a:t>16</a:t>
-            </a:r>
-          </a:p>
-        </p:txBody>
-      </p:sp>
-      <p:sp>
-        <p:nvSpPr>
-          <p:cNvPr id="6" name="TextBox 5"/>
-          <p:cNvSpPr txBox="1"/>
-          <p:nvPr/>
-        </p:nvSpPr>
-        <p:spPr>
-          <a:xfrm>
-            <a:off x="640080" y="548640"/>
-            <a:ext cx="10911535" cy="731520"/>
-          </a:xfrm>
-          <a:prstGeom prst="rect">
-            <a:avLst/>
-          </a:prstGeom>
-          <a:noFill/>
-        </p:spPr>
-        <p:txBody>
-          <a:bodyPr wrap="square" lIns="45720" rIns="45720" anchor="ctr">
-            <a:spAutoFit/>
-          </a:bodyPr>
-          <a:lstStyle/>
-          <a:p>
-            <a:r>
-              <a:rPr sz="3000" b="1">
-                <a:solidFill>
-                  <a:srgbClr val="006D77"/>
-                </a:solidFill>
-              </a:rPr>
-              <a:t>Final neyi ölçer?</a:t>
-            </a:r>
-          </a:p>
-        </p:txBody>
-      </p:sp>
-      <p:sp>
-        <p:nvSpPr>
-          <p:cNvPr id="7" name="TextBox 6"/>
-          <p:cNvSpPr txBox="1"/>
-          <p:nvPr/>
-        </p:nvSpPr>
-        <p:spPr>
-          <a:xfrm>
-            <a:off x="640080" y="1325880"/>
-            <a:ext cx="10911535" cy="439928"/>
-          </a:xfrm>
-          <a:prstGeom prst="rect">
-            <a:avLst/>
-          </a:prstGeom>
-          <a:noFill/>
-        </p:spPr>
-        <p:txBody>
-          <a:bodyPr wrap="square" lIns="45720" rIns="45720">
-            <a:spAutoFit/>
-          </a:bodyPr>
-          <a:lstStyle/>
-          <a:p>
-            <a:pPr algn="l"/>
-            <a:r>
-              <a:rPr sz="2000" b="0">
-                <a:solidFill>
-                  <a:srgbClr val="1F2D3A"/>
-                </a:solidFill>
-              </a:rPr>
-              <a:t>Final gösterimi projenizin </a:t>
-            </a:r>
-            <a:r>
-              <a:rPr sz="2000" b="1">
-                <a:solidFill>
-                  <a:srgbClr val="1F2D3A"/>
-                </a:solidFill>
-              </a:rPr>
-              <a:t>tamamını</a:t>
-            </a:r>
-            <a:r>
-              <a:rPr sz="2000" b="0">
-                <a:solidFill>
-                  <a:srgbClr val="1F2D3A"/>
-                </a:solidFill>
-              </a:rPr>
-              <a:t> ölçer:</a:t>
-            </a:r>
-          </a:p>
-        </p:txBody>
-      </p:sp>
-      <p:sp>
-        <p:nvSpPr>
-          <p:cNvPr id="8" name="TextBox 7"/>
-          <p:cNvSpPr txBox="1"/>
-          <p:nvPr/>
-        </p:nvSpPr>
-        <p:spPr>
-          <a:xfrm>
-            <a:off x="640080" y="1875536"/>
-            <a:ext cx="10911535" cy="1595120"/>
-          </a:xfrm>
-          <a:prstGeom prst="rect">
-            <a:avLst/>
-          </a:prstGeom>
-          <a:noFill/>
-        </p:spPr>
-        <p:txBody>
-          <a:bodyPr wrap="square" lIns="45720" rIns="45720">
-            <a:spAutoFit/>
-          </a:bodyPr>
-          <a:lstStyle/>
-          <a:p>
-            <a:pPr>
-              <a:spcAft>
-                <a:spcPts val="300"/>
-              </a:spcAft>
-            </a:pPr>
-            <a:r>
-              <a:rPr sz="2000" b="1">
-                <a:solidFill>
-                  <a:srgbClr val="006D77"/>
-                </a:solidFill>
-              </a:rPr>
-              <a:t>• </a:t>
-            </a:r>
-            <a:r>
-              <a:rPr sz="2000" b="0">
-                <a:solidFill>
-                  <a:srgbClr val="1F2D3A"/>
-                </a:solidFill>
-              </a:rPr>
-              <a:t>kripto, güvenli iletişim</a:t>
-            </a:r>
-          </a:p>
-          <a:p>
-            <a:pPr>
-              <a:spcAft>
-                <a:spcPts val="300"/>
-              </a:spcAft>
-            </a:pPr>
-            <a:r>
-              <a:rPr sz="2000" b="1">
-                <a:solidFill>
-                  <a:srgbClr val="006D77"/>
-                </a:solidFill>
-              </a:rPr>
-              <a:t>• </a:t>
-            </a:r>
-            <a:r>
-              <a:rPr sz="2000" b="0">
-                <a:solidFill>
-                  <a:srgbClr val="1F2D3A"/>
-                </a:solidFill>
-              </a:rPr>
-              <a:t>varlık yönetimi (tam)</a:t>
-            </a:r>
-          </a:p>
-          <a:p>
-            <a:pPr>
-              <a:spcAft>
-                <a:spcPts val="300"/>
-              </a:spcAft>
-            </a:pPr>
-            <a:r>
-              <a:rPr sz="2000" b="1">
-                <a:solidFill>
-                  <a:srgbClr val="006D77"/>
-                </a:solidFill>
-              </a:rPr>
-              <a:t>• </a:t>
-            </a:r>
-            <a:r>
-              <a:rPr sz="2000" b="0">
-                <a:solidFill>
-                  <a:srgbClr val="1F2D3A"/>
-                </a:solidFill>
-              </a:rPr>
-              <a:t>ileri ikili korumalar</a:t>
-            </a:r>
-          </a:p>
-          <a:p>
-            <a:pPr>
-              <a:spcAft>
-                <a:spcPts val="300"/>
-              </a:spcAft>
-            </a:pPr>
-            <a:r>
-              <a:rPr sz="2000" b="1">
-                <a:solidFill>
-                  <a:srgbClr val="006D77"/>
-                </a:solidFill>
-              </a:rPr>
-              <a:t>• </a:t>
-            </a:r>
-            <a:r>
-              <a:rPr sz="2000" b="0">
-                <a:solidFill>
-                  <a:srgbClr val="1F2D3A"/>
-                </a:solidFill>
-              </a:rPr>
-              <a:t>test </a:t>
-            </a:r>
-            <a:r>
-              <a:rPr sz="2000" b="1">
-                <a:solidFill>
-                  <a:srgbClr val="1F2D3A"/>
-                </a:solidFill>
-              </a:rPr>
-              <a:t>sonuçları</a:t>
-            </a:r>
-            <a:r>
-              <a:rPr sz="2000" b="0">
-                <a:solidFill>
-                  <a:srgbClr val="1F2D3A"/>
-                </a:solidFill>
-              </a:rPr>
-              <a:t>, standartlar</a:t>
-            </a:r>
-          </a:p>
-        </p:txBody>
-      </p:sp>
-    </p:spTree>
-  </p:cSld>
-  <p:clrMapOvr>
-    <a:masterClrMapping/>
-  </p:clrMapOvr>
-</p:sld>
-</file>
-
-<file path=ppt/slides/slide17.xml><?xml version="1.0" encoding="utf-8"?>
-<p:sld xmlns:a="http://schemas.openxmlformats.org/drawingml/2006/main" xmlns:p="http://schemas.openxmlformats.org/presentationml/2006/main" xmlns:r="http://schemas.openxmlformats.org/officeDocument/2006/relationships">
-  <p:cSld>
-    <p:spTree>
-      <p:nvGrpSpPr>
-        <p:cNvPr id="1" name=""/>
-        <p:cNvGrpSpPr/>
-        <p:nvPr/>
-      </p:nvGrpSpPr>
-      <p:grpSpPr/>
-      <p:pic>
-        <p:nvPicPr>
-          <p:cNvPr id="2" name="Picture 1" descr="rteu_logo_kucuk.jpg"/>
-          <p:cNvPicPr>
-            <a:picLocks noChangeAspect="1"/>
-          </p:cNvPicPr>
-          <p:nvPr/>
-        </p:nvPicPr>
-        <p:blipFill>
-          <a:blip r:embed="rId2"/>
-          <a:stretch>
-            <a:fillRect/>
-          </a:stretch>
-        </p:blipFill>
-        <p:spPr>
-          <a:xfrm>
-            <a:off x="640080" y="164592"/>
-            <a:ext cx="242773" cy="329184"/>
-          </a:xfrm>
-          <a:prstGeom prst="rect">
-            <a:avLst/>
-          </a:prstGeom>
-        </p:spPr>
-      </p:pic>
-      <p:sp>
-        <p:nvSpPr>
-          <p:cNvPr id="3" name="TextBox 2"/>
-          <p:cNvSpPr txBox="1"/>
-          <p:nvPr/>
-        </p:nvSpPr>
-        <p:spPr>
-          <a:xfrm>
-            <a:off x="1051560" y="182880"/>
-            <a:ext cx="7315200" cy="320040"/>
-          </a:xfrm>
-          <a:prstGeom prst="rect">
-            <a:avLst/>
-          </a:prstGeom>
-          <a:noFill/>
-        </p:spPr>
-        <p:txBody>
-          <a:bodyPr wrap="square" lIns="45720" rIns="45720">
-            <a:spAutoFit/>
-          </a:bodyPr>
-          <a:lstStyle/>
-          <a:p>
-            <a:r>
-              <a:rPr sz="1100" b="0">
-                <a:solidFill>
-                  <a:srgbClr val="5B6770"/>
-                </a:solidFill>
-              </a:rPr>
-              <a:t>CEN429 Güvenli Programlama · Hafta 15</a:t>
-            </a:r>
-          </a:p>
-        </p:txBody>
-      </p:sp>
-      <p:sp>
-        <p:nvSpPr>
-          <p:cNvPr id="4" name="TextBox 3"/>
-          <p:cNvSpPr txBox="1"/>
-          <p:nvPr/>
-        </p:nvSpPr>
-        <p:spPr>
-          <a:xfrm>
-            <a:off x="640080" y="6446520"/>
-            <a:ext cx="7315200" cy="274320"/>
-          </a:xfrm>
-          <a:prstGeom prst="rect">
-            <a:avLst/>
-          </a:prstGeom>
-          <a:noFill/>
-        </p:spPr>
-        <p:txBody>
-          <a:bodyPr wrap="square" lIns="45720" rIns="45720">
-            <a:spAutoFit/>
-          </a:bodyPr>
-          <a:lstStyle/>
-          <a:p>
-            <a:r>
-              <a:rPr sz="1000" b="0">
-                <a:solidFill>
-                  <a:srgbClr val="5B6770"/>
-                </a:solidFill>
-              </a:rPr>
-              <a:t>RTEÜ Bilgisayar Mühendisliği · 2026-2027 Güz</a:t>
-            </a:r>
-          </a:p>
-        </p:txBody>
-      </p:sp>
-      <p:sp>
-        <p:nvSpPr>
-          <p:cNvPr id="5" name="TextBox 4"/>
-          <p:cNvSpPr txBox="1"/>
-          <p:nvPr/>
-        </p:nvSpPr>
-        <p:spPr>
-          <a:xfrm>
-            <a:off x="10637215" y="6446520"/>
-            <a:ext cx="914400" cy="274320"/>
-          </a:xfrm>
-          <a:prstGeom prst="rect">
-            <a:avLst/>
-          </a:prstGeom>
-          <a:noFill/>
-        </p:spPr>
-        <p:txBody>
-          <a:bodyPr wrap="square" lIns="45720" rIns="45720">
-            <a:spAutoFit/>
-          </a:bodyPr>
-          <a:lstStyle/>
-          <a:p>
-            <a:pPr algn="r"/>
-            <a:r>
-              <a:rPr sz="1000" b="0">
-                <a:solidFill>
-                  <a:srgbClr val="5B6770"/>
-                </a:solidFill>
-              </a:rPr>
-              <a:t>17</a:t>
-            </a:r>
-          </a:p>
-        </p:txBody>
-      </p:sp>
-      <p:sp>
-        <p:nvSpPr>
-          <p:cNvPr id="6" name="TextBox 5"/>
-          <p:cNvSpPr txBox="1"/>
-          <p:nvPr/>
-        </p:nvSpPr>
-        <p:spPr>
-          <a:xfrm>
-            <a:off x="640080" y="548640"/>
-            <a:ext cx="10911535" cy="731520"/>
-          </a:xfrm>
-          <a:prstGeom prst="rect">
-            <a:avLst/>
-          </a:prstGeom>
-          <a:noFill/>
-        </p:spPr>
-        <p:txBody>
-          <a:bodyPr wrap="square" lIns="45720" rIns="45720" anchor="ctr">
-            <a:spAutoFit/>
-          </a:bodyPr>
-          <a:lstStyle/>
-          <a:p>
-            <a:r>
-              <a:rPr sz="3000" b="1">
-                <a:solidFill>
-                  <a:srgbClr val="006D77"/>
-                </a:solidFill>
-              </a:rPr>
-              <a:t>Madde · kriptografi</a:t>
-            </a:r>
-          </a:p>
-        </p:txBody>
-      </p:sp>
-      <p:sp>
-        <p:nvSpPr>
-          <p:cNvPr id="7" name="TextBox 6"/>
-          <p:cNvSpPr txBox="1"/>
-          <p:nvPr/>
-        </p:nvSpPr>
-        <p:spPr>
-          <a:xfrm>
-            <a:off x="640080" y="1325880"/>
-            <a:ext cx="10911535" cy="843280"/>
-          </a:xfrm>
-          <a:prstGeom prst="rect">
-            <a:avLst/>
-          </a:prstGeom>
-          <a:noFill/>
-        </p:spPr>
-        <p:txBody>
-          <a:bodyPr wrap="square" lIns="45720" rIns="45720">
-            <a:spAutoFit/>
-          </a:bodyPr>
-          <a:lstStyle/>
-          <a:p>
-            <a:pPr>
-              <a:spcAft>
-                <a:spcPts val="300"/>
-              </a:spcAft>
-            </a:pPr>
-            <a:r>
-              <a:rPr sz="2000" b="1">
-                <a:solidFill>
-                  <a:srgbClr val="006D77"/>
-                </a:solidFill>
-              </a:rPr>
-              <a:t>• </a:t>
-            </a:r>
-            <a:r>
-              <a:rPr sz="2000" b="0">
-                <a:solidFill>
-                  <a:srgbClr val="1F2D3A"/>
-                </a:solidFill>
-              </a:rPr>
-              <a:t>Algoritma envanteri, anahtar yaşam döngüsü.</a:t>
-            </a:r>
-          </a:p>
-          <a:p>
-            <a:pPr>
-              <a:spcAft>
-                <a:spcPts val="300"/>
-              </a:spcAft>
-            </a:pPr>
-            <a:r>
-              <a:rPr sz="2000" b="1">
-                <a:solidFill>
-                  <a:srgbClr val="006D77"/>
-                </a:solidFill>
-              </a:rPr>
-              <a:t>• </a:t>
-            </a:r>
-            <a:r>
-              <a:rPr sz="2000" b="1">
-                <a:solidFill>
-                  <a:srgbClr val="1F2D3A"/>
-                </a:solidFill>
-              </a:rPr>
-              <a:t>Kanıt:</a:t>
-            </a:r>
-            <a:r>
-              <a:rPr sz="2000" b="0">
-                <a:solidFill>
-                  <a:srgbClr val="1F2D3A"/>
-                </a:solidFill>
-              </a:rPr>
-              <a:t> S8 + testler.</a:t>
-            </a:r>
-          </a:p>
-        </p:txBody>
-      </p:sp>
-    </p:spTree>
-  </p:cSld>
-  <p:clrMapOvr>
-    <a:masterClrMapping/>
-  </p:clrMapOvr>
-</p:sld>
-</file>
-
-<file path=ppt/slides/slide18.xml><?xml version="1.0" encoding="utf-8"?>
-<p:sld xmlns:a="http://schemas.openxmlformats.org/drawingml/2006/main" xmlns:p="http://schemas.openxmlformats.org/presentationml/2006/main" xmlns:r="http://schemas.openxmlformats.org/officeDocument/2006/relationships">
-  <p:cSld>
-    <p:spTree>
-      <p:nvGrpSpPr>
-        <p:cNvPr id="1" name=""/>
-        <p:cNvGrpSpPr/>
-        <p:nvPr/>
-      </p:nvGrpSpPr>
-      <p:grpSpPr/>
-      <p:pic>
-        <p:nvPicPr>
-          <p:cNvPr id="2" name="Picture 1" descr="rteu_logo_kucuk.jpg"/>
-          <p:cNvPicPr>
-            <a:picLocks noChangeAspect="1"/>
-          </p:cNvPicPr>
-          <p:nvPr/>
-        </p:nvPicPr>
-        <p:blipFill>
-          <a:blip r:embed="rId2"/>
-          <a:stretch>
-            <a:fillRect/>
-          </a:stretch>
-        </p:blipFill>
-        <p:spPr>
-          <a:xfrm>
-            <a:off x="640080" y="164592"/>
-            <a:ext cx="242773" cy="329184"/>
-          </a:xfrm>
-          <a:prstGeom prst="rect">
-            <a:avLst/>
-          </a:prstGeom>
-        </p:spPr>
-      </p:pic>
-      <p:sp>
-        <p:nvSpPr>
-          <p:cNvPr id="3" name="TextBox 2"/>
-          <p:cNvSpPr txBox="1"/>
-          <p:nvPr/>
-        </p:nvSpPr>
-        <p:spPr>
-          <a:xfrm>
-            <a:off x="1051560" y="182880"/>
-            <a:ext cx="7315200" cy="320040"/>
-          </a:xfrm>
-          <a:prstGeom prst="rect">
-            <a:avLst/>
-          </a:prstGeom>
-          <a:noFill/>
-        </p:spPr>
-        <p:txBody>
-          <a:bodyPr wrap="square" lIns="45720" rIns="45720">
-            <a:spAutoFit/>
-          </a:bodyPr>
-          <a:lstStyle/>
-          <a:p>
-            <a:r>
-              <a:rPr sz="1100" b="0">
-                <a:solidFill>
-                  <a:srgbClr val="5B6770"/>
-                </a:solidFill>
-              </a:rPr>
-              <a:t>CEN429 Güvenli Programlama · Hafta 15</a:t>
-            </a:r>
-          </a:p>
-        </p:txBody>
-      </p:sp>
-      <p:sp>
-        <p:nvSpPr>
-          <p:cNvPr id="4" name="TextBox 3"/>
-          <p:cNvSpPr txBox="1"/>
-          <p:nvPr/>
-        </p:nvSpPr>
-        <p:spPr>
-          <a:xfrm>
-            <a:off x="640080" y="6446520"/>
-            <a:ext cx="7315200" cy="274320"/>
-          </a:xfrm>
-          <a:prstGeom prst="rect">
-            <a:avLst/>
-          </a:prstGeom>
-          <a:noFill/>
-        </p:spPr>
-        <p:txBody>
-          <a:bodyPr wrap="square" lIns="45720" rIns="45720">
-            <a:spAutoFit/>
-          </a:bodyPr>
-          <a:lstStyle/>
-          <a:p>
-            <a:r>
-              <a:rPr sz="1000" b="0">
-                <a:solidFill>
-                  <a:srgbClr val="5B6770"/>
-                </a:solidFill>
-              </a:rPr>
-              <a:t>RTEÜ Bilgisayar Mühendisliği · 2026-2027 Güz</a:t>
-            </a:r>
-          </a:p>
-        </p:txBody>
-      </p:sp>
-      <p:sp>
-        <p:nvSpPr>
-          <p:cNvPr id="5" name="TextBox 4"/>
-          <p:cNvSpPr txBox="1"/>
-          <p:nvPr/>
-        </p:nvSpPr>
-        <p:spPr>
-          <a:xfrm>
-            <a:off x="10637215" y="6446520"/>
-            <a:ext cx="914400" cy="274320"/>
-          </a:xfrm>
-          <a:prstGeom prst="rect">
-            <a:avLst/>
-          </a:prstGeom>
-          <a:noFill/>
-        </p:spPr>
-        <p:txBody>
-          <a:bodyPr wrap="square" lIns="45720" rIns="45720">
-            <a:spAutoFit/>
-          </a:bodyPr>
-          <a:lstStyle/>
-          <a:p>
-            <a:pPr algn="r"/>
-            <a:r>
-              <a:rPr sz="1000" b="0">
-                <a:solidFill>
-                  <a:srgbClr val="5B6770"/>
-                </a:solidFill>
-              </a:rPr>
-              <a:t>18</a:t>
-            </a:r>
-          </a:p>
-        </p:txBody>
-      </p:sp>
-      <p:sp>
-        <p:nvSpPr>
-          <p:cNvPr id="6" name="TextBox 5"/>
-          <p:cNvSpPr txBox="1"/>
-          <p:nvPr/>
-        </p:nvSpPr>
-        <p:spPr>
-          <a:xfrm>
-            <a:off x="640080" y="548640"/>
-            <a:ext cx="10911535" cy="731520"/>
-          </a:xfrm>
-          <a:prstGeom prst="rect">
-            <a:avLst/>
-          </a:prstGeom>
-          <a:noFill/>
-        </p:spPr>
-        <p:txBody>
-          <a:bodyPr wrap="square" lIns="45720" rIns="45720" anchor="ctr">
-            <a:spAutoFit/>
-          </a:bodyPr>
-          <a:lstStyle/>
-          <a:p>
-            <a:r>
-              <a:rPr sz="3000" b="1">
-                <a:solidFill>
-                  <a:srgbClr val="006D77"/>
-                </a:solidFill>
-              </a:rPr>
-              <a:t>Madde · güvenli iletişim</a:t>
-            </a:r>
-          </a:p>
-        </p:txBody>
-      </p:sp>
-      <p:sp>
-        <p:nvSpPr>
-          <p:cNvPr id="7" name="TextBox 6"/>
-          <p:cNvSpPr txBox="1"/>
-          <p:nvPr/>
-        </p:nvSpPr>
-        <p:spPr>
-          <a:xfrm>
-            <a:off x="640080" y="1325880"/>
-            <a:ext cx="10911535" cy="843280"/>
-          </a:xfrm>
-          <a:prstGeom prst="rect">
-            <a:avLst/>
-          </a:prstGeom>
-          <a:noFill/>
-        </p:spPr>
-        <p:txBody>
-          <a:bodyPr wrap="square" lIns="45720" rIns="45720">
-            <a:spAutoFit/>
-          </a:bodyPr>
-          <a:lstStyle/>
-          <a:p>
-            <a:pPr>
-              <a:spcAft>
-                <a:spcPts val="300"/>
-              </a:spcAft>
-            </a:pPr>
-            <a:r>
-              <a:rPr sz="2000" b="1">
-                <a:solidFill>
-                  <a:srgbClr val="006D77"/>
-                </a:solidFill>
-              </a:rPr>
-              <a:t>• </a:t>
-            </a:r>
-            <a:r>
-              <a:rPr sz="2000" b="0">
-                <a:solidFill>
-                  <a:srgbClr val="1F2D3A"/>
-                </a:solidFill>
-              </a:rPr>
-              <a:t>TLS, sabitleme, mesaj düzeyi.</a:t>
-            </a:r>
-          </a:p>
-          <a:p>
-            <a:pPr>
-              <a:spcAft>
-                <a:spcPts val="300"/>
-              </a:spcAft>
-            </a:pPr>
-            <a:r>
-              <a:rPr sz="2000" b="1">
-                <a:solidFill>
-                  <a:srgbClr val="006D77"/>
-                </a:solidFill>
-              </a:rPr>
-              <a:t>• </a:t>
-            </a:r>
-            <a:r>
-              <a:rPr sz="2000" b="1">
-                <a:solidFill>
-                  <a:srgbClr val="1F2D3A"/>
-                </a:solidFill>
-              </a:rPr>
-              <a:t>Kanıt:</a:t>
-            </a:r>
-            <a:r>
-              <a:rPr sz="2000" b="0">
-                <a:solidFill>
-                  <a:srgbClr val="1F2D3A"/>
-                </a:solidFill>
-              </a:rPr>
-              <a:t> S6, S11 + test.</a:t>
-            </a:r>
-          </a:p>
-        </p:txBody>
-      </p:sp>
-    </p:spTree>
-  </p:cSld>
-  <p:clrMapOvr>
-    <a:masterClrMapping/>
-  </p:clrMapOvr>
-</p:sld>
-</file>
-
-<file path=ppt/slides/slide19.xml><?xml version="1.0" encoding="utf-8"?>
-<p:sld xmlns:a="http://schemas.openxmlformats.org/drawingml/2006/main" xmlns:p="http://schemas.openxmlformats.org/presentationml/2006/main" xmlns:r="http://schemas.openxmlformats.org/officeDocument/2006/relationships">
-  <p:cSld>
-    <p:spTree>
-      <p:nvGrpSpPr>
-        <p:cNvPr id="1" name=""/>
-        <p:cNvGrpSpPr/>
-        <p:nvPr/>
-      </p:nvGrpSpPr>
-      <p:grpSpPr/>
-      <p:pic>
-        <p:nvPicPr>
-          <p:cNvPr id="2" name="Picture 1" descr="rteu_logo_kucuk.jpg"/>
-          <p:cNvPicPr>
-            <a:picLocks noChangeAspect="1"/>
-          </p:cNvPicPr>
-          <p:nvPr/>
-        </p:nvPicPr>
-        <p:blipFill>
-          <a:blip r:embed="rId2"/>
-          <a:stretch>
-            <a:fillRect/>
-          </a:stretch>
-        </p:blipFill>
-        <p:spPr>
-          <a:xfrm>
-            <a:off x="640080" y="164592"/>
-            <a:ext cx="242773" cy="329184"/>
-          </a:xfrm>
-          <a:prstGeom prst="rect">
-            <a:avLst/>
-          </a:prstGeom>
-        </p:spPr>
-      </p:pic>
-      <p:sp>
-        <p:nvSpPr>
-          <p:cNvPr id="3" name="TextBox 2"/>
-          <p:cNvSpPr txBox="1"/>
-          <p:nvPr/>
-        </p:nvSpPr>
-        <p:spPr>
-          <a:xfrm>
-            <a:off x="1051560" y="182880"/>
-            <a:ext cx="7315200" cy="320040"/>
-          </a:xfrm>
-          <a:prstGeom prst="rect">
-            <a:avLst/>
-          </a:prstGeom>
-          <a:noFill/>
-        </p:spPr>
-        <p:txBody>
-          <a:bodyPr wrap="square" lIns="45720" rIns="45720">
-            <a:spAutoFit/>
-          </a:bodyPr>
-          <a:lstStyle/>
-          <a:p>
-            <a:r>
-              <a:rPr sz="1100" b="0">
-                <a:solidFill>
-                  <a:srgbClr val="5B6770"/>
-                </a:solidFill>
-              </a:rPr>
-              <a:t>CEN429 Güvenli Programlama · Hafta 15</a:t>
-            </a:r>
-          </a:p>
-        </p:txBody>
-      </p:sp>
-      <p:sp>
-        <p:nvSpPr>
-          <p:cNvPr id="4" name="TextBox 3"/>
-          <p:cNvSpPr txBox="1"/>
-          <p:nvPr/>
-        </p:nvSpPr>
-        <p:spPr>
-          <a:xfrm>
-            <a:off x="640080" y="6446520"/>
-            <a:ext cx="7315200" cy="274320"/>
-          </a:xfrm>
-          <a:prstGeom prst="rect">
-            <a:avLst/>
-          </a:prstGeom>
-          <a:noFill/>
-        </p:spPr>
-        <p:txBody>
-          <a:bodyPr wrap="square" lIns="45720" rIns="45720">
-            <a:spAutoFit/>
-          </a:bodyPr>
-          <a:lstStyle/>
-          <a:p>
-            <a:r>
-              <a:rPr sz="1000" b="0">
-                <a:solidFill>
-                  <a:srgbClr val="5B6770"/>
-                </a:solidFill>
-              </a:rPr>
-              <a:t>RTEÜ Bilgisayar Mühendisliği · 2026-2027 Güz</a:t>
-            </a:r>
-          </a:p>
-        </p:txBody>
-      </p:sp>
-      <p:sp>
-        <p:nvSpPr>
-          <p:cNvPr id="5" name="TextBox 4"/>
-          <p:cNvSpPr txBox="1"/>
-          <p:nvPr/>
-        </p:nvSpPr>
-        <p:spPr>
-          <a:xfrm>
-            <a:off x="10637215" y="6446520"/>
-            <a:ext cx="914400" cy="274320"/>
-          </a:xfrm>
-          <a:prstGeom prst="rect">
-            <a:avLst/>
-          </a:prstGeom>
-          <a:noFill/>
-        </p:spPr>
-        <p:txBody>
-          <a:bodyPr wrap="square" lIns="45720" rIns="45720">
-            <a:spAutoFit/>
-          </a:bodyPr>
-          <a:lstStyle/>
-          <a:p>
-            <a:pPr algn="r"/>
-            <a:r>
-              <a:rPr sz="1000" b="0">
-                <a:solidFill>
-                  <a:srgbClr val="5B6770"/>
-                </a:solidFill>
-              </a:rPr>
-              <a:t>19</a:t>
-            </a:r>
-          </a:p>
-        </p:txBody>
-      </p:sp>
-      <p:sp>
-        <p:nvSpPr>
-          <p:cNvPr id="6" name="TextBox 5"/>
-          <p:cNvSpPr txBox="1"/>
-          <p:nvPr/>
-        </p:nvSpPr>
-        <p:spPr>
-          <a:xfrm>
-            <a:off x="640080" y="548640"/>
-            <a:ext cx="10911535" cy="731520"/>
-          </a:xfrm>
-          <a:prstGeom prst="rect">
-            <a:avLst/>
-          </a:prstGeom>
-          <a:noFill/>
-        </p:spPr>
-        <p:txBody>
-          <a:bodyPr wrap="square" lIns="45720" rIns="45720" anchor="ctr">
-            <a:spAutoFit/>
-          </a:bodyPr>
-          <a:lstStyle/>
-          <a:p>
-            <a:r>
-              <a:rPr sz="3000" b="1">
-                <a:solidFill>
-                  <a:srgbClr val="006D77"/>
-                </a:solidFill>
-              </a:rPr>
-              <a:t>Madde · ileri ikili korumalar</a:t>
-            </a:r>
-          </a:p>
-        </p:txBody>
-      </p:sp>
-      <p:sp>
-        <p:nvSpPr>
-          <p:cNvPr id="7" name="TextBox 6"/>
-          <p:cNvSpPr txBox="1"/>
-          <p:nvPr/>
-        </p:nvSpPr>
-        <p:spPr>
-          <a:xfrm>
-            <a:off x="640080" y="1325880"/>
-            <a:ext cx="10911535" cy="843280"/>
-          </a:xfrm>
-          <a:prstGeom prst="rect">
-            <a:avLst/>
-          </a:prstGeom>
-          <a:noFill/>
-        </p:spPr>
-        <p:txBody>
-          <a:bodyPr wrap="square" lIns="45720" rIns="45720">
-            <a:spAutoFit/>
-          </a:bodyPr>
-          <a:lstStyle/>
-          <a:p>
-            <a:pPr>
-              <a:spcAft>
-                <a:spcPts val="300"/>
-              </a:spcAft>
-            </a:pPr>
-            <a:r>
-              <a:rPr sz="2000" b="1">
-                <a:solidFill>
-                  <a:srgbClr val="006D77"/>
-                </a:solidFill>
-              </a:rPr>
-              <a:t>• </a:t>
-            </a:r>
-            <a:r>
-              <a:rPr sz="2000" b="0">
-                <a:solidFill>
-                  <a:srgbClr val="1F2D3A"/>
-                </a:solidFill>
-              </a:rPr>
-              <a:t>Gizleme (S9 ileri), derleme hattı (S15).</a:t>
-            </a:r>
-          </a:p>
-          <a:p>
-            <a:pPr>
-              <a:spcAft>
-                <a:spcPts val="300"/>
-              </a:spcAft>
-            </a:pPr>
-            <a:r>
-              <a:rPr sz="2000" b="1">
-                <a:solidFill>
-                  <a:srgbClr val="006D77"/>
-                </a:solidFill>
-              </a:rPr>
-              <a:t>• </a:t>
-            </a:r>
-            <a:r>
-              <a:rPr sz="2000" b="1">
-                <a:solidFill>
-                  <a:srgbClr val="1F2D3A"/>
-                </a:solidFill>
-              </a:rPr>
-              <a:t>Kanıt:</a:t>
-            </a:r>
-            <a:r>
-              <a:rPr sz="2000" b="0">
-                <a:solidFill>
-                  <a:srgbClr val="1F2D3A"/>
-                </a:solidFill>
-              </a:rPr>
-              <a:t> ölçüm tablosu + imzalama.</a:t>
+              <a:t>Final gösteriminden (RAP2) sonra sıra Quiz-2'ye gelir; kapsam 9–14. haftalardır. Çalışma rehberi 16. hafta sayfasındadır.</a:t>
             </a:r>
           </a:p>
         </p:txBody>
@@ -7056,2495 +5736,6 @@
 </p:sld>
 </file>
 
-<file path=ppt/slides/slide20.xml><?xml version="1.0" encoding="utf-8"?>
-<p:sld xmlns:a="http://schemas.openxmlformats.org/drawingml/2006/main" xmlns:p="http://schemas.openxmlformats.org/presentationml/2006/main" xmlns:r="http://schemas.openxmlformats.org/officeDocument/2006/relationships">
-  <p:cSld>
-    <p:spTree>
-      <p:nvGrpSpPr>
-        <p:cNvPr id="1" name=""/>
-        <p:cNvGrpSpPr/>
-        <p:nvPr/>
-      </p:nvGrpSpPr>
-      <p:grpSpPr/>
-      <p:pic>
-        <p:nvPicPr>
-          <p:cNvPr id="2" name="Picture 1" descr="rteu_logo_kucuk.jpg"/>
-          <p:cNvPicPr>
-            <a:picLocks noChangeAspect="1"/>
-          </p:cNvPicPr>
-          <p:nvPr/>
-        </p:nvPicPr>
-        <p:blipFill>
-          <a:blip r:embed="rId2"/>
-          <a:stretch>
-            <a:fillRect/>
-          </a:stretch>
-        </p:blipFill>
-        <p:spPr>
-          <a:xfrm>
-            <a:off x="640080" y="164592"/>
-            <a:ext cx="242773" cy="329184"/>
-          </a:xfrm>
-          <a:prstGeom prst="rect">
-            <a:avLst/>
-          </a:prstGeom>
-        </p:spPr>
-      </p:pic>
-      <p:sp>
-        <p:nvSpPr>
-          <p:cNvPr id="3" name="TextBox 2"/>
-          <p:cNvSpPr txBox="1"/>
-          <p:nvPr/>
-        </p:nvSpPr>
-        <p:spPr>
-          <a:xfrm>
-            <a:off x="1051560" y="182880"/>
-            <a:ext cx="7315200" cy="320040"/>
-          </a:xfrm>
-          <a:prstGeom prst="rect">
-            <a:avLst/>
-          </a:prstGeom>
-          <a:noFill/>
-        </p:spPr>
-        <p:txBody>
-          <a:bodyPr wrap="square" lIns="45720" rIns="45720">
-            <a:spAutoFit/>
-          </a:bodyPr>
-          <a:lstStyle/>
-          <a:p>
-            <a:r>
-              <a:rPr sz="1100" b="0">
-                <a:solidFill>
-                  <a:srgbClr val="5B6770"/>
-                </a:solidFill>
-              </a:rPr>
-              <a:t>CEN429 Güvenli Programlama · Hafta 15</a:t>
-            </a:r>
-          </a:p>
-        </p:txBody>
-      </p:sp>
-      <p:sp>
-        <p:nvSpPr>
-          <p:cNvPr id="4" name="TextBox 3"/>
-          <p:cNvSpPr txBox="1"/>
-          <p:nvPr/>
-        </p:nvSpPr>
-        <p:spPr>
-          <a:xfrm>
-            <a:off x="640080" y="6446520"/>
-            <a:ext cx="7315200" cy="274320"/>
-          </a:xfrm>
-          <a:prstGeom prst="rect">
-            <a:avLst/>
-          </a:prstGeom>
-          <a:noFill/>
-        </p:spPr>
-        <p:txBody>
-          <a:bodyPr wrap="square" lIns="45720" rIns="45720">
-            <a:spAutoFit/>
-          </a:bodyPr>
-          <a:lstStyle/>
-          <a:p>
-            <a:r>
-              <a:rPr sz="1000" b="0">
-                <a:solidFill>
-                  <a:srgbClr val="5B6770"/>
-                </a:solidFill>
-              </a:rPr>
-              <a:t>RTEÜ Bilgisayar Mühendisliği · 2026-2027 Güz</a:t>
-            </a:r>
-          </a:p>
-        </p:txBody>
-      </p:sp>
-      <p:sp>
-        <p:nvSpPr>
-          <p:cNvPr id="5" name="TextBox 4"/>
-          <p:cNvSpPr txBox="1"/>
-          <p:nvPr/>
-        </p:nvSpPr>
-        <p:spPr>
-          <a:xfrm>
-            <a:off x="10637215" y="6446520"/>
-            <a:ext cx="914400" cy="274320"/>
-          </a:xfrm>
-          <a:prstGeom prst="rect">
-            <a:avLst/>
-          </a:prstGeom>
-          <a:noFill/>
-        </p:spPr>
-        <p:txBody>
-          <a:bodyPr wrap="square" lIns="45720" rIns="45720">
-            <a:spAutoFit/>
-          </a:bodyPr>
-          <a:lstStyle/>
-          <a:p>
-            <a:pPr algn="r"/>
-            <a:r>
-              <a:rPr sz="1000" b="0">
-                <a:solidFill>
-                  <a:srgbClr val="5B6770"/>
-                </a:solidFill>
-              </a:rPr>
-              <a:t>20</a:t>
-            </a:r>
-          </a:p>
-        </p:txBody>
-      </p:sp>
-      <p:sp>
-        <p:nvSpPr>
-          <p:cNvPr id="6" name="TextBox 5"/>
-          <p:cNvSpPr txBox="1"/>
-          <p:nvPr/>
-        </p:nvSpPr>
-        <p:spPr>
-          <a:xfrm>
-            <a:off x="640080" y="548640"/>
-            <a:ext cx="10911535" cy="731520"/>
-          </a:xfrm>
-          <a:prstGeom prst="rect">
-            <a:avLst/>
-          </a:prstGeom>
-          <a:noFill/>
-        </p:spPr>
-        <p:txBody>
-          <a:bodyPr wrap="square" lIns="45720" rIns="45720" anchor="ctr">
-            <a:spAutoFit/>
-          </a:bodyPr>
-          <a:lstStyle/>
-          <a:p>
-            <a:r>
-              <a:rPr sz="3000" b="1">
-                <a:solidFill>
-                  <a:srgbClr val="006D77"/>
-                </a:solidFill>
-              </a:rPr>
-              <a:t>Madde · test ve doğrulama</a:t>
-            </a:r>
-          </a:p>
-        </p:txBody>
-      </p:sp>
-      <p:sp>
-        <p:nvSpPr>
-          <p:cNvPr id="7" name="TextBox 6"/>
-          <p:cNvSpPr txBox="1"/>
-          <p:nvPr/>
-        </p:nvSpPr>
-        <p:spPr>
-          <a:xfrm>
-            <a:off x="640080" y="1325880"/>
-            <a:ext cx="10911535" cy="843280"/>
-          </a:xfrm>
-          <a:prstGeom prst="rect">
-            <a:avLst/>
-          </a:prstGeom>
-          <a:noFill/>
-        </p:spPr>
-        <p:txBody>
-          <a:bodyPr wrap="square" lIns="45720" rIns="45720">
-            <a:spAutoFit/>
-          </a:bodyPr>
-          <a:lstStyle/>
-          <a:p>
-            <a:pPr>
-              <a:spcAft>
-                <a:spcPts val="300"/>
-              </a:spcAft>
-            </a:pPr>
-            <a:r>
-              <a:rPr sz="2000" b="1">
-                <a:solidFill>
-                  <a:srgbClr val="006D77"/>
-                </a:solidFill>
-              </a:rPr>
-              <a:t>• </a:t>
-            </a:r>
-            <a:r>
-              <a:rPr sz="2000" b="0">
-                <a:solidFill>
-                  <a:srgbClr val="1F2D3A"/>
-                </a:solidFill>
-              </a:rPr>
-              <a:t>Test </a:t>
-            </a:r>
-            <a:r>
-              <a:rPr sz="2000" b="1">
-                <a:solidFill>
-                  <a:srgbClr val="1F2D3A"/>
-                </a:solidFill>
-              </a:rPr>
-              <a:t>sonuçları</a:t>
-            </a:r>
-            <a:r>
-              <a:rPr sz="2000" b="0">
-                <a:solidFill>
-                  <a:srgbClr val="1F2D3A"/>
-                </a:solidFill>
-              </a:rPr>
-              <a:t> (plan değil).</a:t>
-            </a:r>
-          </a:p>
-          <a:p>
-            <a:pPr>
-              <a:spcAft>
-                <a:spcPts val="300"/>
-              </a:spcAft>
-            </a:pPr>
-            <a:r>
-              <a:rPr sz="2000" b="1">
-                <a:solidFill>
-                  <a:srgbClr val="006D77"/>
-                </a:solidFill>
-              </a:rPr>
-              <a:t>• </a:t>
-            </a:r>
-            <a:r>
-              <a:rPr sz="2000" b="1">
-                <a:solidFill>
-                  <a:srgbClr val="1F2D3A"/>
-                </a:solidFill>
-              </a:rPr>
-              <a:t>Kanıt:</a:t>
-            </a:r>
-            <a:r>
-              <a:rPr sz="2000" b="0">
-                <a:solidFill>
-                  <a:srgbClr val="1F2D3A"/>
-                </a:solidFill>
-              </a:rPr>
-              <a:t> S16.</a:t>
-            </a:r>
-          </a:p>
-        </p:txBody>
-      </p:sp>
-    </p:spTree>
-  </p:cSld>
-  <p:clrMapOvr>
-    <a:masterClrMapping/>
-  </p:clrMapOvr>
-</p:sld>
-</file>
-
-<file path=ppt/slides/slide21.xml><?xml version="1.0" encoding="utf-8"?>
-<p:sld xmlns:a="http://schemas.openxmlformats.org/drawingml/2006/main" xmlns:p="http://schemas.openxmlformats.org/presentationml/2006/main" xmlns:r="http://schemas.openxmlformats.org/officeDocument/2006/relationships">
-  <p:cSld>
-    <p:spTree>
-      <p:nvGrpSpPr>
-        <p:cNvPr id="1" name=""/>
-        <p:cNvGrpSpPr/>
-        <p:nvPr/>
-      </p:nvGrpSpPr>
-      <p:grpSpPr/>
-      <p:pic>
-        <p:nvPicPr>
-          <p:cNvPr id="2" name="Picture 1" descr="rteu_logo_kucuk.jpg"/>
-          <p:cNvPicPr>
-            <a:picLocks noChangeAspect="1"/>
-          </p:cNvPicPr>
-          <p:nvPr/>
-        </p:nvPicPr>
-        <p:blipFill>
-          <a:blip r:embed="rId2"/>
-          <a:stretch>
-            <a:fillRect/>
-          </a:stretch>
-        </p:blipFill>
-        <p:spPr>
-          <a:xfrm>
-            <a:off x="640080" y="164592"/>
-            <a:ext cx="242773" cy="329184"/>
-          </a:xfrm>
-          <a:prstGeom prst="rect">
-            <a:avLst/>
-          </a:prstGeom>
-        </p:spPr>
-      </p:pic>
-      <p:sp>
-        <p:nvSpPr>
-          <p:cNvPr id="3" name="TextBox 2"/>
-          <p:cNvSpPr txBox="1"/>
-          <p:nvPr/>
-        </p:nvSpPr>
-        <p:spPr>
-          <a:xfrm>
-            <a:off x="1051560" y="182880"/>
-            <a:ext cx="7315200" cy="320040"/>
-          </a:xfrm>
-          <a:prstGeom prst="rect">
-            <a:avLst/>
-          </a:prstGeom>
-          <a:noFill/>
-        </p:spPr>
-        <p:txBody>
-          <a:bodyPr wrap="square" lIns="45720" rIns="45720">
-            <a:spAutoFit/>
-          </a:bodyPr>
-          <a:lstStyle/>
-          <a:p>
-            <a:r>
-              <a:rPr sz="1100" b="0">
-                <a:solidFill>
-                  <a:srgbClr val="5B6770"/>
-                </a:solidFill>
-              </a:rPr>
-              <a:t>CEN429 Güvenli Programlama · Hafta 15</a:t>
-            </a:r>
-          </a:p>
-        </p:txBody>
-      </p:sp>
-      <p:sp>
-        <p:nvSpPr>
-          <p:cNvPr id="4" name="TextBox 3"/>
-          <p:cNvSpPr txBox="1"/>
-          <p:nvPr/>
-        </p:nvSpPr>
-        <p:spPr>
-          <a:xfrm>
-            <a:off x="640080" y="6446520"/>
-            <a:ext cx="7315200" cy="274320"/>
-          </a:xfrm>
-          <a:prstGeom prst="rect">
-            <a:avLst/>
-          </a:prstGeom>
-          <a:noFill/>
-        </p:spPr>
-        <p:txBody>
-          <a:bodyPr wrap="square" lIns="45720" rIns="45720">
-            <a:spAutoFit/>
-          </a:bodyPr>
-          <a:lstStyle/>
-          <a:p>
-            <a:r>
-              <a:rPr sz="1000" b="0">
-                <a:solidFill>
-                  <a:srgbClr val="5B6770"/>
-                </a:solidFill>
-              </a:rPr>
-              <a:t>RTEÜ Bilgisayar Mühendisliği · 2026-2027 Güz</a:t>
-            </a:r>
-          </a:p>
-        </p:txBody>
-      </p:sp>
-      <p:sp>
-        <p:nvSpPr>
-          <p:cNvPr id="5" name="TextBox 4"/>
-          <p:cNvSpPr txBox="1"/>
-          <p:nvPr/>
-        </p:nvSpPr>
-        <p:spPr>
-          <a:xfrm>
-            <a:off x="10637215" y="6446520"/>
-            <a:ext cx="914400" cy="274320"/>
-          </a:xfrm>
-          <a:prstGeom prst="rect">
-            <a:avLst/>
-          </a:prstGeom>
-          <a:noFill/>
-        </p:spPr>
-        <p:txBody>
-          <a:bodyPr wrap="square" lIns="45720" rIns="45720">
-            <a:spAutoFit/>
-          </a:bodyPr>
-          <a:lstStyle/>
-          <a:p>
-            <a:pPr algn="r"/>
-            <a:r>
-              <a:rPr sz="1000" b="0">
-                <a:solidFill>
-                  <a:srgbClr val="5B6770"/>
-                </a:solidFill>
-              </a:rPr>
-              <a:t>21</a:t>
-            </a:r>
-          </a:p>
-        </p:txBody>
-      </p:sp>
-      <p:sp>
-        <p:nvSpPr>
-          <p:cNvPr id="6" name="TextBox 5"/>
-          <p:cNvSpPr txBox="1"/>
-          <p:nvPr/>
-        </p:nvSpPr>
-        <p:spPr>
-          <a:xfrm>
-            <a:off x="640080" y="548640"/>
-            <a:ext cx="10911535" cy="731520"/>
-          </a:xfrm>
-          <a:prstGeom prst="rect">
-            <a:avLst/>
-          </a:prstGeom>
-          <a:noFill/>
-        </p:spPr>
-        <p:txBody>
-          <a:bodyPr wrap="square" lIns="45720" rIns="45720" anchor="ctr">
-            <a:spAutoFit/>
-          </a:bodyPr>
-          <a:lstStyle/>
-          <a:p>
-            <a:r>
-              <a:rPr sz="3000" b="1">
-                <a:solidFill>
-                  <a:srgbClr val="006D77"/>
-                </a:solidFill>
-              </a:rPr>
-              <a:t>Madde · standartlar ve uyum</a:t>
-            </a:r>
-          </a:p>
-        </p:txBody>
-      </p:sp>
-      <p:sp>
-        <p:nvSpPr>
-          <p:cNvPr id="7" name="TextBox 6"/>
-          <p:cNvSpPr txBox="1"/>
-          <p:nvPr/>
-        </p:nvSpPr>
-        <p:spPr>
-          <a:xfrm>
-            <a:off x="640080" y="1325880"/>
-            <a:ext cx="10911535" cy="843280"/>
-          </a:xfrm>
-          <a:prstGeom prst="rect">
-            <a:avLst/>
-          </a:prstGeom>
-          <a:noFill/>
-        </p:spPr>
-        <p:txBody>
-          <a:bodyPr wrap="square" lIns="45720" rIns="45720">
-            <a:spAutoFit/>
-          </a:bodyPr>
-          <a:lstStyle/>
-          <a:p>
-            <a:pPr>
-              <a:spcAft>
-                <a:spcPts val="300"/>
-              </a:spcAft>
-            </a:pPr>
-            <a:r>
-              <a:rPr sz="2000" b="1">
-                <a:solidFill>
-                  <a:srgbClr val="006D77"/>
-                </a:solidFill>
-              </a:rPr>
-              <a:t>• </a:t>
-            </a:r>
-            <a:r>
-              <a:rPr sz="2000" b="0">
-                <a:solidFill>
-                  <a:srgbClr val="1F2D3A"/>
-                </a:solidFill>
-              </a:rPr>
-              <a:t>Uyum matrisi (S17), devredilenler (S14).</a:t>
-            </a:r>
-          </a:p>
-          <a:p>
-            <a:pPr>
-              <a:spcAft>
-                <a:spcPts val="300"/>
-              </a:spcAft>
-            </a:pPr>
-            <a:r>
-              <a:rPr sz="2000" b="1">
-                <a:solidFill>
-                  <a:srgbClr val="006D77"/>
-                </a:solidFill>
-              </a:rPr>
-              <a:t>• </a:t>
-            </a:r>
-            <a:r>
-              <a:rPr sz="2000" b="1">
-                <a:solidFill>
-                  <a:srgbClr val="1F2D3A"/>
-                </a:solidFill>
-              </a:rPr>
-              <a:t>Kanıt:</a:t>
-            </a:r>
-            <a:r>
-              <a:rPr sz="2000" b="0">
-                <a:solidFill>
-                  <a:srgbClr val="1F2D3A"/>
-                </a:solidFill>
-              </a:rPr>
-              <a:t> S14, S17.</a:t>
-            </a:r>
-          </a:p>
-        </p:txBody>
-      </p:sp>
-    </p:spTree>
-  </p:cSld>
-  <p:clrMapOvr>
-    <a:masterClrMapping/>
-  </p:clrMapOvr>
-</p:sld>
-</file>
-
-<file path=ppt/slides/slide22.xml><?xml version="1.0" encoding="utf-8"?>
-<p:sld xmlns:a="http://schemas.openxmlformats.org/drawingml/2006/main" xmlns:p="http://schemas.openxmlformats.org/presentationml/2006/main" xmlns:r="http://schemas.openxmlformats.org/officeDocument/2006/relationships">
-  <p:cSld>
-    <p:bg>
-      <p:bgPr>
-        <a:solidFill>
-          <a:srgbClr val="006D77"/>
-        </a:solidFill>
-        <a:effectLst/>
-      </p:bgPr>
-    </p:bg>
-    <p:spTree>
-      <p:nvGrpSpPr>
-        <p:cNvPr id="1" name=""/>
-        <p:cNvGrpSpPr/>
-        <p:nvPr/>
-      </p:nvGrpSpPr>
-      <p:grpSpPr/>
-      <p:sp>
-        <p:nvSpPr>
-          <p:cNvPr id="2" name="TextBox 1"/>
-          <p:cNvSpPr txBox="1"/>
-          <p:nvPr/>
-        </p:nvSpPr>
-        <p:spPr>
-          <a:xfrm>
-            <a:off x="1051560" y="182880"/>
-            <a:ext cx="7315200" cy="320040"/>
-          </a:xfrm>
-          <a:prstGeom prst="rect">
-            <a:avLst/>
-          </a:prstGeom>
-          <a:noFill/>
-        </p:spPr>
-        <p:txBody>
-          <a:bodyPr wrap="square" lIns="45720" rIns="45720">
-            <a:spAutoFit/>
-          </a:bodyPr>
-          <a:lstStyle/>
-          <a:p>
-            <a:r>
-              <a:rPr sz="1100" b="0">
-                <a:solidFill>
-                  <a:srgbClr val="D8F0F2"/>
-                </a:solidFill>
-              </a:rPr>
-              <a:t>CEN429 Güvenli Programlama · Hafta 15</a:t>
-            </a:r>
-          </a:p>
-        </p:txBody>
-      </p:sp>
-      <p:sp>
-        <p:nvSpPr>
-          <p:cNvPr id="3" name="TextBox 2"/>
-          <p:cNvSpPr txBox="1"/>
-          <p:nvPr/>
-        </p:nvSpPr>
-        <p:spPr>
-          <a:xfrm>
-            <a:off x="640080" y="6446520"/>
-            <a:ext cx="7315200" cy="274320"/>
-          </a:xfrm>
-          <a:prstGeom prst="rect">
-            <a:avLst/>
-          </a:prstGeom>
-          <a:noFill/>
-        </p:spPr>
-        <p:txBody>
-          <a:bodyPr wrap="square" lIns="45720" rIns="45720">
-            <a:spAutoFit/>
-          </a:bodyPr>
-          <a:lstStyle/>
-          <a:p>
-            <a:r>
-              <a:rPr sz="1000" b="0">
-                <a:solidFill>
-                  <a:srgbClr val="D8F0F2"/>
-                </a:solidFill>
-              </a:rPr>
-              <a:t>RTEÜ Bilgisayar Mühendisliği · 2026-2027 Güz</a:t>
-            </a:r>
-          </a:p>
-        </p:txBody>
-      </p:sp>
-      <p:sp>
-        <p:nvSpPr>
-          <p:cNvPr id="4" name="TextBox 3"/>
-          <p:cNvSpPr txBox="1"/>
-          <p:nvPr/>
-        </p:nvSpPr>
-        <p:spPr>
-          <a:xfrm>
-            <a:off x="10637215" y="6446520"/>
-            <a:ext cx="914400" cy="274320"/>
-          </a:xfrm>
-          <a:prstGeom prst="rect">
-            <a:avLst/>
-          </a:prstGeom>
-          <a:noFill/>
-        </p:spPr>
-        <p:txBody>
-          <a:bodyPr wrap="square" lIns="45720" rIns="45720">
-            <a:spAutoFit/>
-          </a:bodyPr>
-          <a:lstStyle/>
-          <a:p>
-            <a:pPr algn="r"/>
-            <a:r>
-              <a:rPr sz="1000" b="0">
-                <a:solidFill>
-                  <a:srgbClr val="D8F0F2"/>
-                </a:solidFill>
-              </a:rPr>
-              <a:t>22</a:t>
-            </a:r>
-          </a:p>
-        </p:txBody>
-      </p:sp>
-      <p:sp>
-        <p:nvSpPr>
-          <p:cNvPr id="5" name="TextBox 4"/>
-          <p:cNvSpPr txBox="1"/>
-          <p:nvPr/>
-        </p:nvSpPr>
-        <p:spPr>
-          <a:xfrm>
-            <a:off x="640080" y="2743200"/>
-            <a:ext cx="10911535" cy="1280160"/>
-          </a:xfrm>
-          <a:prstGeom prst="rect">
-            <a:avLst/>
-          </a:prstGeom>
-          <a:noFill/>
-        </p:spPr>
-        <p:txBody>
-          <a:bodyPr wrap="square" lIns="45720" rIns="45720">
-            <a:spAutoFit/>
-          </a:bodyPr>
-          <a:lstStyle/>
-          <a:p>
-            <a:pPr algn="l"/>
-            <a:r>
-              <a:rPr sz="4000" b="1">
-                <a:solidFill>
-                  <a:srgbClr val="FFFFFF"/>
-                </a:solidFill>
-              </a:rPr>
-              <a:t>Ek · Vizeden finale</a:t>
-            </a:r>
-          </a:p>
-        </p:txBody>
-      </p:sp>
-    </p:spTree>
-  </p:cSld>
-  <p:clrMapOvr>
-    <a:masterClrMapping/>
-  </p:clrMapOvr>
-</p:sld>
-</file>
-
-<file path=ppt/slides/slide23.xml><?xml version="1.0" encoding="utf-8"?>
-<p:sld xmlns:a="http://schemas.openxmlformats.org/drawingml/2006/main" xmlns:p="http://schemas.openxmlformats.org/presentationml/2006/main" xmlns:r="http://schemas.openxmlformats.org/officeDocument/2006/relationships">
-  <p:cSld>
-    <p:spTree>
-      <p:nvGrpSpPr>
-        <p:cNvPr id="1" name=""/>
-        <p:cNvGrpSpPr/>
-        <p:nvPr/>
-      </p:nvGrpSpPr>
-      <p:grpSpPr/>
-      <p:pic>
-        <p:nvPicPr>
-          <p:cNvPr id="2" name="Picture 1" descr="rteu_logo_kucuk.jpg"/>
-          <p:cNvPicPr>
-            <a:picLocks noChangeAspect="1"/>
-          </p:cNvPicPr>
-          <p:nvPr/>
-        </p:nvPicPr>
-        <p:blipFill>
-          <a:blip r:embed="rId2"/>
-          <a:stretch>
-            <a:fillRect/>
-          </a:stretch>
-        </p:blipFill>
-        <p:spPr>
-          <a:xfrm>
-            <a:off x="640080" y="164592"/>
-            <a:ext cx="242773" cy="329184"/>
-          </a:xfrm>
-          <a:prstGeom prst="rect">
-            <a:avLst/>
-          </a:prstGeom>
-        </p:spPr>
-      </p:pic>
-      <p:sp>
-        <p:nvSpPr>
-          <p:cNvPr id="3" name="TextBox 2"/>
-          <p:cNvSpPr txBox="1"/>
-          <p:nvPr/>
-        </p:nvSpPr>
-        <p:spPr>
-          <a:xfrm>
-            <a:off x="1051560" y="182880"/>
-            <a:ext cx="7315200" cy="320040"/>
-          </a:xfrm>
-          <a:prstGeom prst="rect">
-            <a:avLst/>
-          </a:prstGeom>
-          <a:noFill/>
-        </p:spPr>
-        <p:txBody>
-          <a:bodyPr wrap="square" lIns="45720" rIns="45720">
-            <a:spAutoFit/>
-          </a:bodyPr>
-          <a:lstStyle/>
-          <a:p>
-            <a:r>
-              <a:rPr sz="1100" b="0">
-                <a:solidFill>
-                  <a:srgbClr val="5B6770"/>
-                </a:solidFill>
-              </a:rPr>
-              <a:t>CEN429 Güvenli Programlama · Hafta 15</a:t>
-            </a:r>
-          </a:p>
-        </p:txBody>
-      </p:sp>
-      <p:sp>
-        <p:nvSpPr>
-          <p:cNvPr id="4" name="TextBox 3"/>
-          <p:cNvSpPr txBox="1"/>
-          <p:nvPr/>
-        </p:nvSpPr>
-        <p:spPr>
-          <a:xfrm>
-            <a:off x="640080" y="6446520"/>
-            <a:ext cx="7315200" cy="274320"/>
-          </a:xfrm>
-          <a:prstGeom prst="rect">
-            <a:avLst/>
-          </a:prstGeom>
-          <a:noFill/>
-        </p:spPr>
-        <p:txBody>
-          <a:bodyPr wrap="square" lIns="45720" rIns="45720">
-            <a:spAutoFit/>
-          </a:bodyPr>
-          <a:lstStyle/>
-          <a:p>
-            <a:r>
-              <a:rPr sz="1000" b="0">
-                <a:solidFill>
-                  <a:srgbClr val="5B6770"/>
-                </a:solidFill>
-              </a:rPr>
-              <a:t>RTEÜ Bilgisayar Mühendisliği · 2026-2027 Güz</a:t>
-            </a:r>
-          </a:p>
-        </p:txBody>
-      </p:sp>
-      <p:sp>
-        <p:nvSpPr>
-          <p:cNvPr id="5" name="TextBox 4"/>
-          <p:cNvSpPr txBox="1"/>
-          <p:nvPr/>
-        </p:nvSpPr>
-        <p:spPr>
-          <a:xfrm>
-            <a:off x="10637215" y="6446520"/>
-            <a:ext cx="914400" cy="274320"/>
-          </a:xfrm>
-          <a:prstGeom prst="rect">
-            <a:avLst/>
-          </a:prstGeom>
-          <a:noFill/>
-        </p:spPr>
-        <p:txBody>
-          <a:bodyPr wrap="square" lIns="45720" rIns="45720">
-            <a:spAutoFit/>
-          </a:bodyPr>
-          <a:lstStyle/>
-          <a:p>
-            <a:pPr algn="r"/>
-            <a:r>
-              <a:rPr sz="1000" b="0">
-                <a:solidFill>
-                  <a:srgbClr val="5B6770"/>
-                </a:solidFill>
-              </a:rPr>
-              <a:t>23</a:t>
-            </a:r>
-          </a:p>
-        </p:txBody>
-      </p:sp>
-      <p:sp>
-        <p:nvSpPr>
-          <p:cNvPr id="6" name="TextBox 5"/>
-          <p:cNvSpPr txBox="1"/>
-          <p:nvPr/>
-        </p:nvSpPr>
-        <p:spPr>
-          <a:xfrm>
-            <a:off x="640080" y="548640"/>
-            <a:ext cx="10911535" cy="731520"/>
-          </a:xfrm>
-          <a:prstGeom prst="rect">
-            <a:avLst/>
-          </a:prstGeom>
-          <a:noFill/>
-        </p:spPr>
-        <p:txBody>
-          <a:bodyPr wrap="square" lIns="45720" rIns="45720" anchor="ctr">
-            <a:spAutoFit/>
-          </a:bodyPr>
-          <a:lstStyle/>
-          <a:p>
-            <a:r>
-              <a:rPr sz="3000" b="1">
-                <a:solidFill>
-                  <a:srgbClr val="006D77"/>
-                </a:solidFill>
-              </a:rPr>
-              <a:t>Yeni bölümler</a:t>
-            </a:r>
-          </a:p>
-        </p:txBody>
-      </p:sp>
-      <p:sp>
-        <p:nvSpPr>
-          <p:cNvPr id="7" name="TextBox 6"/>
-          <p:cNvSpPr txBox="1"/>
-          <p:nvPr/>
-        </p:nvSpPr>
-        <p:spPr>
-          <a:xfrm>
-            <a:off x="640080" y="1325880"/>
-            <a:ext cx="10911535" cy="1971040"/>
-          </a:xfrm>
-          <a:prstGeom prst="rect">
-            <a:avLst/>
-          </a:prstGeom>
-          <a:noFill/>
-        </p:spPr>
-        <p:txBody>
-          <a:bodyPr wrap="square" lIns="45720" rIns="45720">
-            <a:spAutoFit/>
-          </a:bodyPr>
-          <a:lstStyle/>
-          <a:p>
-            <a:pPr>
-              <a:spcAft>
-                <a:spcPts val="300"/>
-              </a:spcAft>
-            </a:pPr>
-            <a:r>
-              <a:rPr sz="2000" b="1">
-                <a:solidFill>
-                  <a:srgbClr val="006D77"/>
-                </a:solidFill>
-              </a:rPr>
-              <a:t>• </a:t>
-            </a:r>
-            <a:r>
-              <a:rPr sz="2000" b="0">
-                <a:solidFill>
-                  <a:srgbClr val="1F2D3A"/>
-                </a:solidFill>
-              </a:rPr>
-              <a:t>S6 kimlik/bağlama</a:t>
-            </a:r>
-          </a:p>
-          <a:p>
-            <a:pPr>
-              <a:spcAft>
-                <a:spcPts val="300"/>
-              </a:spcAft>
-            </a:pPr>
-            <a:r>
-              <a:rPr sz="2000" b="1">
-                <a:solidFill>
-                  <a:srgbClr val="006D77"/>
-                </a:solidFill>
-              </a:rPr>
-              <a:t>• </a:t>
-            </a:r>
-            <a:r>
-              <a:rPr sz="2000" b="0">
-                <a:solidFill>
-                  <a:srgbClr val="1F2D3A"/>
-                </a:solidFill>
-              </a:rPr>
-              <a:t>S8 kripto/anahtarlar</a:t>
-            </a:r>
-          </a:p>
-          <a:p>
-            <a:pPr>
-              <a:spcAft>
-                <a:spcPts val="300"/>
-              </a:spcAft>
-            </a:pPr>
-            <a:r>
-              <a:rPr sz="2000" b="1">
-                <a:solidFill>
-                  <a:srgbClr val="006D77"/>
-                </a:solidFill>
-              </a:rPr>
-              <a:t>• </a:t>
-            </a:r>
-            <a:r>
-              <a:rPr sz="2000" b="0">
-                <a:solidFill>
-                  <a:srgbClr val="1F2D3A"/>
-                </a:solidFill>
-              </a:rPr>
-              <a:t>S11 güvenli iletişim</a:t>
-            </a:r>
-          </a:p>
-          <a:p>
-            <a:pPr>
-              <a:spcAft>
-                <a:spcPts val="300"/>
-              </a:spcAft>
-            </a:pPr>
-            <a:r>
-              <a:rPr sz="2000" b="1">
-                <a:solidFill>
-                  <a:srgbClr val="006D77"/>
-                </a:solidFill>
-              </a:rPr>
-              <a:t>• </a:t>
-            </a:r>
-            <a:r>
-              <a:rPr sz="2000" b="0">
-                <a:solidFill>
-                  <a:srgbClr val="1F2D3A"/>
-                </a:solidFill>
-              </a:rPr>
-              <a:t>S14 varsayımlar/devredilenler</a:t>
-            </a:r>
-          </a:p>
-          <a:p>
-            <a:pPr>
-              <a:spcAft>
-                <a:spcPts val="300"/>
-              </a:spcAft>
-            </a:pPr>
-            <a:r>
-              <a:rPr sz="2000" b="1">
-                <a:solidFill>
-                  <a:srgbClr val="006D77"/>
-                </a:solidFill>
-              </a:rPr>
-              <a:t>• </a:t>
-            </a:r>
-            <a:r>
-              <a:rPr sz="2000" b="0">
-                <a:solidFill>
-                  <a:srgbClr val="1F2D3A"/>
-                </a:solidFill>
-              </a:rPr>
-              <a:t>S15 derleme/dağıtım hattı</a:t>
-            </a:r>
-          </a:p>
-        </p:txBody>
-      </p:sp>
-    </p:spTree>
-  </p:cSld>
-  <p:clrMapOvr>
-    <a:masterClrMapping/>
-  </p:clrMapOvr>
-</p:sld>
-</file>
-
-<file path=ppt/slides/slide24.xml><?xml version="1.0" encoding="utf-8"?>
-<p:sld xmlns:a="http://schemas.openxmlformats.org/drawingml/2006/main" xmlns:p="http://schemas.openxmlformats.org/presentationml/2006/main" xmlns:r="http://schemas.openxmlformats.org/officeDocument/2006/relationships">
-  <p:cSld>
-    <p:spTree>
-      <p:nvGrpSpPr>
-        <p:cNvPr id="1" name=""/>
-        <p:cNvGrpSpPr/>
-        <p:nvPr/>
-      </p:nvGrpSpPr>
-      <p:grpSpPr/>
-      <p:pic>
-        <p:nvPicPr>
-          <p:cNvPr id="2" name="Picture 1" descr="rteu_logo_kucuk.jpg"/>
-          <p:cNvPicPr>
-            <a:picLocks noChangeAspect="1"/>
-          </p:cNvPicPr>
-          <p:nvPr/>
-        </p:nvPicPr>
-        <p:blipFill>
-          <a:blip r:embed="rId2"/>
-          <a:stretch>
-            <a:fillRect/>
-          </a:stretch>
-        </p:blipFill>
-        <p:spPr>
-          <a:xfrm>
-            <a:off x="640080" y="164592"/>
-            <a:ext cx="242773" cy="329184"/>
-          </a:xfrm>
-          <a:prstGeom prst="rect">
-            <a:avLst/>
-          </a:prstGeom>
-        </p:spPr>
-      </p:pic>
-      <p:sp>
-        <p:nvSpPr>
-          <p:cNvPr id="3" name="TextBox 2"/>
-          <p:cNvSpPr txBox="1"/>
-          <p:nvPr/>
-        </p:nvSpPr>
-        <p:spPr>
-          <a:xfrm>
-            <a:off x="1051560" y="182880"/>
-            <a:ext cx="7315200" cy="320040"/>
-          </a:xfrm>
-          <a:prstGeom prst="rect">
-            <a:avLst/>
-          </a:prstGeom>
-          <a:noFill/>
-        </p:spPr>
-        <p:txBody>
-          <a:bodyPr wrap="square" lIns="45720" rIns="45720">
-            <a:spAutoFit/>
-          </a:bodyPr>
-          <a:lstStyle/>
-          <a:p>
-            <a:r>
-              <a:rPr sz="1100" b="0">
-                <a:solidFill>
-                  <a:srgbClr val="5B6770"/>
-                </a:solidFill>
-              </a:rPr>
-              <a:t>CEN429 Güvenli Programlama · Hafta 15</a:t>
-            </a:r>
-          </a:p>
-        </p:txBody>
-      </p:sp>
-      <p:sp>
-        <p:nvSpPr>
-          <p:cNvPr id="4" name="TextBox 3"/>
-          <p:cNvSpPr txBox="1"/>
-          <p:nvPr/>
-        </p:nvSpPr>
-        <p:spPr>
-          <a:xfrm>
-            <a:off x="640080" y="6446520"/>
-            <a:ext cx="7315200" cy="274320"/>
-          </a:xfrm>
-          <a:prstGeom prst="rect">
-            <a:avLst/>
-          </a:prstGeom>
-          <a:noFill/>
-        </p:spPr>
-        <p:txBody>
-          <a:bodyPr wrap="square" lIns="45720" rIns="45720">
-            <a:spAutoFit/>
-          </a:bodyPr>
-          <a:lstStyle/>
-          <a:p>
-            <a:r>
-              <a:rPr sz="1000" b="0">
-                <a:solidFill>
-                  <a:srgbClr val="5B6770"/>
-                </a:solidFill>
-              </a:rPr>
-              <a:t>RTEÜ Bilgisayar Mühendisliği · 2026-2027 Güz</a:t>
-            </a:r>
-          </a:p>
-        </p:txBody>
-      </p:sp>
-      <p:sp>
-        <p:nvSpPr>
-          <p:cNvPr id="5" name="TextBox 4"/>
-          <p:cNvSpPr txBox="1"/>
-          <p:nvPr/>
-        </p:nvSpPr>
-        <p:spPr>
-          <a:xfrm>
-            <a:off x="10637215" y="6446520"/>
-            <a:ext cx="914400" cy="274320"/>
-          </a:xfrm>
-          <a:prstGeom prst="rect">
-            <a:avLst/>
-          </a:prstGeom>
-          <a:noFill/>
-        </p:spPr>
-        <p:txBody>
-          <a:bodyPr wrap="square" lIns="45720" rIns="45720">
-            <a:spAutoFit/>
-          </a:bodyPr>
-          <a:lstStyle/>
-          <a:p>
-            <a:pPr algn="r"/>
-            <a:r>
-              <a:rPr sz="1000" b="0">
-                <a:solidFill>
-                  <a:srgbClr val="5B6770"/>
-                </a:solidFill>
-              </a:rPr>
-              <a:t>24</a:t>
-            </a:r>
-          </a:p>
-        </p:txBody>
-      </p:sp>
-      <p:sp>
-        <p:nvSpPr>
-          <p:cNvPr id="6" name="TextBox 5"/>
-          <p:cNvSpPr txBox="1"/>
-          <p:nvPr/>
-        </p:nvSpPr>
-        <p:spPr>
-          <a:xfrm>
-            <a:off x="640080" y="548640"/>
-            <a:ext cx="10911535" cy="731520"/>
-          </a:xfrm>
-          <a:prstGeom prst="rect">
-            <a:avLst/>
-          </a:prstGeom>
-          <a:noFill/>
-        </p:spPr>
-        <p:txBody>
-          <a:bodyPr wrap="square" lIns="45720" rIns="45720" anchor="ctr">
-            <a:spAutoFit/>
-          </a:bodyPr>
-          <a:lstStyle/>
-          <a:p>
-            <a:r>
-              <a:rPr sz="3000" b="1">
-                <a:solidFill>
-                  <a:srgbClr val="006D77"/>
-                </a:solidFill>
-              </a:rPr>
-              <a:t>Tamamlanacaklar</a:t>
-            </a:r>
-          </a:p>
-        </p:txBody>
-      </p:sp>
-      <p:sp>
-        <p:nvSpPr>
-          <p:cNvPr id="7" name="TextBox 6"/>
-          <p:cNvSpPr txBox="1"/>
-          <p:nvPr/>
-        </p:nvSpPr>
-        <p:spPr>
-          <a:xfrm>
-            <a:off x="640080" y="1325880"/>
-            <a:ext cx="10911535" cy="1971040"/>
-          </a:xfrm>
-          <a:prstGeom prst="rect">
-            <a:avLst/>
-          </a:prstGeom>
-          <a:noFill/>
-        </p:spPr>
-        <p:txBody>
-          <a:bodyPr wrap="square" lIns="45720" rIns="45720">
-            <a:spAutoFit/>
-          </a:bodyPr>
-          <a:lstStyle/>
-          <a:p>
-            <a:pPr>
-              <a:spcAft>
-                <a:spcPts val="300"/>
-              </a:spcAft>
-            </a:pPr>
-            <a:r>
-              <a:rPr sz="2000" b="1">
-                <a:solidFill>
-                  <a:srgbClr val="006D77"/>
-                </a:solidFill>
-              </a:rPr>
-              <a:t>• </a:t>
-            </a:r>
-            <a:r>
-              <a:rPr sz="2000" b="0">
-                <a:solidFill>
-                  <a:srgbClr val="1F2D3A"/>
-                </a:solidFill>
-              </a:rPr>
-              <a:t>S5 varlıklar (tam)</a:t>
-            </a:r>
-          </a:p>
-          <a:p>
-            <a:pPr>
-              <a:spcAft>
-                <a:spcPts val="300"/>
-              </a:spcAft>
-            </a:pPr>
-            <a:r>
-              <a:rPr sz="2000" b="1">
-                <a:solidFill>
-                  <a:srgbClr val="006D77"/>
-                </a:solidFill>
-              </a:rPr>
-              <a:t>• </a:t>
-            </a:r>
-            <a:r>
-              <a:rPr sz="2000" b="0">
-                <a:solidFill>
-                  <a:srgbClr val="1F2D3A"/>
-                </a:solidFill>
-              </a:rPr>
-              <a:t>S9 sağlamlaştırma (ileri)</a:t>
-            </a:r>
-          </a:p>
-          <a:p>
-            <a:pPr>
-              <a:spcAft>
-                <a:spcPts val="300"/>
-              </a:spcAft>
-            </a:pPr>
-            <a:r>
-              <a:rPr sz="2000" b="1">
-                <a:solidFill>
-                  <a:srgbClr val="006D77"/>
-                </a:solidFill>
-              </a:rPr>
-              <a:t>• </a:t>
-            </a:r>
-            <a:r>
-              <a:rPr sz="2000" b="0">
-                <a:solidFill>
-                  <a:srgbClr val="1F2D3A"/>
-                </a:solidFill>
-              </a:rPr>
-              <a:t>S12 raporlama (tam)</a:t>
-            </a:r>
-          </a:p>
-          <a:p>
-            <a:pPr>
-              <a:spcAft>
-                <a:spcPts val="300"/>
-              </a:spcAft>
-            </a:pPr>
-            <a:r>
-              <a:rPr sz="2000" b="1">
-                <a:solidFill>
-                  <a:srgbClr val="006D77"/>
-                </a:solidFill>
-              </a:rPr>
-              <a:t>• </a:t>
-            </a:r>
-            <a:r>
-              <a:rPr sz="2000" b="0">
-                <a:solidFill>
-                  <a:srgbClr val="1F2D3A"/>
-                </a:solidFill>
-              </a:rPr>
-              <a:t>S16 </a:t>
-            </a:r>
-            <a:r>
-              <a:rPr sz="2000" b="1">
-                <a:solidFill>
-                  <a:srgbClr val="1F2D3A"/>
-                </a:solidFill>
-              </a:rPr>
-              <a:t>sonuçlar</a:t>
-            </a:r>
-          </a:p>
-          <a:p>
-            <a:pPr>
-              <a:spcAft>
-                <a:spcPts val="300"/>
-              </a:spcAft>
-            </a:pPr>
-            <a:r>
-              <a:rPr sz="2000" b="1">
-                <a:solidFill>
-                  <a:srgbClr val="006D77"/>
-                </a:solidFill>
-              </a:rPr>
-              <a:t>• </a:t>
-            </a:r>
-            <a:r>
-              <a:rPr sz="2000" b="0">
-                <a:solidFill>
-                  <a:srgbClr val="1F2D3A"/>
-                </a:solidFill>
-              </a:rPr>
-              <a:t>S17 tam matris</a:t>
-            </a:r>
-          </a:p>
-        </p:txBody>
-      </p:sp>
-    </p:spTree>
-  </p:cSld>
-  <p:clrMapOvr>
-    <a:masterClrMapping/>
-  </p:clrMapOvr>
-</p:sld>
-</file>
-
-<file path=ppt/slides/slide25.xml><?xml version="1.0" encoding="utf-8"?>
-<p:sld xmlns:a="http://schemas.openxmlformats.org/drawingml/2006/main" xmlns:p="http://schemas.openxmlformats.org/presentationml/2006/main" xmlns:r="http://schemas.openxmlformats.org/officeDocument/2006/relationships">
-  <p:cSld>
-    <p:spTree>
-      <p:nvGrpSpPr>
-        <p:cNvPr id="1" name=""/>
-        <p:cNvGrpSpPr/>
-        <p:nvPr/>
-      </p:nvGrpSpPr>
-      <p:grpSpPr/>
-      <p:pic>
-        <p:nvPicPr>
-          <p:cNvPr id="2" name="Picture 1" descr="rteu_logo_kucuk.jpg"/>
-          <p:cNvPicPr>
-            <a:picLocks noChangeAspect="1"/>
-          </p:cNvPicPr>
-          <p:nvPr/>
-        </p:nvPicPr>
-        <p:blipFill>
-          <a:blip r:embed="rId2"/>
-          <a:stretch>
-            <a:fillRect/>
-          </a:stretch>
-        </p:blipFill>
-        <p:spPr>
-          <a:xfrm>
-            <a:off x="640080" y="164592"/>
-            <a:ext cx="242773" cy="329184"/>
-          </a:xfrm>
-          <a:prstGeom prst="rect">
-            <a:avLst/>
-          </a:prstGeom>
-        </p:spPr>
-      </p:pic>
-      <p:sp>
-        <p:nvSpPr>
-          <p:cNvPr id="3" name="TextBox 2"/>
-          <p:cNvSpPr txBox="1"/>
-          <p:nvPr/>
-        </p:nvSpPr>
-        <p:spPr>
-          <a:xfrm>
-            <a:off x="1051560" y="182880"/>
-            <a:ext cx="7315200" cy="320040"/>
-          </a:xfrm>
-          <a:prstGeom prst="rect">
-            <a:avLst/>
-          </a:prstGeom>
-          <a:noFill/>
-        </p:spPr>
-        <p:txBody>
-          <a:bodyPr wrap="square" lIns="45720" rIns="45720">
-            <a:spAutoFit/>
-          </a:bodyPr>
-          <a:lstStyle/>
-          <a:p>
-            <a:r>
-              <a:rPr sz="1100" b="0">
-                <a:solidFill>
-                  <a:srgbClr val="5B6770"/>
-                </a:solidFill>
-              </a:rPr>
-              <a:t>CEN429 Güvenli Programlama · Hafta 15</a:t>
-            </a:r>
-          </a:p>
-        </p:txBody>
-      </p:sp>
-      <p:sp>
-        <p:nvSpPr>
-          <p:cNvPr id="4" name="TextBox 3"/>
-          <p:cNvSpPr txBox="1"/>
-          <p:nvPr/>
-        </p:nvSpPr>
-        <p:spPr>
-          <a:xfrm>
-            <a:off x="640080" y="6446520"/>
-            <a:ext cx="7315200" cy="274320"/>
-          </a:xfrm>
-          <a:prstGeom prst="rect">
-            <a:avLst/>
-          </a:prstGeom>
-          <a:noFill/>
-        </p:spPr>
-        <p:txBody>
-          <a:bodyPr wrap="square" lIns="45720" rIns="45720">
-            <a:spAutoFit/>
-          </a:bodyPr>
-          <a:lstStyle/>
-          <a:p>
-            <a:r>
-              <a:rPr sz="1000" b="0">
-                <a:solidFill>
-                  <a:srgbClr val="5B6770"/>
-                </a:solidFill>
-              </a:rPr>
-              <a:t>RTEÜ Bilgisayar Mühendisliği · 2026-2027 Güz</a:t>
-            </a:r>
-          </a:p>
-        </p:txBody>
-      </p:sp>
-      <p:sp>
-        <p:nvSpPr>
-          <p:cNvPr id="5" name="TextBox 4"/>
-          <p:cNvSpPr txBox="1"/>
-          <p:nvPr/>
-        </p:nvSpPr>
-        <p:spPr>
-          <a:xfrm>
-            <a:off x="10637215" y="6446520"/>
-            <a:ext cx="914400" cy="274320"/>
-          </a:xfrm>
-          <a:prstGeom prst="rect">
-            <a:avLst/>
-          </a:prstGeom>
-          <a:noFill/>
-        </p:spPr>
-        <p:txBody>
-          <a:bodyPr wrap="square" lIns="45720" rIns="45720">
-            <a:spAutoFit/>
-          </a:bodyPr>
-          <a:lstStyle/>
-          <a:p>
-            <a:pPr algn="r"/>
-            <a:r>
-              <a:rPr sz="1000" b="0">
-                <a:solidFill>
-                  <a:srgbClr val="5B6770"/>
-                </a:solidFill>
-              </a:rPr>
-              <a:t>25</a:t>
-            </a:r>
-          </a:p>
-        </p:txBody>
-      </p:sp>
-      <p:sp>
-        <p:nvSpPr>
-          <p:cNvPr id="6" name="TextBox 5"/>
-          <p:cNvSpPr txBox="1"/>
-          <p:nvPr/>
-        </p:nvSpPr>
-        <p:spPr>
-          <a:xfrm>
-            <a:off x="640080" y="548640"/>
-            <a:ext cx="10911535" cy="731520"/>
-          </a:xfrm>
-          <a:prstGeom prst="rect">
-            <a:avLst/>
-          </a:prstGeom>
-          <a:noFill/>
-        </p:spPr>
-        <p:txBody>
-          <a:bodyPr wrap="square" lIns="45720" rIns="45720" anchor="ctr">
-            <a:spAutoFit/>
-          </a:bodyPr>
-          <a:lstStyle/>
-          <a:p>
-            <a:r>
-              <a:rPr sz="3000" b="1">
-                <a:solidFill>
-                  <a:srgbClr val="006D77"/>
-                </a:solidFill>
-              </a:rPr>
-              <a:t>Bulgu–aksiyon (vizeden)</a:t>
-            </a:r>
-          </a:p>
-        </p:txBody>
-      </p:sp>
-      <p:sp>
-        <p:nvSpPr>
-          <p:cNvPr id="7" name="TextBox 6"/>
-          <p:cNvSpPr txBox="1"/>
-          <p:nvPr/>
-        </p:nvSpPr>
-        <p:spPr>
-          <a:xfrm>
-            <a:off x="640080" y="1325880"/>
-            <a:ext cx="10911535" cy="1219200"/>
-          </a:xfrm>
-          <a:prstGeom prst="rect">
-            <a:avLst/>
-          </a:prstGeom>
-          <a:noFill/>
-        </p:spPr>
-        <p:txBody>
-          <a:bodyPr wrap="square" lIns="45720" rIns="45720">
-            <a:spAutoFit/>
-          </a:bodyPr>
-          <a:lstStyle/>
-          <a:p>
-            <a:pPr>
-              <a:spcAft>
-                <a:spcPts val="300"/>
-              </a:spcAft>
-            </a:pPr>
-            <a:r>
-              <a:rPr sz="2000" b="1">
-                <a:solidFill>
-                  <a:srgbClr val="006D77"/>
-                </a:solidFill>
-              </a:rPr>
-              <a:t>• </a:t>
-            </a:r>
-            <a:r>
-              <a:rPr sz="2000" b="0">
-                <a:solidFill>
-                  <a:srgbClr val="1F2D3A"/>
-                </a:solidFill>
-              </a:rPr>
-              <a:t>Vize geri bildirimleri bir tabloya:</a:t>
-            </a:r>
-          </a:p>
-          <a:p>
-            <a:pPr lvl="1">
-              <a:spcAft>
-                <a:spcPts val="300"/>
-              </a:spcAft>
-            </a:pPr>
-            <a:r>
-              <a:rPr sz="2000" b="1">
-                <a:solidFill>
-                  <a:srgbClr val="006D77"/>
-                </a:solidFill>
-              </a:rPr>
-              <a:t>    – </a:t>
-            </a:r>
-            <a:r>
-              <a:rPr sz="2000" b="0">
-                <a:solidFill>
-                  <a:srgbClr val="1F2D3A"/>
-                </a:solidFill>
-              </a:rPr>
-              <a:t>bulgu → aksiyon → kapanış.</a:t>
-            </a:r>
-          </a:p>
-          <a:p>
-            <a:pPr>
-              <a:spcAft>
-                <a:spcPts val="300"/>
-              </a:spcAft>
-            </a:pPr>
-            <a:r>
-              <a:rPr sz="2000" b="1">
-                <a:solidFill>
-                  <a:srgbClr val="006D77"/>
-                </a:solidFill>
-              </a:rPr>
-              <a:t>• </a:t>
-            </a:r>
-            <a:r>
-              <a:rPr sz="2000" b="0">
-                <a:solidFill>
-                  <a:srgbClr val="1F2D3A"/>
-                </a:solidFill>
-              </a:rPr>
-              <a:t>Değerlendirici bu döngüyü arar.</a:t>
-            </a:r>
-          </a:p>
-        </p:txBody>
-      </p:sp>
-    </p:spTree>
-  </p:cSld>
-  <p:clrMapOvr>
-    <a:masterClrMapping/>
-  </p:clrMapOvr>
-</p:sld>
-</file>
-
-<file path=ppt/slides/slide26.xml><?xml version="1.0" encoding="utf-8"?>
-<p:sld xmlns:a="http://schemas.openxmlformats.org/drawingml/2006/main" xmlns:p="http://schemas.openxmlformats.org/presentationml/2006/main" xmlns:r="http://schemas.openxmlformats.org/officeDocument/2006/relationships">
-  <p:cSld>
-    <p:bg>
-      <p:bgPr>
-        <a:solidFill>
-          <a:srgbClr val="006D77"/>
-        </a:solidFill>
-        <a:effectLst/>
-      </p:bgPr>
-    </p:bg>
-    <p:spTree>
-      <p:nvGrpSpPr>
-        <p:cNvPr id="1" name=""/>
-        <p:cNvGrpSpPr/>
-        <p:nvPr/>
-      </p:nvGrpSpPr>
-      <p:grpSpPr/>
-      <p:sp>
-        <p:nvSpPr>
-          <p:cNvPr id="2" name="TextBox 1"/>
-          <p:cNvSpPr txBox="1"/>
-          <p:nvPr/>
-        </p:nvSpPr>
-        <p:spPr>
-          <a:xfrm>
-            <a:off x="1051560" y="182880"/>
-            <a:ext cx="7315200" cy="320040"/>
-          </a:xfrm>
-          <a:prstGeom prst="rect">
-            <a:avLst/>
-          </a:prstGeom>
-          <a:noFill/>
-        </p:spPr>
-        <p:txBody>
-          <a:bodyPr wrap="square" lIns="45720" rIns="45720">
-            <a:spAutoFit/>
-          </a:bodyPr>
-          <a:lstStyle/>
-          <a:p>
-            <a:r>
-              <a:rPr sz="1100" b="0">
-                <a:solidFill>
-                  <a:srgbClr val="D8F0F2"/>
-                </a:solidFill>
-              </a:rPr>
-              <a:t>CEN429 Güvenli Programlama · Hafta 15</a:t>
-            </a:r>
-          </a:p>
-        </p:txBody>
-      </p:sp>
-      <p:sp>
-        <p:nvSpPr>
-          <p:cNvPr id="3" name="TextBox 2"/>
-          <p:cNvSpPr txBox="1"/>
-          <p:nvPr/>
-        </p:nvSpPr>
-        <p:spPr>
-          <a:xfrm>
-            <a:off x="640080" y="6446520"/>
-            <a:ext cx="7315200" cy="274320"/>
-          </a:xfrm>
-          <a:prstGeom prst="rect">
-            <a:avLst/>
-          </a:prstGeom>
-          <a:noFill/>
-        </p:spPr>
-        <p:txBody>
-          <a:bodyPr wrap="square" lIns="45720" rIns="45720">
-            <a:spAutoFit/>
-          </a:bodyPr>
-          <a:lstStyle/>
-          <a:p>
-            <a:r>
-              <a:rPr sz="1000" b="0">
-                <a:solidFill>
-                  <a:srgbClr val="D8F0F2"/>
-                </a:solidFill>
-              </a:rPr>
-              <a:t>RTEÜ Bilgisayar Mühendisliği · 2026-2027 Güz</a:t>
-            </a:r>
-          </a:p>
-        </p:txBody>
-      </p:sp>
-      <p:sp>
-        <p:nvSpPr>
-          <p:cNvPr id="4" name="TextBox 3"/>
-          <p:cNvSpPr txBox="1"/>
-          <p:nvPr/>
-        </p:nvSpPr>
-        <p:spPr>
-          <a:xfrm>
-            <a:off x="10637215" y="6446520"/>
-            <a:ext cx="914400" cy="274320"/>
-          </a:xfrm>
-          <a:prstGeom prst="rect">
-            <a:avLst/>
-          </a:prstGeom>
-          <a:noFill/>
-        </p:spPr>
-        <p:txBody>
-          <a:bodyPr wrap="square" lIns="45720" rIns="45720">
-            <a:spAutoFit/>
-          </a:bodyPr>
-          <a:lstStyle/>
-          <a:p>
-            <a:pPr algn="r"/>
-            <a:r>
-              <a:rPr sz="1000" b="0">
-                <a:solidFill>
-                  <a:srgbClr val="D8F0F2"/>
-                </a:solidFill>
-              </a:rPr>
-              <a:t>26</a:t>
-            </a:r>
-          </a:p>
-        </p:txBody>
-      </p:sp>
-      <p:sp>
-        <p:nvSpPr>
-          <p:cNvPr id="5" name="TextBox 4"/>
-          <p:cNvSpPr txBox="1"/>
-          <p:nvPr/>
-        </p:nvSpPr>
-        <p:spPr>
-          <a:xfrm>
-            <a:off x="640080" y="2743200"/>
-            <a:ext cx="10911535" cy="1280160"/>
-          </a:xfrm>
-          <a:prstGeom prst="rect">
-            <a:avLst/>
-          </a:prstGeom>
-          <a:noFill/>
-        </p:spPr>
-        <p:txBody>
-          <a:bodyPr wrap="square" lIns="45720" rIns="45720">
-            <a:spAutoFit/>
-          </a:bodyPr>
-          <a:lstStyle/>
-          <a:p>
-            <a:pPr algn="l"/>
-            <a:r>
-              <a:rPr sz="4000" b="1">
-                <a:solidFill>
-                  <a:srgbClr val="FFFFFF"/>
-                </a:solidFill>
-              </a:rPr>
-              <a:t>Ek · Gösterim akışı</a:t>
-            </a:r>
-          </a:p>
-        </p:txBody>
-      </p:sp>
-    </p:spTree>
-  </p:cSld>
-  <p:clrMapOvr>
-    <a:masterClrMapping/>
-  </p:clrMapOvr>
-</p:sld>
-</file>
-
-<file path=ppt/slides/slide27.xml><?xml version="1.0" encoding="utf-8"?>
-<p:sld xmlns:a="http://schemas.openxmlformats.org/drawingml/2006/main" xmlns:p="http://schemas.openxmlformats.org/presentationml/2006/main" xmlns:r="http://schemas.openxmlformats.org/officeDocument/2006/relationships">
-  <p:cSld>
-    <p:spTree>
-      <p:nvGrpSpPr>
-        <p:cNvPr id="1" name=""/>
-        <p:cNvGrpSpPr/>
-        <p:nvPr/>
-      </p:nvGrpSpPr>
-      <p:grpSpPr/>
-      <p:pic>
-        <p:nvPicPr>
-          <p:cNvPr id="2" name="Picture 1" descr="rteu_logo_kucuk.jpg"/>
-          <p:cNvPicPr>
-            <a:picLocks noChangeAspect="1"/>
-          </p:cNvPicPr>
-          <p:nvPr/>
-        </p:nvPicPr>
-        <p:blipFill>
-          <a:blip r:embed="rId2"/>
-          <a:stretch>
-            <a:fillRect/>
-          </a:stretch>
-        </p:blipFill>
-        <p:spPr>
-          <a:xfrm>
-            <a:off x="640080" y="164592"/>
-            <a:ext cx="242773" cy="329184"/>
-          </a:xfrm>
-          <a:prstGeom prst="rect">
-            <a:avLst/>
-          </a:prstGeom>
-        </p:spPr>
-      </p:pic>
-      <p:sp>
-        <p:nvSpPr>
-          <p:cNvPr id="3" name="TextBox 2"/>
-          <p:cNvSpPr txBox="1"/>
-          <p:nvPr/>
-        </p:nvSpPr>
-        <p:spPr>
-          <a:xfrm>
-            <a:off x="1051560" y="182880"/>
-            <a:ext cx="7315200" cy="320040"/>
-          </a:xfrm>
-          <a:prstGeom prst="rect">
-            <a:avLst/>
-          </a:prstGeom>
-          <a:noFill/>
-        </p:spPr>
-        <p:txBody>
-          <a:bodyPr wrap="square" lIns="45720" rIns="45720">
-            <a:spAutoFit/>
-          </a:bodyPr>
-          <a:lstStyle/>
-          <a:p>
-            <a:r>
-              <a:rPr sz="1100" b="0">
-                <a:solidFill>
-                  <a:srgbClr val="5B6770"/>
-                </a:solidFill>
-              </a:rPr>
-              <a:t>CEN429 Güvenli Programlama · Hafta 15</a:t>
-            </a:r>
-          </a:p>
-        </p:txBody>
-      </p:sp>
-      <p:sp>
-        <p:nvSpPr>
-          <p:cNvPr id="4" name="TextBox 3"/>
-          <p:cNvSpPr txBox="1"/>
-          <p:nvPr/>
-        </p:nvSpPr>
-        <p:spPr>
-          <a:xfrm>
-            <a:off x="640080" y="6446520"/>
-            <a:ext cx="7315200" cy="274320"/>
-          </a:xfrm>
-          <a:prstGeom prst="rect">
-            <a:avLst/>
-          </a:prstGeom>
-          <a:noFill/>
-        </p:spPr>
-        <p:txBody>
-          <a:bodyPr wrap="square" lIns="45720" rIns="45720">
-            <a:spAutoFit/>
-          </a:bodyPr>
-          <a:lstStyle/>
-          <a:p>
-            <a:r>
-              <a:rPr sz="1000" b="0">
-                <a:solidFill>
-                  <a:srgbClr val="5B6770"/>
-                </a:solidFill>
-              </a:rPr>
-              <a:t>RTEÜ Bilgisayar Mühendisliği · 2026-2027 Güz</a:t>
-            </a:r>
-          </a:p>
-        </p:txBody>
-      </p:sp>
-      <p:sp>
-        <p:nvSpPr>
-          <p:cNvPr id="5" name="TextBox 4"/>
-          <p:cNvSpPr txBox="1"/>
-          <p:nvPr/>
-        </p:nvSpPr>
-        <p:spPr>
-          <a:xfrm>
-            <a:off x="10637215" y="6446520"/>
-            <a:ext cx="914400" cy="274320"/>
-          </a:xfrm>
-          <a:prstGeom prst="rect">
-            <a:avLst/>
-          </a:prstGeom>
-          <a:noFill/>
-        </p:spPr>
-        <p:txBody>
-          <a:bodyPr wrap="square" lIns="45720" rIns="45720">
-            <a:spAutoFit/>
-          </a:bodyPr>
-          <a:lstStyle/>
-          <a:p>
-            <a:pPr algn="r"/>
-            <a:r>
-              <a:rPr sz="1000" b="0">
-                <a:solidFill>
-                  <a:srgbClr val="5B6770"/>
-                </a:solidFill>
-              </a:rPr>
-              <a:t>27</a:t>
-            </a:r>
-          </a:p>
-        </p:txBody>
-      </p:sp>
-      <p:sp>
-        <p:nvSpPr>
-          <p:cNvPr id="6" name="TextBox 5"/>
-          <p:cNvSpPr txBox="1"/>
-          <p:nvPr/>
-        </p:nvSpPr>
-        <p:spPr>
-          <a:xfrm>
-            <a:off x="640080" y="548640"/>
-            <a:ext cx="10911535" cy="731520"/>
-          </a:xfrm>
-          <a:prstGeom prst="rect">
-            <a:avLst/>
-          </a:prstGeom>
-          <a:noFill/>
-        </p:spPr>
-        <p:txBody>
-          <a:bodyPr wrap="square" lIns="45720" rIns="45720" anchor="ctr">
-            <a:spAutoFit/>
-          </a:bodyPr>
-          <a:lstStyle/>
-          <a:p>
-            <a:r>
-              <a:rPr sz="3000" b="1">
-                <a:solidFill>
-                  <a:srgbClr val="006D77"/>
-                </a:solidFill>
-              </a:rPr>
-              <a:t>Akış · özet + vizeden bu yana</a:t>
-            </a:r>
-          </a:p>
-        </p:txBody>
-      </p:sp>
-      <p:sp>
-        <p:nvSpPr>
-          <p:cNvPr id="7" name="TextBox 6"/>
-          <p:cNvSpPr txBox="1"/>
-          <p:nvPr/>
-        </p:nvSpPr>
-        <p:spPr>
-          <a:xfrm>
-            <a:off x="640080" y="1325880"/>
-            <a:ext cx="10911535" cy="843280"/>
-          </a:xfrm>
-          <a:prstGeom prst="rect">
-            <a:avLst/>
-          </a:prstGeom>
-          <a:noFill/>
-        </p:spPr>
-        <p:txBody>
-          <a:bodyPr wrap="square" lIns="45720" rIns="45720">
-            <a:spAutoFit/>
-          </a:bodyPr>
-          <a:lstStyle/>
-          <a:p>
-            <a:pPr>
-              <a:spcAft>
-                <a:spcPts val="300"/>
-              </a:spcAft>
-            </a:pPr>
-            <a:r>
-              <a:rPr sz="2000" b="1">
-                <a:solidFill>
-                  <a:srgbClr val="006D77"/>
-                </a:solidFill>
-              </a:rPr>
-              <a:t>• </a:t>
-            </a:r>
-            <a:r>
-              <a:rPr sz="2000" b="0">
-                <a:solidFill>
-                  <a:srgbClr val="1F2D3A"/>
-                </a:solidFill>
-              </a:rPr>
-              <a:t>Ürün, mimari, en kritik üç varlık.</a:t>
-            </a:r>
-          </a:p>
-          <a:p>
-            <a:pPr>
-              <a:spcAft>
-                <a:spcPts val="300"/>
-              </a:spcAft>
-            </a:pPr>
-            <a:r>
-              <a:rPr sz="2000" b="1">
-                <a:solidFill>
-                  <a:srgbClr val="006D77"/>
-                </a:solidFill>
-              </a:rPr>
-              <a:t>• </a:t>
-            </a:r>
-            <a:r>
-              <a:rPr sz="2000" b="0">
-                <a:solidFill>
-                  <a:srgbClr val="1F2D3A"/>
-                </a:solidFill>
-              </a:rPr>
-              <a:t>Bulgu–aksiyon listesi.</a:t>
-            </a:r>
-          </a:p>
-        </p:txBody>
-      </p:sp>
-    </p:spTree>
-  </p:cSld>
-  <p:clrMapOvr>
-    <a:masterClrMapping/>
-  </p:clrMapOvr>
-</p:sld>
-</file>
-
-<file path=ppt/slides/slide28.xml><?xml version="1.0" encoding="utf-8"?>
-<p:sld xmlns:a="http://schemas.openxmlformats.org/drawingml/2006/main" xmlns:p="http://schemas.openxmlformats.org/presentationml/2006/main" xmlns:r="http://schemas.openxmlformats.org/officeDocument/2006/relationships">
-  <p:cSld>
-    <p:spTree>
-      <p:nvGrpSpPr>
-        <p:cNvPr id="1" name=""/>
-        <p:cNvGrpSpPr/>
-        <p:nvPr/>
-      </p:nvGrpSpPr>
-      <p:grpSpPr/>
-      <p:pic>
-        <p:nvPicPr>
-          <p:cNvPr id="2" name="Picture 1" descr="rteu_logo_kucuk.jpg"/>
-          <p:cNvPicPr>
-            <a:picLocks noChangeAspect="1"/>
-          </p:cNvPicPr>
-          <p:nvPr/>
-        </p:nvPicPr>
-        <p:blipFill>
-          <a:blip r:embed="rId2"/>
-          <a:stretch>
-            <a:fillRect/>
-          </a:stretch>
-        </p:blipFill>
-        <p:spPr>
-          <a:xfrm>
-            <a:off x="640080" y="164592"/>
-            <a:ext cx="242773" cy="329184"/>
-          </a:xfrm>
-          <a:prstGeom prst="rect">
-            <a:avLst/>
-          </a:prstGeom>
-        </p:spPr>
-      </p:pic>
-      <p:sp>
-        <p:nvSpPr>
-          <p:cNvPr id="3" name="TextBox 2"/>
-          <p:cNvSpPr txBox="1"/>
-          <p:nvPr/>
-        </p:nvSpPr>
-        <p:spPr>
-          <a:xfrm>
-            <a:off x="1051560" y="182880"/>
-            <a:ext cx="7315200" cy="320040"/>
-          </a:xfrm>
-          <a:prstGeom prst="rect">
-            <a:avLst/>
-          </a:prstGeom>
-          <a:noFill/>
-        </p:spPr>
-        <p:txBody>
-          <a:bodyPr wrap="square" lIns="45720" rIns="45720">
-            <a:spAutoFit/>
-          </a:bodyPr>
-          <a:lstStyle/>
-          <a:p>
-            <a:r>
-              <a:rPr sz="1100" b="0">
-                <a:solidFill>
-                  <a:srgbClr val="5B6770"/>
-                </a:solidFill>
-              </a:rPr>
-              <a:t>CEN429 Güvenli Programlama · Hafta 15</a:t>
-            </a:r>
-          </a:p>
-        </p:txBody>
-      </p:sp>
-      <p:sp>
-        <p:nvSpPr>
-          <p:cNvPr id="4" name="TextBox 3"/>
-          <p:cNvSpPr txBox="1"/>
-          <p:nvPr/>
-        </p:nvSpPr>
-        <p:spPr>
-          <a:xfrm>
-            <a:off x="640080" y="6446520"/>
-            <a:ext cx="7315200" cy="274320"/>
-          </a:xfrm>
-          <a:prstGeom prst="rect">
-            <a:avLst/>
-          </a:prstGeom>
-          <a:noFill/>
-        </p:spPr>
-        <p:txBody>
-          <a:bodyPr wrap="square" lIns="45720" rIns="45720">
-            <a:spAutoFit/>
-          </a:bodyPr>
-          <a:lstStyle/>
-          <a:p>
-            <a:r>
-              <a:rPr sz="1000" b="0">
-                <a:solidFill>
-                  <a:srgbClr val="5B6770"/>
-                </a:solidFill>
-              </a:rPr>
-              <a:t>RTEÜ Bilgisayar Mühendisliği · 2026-2027 Güz</a:t>
-            </a:r>
-          </a:p>
-        </p:txBody>
-      </p:sp>
-      <p:sp>
-        <p:nvSpPr>
-          <p:cNvPr id="5" name="TextBox 4"/>
-          <p:cNvSpPr txBox="1"/>
-          <p:nvPr/>
-        </p:nvSpPr>
-        <p:spPr>
-          <a:xfrm>
-            <a:off x="10637215" y="6446520"/>
-            <a:ext cx="914400" cy="274320"/>
-          </a:xfrm>
-          <a:prstGeom prst="rect">
-            <a:avLst/>
-          </a:prstGeom>
-          <a:noFill/>
-        </p:spPr>
-        <p:txBody>
-          <a:bodyPr wrap="square" lIns="45720" rIns="45720">
-            <a:spAutoFit/>
-          </a:bodyPr>
-          <a:lstStyle/>
-          <a:p>
-            <a:pPr algn="r"/>
-            <a:r>
-              <a:rPr sz="1000" b="0">
-                <a:solidFill>
-                  <a:srgbClr val="5B6770"/>
-                </a:solidFill>
-              </a:rPr>
-              <a:t>28</a:t>
-            </a:r>
-          </a:p>
-        </p:txBody>
-      </p:sp>
-      <p:sp>
-        <p:nvSpPr>
-          <p:cNvPr id="6" name="TextBox 5"/>
-          <p:cNvSpPr txBox="1"/>
-          <p:nvPr/>
-        </p:nvSpPr>
-        <p:spPr>
-          <a:xfrm>
-            <a:off x="640080" y="548640"/>
-            <a:ext cx="10911535" cy="731520"/>
-          </a:xfrm>
-          <a:prstGeom prst="rect">
-            <a:avLst/>
-          </a:prstGeom>
-          <a:noFill/>
-        </p:spPr>
-        <p:txBody>
-          <a:bodyPr wrap="square" lIns="45720" rIns="45720" anchor="ctr">
-            <a:spAutoFit/>
-          </a:bodyPr>
-          <a:lstStyle/>
-          <a:p>
-            <a:r>
-              <a:rPr sz="3000" b="1">
-                <a:solidFill>
-                  <a:srgbClr val="006D77"/>
-                </a:solidFill>
-              </a:rPr>
-              <a:t>Akış · canlı gösterim</a:t>
-            </a:r>
-          </a:p>
-        </p:txBody>
-      </p:sp>
-      <p:sp>
-        <p:nvSpPr>
-          <p:cNvPr id="7" name="TextBox 6"/>
-          <p:cNvSpPr txBox="1"/>
-          <p:nvPr/>
-        </p:nvSpPr>
-        <p:spPr>
-          <a:xfrm>
-            <a:off x="640080" y="1325880"/>
-            <a:ext cx="10911535" cy="843280"/>
-          </a:xfrm>
-          <a:prstGeom prst="rect">
-            <a:avLst/>
-          </a:prstGeom>
-          <a:noFill/>
-        </p:spPr>
-        <p:txBody>
-          <a:bodyPr wrap="square" lIns="45720" rIns="45720">
-            <a:spAutoFit/>
-          </a:bodyPr>
-          <a:lstStyle/>
-          <a:p>
-            <a:pPr>
-              <a:spcAft>
-                <a:spcPts val="300"/>
-              </a:spcAft>
-            </a:pPr>
-            <a:r>
-              <a:rPr sz="2000" b="1">
-                <a:solidFill>
-                  <a:srgbClr val="006D77"/>
-                </a:solidFill>
-              </a:rPr>
-              <a:t>• </a:t>
-            </a:r>
-            <a:r>
-              <a:rPr sz="2000" b="0">
-                <a:solidFill>
-                  <a:srgbClr val="1F2D3A"/>
-                </a:solidFill>
-              </a:rPr>
-              <a:t>Kripto, güvenli iletişim ve </a:t>
-            </a:r>
-            <a:r>
-              <a:rPr sz="2000" b="1">
-                <a:solidFill>
-                  <a:srgbClr val="1F2D3A"/>
-                </a:solidFill>
-              </a:rPr>
-              <a:t>bir koruma katmanı</a:t>
-            </a:r>
-            <a:r>
-              <a:rPr sz="2000" b="0">
-                <a:solidFill>
-                  <a:srgbClr val="1F2D3A"/>
-                </a:solidFill>
-              </a:rPr>
-              <a:t> çalışırken.</a:t>
-            </a:r>
-          </a:p>
-          <a:p>
-            <a:pPr>
-              <a:spcAft>
-                <a:spcPts val="300"/>
-              </a:spcAft>
-            </a:pPr>
-            <a:r>
-              <a:rPr sz="2000" b="1">
-                <a:solidFill>
-                  <a:srgbClr val="006D77"/>
-                </a:solidFill>
-              </a:rPr>
-              <a:t>• </a:t>
-            </a:r>
-            <a:r>
-              <a:rPr sz="2000" b="0">
-                <a:solidFill>
-                  <a:srgbClr val="1F2D3A"/>
-                </a:solidFill>
-              </a:rPr>
-              <a:t>Ör. kurcalanmış dosyanın reddi.</a:t>
-            </a:r>
-          </a:p>
-        </p:txBody>
-      </p:sp>
-    </p:spTree>
-  </p:cSld>
-  <p:clrMapOvr>
-    <a:masterClrMapping/>
-  </p:clrMapOvr>
-</p:sld>
-</file>
-
-<file path=ppt/slides/slide29.xml><?xml version="1.0" encoding="utf-8"?>
-<p:sld xmlns:a="http://schemas.openxmlformats.org/drawingml/2006/main" xmlns:p="http://schemas.openxmlformats.org/presentationml/2006/main" xmlns:r="http://schemas.openxmlformats.org/officeDocument/2006/relationships">
-  <p:cSld>
-    <p:spTree>
-      <p:nvGrpSpPr>
-        <p:cNvPr id="1" name=""/>
-        <p:cNvGrpSpPr/>
-        <p:nvPr/>
-      </p:nvGrpSpPr>
-      <p:grpSpPr/>
-      <p:pic>
-        <p:nvPicPr>
-          <p:cNvPr id="2" name="Picture 1" descr="rteu_logo_kucuk.jpg"/>
-          <p:cNvPicPr>
-            <a:picLocks noChangeAspect="1"/>
-          </p:cNvPicPr>
-          <p:nvPr/>
-        </p:nvPicPr>
-        <p:blipFill>
-          <a:blip r:embed="rId2"/>
-          <a:stretch>
-            <a:fillRect/>
-          </a:stretch>
-        </p:blipFill>
-        <p:spPr>
-          <a:xfrm>
-            <a:off x="640080" y="164592"/>
-            <a:ext cx="242773" cy="329184"/>
-          </a:xfrm>
-          <a:prstGeom prst="rect">
-            <a:avLst/>
-          </a:prstGeom>
-        </p:spPr>
-      </p:pic>
-      <p:sp>
-        <p:nvSpPr>
-          <p:cNvPr id="3" name="TextBox 2"/>
-          <p:cNvSpPr txBox="1"/>
-          <p:nvPr/>
-        </p:nvSpPr>
-        <p:spPr>
-          <a:xfrm>
-            <a:off x="1051560" y="182880"/>
-            <a:ext cx="7315200" cy="320040"/>
-          </a:xfrm>
-          <a:prstGeom prst="rect">
-            <a:avLst/>
-          </a:prstGeom>
-          <a:noFill/>
-        </p:spPr>
-        <p:txBody>
-          <a:bodyPr wrap="square" lIns="45720" rIns="45720">
-            <a:spAutoFit/>
-          </a:bodyPr>
-          <a:lstStyle/>
-          <a:p>
-            <a:r>
-              <a:rPr sz="1100" b="0">
-                <a:solidFill>
-                  <a:srgbClr val="5B6770"/>
-                </a:solidFill>
-              </a:rPr>
-              <a:t>CEN429 Güvenli Programlama · Hafta 15</a:t>
-            </a:r>
-          </a:p>
-        </p:txBody>
-      </p:sp>
-      <p:sp>
-        <p:nvSpPr>
-          <p:cNvPr id="4" name="TextBox 3"/>
-          <p:cNvSpPr txBox="1"/>
-          <p:nvPr/>
-        </p:nvSpPr>
-        <p:spPr>
-          <a:xfrm>
-            <a:off x="640080" y="6446520"/>
-            <a:ext cx="7315200" cy="274320"/>
-          </a:xfrm>
-          <a:prstGeom prst="rect">
-            <a:avLst/>
-          </a:prstGeom>
-          <a:noFill/>
-        </p:spPr>
-        <p:txBody>
-          <a:bodyPr wrap="square" lIns="45720" rIns="45720">
-            <a:spAutoFit/>
-          </a:bodyPr>
-          <a:lstStyle/>
-          <a:p>
-            <a:r>
-              <a:rPr sz="1000" b="0">
-                <a:solidFill>
-                  <a:srgbClr val="5B6770"/>
-                </a:solidFill>
-              </a:rPr>
-              <a:t>RTEÜ Bilgisayar Mühendisliği · 2026-2027 Güz</a:t>
-            </a:r>
-          </a:p>
-        </p:txBody>
-      </p:sp>
-      <p:sp>
-        <p:nvSpPr>
-          <p:cNvPr id="5" name="TextBox 4"/>
-          <p:cNvSpPr txBox="1"/>
-          <p:nvPr/>
-        </p:nvSpPr>
-        <p:spPr>
-          <a:xfrm>
-            <a:off x="10637215" y="6446520"/>
-            <a:ext cx="914400" cy="274320"/>
-          </a:xfrm>
-          <a:prstGeom prst="rect">
-            <a:avLst/>
-          </a:prstGeom>
-          <a:noFill/>
-        </p:spPr>
-        <p:txBody>
-          <a:bodyPr wrap="square" lIns="45720" rIns="45720">
-            <a:spAutoFit/>
-          </a:bodyPr>
-          <a:lstStyle/>
-          <a:p>
-            <a:pPr algn="r"/>
-            <a:r>
-              <a:rPr sz="1000" b="0">
-                <a:solidFill>
-                  <a:srgbClr val="5B6770"/>
-                </a:solidFill>
-              </a:rPr>
-              <a:t>29</a:t>
-            </a:r>
-          </a:p>
-        </p:txBody>
-      </p:sp>
-      <p:sp>
-        <p:nvSpPr>
-          <p:cNvPr id="6" name="TextBox 5"/>
-          <p:cNvSpPr txBox="1"/>
-          <p:nvPr/>
-        </p:nvSpPr>
-        <p:spPr>
-          <a:xfrm>
-            <a:off x="640080" y="548640"/>
-            <a:ext cx="10911535" cy="731520"/>
-          </a:xfrm>
-          <a:prstGeom prst="rect">
-            <a:avLst/>
-          </a:prstGeom>
-          <a:noFill/>
-        </p:spPr>
-        <p:txBody>
-          <a:bodyPr wrap="square" lIns="45720" rIns="45720" anchor="ctr">
-            <a:spAutoFit/>
-          </a:bodyPr>
-          <a:lstStyle/>
-          <a:p>
-            <a:r>
-              <a:rPr sz="3000" b="1">
-                <a:solidFill>
-                  <a:srgbClr val="006D77"/>
-                </a:solidFill>
-              </a:rPr>
-              <a:t>Akış · kanıt + kalan risk</a:t>
-            </a:r>
-          </a:p>
-        </p:txBody>
-      </p:sp>
-      <p:sp>
-        <p:nvSpPr>
-          <p:cNvPr id="7" name="TextBox 6"/>
-          <p:cNvSpPr txBox="1"/>
-          <p:nvPr/>
-        </p:nvSpPr>
-        <p:spPr>
-          <a:xfrm>
-            <a:off x="640080" y="1325880"/>
-            <a:ext cx="10911535" cy="843280"/>
-          </a:xfrm>
-          <a:prstGeom prst="rect">
-            <a:avLst/>
-          </a:prstGeom>
-          <a:noFill/>
-        </p:spPr>
-        <p:txBody>
-          <a:bodyPr wrap="square" lIns="45720" rIns="45720">
-            <a:spAutoFit/>
-          </a:bodyPr>
-          <a:lstStyle/>
-          <a:p>
-            <a:pPr>
-              <a:spcAft>
-                <a:spcPts val="300"/>
-              </a:spcAft>
-            </a:pPr>
-            <a:r>
-              <a:rPr sz="2000" b="1">
-                <a:solidFill>
-                  <a:srgbClr val="006D77"/>
-                </a:solidFill>
-              </a:rPr>
-              <a:t>• </a:t>
-            </a:r>
-            <a:r>
-              <a:rPr sz="2000" b="0">
-                <a:solidFill>
-                  <a:srgbClr val="1F2D3A"/>
-                </a:solidFill>
-              </a:rPr>
-              <a:t>Testler, koruma tablosu, SBOM, uyum matrisi.</a:t>
-            </a:r>
-          </a:p>
-          <a:p>
-            <a:pPr>
-              <a:spcAft>
-                <a:spcPts val="300"/>
-              </a:spcAft>
-            </a:pPr>
-            <a:r>
-              <a:rPr sz="2000" b="1">
-                <a:solidFill>
-                  <a:srgbClr val="006D77"/>
-                </a:solidFill>
-              </a:rPr>
-              <a:t>• </a:t>
-            </a:r>
-            <a:r>
-              <a:rPr sz="2000" b="0">
-                <a:solidFill>
-                  <a:srgbClr val="1F2D3A"/>
-                </a:solidFill>
-              </a:rPr>
-              <a:t>Kalan risk: bilerek kapsam dışı olanlar.</a:t>
-            </a:r>
-          </a:p>
-        </p:txBody>
-      </p:sp>
-    </p:spTree>
-  </p:cSld>
-  <p:clrMapOvr>
-    <a:masterClrMapping/>
-  </p:clrMapOvr>
-</p:sld>
-</file>
-
 <file path=ppt/slides/slide3.xml><?xml version="1.0" encoding="utf-8"?>
 <p:sld xmlns:a="http://schemas.openxmlformats.org/drawingml/2006/main" xmlns:p="http://schemas.openxmlformats.org/presentationml/2006/main" xmlns:r="http://schemas.openxmlformats.org/officeDocument/2006/relationships">
   <p:cSld>
@@ -9675,6 +5866,205 @@
                 </a:solidFill>
               </a:rPr>
               <a:t>3</a:t>
+            </a:r>
+          </a:p>
+        </p:txBody>
+      </p:sp>
+      <p:sp>
+        <p:nvSpPr>
+          <p:cNvPr id="6" name="TextBox 5"/>
+          <p:cNvSpPr txBox="1"/>
+          <p:nvPr/>
+        </p:nvSpPr>
+        <p:spPr>
+          <a:xfrm>
+            <a:off x="640080" y="548640"/>
+            <a:ext cx="10911535" cy="731520"/>
+          </a:xfrm>
+          <a:prstGeom prst="rect">
+            <a:avLst/>
+          </a:prstGeom>
+          <a:noFill/>
+        </p:spPr>
+        <p:txBody>
+          <a:bodyPr wrap="square" lIns="45720" rIns="45720" anchor="ctr">
+            <a:spAutoFit/>
+          </a:bodyPr>
+          <a:lstStyle/>
+          <a:p>
+            <a:r>
+              <a:rPr sz="3000" b="1">
+                <a:solidFill>
+                  <a:srgbClr val="006D77"/>
+                </a:solidFill>
+              </a:rPr>
+              <a:t>RAP2 teslimi — şema</a:t>
+            </a:r>
+          </a:p>
+        </p:txBody>
+      </p:sp>
+      <p:pic>
+        <p:nvPicPr>
+          <p:cNvPr id="7" name="Picture 6" descr="h15-01-rap2.png"/>
+          <p:cNvPicPr>
+            <a:picLocks noChangeAspect="1"/>
+          </p:cNvPicPr>
+          <p:nvPr/>
+        </p:nvPicPr>
+        <p:blipFill>
+          <a:blip r:embed="rId3"/>
+          <a:stretch>
+            <a:fillRect/>
+          </a:stretch>
+        </p:blipFill>
+        <p:spPr>
+          <a:xfrm>
+            <a:off x="1335562" y="1325880"/>
+            <a:ext cx="9520571" cy="4828032"/>
+          </a:xfrm>
+          <a:prstGeom prst="rect">
+            <a:avLst/>
+          </a:prstGeom>
+        </p:spPr>
+      </p:pic>
+    </p:spTree>
+  </p:cSld>
+  <p:clrMapOvr>
+    <a:masterClrMapping/>
+  </p:clrMapOvr>
+</p:sld>
+</file>
+
+<file path=ppt/slides/slide4.xml><?xml version="1.0" encoding="utf-8"?>
+<p:sld xmlns:a="http://schemas.openxmlformats.org/drawingml/2006/main" xmlns:p="http://schemas.openxmlformats.org/presentationml/2006/main" xmlns:r="http://schemas.openxmlformats.org/officeDocument/2006/relationships">
+  <p:cSld>
+    <p:spTree>
+      <p:nvGrpSpPr>
+        <p:cNvPr id="1" name=""/>
+        <p:cNvGrpSpPr/>
+        <p:nvPr/>
+      </p:nvGrpSpPr>
+      <p:grpSpPr/>
+      <p:pic>
+        <p:nvPicPr>
+          <p:cNvPr id="2" name="Picture 1" descr="rteu_logo_kucuk.jpg"/>
+          <p:cNvPicPr>
+            <a:picLocks noChangeAspect="1"/>
+          </p:cNvPicPr>
+          <p:nvPr/>
+        </p:nvPicPr>
+        <p:blipFill>
+          <a:blip r:embed="rId2"/>
+          <a:stretch>
+            <a:fillRect/>
+          </a:stretch>
+        </p:blipFill>
+        <p:spPr>
+          <a:xfrm>
+            <a:off x="640080" y="164592"/>
+            <a:ext cx="242773" cy="329184"/>
+          </a:xfrm>
+          <a:prstGeom prst="rect">
+            <a:avLst/>
+          </a:prstGeom>
+        </p:spPr>
+      </p:pic>
+      <p:sp>
+        <p:nvSpPr>
+          <p:cNvPr id="3" name="TextBox 2"/>
+          <p:cNvSpPr txBox="1"/>
+          <p:nvPr/>
+        </p:nvSpPr>
+        <p:spPr>
+          <a:xfrm>
+            <a:off x="1051560" y="182880"/>
+            <a:ext cx="7315200" cy="320040"/>
+          </a:xfrm>
+          <a:prstGeom prst="rect">
+            <a:avLst/>
+          </a:prstGeom>
+          <a:noFill/>
+        </p:spPr>
+        <p:txBody>
+          <a:bodyPr wrap="square" lIns="45720" rIns="45720">
+            <a:spAutoFit/>
+          </a:bodyPr>
+          <a:lstStyle/>
+          <a:p>
+            <a:r>
+              <a:rPr sz="1100" b="0">
+                <a:solidFill>
+                  <a:srgbClr val="5B6770"/>
+                </a:solidFill>
+              </a:rPr>
+              <a:t>CEN429 Güvenli Programlama · Hafta 15</a:t>
+            </a:r>
+          </a:p>
+        </p:txBody>
+      </p:sp>
+      <p:sp>
+        <p:nvSpPr>
+          <p:cNvPr id="4" name="TextBox 3"/>
+          <p:cNvSpPr txBox="1"/>
+          <p:nvPr/>
+        </p:nvSpPr>
+        <p:spPr>
+          <a:xfrm>
+            <a:off x="640080" y="6446520"/>
+            <a:ext cx="7315200" cy="274320"/>
+          </a:xfrm>
+          <a:prstGeom prst="rect">
+            <a:avLst/>
+          </a:prstGeom>
+          <a:noFill/>
+        </p:spPr>
+        <p:txBody>
+          <a:bodyPr wrap="square" lIns="45720" rIns="45720">
+            <a:spAutoFit/>
+          </a:bodyPr>
+          <a:lstStyle/>
+          <a:p>
+            <a:r>
+              <a:rPr sz="1000" b="0">
+                <a:solidFill>
+                  <a:srgbClr val="5B6770"/>
+                </a:solidFill>
+              </a:rPr>
+              <a:t>RTEÜ Bilgisayar Mühendisliği · 2026-2027 Güz</a:t>
+            </a:r>
+          </a:p>
+        </p:txBody>
+      </p:sp>
+      <p:sp>
+        <p:nvSpPr>
+          <p:cNvPr id="5" name="TextBox 4"/>
+          <p:cNvSpPr txBox="1"/>
+          <p:nvPr/>
+        </p:nvSpPr>
+        <p:spPr>
+          <a:xfrm>
+            <a:off x="10637215" y="6446520"/>
+            <a:ext cx="914400" cy="274320"/>
+          </a:xfrm>
+          <a:prstGeom prst="rect">
+            <a:avLst/>
+          </a:prstGeom>
+          <a:noFill/>
+        </p:spPr>
+        <p:txBody>
+          <a:bodyPr wrap="square" lIns="45720" rIns="45720">
+            <a:spAutoFit/>
+          </a:bodyPr>
+          <a:lstStyle/>
+          <a:p>
+            <a:pPr algn="r"/>
+            <a:r>
+              <a:rPr sz="1000" b="0">
+                <a:solidFill>
+                  <a:srgbClr val="5B6770"/>
+                </a:solidFill>
+              </a:rPr>
+              <a:t>4</a:t>
             </a:r>
           </a:p>
         </p:txBody>
@@ -10275,2216 +6665,6 @@
 </p:sld>
 </file>
 
-<file path=ppt/slides/slide30.xml><?xml version="1.0" encoding="utf-8"?>
-<p:sld xmlns:a="http://schemas.openxmlformats.org/drawingml/2006/main" xmlns:p="http://schemas.openxmlformats.org/presentationml/2006/main" xmlns:r="http://schemas.openxmlformats.org/officeDocument/2006/relationships">
-  <p:cSld>
-    <p:bg>
-      <p:bgPr>
-        <a:solidFill>
-          <a:srgbClr val="006D77"/>
-        </a:solidFill>
-        <a:effectLst/>
-      </p:bgPr>
-    </p:bg>
-    <p:spTree>
-      <p:nvGrpSpPr>
-        <p:cNvPr id="1" name=""/>
-        <p:cNvGrpSpPr/>
-        <p:nvPr/>
-      </p:nvGrpSpPr>
-      <p:grpSpPr/>
-      <p:sp>
-        <p:nvSpPr>
-          <p:cNvPr id="2" name="TextBox 1"/>
-          <p:cNvSpPr txBox="1"/>
-          <p:nvPr/>
-        </p:nvSpPr>
-        <p:spPr>
-          <a:xfrm>
-            <a:off x="1051560" y="182880"/>
-            <a:ext cx="7315200" cy="320040"/>
-          </a:xfrm>
-          <a:prstGeom prst="rect">
-            <a:avLst/>
-          </a:prstGeom>
-          <a:noFill/>
-        </p:spPr>
-        <p:txBody>
-          <a:bodyPr wrap="square" lIns="45720" rIns="45720">
-            <a:spAutoFit/>
-          </a:bodyPr>
-          <a:lstStyle/>
-          <a:p>
-            <a:r>
-              <a:rPr sz="1100" b="0">
-                <a:solidFill>
-                  <a:srgbClr val="D8F0F2"/>
-                </a:solidFill>
-              </a:rPr>
-              <a:t>CEN429 Güvenli Programlama · Hafta 15</a:t>
-            </a:r>
-          </a:p>
-        </p:txBody>
-      </p:sp>
-      <p:sp>
-        <p:nvSpPr>
-          <p:cNvPr id="3" name="TextBox 2"/>
-          <p:cNvSpPr txBox="1"/>
-          <p:nvPr/>
-        </p:nvSpPr>
-        <p:spPr>
-          <a:xfrm>
-            <a:off x="640080" y="6446520"/>
-            <a:ext cx="7315200" cy="274320"/>
-          </a:xfrm>
-          <a:prstGeom prst="rect">
-            <a:avLst/>
-          </a:prstGeom>
-          <a:noFill/>
-        </p:spPr>
-        <p:txBody>
-          <a:bodyPr wrap="square" lIns="45720" rIns="45720">
-            <a:spAutoFit/>
-          </a:bodyPr>
-          <a:lstStyle/>
-          <a:p>
-            <a:r>
-              <a:rPr sz="1000" b="0">
-                <a:solidFill>
-                  <a:srgbClr val="D8F0F2"/>
-                </a:solidFill>
-              </a:rPr>
-              <a:t>RTEÜ Bilgisayar Mühendisliği · 2026-2027 Güz</a:t>
-            </a:r>
-          </a:p>
-        </p:txBody>
-      </p:sp>
-      <p:sp>
-        <p:nvSpPr>
-          <p:cNvPr id="4" name="TextBox 3"/>
-          <p:cNvSpPr txBox="1"/>
-          <p:nvPr/>
-        </p:nvSpPr>
-        <p:spPr>
-          <a:xfrm>
-            <a:off x="10637215" y="6446520"/>
-            <a:ext cx="914400" cy="274320"/>
-          </a:xfrm>
-          <a:prstGeom prst="rect">
-            <a:avLst/>
-          </a:prstGeom>
-          <a:noFill/>
-        </p:spPr>
-        <p:txBody>
-          <a:bodyPr wrap="square" lIns="45720" rIns="45720">
-            <a:spAutoFit/>
-          </a:bodyPr>
-          <a:lstStyle/>
-          <a:p>
-            <a:pPr algn="r"/>
-            <a:r>
-              <a:rPr sz="1000" b="0">
-                <a:solidFill>
-                  <a:srgbClr val="D8F0F2"/>
-                </a:solidFill>
-              </a:rPr>
-              <a:t>30</a:t>
-            </a:r>
-          </a:p>
-        </p:txBody>
-      </p:sp>
-      <p:sp>
-        <p:nvSpPr>
-          <p:cNvPr id="5" name="TextBox 4"/>
-          <p:cNvSpPr txBox="1"/>
-          <p:nvPr/>
-        </p:nvSpPr>
-        <p:spPr>
-          <a:xfrm>
-            <a:off x="640080" y="2743200"/>
-            <a:ext cx="10911535" cy="1280160"/>
-          </a:xfrm>
-          <a:prstGeom prst="rect">
-            <a:avLst/>
-          </a:prstGeom>
-          <a:noFill/>
-        </p:spPr>
-        <p:txBody>
-          <a:bodyPr wrap="square" lIns="45720" rIns="45720">
-            <a:spAutoFit/>
-          </a:bodyPr>
-          <a:lstStyle/>
-          <a:p>
-            <a:pPr algn="l"/>
-            <a:r>
-              <a:rPr sz="4000" b="1">
-                <a:solidFill>
-                  <a:srgbClr val="FFFFFF"/>
-                </a:solidFill>
-              </a:rPr>
-              <a:t>Ek · Örnek sorular</a:t>
-            </a:r>
-          </a:p>
-        </p:txBody>
-      </p:sp>
-    </p:spTree>
-  </p:cSld>
-  <p:clrMapOvr>
-    <a:masterClrMapping/>
-  </p:clrMapOvr>
-</p:sld>
-</file>
-
-<file path=ppt/slides/slide31.xml><?xml version="1.0" encoding="utf-8"?>
-<p:sld xmlns:a="http://schemas.openxmlformats.org/drawingml/2006/main" xmlns:p="http://schemas.openxmlformats.org/presentationml/2006/main" xmlns:r="http://schemas.openxmlformats.org/officeDocument/2006/relationships">
-  <p:cSld>
-    <p:spTree>
-      <p:nvGrpSpPr>
-        <p:cNvPr id="1" name=""/>
-        <p:cNvGrpSpPr/>
-        <p:nvPr/>
-      </p:nvGrpSpPr>
-      <p:grpSpPr/>
-      <p:pic>
-        <p:nvPicPr>
-          <p:cNvPr id="2" name="Picture 1" descr="rteu_logo_kucuk.jpg"/>
-          <p:cNvPicPr>
-            <a:picLocks noChangeAspect="1"/>
-          </p:cNvPicPr>
-          <p:nvPr/>
-        </p:nvPicPr>
-        <p:blipFill>
-          <a:blip r:embed="rId2"/>
-          <a:stretch>
-            <a:fillRect/>
-          </a:stretch>
-        </p:blipFill>
-        <p:spPr>
-          <a:xfrm>
-            <a:off x="640080" y="164592"/>
-            <a:ext cx="242773" cy="329184"/>
-          </a:xfrm>
-          <a:prstGeom prst="rect">
-            <a:avLst/>
-          </a:prstGeom>
-        </p:spPr>
-      </p:pic>
-      <p:sp>
-        <p:nvSpPr>
-          <p:cNvPr id="3" name="TextBox 2"/>
-          <p:cNvSpPr txBox="1"/>
-          <p:nvPr/>
-        </p:nvSpPr>
-        <p:spPr>
-          <a:xfrm>
-            <a:off x="1051560" y="182880"/>
-            <a:ext cx="7315200" cy="320040"/>
-          </a:xfrm>
-          <a:prstGeom prst="rect">
-            <a:avLst/>
-          </a:prstGeom>
-          <a:noFill/>
-        </p:spPr>
-        <p:txBody>
-          <a:bodyPr wrap="square" lIns="45720" rIns="45720">
-            <a:spAutoFit/>
-          </a:bodyPr>
-          <a:lstStyle/>
-          <a:p>
-            <a:r>
-              <a:rPr sz="1100" b="0">
-                <a:solidFill>
-                  <a:srgbClr val="5B6770"/>
-                </a:solidFill>
-              </a:rPr>
-              <a:t>CEN429 Güvenli Programlama · Hafta 15</a:t>
-            </a:r>
-          </a:p>
-        </p:txBody>
-      </p:sp>
-      <p:sp>
-        <p:nvSpPr>
-          <p:cNvPr id="4" name="TextBox 3"/>
-          <p:cNvSpPr txBox="1"/>
-          <p:nvPr/>
-        </p:nvSpPr>
-        <p:spPr>
-          <a:xfrm>
-            <a:off x="640080" y="6446520"/>
-            <a:ext cx="7315200" cy="274320"/>
-          </a:xfrm>
-          <a:prstGeom prst="rect">
-            <a:avLst/>
-          </a:prstGeom>
-          <a:noFill/>
-        </p:spPr>
-        <p:txBody>
-          <a:bodyPr wrap="square" lIns="45720" rIns="45720">
-            <a:spAutoFit/>
-          </a:bodyPr>
-          <a:lstStyle/>
-          <a:p>
-            <a:r>
-              <a:rPr sz="1000" b="0">
-                <a:solidFill>
-                  <a:srgbClr val="5B6770"/>
-                </a:solidFill>
-              </a:rPr>
-              <a:t>RTEÜ Bilgisayar Mühendisliği · 2026-2027 Güz</a:t>
-            </a:r>
-          </a:p>
-        </p:txBody>
-      </p:sp>
-      <p:sp>
-        <p:nvSpPr>
-          <p:cNvPr id="5" name="TextBox 4"/>
-          <p:cNvSpPr txBox="1"/>
-          <p:nvPr/>
-        </p:nvSpPr>
-        <p:spPr>
-          <a:xfrm>
-            <a:off x="10637215" y="6446520"/>
-            <a:ext cx="914400" cy="274320"/>
-          </a:xfrm>
-          <a:prstGeom prst="rect">
-            <a:avLst/>
-          </a:prstGeom>
-          <a:noFill/>
-        </p:spPr>
-        <p:txBody>
-          <a:bodyPr wrap="square" lIns="45720" rIns="45720">
-            <a:spAutoFit/>
-          </a:bodyPr>
-          <a:lstStyle/>
-          <a:p>
-            <a:pPr algn="r"/>
-            <a:r>
-              <a:rPr sz="1000" b="0">
-                <a:solidFill>
-                  <a:srgbClr val="5B6770"/>
-                </a:solidFill>
-              </a:rPr>
-              <a:t>31</a:t>
-            </a:r>
-          </a:p>
-        </p:txBody>
-      </p:sp>
-      <p:sp>
-        <p:nvSpPr>
-          <p:cNvPr id="6" name="TextBox 5"/>
-          <p:cNvSpPr txBox="1"/>
-          <p:nvPr/>
-        </p:nvSpPr>
-        <p:spPr>
-          <a:xfrm>
-            <a:off x="640080" y="548640"/>
-            <a:ext cx="10911535" cy="731520"/>
-          </a:xfrm>
-          <a:prstGeom prst="rect">
-            <a:avLst/>
-          </a:prstGeom>
-          <a:noFill/>
-        </p:spPr>
-        <p:txBody>
-          <a:bodyPr wrap="square" lIns="45720" rIns="45720" anchor="ctr">
-            <a:spAutoFit/>
-          </a:bodyPr>
-          <a:lstStyle/>
-          <a:p>
-            <a:r>
-              <a:rPr sz="3000" b="1">
-                <a:solidFill>
-                  <a:srgbClr val="006D77"/>
-                </a:solidFill>
-              </a:rPr>
-              <a:t>Soru 1</a:t>
-            </a:r>
-          </a:p>
-        </p:txBody>
-      </p:sp>
-      <p:sp>
-        <p:nvSpPr>
-          <p:cNvPr id="7" name="TextBox 6"/>
-          <p:cNvSpPr txBox="1"/>
-          <p:nvPr/>
-        </p:nvSpPr>
-        <p:spPr>
-          <a:xfrm>
-            <a:off x="640080" y="1325880"/>
-            <a:ext cx="10911535" cy="439928"/>
-          </a:xfrm>
-          <a:prstGeom prst="rect">
-            <a:avLst/>
-          </a:prstGeom>
-          <a:noFill/>
-        </p:spPr>
-        <p:txBody>
-          <a:bodyPr wrap="square" lIns="45720" rIns="45720">
-            <a:spAutoFit/>
-          </a:bodyPr>
-          <a:lstStyle/>
-          <a:p>
-            <a:pPr algn="l"/>
-            <a:r>
-              <a:rPr sz="2000" b="1">
-                <a:solidFill>
-                  <a:srgbClr val="1F2D3A"/>
-                </a:solidFill>
-              </a:rPr>
-              <a:t>Bu anahtar hangi anahtardan türetiliyor, nerede duruyor, ne zaman siliniyor?</a:t>
-            </a:r>
-          </a:p>
-        </p:txBody>
-      </p:sp>
-    </p:spTree>
-  </p:cSld>
-  <p:clrMapOvr>
-    <a:masterClrMapping/>
-  </p:clrMapOvr>
-</p:sld>
-</file>
-
-<file path=ppt/slides/slide32.xml><?xml version="1.0" encoding="utf-8"?>
-<p:sld xmlns:a="http://schemas.openxmlformats.org/drawingml/2006/main" xmlns:p="http://schemas.openxmlformats.org/presentationml/2006/main" xmlns:r="http://schemas.openxmlformats.org/officeDocument/2006/relationships">
-  <p:cSld>
-    <p:spTree>
-      <p:nvGrpSpPr>
-        <p:cNvPr id="1" name=""/>
-        <p:cNvGrpSpPr/>
-        <p:nvPr/>
-      </p:nvGrpSpPr>
-      <p:grpSpPr/>
-      <p:pic>
-        <p:nvPicPr>
-          <p:cNvPr id="2" name="Picture 1" descr="rteu_logo_kucuk.jpg"/>
-          <p:cNvPicPr>
-            <a:picLocks noChangeAspect="1"/>
-          </p:cNvPicPr>
-          <p:nvPr/>
-        </p:nvPicPr>
-        <p:blipFill>
-          <a:blip r:embed="rId2"/>
-          <a:stretch>
-            <a:fillRect/>
-          </a:stretch>
-        </p:blipFill>
-        <p:spPr>
-          <a:xfrm>
-            <a:off x="640080" y="164592"/>
-            <a:ext cx="242773" cy="329184"/>
-          </a:xfrm>
-          <a:prstGeom prst="rect">
-            <a:avLst/>
-          </a:prstGeom>
-        </p:spPr>
-      </p:pic>
-      <p:sp>
-        <p:nvSpPr>
-          <p:cNvPr id="3" name="TextBox 2"/>
-          <p:cNvSpPr txBox="1"/>
-          <p:nvPr/>
-        </p:nvSpPr>
-        <p:spPr>
-          <a:xfrm>
-            <a:off x="1051560" y="182880"/>
-            <a:ext cx="7315200" cy="320040"/>
-          </a:xfrm>
-          <a:prstGeom prst="rect">
-            <a:avLst/>
-          </a:prstGeom>
-          <a:noFill/>
-        </p:spPr>
-        <p:txBody>
-          <a:bodyPr wrap="square" lIns="45720" rIns="45720">
-            <a:spAutoFit/>
-          </a:bodyPr>
-          <a:lstStyle/>
-          <a:p>
-            <a:r>
-              <a:rPr sz="1100" b="0">
-                <a:solidFill>
-                  <a:srgbClr val="5B6770"/>
-                </a:solidFill>
-              </a:rPr>
-              <a:t>CEN429 Güvenli Programlama · Hafta 15</a:t>
-            </a:r>
-          </a:p>
-        </p:txBody>
-      </p:sp>
-      <p:sp>
-        <p:nvSpPr>
-          <p:cNvPr id="4" name="TextBox 3"/>
-          <p:cNvSpPr txBox="1"/>
-          <p:nvPr/>
-        </p:nvSpPr>
-        <p:spPr>
-          <a:xfrm>
-            <a:off x="640080" y="6446520"/>
-            <a:ext cx="7315200" cy="274320"/>
-          </a:xfrm>
-          <a:prstGeom prst="rect">
-            <a:avLst/>
-          </a:prstGeom>
-          <a:noFill/>
-        </p:spPr>
-        <p:txBody>
-          <a:bodyPr wrap="square" lIns="45720" rIns="45720">
-            <a:spAutoFit/>
-          </a:bodyPr>
-          <a:lstStyle/>
-          <a:p>
-            <a:r>
-              <a:rPr sz="1000" b="0">
-                <a:solidFill>
-                  <a:srgbClr val="5B6770"/>
-                </a:solidFill>
-              </a:rPr>
-              <a:t>RTEÜ Bilgisayar Mühendisliği · 2026-2027 Güz</a:t>
-            </a:r>
-          </a:p>
-        </p:txBody>
-      </p:sp>
-      <p:sp>
-        <p:nvSpPr>
-          <p:cNvPr id="5" name="TextBox 4"/>
-          <p:cNvSpPr txBox="1"/>
-          <p:nvPr/>
-        </p:nvSpPr>
-        <p:spPr>
-          <a:xfrm>
-            <a:off x="10637215" y="6446520"/>
-            <a:ext cx="914400" cy="274320"/>
-          </a:xfrm>
-          <a:prstGeom prst="rect">
-            <a:avLst/>
-          </a:prstGeom>
-          <a:noFill/>
-        </p:spPr>
-        <p:txBody>
-          <a:bodyPr wrap="square" lIns="45720" rIns="45720">
-            <a:spAutoFit/>
-          </a:bodyPr>
-          <a:lstStyle/>
-          <a:p>
-            <a:pPr algn="r"/>
-            <a:r>
-              <a:rPr sz="1000" b="0">
-                <a:solidFill>
-                  <a:srgbClr val="5B6770"/>
-                </a:solidFill>
-              </a:rPr>
-              <a:t>32</a:t>
-            </a:r>
-          </a:p>
-        </p:txBody>
-      </p:sp>
-      <p:sp>
-        <p:nvSpPr>
-          <p:cNvPr id="6" name="TextBox 5"/>
-          <p:cNvSpPr txBox="1"/>
-          <p:nvPr/>
-        </p:nvSpPr>
-        <p:spPr>
-          <a:xfrm>
-            <a:off x="640080" y="548640"/>
-            <a:ext cx="10911535" cy="731520"/>
-          </a:xfrm>
-          <a:prstGeom prst="rect">
-            <a:avLst/>
-          </a:prstGeom>
-          <a:noFill/>
-        </p:spPr>
-        <p:txBody>
-          <a:bodyPr wrap="square" lIns="45720" rIns="45720" anchor="ctr">
-            <a:spAutoFit/>
-          </a:bodyPr>
-          <a:lstStyle/>
-          <a:p>
-            <a:r>
-              <a:rPr sz="3000" b="1">
-                <a:solidFill>
-                  <a:srgbClr val="006D77"/>
-                </a:solidFill>
-              </a:rPr>
-              <a:t>Soru 2</a:t>
-            </a:r>
-          </a:p>
-        </p:txBody>
-      </p:sp>
-      <p:sp>
-        <p:nvSpPr>
-          <p:cNvPr id="7" name="TextBox 6"/>
-          <p:cNvSpPr txBox="1"/>
-          <p:nvPr/>
-        </p:nvSpPr>
-        <p:spPr>
-          <a:xfrm>
-            <a:off x="640080" y="1325880"/>
-            <a:ext cx="10911535" cy="439928"/>
-          </a:xfrm>
-          <a:prstGeom prst="rect">
-            <a:avLst/>
-          </a:prstGeom>
-          <a:noFill/>
-        </p:spPr>
-        <p:txBody>
-          <a:bodyPr wrap="square" lIns="45720" rIns="45720">
-            <a:spAutoFit/>
-          </a:bodyPr>
-          <a:lstStyle/>
-          <a:p>
-            <a:pPr algn="l"/>
-            <a:r>
-              <a:rPr sz="2000" b="1">
-                <a:solidFill>
-                  <a:srgbClr val="1F2D3A"/>
-                </a:solidFill>
-              </a:rPr>
-              <a:t>Sertifika zinciri ve ad denetimi nerede yapılıyor?</a:t>
-            </a:r>
-          </a:p>
-        </p:txBody>
-      </p:sp>
-    </p:spTree>
-  </p:cSld>
-  <p:clrMapOvr>
-    <a:masterClrMapping/>
-  </p:clrMapOvr>
-</p:sld>
-</file>
-
-<file path=ppt/slides/slide33.xml><?xml version="1.0" encoding="utf-8"?>
-<p:sld xmlns:a="http://schemas.openxmlformats.org/drawingml/2006/main" xmlns:p="http://schemas.openxmlformats.org/presentationml/2006/main" xmlns:r="http://schemas.openxmlformats.org/officeDocument/2006/relationships">
-  <p:cSld>
-    <p:spTree>
-      <p:nvGrpSpPr>
-        <p:cNvPr id="1" name=""/>
-        <p:cNvGrpSpPr/>
-        <p:nvPr/>
-      </p:nvGrpSpPr>
-      <p:grpSpPr/>
-      <p:pic>
-        <p:nvPicPr>
-          <p:cNvPr id="2" name="Picture 1" descr="rteu_logo_kucuk.jpg"/>
-          <p:cNvPicPr>
-            <a:picLocks noChangeAspect="1"/>
-          </p:cNvPicPr>
-          <p:nvPr/>
-        </p:nvPicPr>
-        <p:blipFill>
-          <a:blip r:embed="rId2"/>
-          <a:stretch>
-            <a:fillRect/>
-          </a:stretch>
-        </p:blipFill>
-        <p:spPr>
-          <a:xfrm>
-            <a:off x="640080" y="164592"/>
-            <a:ext cx="242773" cy="329184"/>
-          </a:xfrm>
-          <a:prstGeom prst="rect">
-            <a:avLst/>
-          </a:prstGeom>
-        </p:spPr>
-      </p:pic>
-      <p:sp>
-        <p:nvSpPr>
-          <p:cNvPr id="3" name="TextBox 2"/>
-          <p:cNvSpPr txBox="1"/>
-          <p:nvPr/>
-        </p:nvSpPr>
-        <p:spPr>
-          <a:xfrm>
-            <a:off x="1051560" y="182880"/>
-            <a:ext cx="7315200" cy="320040"/>
-          </a:xfrm>
-          <a:prstGeom prst="rect">
-            <a:avLst/>
-          </a:prstGeom>
-          <a:noFill/>
-        </p:spPr>
-        <p:txBody>
-          <a:bodyPr wrap="square" lIns="45720" rIns="45720">
-            <a:spAutoFit/>
-          </a:bodyPr>
-          <a:lstStyle/>
-          <a:p>
-            <a:r>
-              <a:rPr sz="1100" b="0">
-                <a:solidFill>
-                  <a:srgbClr val="5B6770"/>
-                </a:solidFill>
-              </a:rPr>
-              <a:t>CEN429 Güvenli Programlama · Hafta 15</a:t>
-            </a:r>
-          </a:p>
-        </p:txBody>
-      </p:sp>
-      <p:sp>
-        <p:nvSpPr>
-          <p:cNvPr id="4" name="TextBox 3"/>
-          <p:cNvSpPr txBox="1"/>
-          <p:nvPr/>
-        </p:nvSpPr>
-        <p:spPr>
-          <a:xfrm>
-            <a:off x="640080" y="6446520"/>
-            <a:ext cx="7315200" cy="274320"/>
-          </a:xfrm>
-          <a:prstGeom prst="rect">
-            <a:avLst/>
-          </a:prstGeom>
-          <a:noFill/>
-        </p:spPr>
-        <p:txBody>
-          <a:bodyPr wrap="square" lIns="45720" rIns="45720">
-            <a:spAutoFit/>
-          </a:bodyPr>
-          <a:lstStyle/>
-          <a:p>
-            <a:r>
-              <a:rPr sz="1000" b="0">
-                <a:solidFill>
-                  <a:srgbClr val="5B6770"/>
-                </a:solidFill>
-              </a:rPr>
-              <a:t>RTEÜ Bilgisayar Mühendisliği · 2026-2027 Güz</a:t>
-            </a:r>
-          </a:p>
-        </p:txBody>
-      </p:sp>
-      <p:sp>
-        <p:nvSpPr>
-          <p:cNvPr id="5" name="TextBox 4"/>
-          <p:cNvSpPr txBox="1"/>
-          <p:nvPr/>
-        </p:nvSpPr>
-        <p:spPr>
-          <a:xfrm>
-            <a:off x="10637215" y="6446520"/>
-            <a:ext cx="914400" cy="274320"/>
-          </a:xfrm>
-          <a:prstGeom prst="rect">
-            <a:avLst/>
-          </a:prstGeom>
-          <a:noFill/>
-        </p:spPr>
-        <p:txBody>
-          <a:bodyPr wrap="square" lIns="45720" rIns="45720">
-            <a:spAutoFit/>
-          </a:bodyPr>
-          <a:lstStyle/>
-          <a:p>
-            <a:pPr algn="r"/>
-            <a:r>
-              <a:rPr sz="1000" b="0">
-                <a:solidFill>
-                  <a:srgbClr val="5B6770"/>
-                </a:solidFill>
-              </a:rPr>
-              <a:t>33</a:t>
-            </a:r>
-          </a:p>
-        </p:txBody>
-      </p:sp>
-      <p:sp>
-        <p:nvSpPr>
-          <p:cNvPr id="6" name="TextBox 5"/>
-          <p:cNvSpPr txBox="1"/>
-          <p:nvPr/>
-        </p:nvSpPr>
-        <p:spPr>
-          <a:xfrm>
-            <a:off x="640080" y="548640"/>
-            <a:ext cx="10911535" cy="731520"/>
-          </a:xfrm>
-          <a:prstGeom prst="rect">
-            <a:avLst/>
-          </a:prstGeom>
-          <a:noFill/>
-        </p:spPr>
-        <p:txBody>
-          <a:bodyPr wrap="square" lIns="45720" rIns="45720" anchor="ctr">
-            <a:spAutoFit/>
-          </a:bodyPr>
-          <a:lstStyle/>
-          <a:p>
-            <a:r>
-              <a:rPr sz="3000" b="1">
-                <a:solidFill>
-                  <a:srgbClr val="006D77"/>
-                </a:solidFill>
-              </a:rPr>
-              <a:t>Soru 3</a:t>
-            </a:r>
-          </a:p>
-        </p:txBody>
-      </p:sp>
-      <p:sp>
-        <p:nvSpPr>
-          <p:cNvPr id="7" name="TextBox 6"/>
-          <p:cNvSpPr txBox="1"/>
-          <p:nvPr/>
-        </p:nvSpPr>
-        <p:spPr>
-          <a:xfrm>
-            <a:off x="640080" y="1325880"/>
-            <a:ext cx="10911535" cy="439928"/>
-          </a:xfrm>
-          <a:prstGeom prst="rect">
-            <a:avLst/>
-          </a:prstGeom>
-          <a:noFill/>
-        </p:spPr>
-        <p:txBody>
-          <a:bodyPr wrap="square" lIns="45720" rIns="45720">
-            <a:spAutoFit/>
-          </a:bodyPr>
-          <a:lstStyle/>
-          <a:p>
-            <a:pPr algn="l"/>
-            <a:r>
-              <a:rPr sz="2000" b="1">
-                <a:solidFill>
-                  <a:srgbClr val="1F2D3A"/>
-                </a:solidFill>
-              </a:rPr>
-              <a:t>İmza doğrulaması başarısızsa ne oluyor? Eski imzalı sürüm yüklenebilir mi?</a:t>
-            </a:r>
-          </a:p>
-        </p:txBody>
-      </p:sp>
-    </p:spTree>
-  </p:cSld>
-  <p:clrMapOvr>
-    <a:masterClrMapping/>
-  </p:clrMapOvr>
-</p:sld>
-</file>
-
-<file path=ppt/slides/slide34.xml><?xml version="1.0" encoding="utf-8"?>
-<p:sld xmlns:a="http://schemas.openxmlformats.org/drawingml/2006/main" xmlns:p="http://schemas.openxmlformats.org/presentationml/2006/main" xmlns:r="http://schemas.openxmlformats.org/officeDocument/2006/relationships">
-  <p:cSld>
-    <p:spTree>
-      <p:nvGrpSpPr>
-        <p:cNvPr id="1" name=""/>
-        <p:cNvGrpSpPr/>
-        <p:nvPr/>
-      </p:nvGrpSpPr>
-      <p:grpSpPr/>
-      <p:pic>
-        <p:nvPicPr>
-          <p:cNvPr id="2" name="Picture 1" descr="rteu_logo_kucuk.jpg"/>
-          <p:cNvPicPr>
-            <a:picLocks noChangeAspect="1"/>
-          </p:cNvPicPr>
-          <p:nvPr/>
-        </p:nvPicPr>
-        <p:blipFill>
-          <a:blip r:embed="rId2"/>
-          <a:stretch>
-            <a:fillRect/>
-          </a:stretch>
-        </p:blipFill>
-        <p:spPr>
-          <a:xfrm>
-            <a:off x="640080" y="164592"/>
-            <a:ext cx="242773" cy="329184"/>
-          </a:xfrm>
-          <a:prstGeom prst="rect">
-            <a:avLst/>
-          </a:prstGeom>
-        </p:spPr>
-      </p:pic>
-      <p:sp>
-        <p:nvSpPr>
-          <p:cNvPr id="3" name="TextBox 2"/>
-          <p:cNvSpPr txBox="1"/>
-          <p:nvPr/>
-        </p:nvSpPr>
-        <p:spPr>
-          <a:xfrm>
-            <a:off x="1051560" y="182880"/>
-            <a:ext cx="7315200" cy="320040"/>
-          </a:xfrm>
-          <a:prstGeom prst="rect">
-            <a:avLst/>
-          </a:prstGeom>
-          <a:noFill/>
-        </p:spPr>
-        <p:txBody>
-          <a:bodyPr wrap="square" lIns="45720" rIns="45720">
-            <a:spAutoFit/>
-          </a:bodyPr>
-          <a:lstStyle/>
-          <a:p>
-            <a:r>
-              <a:rPr sz="1100" b="0">
-                <a:solidFill>
-                  <a:srgbClr val="5B6770"/>
-                </a:solidFill>
-              </a:rPr>
-              <a:t>CEN429 Güvenli Programlama · Hafta 15</a:t>
-            </a:r>
-          </a:p>
-        </p:txBody>
-      </p:sp>
-      <p:sp>
-        <p:nvSpPr>
-          <p:cNvPr id="4" name="TextBox 3"/>
-          <p:cNvSpPr txBox="1"/>
-          <p:nvPr/>
-        </p:nvSpPr>
-        <p:spPr>
-          <a:xfrm>
-            <a:off x="640080" y="6446520"/>
-            <a:ext cx="7315200" cy="274320"/>
-          </a:xfrm>
-          <a:prstGeom prst="rect">
-            <a:avLst/>
-          </a:prstGeom>
-          <a:noFill/>
-        </p:spPr>
-        <p:txBody>
-          <a:bodyPr wrap="square" lIns="45720" rIns="45720">
-            <a:spAutoFit/>
-          </a:bodyPr>
-          <a:lstStyle/>
-          <a:p>
-            <a:r>
-              <a:rPr sz="1000" b="0">
-                <a:solidFill>
-                  <a:srgbClr val="5B6770"/>
-                </a:solidFill>
-              </a:rPr>
-              <a:t>RTEÜ Bilgisayar Mühendisliği · 2026-2027 Güz</a:t>
-            </a:r>
-          </a:p>
-        </p:txBody>
-      </p:sp>
-      <p:sp>
-        <p:nvSpPr>
-          <p:cNvPr id="5" name="TextBox 4"/>
-          <p:cNvSpPr txBox="1"/>
-          <p:nvPr/>
-        </p:nvSpPr>
-        <p:spPr>
-          <a:xfrm>
-            <a:off x="10637215" y="6446520"/>
-            <a:ext cx="914400" cy="274320"/>
-          </a:xfrm>
-          <a:prstGeom prst="rect">
-            <a:avLst/>
-          </a:prstGeom>
-          <a:noFill/>
-        </p:spPr>
-        <p:txBody>
-          <a:bodyPr wrap="square" lIns="45720" rIns="45720">
-            <a:spAutoFit/>
-          </a:bodyPr>
-          <a:lstStyle/>
-          <a:p>
-            <a:pPr algn="r"/>
-            <a:r>
-              <a:rPr sz="1000" b="0">
-                <a:solidFill>
-                  <a:srgbClr val="5B6770"/>
-                </a:solidFill>
-              </a:rPr>
-              <a:t>34</a:t>
-            </a:r>
-          </a:p>
-        </p:txBody>
-      </p:sp>
-      <p:sp>
-        <p:nvSpPr>
-          <p:cNvPr id="6" name="TextBox 5"/>
-          <p:cNvSpPr txBox="1"/>
-          <p:nvPr/>
-        </p:nvSpPr>
-        <p:spPr>
-          <a:xfrm>
-            <a:off x="640080" y="548640"/>
-            <a:ext cx="10911535" cy="731520"/>
-          </a:xfrm>
-          <a:prstGeom prst="rect">
-            <a:avLst/>
-          </a:prstGeom>
-          <a:noFill/>
-        </p:spPr>
-        <p:txBody>
-          <a:bodyPr wrap="square" lIns="45720" rIns="45720" anchor="ctr">
-            <a:spAutoFit/>
-          </a:bodyPr>
-          <a:lstStyle/>
-          <a:p>
-            <a:r>
-              <a:rPr sz="3000" b="1">
-                <a:solidFill>
-                  <a:srgbClr val="006D77"/>
-                </a:solidFill>
-              </a:rPr>
-              <a:t>Soru 4</a:t>
-            </a:r>
-          </a:p>
-        </p:txBody>
-      </p:sp>
-      <p:sp>
-        <p:nvSpPr>
-          <p:cNvPr id="7" name="TextBox 6"/>
-          <p:cNvSpPr txBox="1"/>
-          <p:nvPr/>
-        </p:nvSpPr>
-        <p:spPr>
-          <a:xfrm>
-            <a:off x="640080" y="1325880"/>
-            <a:ext cx="10911535" cy="439928"/>
-          </a:xfrm>
-          <a:prstGeom prst="rect">
-            <a:avLst/>
-          </a:prstGeom>
-          <a:noFill/>
-        </p:spPr>
-        <p:txBody>
-          <a:bodyPr wrap="square" lIns="45720" rIns="45720">
-            <a:spAutoFit/>
-          </a:bodyPr>
-          <a:lstStyle/>
-          <a:p>
-            <a:pPr algn="l"/>
-            <a:r>
-              <a:rPr sz="2000" b="1">
-                <a:solidFill>
-                  <a:srgbClr val="1F2D3A"/>
-                </a:solidFill>
-              </a:rPr>
-              <a:t>Gizlemenin maliyetini ölçtünüz mü? Hangi fonksiyonu neden gizlediniz?</a:t>
-            </a:r>
-          </a:p>
-        </p:txBody>
-      </p:sp>
-    </p:spTree>
-  </p:cSld>
-  <p:clrMapOvr>
-    <a:masterClrMapping/>
-  </p:clrMapOvr>
-</p:sld>
-</file>
-
-<file path=ppt/slides/slide35.xml><?xml version="1.0" encoding="utf-8"?>
-<p:sld xmlns:a="http://schemas.openxmlformats.org/drawingml/2006/main" xmlns:p="http://schemas.openxmlformats.org/presentationml/2006/main" xmlns:r="http://schemas.openxmlformats.org/officeDocument/2006/relationships">
-  <p:cSld>
-    <p:spTree>
-      <p:nvGrpSpPr>
-        <p:cNvPr id="1" name=""/>
-        <p:cNvGrpSpPr/>
-        <p:nvPr/>
-      </p:nvGrpSpPr>
-      <p:grpSpPr/>
-      <p:pic>
-        <p:nvPicPr>
-          <p:cNvPr id="2" name="Picture 1" descr="rteu_logo_kucuk.jpg"/>
-          <p:cNvPicPr>
-            <a:picLocks noChangeAspect="1"/>
-          </p:cNvPicPr>
-          <p:nvPr/>
-        </p:nvPicPr>
-        <p:blipFill>
-          <a:blip r:embed="rId2"/>
-          <a:stretch>
-            <a:fillRect/>
-          </a:stretch>
-        </p:blipFill>
-        <p:spPr>
-          <a:xfrm>
-            <a:off x="640080" y="164592"/>
-            <a:ext cx="242773" cy="329184"/>
-          </a:xfrm>
-          <a:prstGeom prst="rect">
-            <a:avLst/>
-          </a:prstGeom>
-        </p:spPr>
-      </p:pic>
-      <p:sp>
-        <p:nvSpPr>
-          <p:cNvPr id="3" name="TextBox 2"/>
-          <p:cNvSpPr txBox="1"/>
-          <p:nvPr/>
-        </p:nvSpPr>
-        <p:spPr>
-          <a:xfrm>
-            <a:off x="1051560" y="182880"/>
-            <a:ext cx="7315200" cy="320040"/>
-          </a:xfrm>
-          <a:prstGeom prst="rect">
-            <a:avLst/>
-          </a:prstGeom>
-          <a:noFill/>
-        </p:spPr>
-        <p:txBody>
-          <a:bodyPr wrap="square" lIns="45720" rIns="45720">
-            <a:spAutoFit/>
-          </a:bodyPr>
-          <a:lstStyle/>
-          <a:p>
-            <a:r>
-              <a:rPr sz="1100" b="0">
-                <a:solidFill>
-                  <a:srgbClr val="5B6770"/>
-                </a:solidFill>
-              </a:rPr>
-              <a:t>CEN429 Güvenli Programlama · Hafta 15</a:t>
-            </a:r>
-          </a:p>
-        </p:txBody>
-      </p:sp>
-      <p:sp>
-        <p:nvSpPr>
-          <p:cNvPr id="4" name="TextBox 3"/>
-          <p:cNvSpPr txBox="1"/>
-          <p:nvPr/>
-        </p:nvSpPr>
-        <p:spPr>
-          <a:xfrm>
-            <a:off x="640080" y="6446520"/>
-            <a:ext cx="7315200" cy="274320"/>
-          </a:xfrm>
-          <a:prstGeom prst="rect">
-            <a:avLst/>
-          </a:prstGeom>
-          <a:noFill/>
-        </p:spPr>
-        <p:txBody>
-          <a:bodyPr wrap="square" lIns="45720" rIns="45720">
-            <a:spAutoFit/>
-          </a:bodyPr>
-          <a:lstStyle/>
-          <a:p>
-            <a:r>
-              <a:rPr sz="1000" b="0">
-                <a:solidFill>
-                  <a:srgbClr val="5B6770"/>
-                </a:solidFill>
-              </a:rPr>
-              <a:t>RTEÜ Bilgisayar Mühendisliği · 2026-2027 Güz</a:t>
-            </a:r>
-          </a:p>
-        </p:txBody>
-      </p:sp>
-      <p:sp>
-        <p:nvSpPr>
-          <p:cNvPr id="5" name="TextBox 4"/>
-          <p:cNvSpPr txBox="1"/>
-          <p:nvPr/>
-        </p:nvSpPr>
-        <p:spPr>
-          <a:xfrm>
-            <a:off x="10637215" y="6446520"/>
-            <a:ext cx="914400" cy="274320"/>
-          </a:xfrm>
-          <a:prstGeom prst="rect">
-            <a:avLst/>
-          </a:prstGeom>
-          <a:noFill/>
-        </p:spPr>
-        <p:txBody>
-          <a:bodyPr wrap="square" lIns="45720" rIns="45720">
-            <a:spAutoFit/>
-          </a:bodyPr>
-          <a:lstStyle/>
-          <a:p>
-            <a:pPr algn="r"/>
-            <a:r>
-              <a:rPr sz="1000" b="0">
-                <a:solidFill>
-                  <a:srgbClr val="5B6770"/>
-                </a:solidFill>
-              </a:rPr>
-              <a:t>35</a:t>
-            </a:r>
-          </a:p>
-        </p:txBody>
-      </p:sp>
-      <p:sp>
-        <p:nvSpPr>
-          <p:cNvPr id="6" name="TextBox 5"/>
-          <p:cNvSpPr txBox="1"/>
-          <p:nvPr/>
-        </p:nvSpPr>
-        <p:spPr>
-          <a:xfrm>
-            <a:off x="640080" y="548640"/>
-            <a:ext cx="10911535" cy="731520"/>
-          </a:xfrm>
-          <a:prstGeom prst="rect">
-            <a:avLst/>
-          </a:prstGeom>
-          <a:noFill/>
-        </p:spPr>
-        <p:txBody>
-          <a:bodyPr wrap="square" lIns="45720" rIns="45720" anchor="ctr">
-            <a:spAutoFit/>
-          </a:bodyPr>
-          <a:lstStyle/>
-          <a:p>
-            <a:r>
-              <a:rPr sz="3000" b="1">
-                <a:solidFill>
-                  <a:srgbClr val="006D77"/>
-                </a:solidFill>
-              </a:rPr>
-              <a:t>Soru 5</a:t>
-            </a:r>
-          </a:p>
-        </p:txBody>
-      </p:sp>
-      <p:sp>
-        <p:nvSpPr>
-          <p:cNvPr id="7" name="TextBox 6"/>
-          <p:cNvSpPr txBox="1"/>
-          <p:nvPr/>
-        </p:nvSpPr>
-        <p:spPr>
-          <a:xfrm>
-            <a:off x="640080" y="1325880"/>
-            <a:ext cx="10911535" cy="439928"/>
-          </a:xfrm>
-          <a:prstGeom prst="rect">
-            <a:avLst/>
-          </a:prstGeom>
-          <a:noFill/>
-        </p:spPr>
-        <p:txBody>
-          <a:bodyPr wrap="square" lIns="45720" rIns="45720">
-            <a:spAutoFit/>
-          </a:bodyPr>
-          <a:lstStyle/>
-          <a:p>
-            <a:pPr algn="l"/>
-            <a:r>
-              <a:rPr sz="2000" b="1">
-                <a:solidFill>
-                  <a:srgbClr val="1F2D3A"/>
-                </a:solidFill>
-              </a:rPr>
-              <a:t>Uyum matrisinde şu "karşılandı" satırının kanıtı nerede?</a:t>
-            </a:r>
-          </a:p>
-        </p:txBody>
-      </p:sp>
-    </p:spTree>
-  </p:cSld>
-  <p:clrMapOvr>
-    <a:masterClrMapping/>
-  </p:clrMapOvr>
-</p:sld>
-</file>
-
-<file path=ppt/slides/slide36.xml><?xml version="1.0" encoding="utf-8"?>
-<p:sld xmlns:a="http://schemas.openxmlformats.org/drawingml/2006/main" xmlns:p="http://schemas.openxmlformats.org/presentationml/2006/main" xmlns:r="http://schemas.openxmlformats.org/officeDocument/2006/relationships">
-  <p:cSld>
-    <p:bg>
-      <p:bgPr>
-        <a:solidFill>
-          <a:srgbClr val="006D77"/>
-        </a:solidFill>
-        <a:effectLst/>
-      </p:bgPr>
-    </p:bg>
-    <p:spTree>
-      <p:nvGrpSpPr>
-        <p:cNvPr id="1" name=""/>
-        <p:cNvGrpSpPr/>
-        <p:nvPr/>
-      </p:nvGrpSpPr>
-      <p:grpSpPr/>
-      <p:sp>
-        <p:nvSpPr>
-          <p:cNvPr id="2" name="TextBox 1"/>
-          <p:cNvSpPr txBox="1"/>
-          <p:nvPr/>
-        </p:nvSpPr>
-        <p:spPr>
-          <a:xfrm>
-            <a:off x="1051560" y="182880"/>
-            <a:ext cx="7315200" cy="320040"/>
-          </a:xfrm>
-          <a:prstGeom prst="rect">
-            <a:avLst/>
-          </a:prstGeom>
-          <a:noFill/>
-        </p:spPr>
-        <p:txBody>
-          <a:bodyPr wrap="square" lIns="45720" rIns="45720">
-            <a:spAutoFit/>
-          </a:bodyPr>
-          <a:lstStyle/>
-          <a:p>
-            <a:r>
-              <a:rPr sz="1100" b="0">
-                <a:solidFill>
-                  <a:srgbClr val="D8F0F2"/>
-                </a:solidFill>
-              </a:rPr>
-              <a:t>CEN429 Güvenli Programlama · Hafta 15</a:t>
-            </a:r>
-          </a:p>
-        </p:txBody>
-      </p:sp>
-      <p:sp>
-        <p:nvSpPr>
-          <p:cNvPr id="3" name="TextBox 2"/>
-          <p:cNvSpPr txBox="1"/>
-          <p:nvPr/>
-        </p:nvSpPr>
-        <p:spPr>
-          <a:xfrm>
-            <a:off x="640080" y="6446520"/>
-            <a:ext cx="7315200" cy="274320"/>
-          </a:xfrm>
-          <a:prstGeom prst="rect">
-            <a:avLst/>
-          </a:prstGeom>
-          <a:noFill/>
-        </p:spPr>
-        <p:txBody>
-          <a:bodyPr wrap="square" lIns="45720" rIns="45720">
-            <a:spAutoFit/>
-          </a:bodyPr>
-          <a:lstStyle/>
-          <a:p>
-            <a:r>
-              <a:rPr sz="1000" b="0">
-                <a:solidFill>
-                  <a:srgbClr val="D8F0F2"/>
-                </a:solidFill>
-              </a:rPr>
-              <a:t>RTEÜ Bilgisayar Mühendisliği · 2026-2027 Güz</a:t>
-            </a:r>
-          </a:p>
-        </p:txBody>
-      </p:sp>
-      <p:sp>
-        <p:nvSpPr>
-          <p:cNvPr id="4" name="TextBox 3"/>
-          <p:cNvSpPr txBox="1"/>
-          <p:nvPr/>
-        </p:nvSpPr>
-        <p:spPr>
-          <a:xfrm>
-            <a:off x="10637215" y="6446520"/>
-            <a:ext cx="914400" cy="274320"/>
-          </a:xfrm>
-          <a:prstGeom prst="rect">
-            <a:avLst/>
-          </a:prstGeom>
-          <a:noFill/>
-        </p:spPr>
-        <p:txBody>
-          <a:bodyPr wrap="square" lIns="45720" rIns="45720">
-            <a:spAutoFit/>
-          </a:bodyPr>
-          <a:lstStyle/>
-          <a:p>
-            <a:pPr algn="r"/>
-            <a:r>
-              <a:rPr sz="1000" b="0">
-                <a:solidFill>
-                  <a:srgbClr val="D8F0F2"/>
-                </a:solidFill>
-              </a:rPr>
-              <a:t>36</a:t>
-            </a:r>
-          </a:p>
-        </p:txBody>
-      </p:sp>
-      <p:sp>
-        <p:nvSpPr>
-          <p:cNvPr id="5" name="TextBox 4"/>
-          <p:cNvSpPr txBox="1"/>
-          <p:nvPr/>
-        </p:nvSpPr>
-        <p:spPr>
-          <a:xfrm>
-            <a:off x="640080" y="2743200"/>
-            <a:ext cx="10911535" cy="1280160"/>
-          </a:xfrm>
-          <a:prstGeom prst="rect">
-            <a:avLst/>
-          </a:prstGeom>
-          <a:noFill/>
-        </p:spPr>
-        <p:txBody>
-          <a:bodyPr wrap="square" lIns="45720" rIns="45720">
-            <a:spAutoFit/>
-          </a:bodyPr>
-          <a:lstStyle/>
-          <a:p>
-            <a:pPr algn="l"/>
-            <a:r>
-              <a:rPr sz="4000" b="1">
-                <a:solidFill>
-                  <a:srgbClr val="FFFFFF"/>
-                </a:solidFill>
-              </a:rPr>
-              <a:t>Ek · Sık yapılan hatalar</a:t>
-            </a:r>
-          </a:p>
-        </p:txBody>
-      </p:sp>
-    </p:spTree>
-  </p:cSld>
-  <p:clrMapOvr>
-    <a:masterClrMapping/>
-  </p:clrMapOvr>
-</p:sld>
-</file>
-
-<file path=ppt/slides/slide37.xml><?xml version="1.0" encoding="utf-8"?>
-<p:sld xmlns:a="http://schemas.openxmlformats.org/drawingml/2006/main" xmlns:p="http://schemas.openxmlformats.org/presentationml/2006/main" xmlns:r="http://schemas.openxmlformats.org/officeDocument/2006/relationships">
-  <p:cSld>
-    <p:spTree>
-      <p:nvGrpSpPr>
-        <p:cNvPr id="1" name=""/>
-        <p:cNvGrpSpPr/>
-        <p:nvPr/>
-      </p:nvGrpSpPr>
-      <p:grpSpPr/>
-      <p:pic>
-        <p:nvPicPr>
-          <p:cNvPr id="2" name="Picture 1" descr="rteu_logo_kucuk.jpg"/>
-          <p:cNvPicPr>
-            <a:picLocks noChangeAspect="1"/>
-          </p:cNvPicPr>
-          <p:nvPr/>
-        </p:nvPicPr>
-        <p:blipFill>
-          <a:blip r:embed="rId2"/>
-          <a:stretch>
-            <a:fillRect/>
-          </a:stretch>
-        </p:blipFill>
-        <p:spPr>
-          <a:xfrm>
-            <a:off x="640080" y="164592"/>
-            <a:ext cx="242773" cy="329184"/>
-          </a:xfrm>
-          <a:prstGeom prst="rect">
-            <a:avLst/>
-          </a:prstGeom>
-        </p:spPr>
-      </p:pic>
-      <p:sp>
-        <p:nvSpPr>
-          <p:cNvPr id="3" name="TextBox 2"/>
-          <p:cNvSpPr txBox="1"/>
-          <p:nvPr/>
-        </p:nvSpPr>
-        <p:spPr>
-          <a:xfrm>
-            <a:off x="1051560" y="182880"/>
-            <a:ext cx="7315200" cy="320040"/>
-          </a:xfrm>
-          <a:prstGeom prst="rect">
-            <a:avLst/>
-          </a:prstGeom>
-          <a:noFill/>
-        </p:spPr>
-        <p:txBody>
-          <a:bodyPr wrap="square" lIns="45720" rIns="45720">
-            <a:spAutoFit/>
-          </a:bodyPr>
-          <a:lstStyle/>
-          <a:p>
-            <a:r>
-              <a:rPr sz="1100" b="0">
-                <a:solidFill>
-                  <a:srgbClr val="5B6770"/>
-                </a:solidFill>
-              </a:rPr>
-              <a:t>CEN429 Güvenli Programlama · Hafta 15</a:t>
-            </a:r>
-          </a:p>
-        </p:txBody>
-      </p:sp>
-      <p:sp>
-        <p:nvSpPr>
-          <p:cNvPr id="4" name="TextBox 3"/>
-          <p:cNvSpPr txBox="1"/>
-          <p:nvPr/>
-        </p:nvSpPr>
-        <p:spPr>
-          <a:xfrm>
-            <a:off x="640080" y="6446520"/>
-            <a:ext cx="7315200" cy="274320"/>
-          </a:xfrm>
-          <a:prstGeom prst="rect">
-            <a:avLst/>
-          </a:prstGeom>
-          <a:noFill/>
-        </p:spPr>
-        <p:txBody>
-          <a:bodyPr wrap="square" lIns="45720" rIns="45720">
-            <a:spAutoFit/>
-          </a:bodyPr>
-          <a:lstStyle/>
-          <a:p>
-            <a:r>
-              <a:rPr sz="1000" b="0">
-                <a:solidFill>
-                  <a:srgbClr val="5B6770"/>
-                </a:solidFill>
-              </a:rPr>
-              <a:t>RTEÜ Bilgisayar Mühendisliği · 2026-2027 Güz</a:t>
-            </a:r>
-          </a:p>
-        </p:txBody>
-      </p:sp>
-      <p:sp>
-        <p:nvSpPr>
-          <p:cNvPr id="5" name="TextBox 4"/>
-          <p:cNvSpPr txBox="1"/>
-          <p:nvPr/>
-        </p:nvSpPr>
-        <p:spPr>
-          <a:xfrm>
-            <a:off x="10637215" y="6446520"/>
-            <a:ext cx="914400" cy="274320"/>
-          </a:xfrm>
-          <a:prstGeom prst="rect">
-            <a:avLst/>
-          </a:prstGeom>
-          <a:noFill/>
-        </p:spPr>
-        <p:txBody>
-          <a:bodyPr wrap="square" lIns="45720" rIns="45720">
-            <a:spAutoFit/>
-          </a:bodyPr>
-          <a:lstStyle/>
-          <a:p>
-            <a:pPr algn="r"/>
-            <a:r>
-              <a:rPr sz="1000" b="0">
-                <a:solidFill>
-                  <a:srgbClr val="5B6770"/>
-                </a:solidFill>
-              </a:rPr>
-              <a:t>37</a:t>
-            </a:r>
-          </a:p>
-        </p:txBody>
-      </p:sp>
-      <p:sp>
-        <p:nvSpPr>
-          <p:cNvPr id="6" name="TextBox 5"/>
-          <p:cNvSpPr txBox="1"/>
-          <p:nvPr/>
-        </p:nvSpPr>
-        <p:spPr>
-          <a:xfrm>
-            <a:off x="640080" y="548640"/>
-            <a:ext cx="10911535" cy="731520"/>
-          </a:xfrm>
-          <a:prstGeom prst="rect">
-            <a:avLst/>
-          </a:prstGeom>
-          <a:noFill/>
-        </p:spPr>
-        <p:txBody>
-          <a:bodyPr wrap="square" lIns="45720" rIns="45720" anchor="ctr">
-            <a:spAutoFit/>
-          </a:bodyPr>
-          <a:lstStyle/>
-          <a:p>
-            <a:r>
-              <a:rPr sz="3000" b="1">
-                <a:solidFill>
-                  <a:srgbClr val="006D77"/>
-                </a:solidFill>
-              </a:rPr>
-              <a:t>Hata listesi</a:t>
-            </a:r>
-          </a:p>
-        </p:txBody>
-      </p:sp>
-      <p:sp>
-        <p:nvSpPr>
-          <p:cNvPr id="7" name="TextBox 6"/>
-          <p:cNvSpPr txBox="1"/>
-          <p:nvPr/>
-        </p:nvSpPr>
-        <p:spPr>
-          <a:xfrm>
-            <a:off x="640080" y="1325880"/>
-            <a:ext cx="10911535" cy="2346960"/>
-          </a:xfrm>
-          <a:prstGeom prst="rect">
-            <a:avLst/>
-          </a:prstGeom>
-          <a:noFill/>
-        </p:spPr>
-        <p:txBody>
-          <a:bodyPr wrap="square" lIns="45720" rIns="45720">
-            <a:spAutoFit/>
-          </a:bodyPr>
-          <a:lstStyle/>
-          <a:p>
-            <a:pPr>
-              <a:spcAft>
-                <a:spcPts val="300"/>
-              </a:spcAft>
-            </a:pPr>
-            <a:r>
-              <a:rPr sz="2000" b="1">
-                <a:solidFill>
-                  <a:srgbClr val="006D77"/>
-                </a:solidFill>
-              </a:rPr>
-              <a:t>• </a:t>
-            </a:r>
-            <a:r>
-              <a:rPr sz="2000" b="0">
-                <a:solidFill>
-                  <a:srgbClr val="1F2D3A"/>
-                </a:solidFill>
-              </a:rPr>
-              <a:t>Test planı var, </a:t>
-            </a:r>
-            <a:r>
-              <a:rPr sz="2000" b="1">
-                <a:solidFill>
-                  <a:srgbClr val="1F2D3A"/>
-                </a:solidFill>
-              </a:rPr>
-              <a:t>sonuç</a:t>
-            </a:r>
-            <a:r>
-              <a:rPr sz="2000" b="0">
-                <a:solidFill>
-                  <a:srgbClr val="1F2D3A"/>
-                </a:solidFill>
-              </a:rPr>
-              <a:t> yok.</a:t>
-            </a:r>
-          </a:p>
-          <a:p>
-            <a:pPr>
-              <a:spcAft>
-                <a:spcPts val="300"/>
-              </a:spcAft>
-            </a:pPr>
-            <a:r>
-              <a:rPr sz="2000" b="1">
-                <a:solidFill>
-                  <a:srgbClr val="006D77"/>
-                </a:solidFill>
-              </a:rPr>
-              <a:t>• </a:t>
-            </a:r>
-            <a:r>
-              <a:rPr sz="2000" b="0">
-                <a:solidFill>
-                  <a:srgbClr val="1F2D3A"/>
-                </a:solidFill>
-              </a:rPr>
-              <a:t>Kanıtsız "karşılandı".</a:t>
-            </a:r>
-          </a:p>
-          <a:p>
-            <a:pPr>
-              <a:spcAft>
-                <a:spcPts val="300"/>
-              </a:spcAft>
-            </a:pPr>
-            <a:r>
-              <a:rPr sz="2000" b="1">
-                <a:solidFill>
-                  <a:srgbClr val="006D77"/>
-                </a:solidFill>
-              </a:rPr>
-              <a:t>• </a:t>
-            </a:r>
-            <a:r>
-              <a:rPr sz="2000" b="0">
-                <a:solidFill>
-                  <a:srgbClr val="1F2D3A"/>
-                </a:solidFill>
-              </a:rPr>
-              <a:t>Kılavuz ile kod sürümü farklı.</a:t>
-            </a:r>
-          </a:p>
-          <a:p>
-            <a:pPr>
-              <a:spcAft>
-                <a:spcPts val="300"/>
-              </a:spcAft>
-            </a:pPr>
-            <a:r>
-              <a:rPr sz="2000" b="1">
-                <a:solidFill>
-                  <a:srgbClr val="006D77"/>
-                </a:solidFill>
-              </a:rPr>
-              <a:t>• </a:t>
-            </a:r>
-            <a:r>
-              <a:rPr sz="2000" b="0">
-                <a:solidFill>
-                  <a:srgbClr val="1F2D3A"/>
-                </a:solidFill>
-              </a:rPr>
-              <a:t>Kalan risk boş.</a:t>
-            </a:r>
-          </a:p>
-          <a:p>
-            <a:pPr>
-              <a:spcAft>
-                <a:spcPts val="300"/>
-              </a:spcAft>
-            </a:pPr>
-            <a:r>
-              <a:rPr sz="2000" b="1">
-                <a:solidFill>
-                  <a:srgbClr val="006D77"/>
-                </a:solidFill>
-              </a:rPr>
-              <a:t>• </a:t>
-            </a:r>
-            <a:r>
-              <a:rPr sz="2000" b="0">
-                <a:solidFill>
-                  <a:srgbClr val="1F2D3A"/>
-                </a:solidFill>
-              </a:rPr>
-              <a:t>Vize geri bildirimi yok sayılmış.</a:t>
-            </a:r>
-          </a:p>
-          <a:p>
-            <a:pPr>
-              <a:spcAft>
-                <a:spcPts val="300"/>
-              </a:spcAft>
-            </a:pPr>
-            <a:r>
-              <a:rPr sz="2000" b="1">
-                <a:solidFill>
-                  <a:srgbClr val="006D77"/>
-                </a:solidFill>
-              </a:rPr>
-              <a:t>• </a:t>
-            </a:r>
-            <a:r>
-              <a:rPr sz="2000" b="0">
-                <a:solidFill>
-                  <a:srgbClr val="1F2D3A"/>
-                </a:solidFill>
-              </a:rPr>
-              <a:t>Depoda gerçek sır/kişisel veri.</a:t>
-            </a:r>
-          </a:p>
-        </p:txBody>
-      </p:sp>
-    </p:spTree>
-  </p:cSld>
-  <p:clrMapOvr>
-    <a:masterClrMapping/>
-  </p:clrMapOvr>
-</p:sld>
-</file>
-
-<file path=ppt/slides/slide38.xml><?xml version="1.0" encoding="utf-8"?>
-<p:sld xmlns:a="http://schemas.openxmlformats.org/drawingml/2006/main" xmlns:p="http://schemas.openxmlformats.org/presentationml/2006/main" xmlns:r="http://schemas.openxmlformats.org/officeDocument/2006/relationships">
-  <p:cSld>
-    <p:spTree>
-      <p:nvGrpSpPr>
-        <p:cNvPr id="1" name=""/>
-        <p:cNvGrpSpPr/>
-        <p:nvPr/>
-      </p:nvGrpSpPr>
-      <p:grpSpPr/>
-      <p:pic>
-        <p:nvPicPr>
-          <p:cNvPr id="2" name="Picture 1" descr="rteu_logo_kucuk.jpg"/>
-          <p:cNvPicPr>
-            <a:picLocks noChangeAspect="1"/>
-          </p:cNvPicPr>
-          <p:nvPr/>
-        </p:nvPicPr>
-        <p:blipFill>
-          <a:blip r:embed="rId2"/>
-          <a:stretch>
-            <a:fillRect/>
-          </a:stretch>
-        </p:blipFill>
-        <p:spPr>
-          <a:xfrm>
-            <a:off x="640080" y="164592"/>
-            <a:ext cx="242773" cy="329184"/>
-          </a:xfrm>
-          <a:prstGeom prst="rect">
-            <a:avLst/>
-          </a:prstGeom>
-        </p:spPr>
-      </p:pic>
-      <p:sp>
-        <p:nvSpPr>
-          <p:cNvPr id="3" name="TextBox 2"/>
-          <p:cNvSpPr txBox="1"/>
-          <p:nvPr/>
-        </p:nvSpPr>
-        <p:spPr>
-          <a:xfrm>
-            <a:off x="1051560" y="182880"/>
-            <a:ext cx="7315200" cy="320040"/>
-          </a:xfrm>
-          <a:prstGeom prst="rect">
-            <a:avLst/>
-          </a:prstGeom>
-          <a:noFill/>
-        </p:spPr>
-        <p:txBody>
-          <a:bodyPr wrap="square" lIns="45720" rIns="45720">
-            <a:spAutoFit/>
-          </a:bodyPr>
-          <a:lstStyle/>
-          <a:p>
-            <a:r>
-              <a:rPr sz="1100" b="0">
-                <a:solidFill>
-                  <a:srgbClr val="5B6770"/>
-                </a:solidFill>
-              </a:rPr>
-              <a:t>CEN429 Güvenli Programlama · Hafta 15</a:t>
-            </a:r>
-          </a:p>
-        </p:txBody>
-      </p:sp>
-      <p:sp>
-        <p:nvSpPr>
-          <p:cNvPr id="4" name="TextBox 3"/>
-          <p:cNvSpPr txBox="1"/>
-          <p:nvPr/>
-        </p:nvSpPr>
-        <p:spPr>
-          <a:xfrm>
-            <a:off x="640080" y="6446520"/>
-            <a:ext cx="7315200" cy="274320"/>
-          </a:xfrm>
-          <a:prstGeom prst="rect">
-            <a:avLst/>
-          </a:prstGeom>
-          <a:noFill/>
-        </p:spPr>
-        <p:txBody>
-          <a:bodyPr wrap="square" lIns="45720" rIns="45720">
-            <a:spAutoFit/>
-          </a:bodyPr>
-          <a:lstStyle/>
-          <a:p>
-            <a:r>
-              <a:rPr sz="1000" b="0">
-                <a:solidFill>
-                  <a:srgbClr val="5B6770"/>
-                </a:solidFill>
-              </a:rPr>
-              <a:t>RTEÜ Bilgisayar Mühendisliği · 2026-2027 Güz</a:t>
-            </a:r>
-          </a:p>
-        </p:txBody>
-      </p:sp>
-      <p:sp>
-        <p:nvSpPr>
-          <p:cNvPr id="5" name="TextBox 4"/>
-          <p:cNvSpPr txBox="1"/>
-          <p:nvPr/>
-        </p:nvSpPr>
-        <p:spPr>
-          <a:xfrm>
-            <a:off x="10637215" y="6446520"/>
-            <a:ext cx="914400" cy="274320"/>
-          </a:xfrm>
-          <a:prstGeom prst="rect">
-            <a:avLst/>
-          </a:prstGeom>
-          <a:noFill/>
-        </p:spPr>
-        <p:txBody>
-          <a:bodyPr wrap="square" lIns="45720" rIns="45720">
-            <a:spAutoFit/>
-          </a:bodyPr>
-          <a:lstStyle/>
-          <a:p>
-            <a:pPr algn="r"/>
-            <a:r>
-              <a:rPr sz="1000" b="0">
-                <a:solidFill>
-                  <a:srgbClr val="5B6770"/>
-                </a:solidFill>
-              </a:rPr>
-              <a:t>38</a:t>
-            </a:r>
-          </a:p>
-        </p:txBody>
-      </p:sp>
-      <p:sp>
-        <p:nvSpPr>
-          <p:cNvPr id="6" name="TextBox 5"/>
-          <p:cNvSpPr txBox="1"/>
-          <p:nvPr/>
-        </p:nvSpPr>
-        <p:spPr>
-          <a:xfrm>
-            <a:off x="640080" y="548640"/>
-            <a:ext cx="10911535" cy="731520"/>
-          </a:xfrm>
-          <a:prstGeom prst="rect">
-            <a:avLst/>
-          </a:prstGeom>
-          <a:noFill/>
-        </p:spPr>
-        <p:txBody>
-          <a:bodyPr wrap="square" lIns="45720" rIns="45720" anchor="ctr">
-            <a:spAutoFit/>
-          </a:bodyPr>
-          <a:lstStyle/>
-          <a:p>
-            <a:r>
-              <a:rPr sz="3000" b="1">
-                <a:solidFill>
-                  <a:srgbClr val="006D77"/>
-                </a:solidFill>
-              </a:rPr>
-              <a:t>Son söz (RAP2)</a:t>
-            </a:r>
-          </a:p>
-        </p:txBody>
-      </p:sp>
-      <p:sp>
-        <p:nvSpPr>
-          <p:cNvPr id="7" name="Rectangle 6"/>
-          <p:cNvSpPr/>
-          <p:nvPr/>
-        </p:nvSpPr>
-        <p:spPr>
-          <a:xfrm>
-            <a:off x="640080" y="1325880"/>
-            <a:ext cx="10911535" cy="934719"/>
-          </a:xfrm>
-          <a:prstGeom prst="rect">
-            <a:avLst/>
-          </a:prstGeom>
-          <a:solidFill>
-            <a:srgbClr val="EEF7F8"/>
-          </a:solidFill>
-          <a:ln>
-            <a:solidFill>
-              <a:srgbClr val="006D77"/>
-            </a:solidFill>
-          </a:ln>
-        </p:spPr>
-        <p:style>
-          <a:lnRef idx="1">
-            <a:schemeClr val="accent1"/>
-          </a:lnRef>
-          <a:fillRef idx="3">
-            <a:schemeClr val="accent1"/>
-          </a:fillRef>
-          <a:effectRef idx="2">
-            <a:schemeClr val="accent1"/>
-          </a:effectRef>
-          <a:fontRef idx="minor">
-            <a:schemeClr val="lt1"/>
-          </a:fontRef>
-        </p:style>
-        <p:txBody>
-          <a:bodyPr rtlCol="0" anchor="ctr" wrap="square" lIns="182880"/>
-          <a:lstStyle/>
-          <a:p>
-            <a:pPr algn="l"/>
-            <a:r>
-              <a:rPr sz="2000" b="0">
-                <a:solidFill>
-                  <a:srgbClr val="1F2D3A"/>
-                </a:solidFill>
-              </a:rPr>
-              <a:t>Finalde </a:t>
-            </a:r>
-            <a:r>
-              <a:rPr sz="2000" b="1">
-                <a:solidFill>
-                  <a:srgbClr val="1F2D3A"/>
-                </a:solidFill>
-              </a:rPr>
-              <a:t>sonuç</a:t>
-            </a:r>
-            <a:r>
-              <a:rPr sz="2000" b="0">
-                <a:solidFill>
-                  <a:srgbClr val="1F2D3A"/>
-                </a:solidFill>
-              </a:rPr>
-              <a:t> beklenir: her koruma çalışırken gösterilir, her gereksinim kanıtla bağlanır.</a:t>
-            </a:r>
-          </a:p>
-        </p:txBody>
-      </p:sp>
-      <p:sp>
-        <p:nvSpPr>
-          <p:cNvPr id="8" name="TextBox 7"/>
-          <p:cNvSpPr txBox="1"/>
-          <p:nvPr/>
-        </p:nvSpPr>
-        <p:spPr>
-          <a:xfrm>
-            <a:off x="640080" y="2370328"/>
-            <a:ext cx="10911535" cy="770128"/>
-          </a:xfrm>
-          <a:prstGeom prst="rect">
-            <a:avLst/>
-          </a:prstGeom>
-          <a:noFill/>
-        </p:spPr>
-        <p:txBody>
-          <a:bodyPr wrap="square" lIns="45720" rIns="45720">
-            <a:spAutoFit/>
-          </a:bodyPr>
-          <a:lstStyle/>
-          <a:p>
-            <a:pPr algn="l"/>
-            <a:r>
-              <a:rPr sz="2000" b="0">
-                <a:solidFill>
-                  <a:srgbClr val="1F2D3A"/>
-                </a:solidFill>
-              </a:rPr>
-              <a:t>Kılavuzunuz sertifikasyon belgelerinin küçük bir modelidir; bir </a:t>
-            </a:r>
-            <a:r>
-              <a:rPr sz="2000" b="1">
-                <a:solidFill>
-                  <a:srgbClr val="1F2D3A"/>
-                </a:solidFill>
-              </a:rPr>
-              <a:t>portfolyo</a:t>
-            </a:r>
-            <a:r>
-              <a:rPr sz="2000" b="0">
-                <a:solidFill>
-                  <a:srgbClr val="1F2D3A"/>
-                </a:solidFill>
-              </a:rPr>
-              <a:t> öğesidir.</a:t>
-            </a:r>
-          </a:p>
-        </p:txBody>
-      </p:sp>
-    </p:spTree>
-  </p:cSld>
-  <p:clrMapOvr>
-    <a:masterClrMapping/>
-  </p:clrMapOvr>
-</p:sld>
-</file>
-
-<file path=ppt/slides/slide4.xml><?xml version="1.0" encoding="utf-8"?>
-<p:sld xmlns:a="http://schemas.openxmlformats.org/drawingml/2006/main" xmlns:p="http://schemas.openxmlformats.org/presentationml/2006/main" xmlns:r="http://schemas.openxmlformats.org/officeDocument/2006/relationships">
-  <p:cSld>
-    <p:spTree>
-      <p:nvGrpSpPr>
-        <p:cNvPr id="1" name=""/>
-        <p:cNvGrpSpPr/>
-        <p:nvPr/>
-      </p:nvGrpSpPr>
-      <p:grpSpPr/>
-      <p:pic>
-        <p:nvPicPr>
-          <p:cNvPr id="2" name="Picture 1" descr="rteu_logo_kucuk.jpg"/>
-          <p:cNvPicPr>
-            <a:picLocks noChangeAspect="1"/>
-          </p:cNvPicPr>
-          <p:nvPr/>
-        </p:nvPicPr>
-        <p:blipFill>
-          <a:blip r:embed="rId2"/>
-          <a:stretch>
-            <a:fillRect/>
-          </a:stretch>
-        </p:blipFill>
-        <p:spPr>
-          <a:xfrm>
-            <a:off x="640080" y="164592"/>
-            <a:ext cx="242773" cy="329184"/>
-          </a:xfrm>
-          <a:prstGeom prst="rect">
-            <a:avLst/>
-          </a:prstGeom>
-        </p:spPr>
-      </p:pic>
-      <p:sp>
-        <p:nvSpPr>
-          <p:cNvPr id="3" name="TextBox 2"/>
-          <p:cNvSpPr txBox="1"/>
-          <p:nvPr/>
-        </p:nvSpPr>
-        <p:spPr>
-          <a:xfrm>
-            <a:off x="1051560" y="182880"/>
-            <a:ext cx="7315200" cy="320040"/>
-          </a:xfrm>
-          <a:prstGeom prst="rect">
-            <a:avLst/>
-          </a:prstGeom>
-          <a:noFill/>
-        </p:spPr>
-        <p:txBody>
-          <a:bodyPr wrap="square" lIns="45720" rIns="45720">
-            <a:spAutoFit/>
-          </a:bodyPr>
-          <a:lstStyle/>
-          <a:p>
-            <a:r>
-              <a:rPr sz="1100" b="0">
-                <a:solidFill>
-                  <a:srgbClr val="5B6770"/>
-                </a:solidFill>
-              </a:rPr>
-              <a:t>CEN429 Güvenli Programlama · Hafta 15</a:t>
-            </a:r>
-          </a:p>
-        </p:txBody>
-      </p:sp>
-      <p:sp>
-        <p:nvSpPr>
-          <p:cNvPr id="4" name="TextBox 3"/>
-          <p:cNvSpPr txBox="1"/>
-          <p:nvPr/>
-        </p:nvSpPr>
-        <p:spPr>
-          <a:xfrm>
-            <a:off x="640080" y="6446520"/>
-            <a:ext cx="7315200" cy="274320"/>
-          </a:xfrm>
-          <a:prstGeom prst="rect">
-            <a:avLst/>
-          </a:prstGeom>
-          <a:noFill/>
-        </p:spPr>
-        <p:txBody>
-          <a:bodyPr wrap="square" lIns="45720" rIns="45720">
-            <a:spAutoFit/>
-          </a:bodyPr>
-          <a:lstStyle/>
-          <a:p>
-            <a:r>
-              <a:rPr sz="1000" b="0">
-                <a:solidFill>
-                  <a:srgbClr val="5B6770"/>
-                </a:solidFill>
-              </a:rPr>
-              <a:t>RTEÜ Bilgisayar Mühendisliği · 2026-2027 Güz</a:t>
-            </a:r>
-          </a:p>
-        </p:txBody>
-      </p:sp>
-      <p:sp>
-        <p:nvSpPr>
-          <p:cNvPr id="5" name="TextBox 4"/>
-          <p:cNvSpPr txBox="1"/>
-          <p:nvPr/>
-        </p:nvSpPr>
-        <p:spPr>
-          <a:xfrm>
-            <a:off x="10637215" y="6446520"/>
-            <a:ext cx="914400" cy="274320"/>
-          </a:xfrm>
-          <a:prstGeom prst="rect">
-            <a:avLst/>
-          </a:prstGeom>
-          <a:noFill/>
-        </p:spPr>
-        <p:txBody>
-          <a:bodyPr wrap="square" lIns="45720" rIns="45720">
-            <a:spAutoFit/>
-          </a:bodyPr>
-          <a:lstStyle/>
-          <a:p>
-            <a:pPr algn="r"/>
-            <a:r>
-              <a:rPr sz="1000" b="0">
-                <a:solidFill>
-                  <a:srgbClr val="5B6770"/>
-                </a:solidFill>
-              </a:rPr>
-              <a:t>4</a:t>
-            </a:r>
-          </a:p>
-        </p:txBody>
-      </p:sp>
-      <p:sp>
-        <p:nvSpPr>
-          <p:cNvPr id="6" name="TextBox 5"/>
-          <p:cNvSpPr txBox="1"/>
-          <p:nvPr/>
-        </p:nvSpPr>
-        <p:spPr>
-          <a:xfrm>
-            <a:off x="640080" y="548640"/>
-            <a:ext cx="10911535" cy="731520"/>
-          </a:xfrm>
-          <a:prstGeom prst="rect">
-            <a:avLst/>
-          </a:prstGeom>
-          <a:noFill/>
-        </p:spPr>
-        <p:txBody>
-          <a:bodyPr wrap="square" lIns="45720" rIns="45720" anchor="ctr">
-            <a:spAutoFit/>
-          </a:bodyPr>
-          <a:lstStyle/>
-          <a:p>
-            <a:r>
-              <a:rPr sz="3000" b="1">
-                <a:solidFill>
-                  <a:srgbClr val="006D77"/>
-                </a:solidFill>
-              </a:rPr>
-              <a:t>Kılavuz haritası S0–S17 — şema</a:t>
-            </a:r>
-          </a:p>
-        </p:txBody>
-      </p:sp>
-      <p:pic>
-        <p:nvPicPr>
-          <p:cNvPr id="7" name="Picture 6" descr="h15-02-kilavuz-haritasi.png"/>
-          <p:cNvPicPr>
-            <a:picLocks noChangeAspect="1"/>
-          </p:cNvPicPr>
-          <p:nvPr/>
-        </p:nvPicPr>
-        <p:blipFill>
-          <a:blip r:embed="rId3"/>
-          <a:stretch>
-            <a:fillRect/>
-          </a:stretch>
-        </p:blipFill>
-        <p:spPr>
-          <a:xfrm>
-            <a:off x="2187499" y="1325880"/>
-            <a:ext cx="7816696" cy="4937760"/>
-          </a:xfrm>
-          <a:prstGeom prst="rect">
-            <a:avLst/>
-          </a:prstGeom>
-        </p:spPr>
-      </p:pic>
-    </p:spTree>
-  </p:cSld>
-  <p:clrMapOvr>
-    <a:masterClrMapping/>
-  </p:clrMapOvr>
-</p:sld>
-</file>
-
 <file path=ppt/slides/slide5.xml><?xml version="1.0" encoding="utf-8"?>
 <p:sld xmlns:a="http://schemas.openxmlformats.org/drawingml/2006/main" xmlns:p="http://schemas.openxmlformats.org/presentationml/2006/main" xmlns:r="http://schemas.openxmlformats.org/officeDocument/2006/relationships">
   <p:cSld>
@@ -13128,14 +7308,14 @@
                   <a:srgbClr val="006D77"/>
                 </a:solidFill>
               </a:rPr>
-              <a:t>RAP2 teslimi — şema</a:t>
+              <a:t>Kılavuz haritası S0–S17 — şema</a:t>
             </a:r>
           </a:p>
         </p:txBody>
       </p:sp>
       <p:pic>
         <p:nvPicPr>
-          <p:cNvPr id="7" name="Picture 6" descr="h15-01-rap2.png"/>
+          <p:cNvPr id="7" name="Picture 6" descr="h15-02-kilavuz-haritasi.png"/>
           <p:cNvPicPr>
             <a:picLocks noChangeAspect="1"/>
           </p:cNvPicPr>
@@ -13149,8 +7329,8 @@
         </p:blipFill>
         <p:spPr>
           <a:xfrm>
-            <a:off x="2046645" y="1325880"/>
-            <a:ext cx="8098404" cy="3778947"/>
+            <a:off x="2868851" y="1325880"/>
+            <a:ext cx="6453993" cy="4828032"/>
           </a:xfrm>
           <a:prstGeom prst="rect">
             <a:avLst/>
@@ -13822,7 +8002,7 @@
         <p:spPr>
           <a:xfrm>
             <a:off x="640080" y="1325880"/>
-            <a:ext cx="10911535" cy="1971040"/>
+            <a:ext cx="10911535" cy="2631440"/>
           </a:xfrm>
           <a:prstGeom prst="rect">
             <a:avLst/>
@@ -13893,7 +8073,7 @@
                   <a:srgbClr val="1F2D3A"/>
                 </a:solidFill>
               </a:rPr>
-              <a:t> bulgu–aksiyon listesi</a:t>
+              <a:t> bulgu–aksiyon listesi (bulgu → aksiyon → kapanış; değerlendirici bu döngüyü arar)</a:t>
             </a:r>
           </a:p>
           <a:p>
@@ -13933,6 +8113,14 @@
                 </a:solidFill>
               </a:rPr>
               <a:t>çalışırken</a:t>
+            </a:r>
+            <a:r>
+              <a:rPr sz="2000" b="0">
+                <a:solidFill>
+                  <a:srgbClr val="1F2D3A"/>
+                </a:solidFill>
+              </a:rPr>
+              <a:t> (ör. kurcalanmış dosyanın reddi)</a:t>
             </a:r>
           </a:p>
           <a:p>
@@ -14190,8 +8378,8 @@
         </p:blipFill>
         <p:spPr>
           <a:xfrm>
-            <a:off x="2046645" y="1325880"/>
-            <a:ext cx="8098404" cy="3210484"/>
+            <a:off x="640080" y="1325880"/>
+            <a:ext cx="10911535" cy="2726616"/>
           </a:xfrm>
           <a:prstGeom prst="rect">
             <a:avLst/>

--- a/docs/week-15/cen429-week-15-sunum.tr.pptx
+++ b/docs/week-15/cen429-week-15-sunum.tr.pptx
@@ -19,6 +19,7 @@
     <p:sldId id="267" r:id="rId19"/>
     <p:sldId id="268" r:id="rId20"/>
     <p:sldId id="269" r:id="rId21"/>
+    <p:sldId id="270" r:id="rId22"/>
   </p:sldIdLst>
   <p:sldSz cx="12191695" cy="6858000" type="screen4x3"/>
   <p:notesSz cx="6858000" cy="9144000"/>
@@ -3883,7 +3884,7 @@
                   <a:srgbClr val="006D77"/>
                 </a:solidFill>
               </a:rPr>
-              <a:t>Örnek sorular</a:t>
+              <a:t>Gösterim kontrol listesi</a:t>
             </a:r>
           </a:p>
         </p:txBody>
@@ -3897,7 +3898,41 @@
         <p:spPr>
           <a:xfrm>
             <a:off x="640080" y="1325880"/>
-            <a:ext cx="10911535" cy="2346960"/>
+            <a:ext cx="10911535" cy="439928"/>
+          </a:xfrm>
+          <a:prstGeom prst="rect">
+            <a:avLst/>
+          </a:prstGeom>
+          <a:noFill/>
+        </p:spPr>
+        <p:txBody>
+          <a:bodyPr wrap="square" lIns="45720" rIns="45720">
+            <a:spAutoFit/>
+          </a:bodyPr>
+          <a:lstStyle/>
+          <a:p>
+            <a:pPr algn="l"/>
+            <a:r>
+              <a:rPr sz="2000" b="0">
+                <a:solidFill>
+                  <a:srgbClr val="1F2D3A"/>
+                </a:solidFill>
+              </a:rPr>
+              <a:t>Gösterimde sırayla neyi açıp göstereceğiniz:</a:t>
+            </a:r>
+          </a:p>
+        </p:txBody>
+      </p:sp>
+      <p:sp>
+        <p:nvSpPr>
+          <p:cNvPr id="8" name="TextBox 7"/>
+          <p:cNvSpPr txBox="1"/>
+          <p:nvPr/>
+        </p:nvSpPr>
+        <p:spPr>
+          <a:xfrm>
+            <a:off x="640080" y="1875536"/>
+            <a:ext cx="10911535" cy="3007360"/>
           </a:xfrm>
           <a:prstGeom prst="rect">
             <a:avLst/>
@@ -3921,7 +3956,7 @@
                   <a:srgbClr val="006D77"/>
                 </a:solidFill>
               </a:rPr>
-              <a:t>• </a:t>
+              <a:t>1. </a:t>
             </a:r>
             <a:r>
               <a:rPr sz="2000" b="0">
@@ -3929,7 +3964,57 @@
                   <a:srgbClr val="1F2D3A"/>
                 </a:solidFill>
               </a:rPr>
-              <a:t>Bu anahtar hangi anahtardan türetiliyor, nerede duruyor, ne zaman siliniyor?</a:t>
+              <a:t>Yerel sitenin </a:t>
+            </a:r>
+            <a:r>
+              <a:rPr sz="2000" b="1">
+                <a:solidFill>
+                  <a:srgbClr val="1F2D3A"/>
+                </a:solidFill>
+              </a:rPr>
+              <a:t>ana sayfası</a:t>
+            </a:r>
+            <a:r>
+              <a:rPr sz="2000" b="0">
+                <a:solidFill>
+                  <a:srgbClr val="1F2D3A"/>
+                </a:solidFill>
+              </a:rPr>
+              <a:t> (</a:t>
+            </a:r>
+            <a:r>
+              <a:rPr sz="2000" b="0">
+                <a:solidFill>
+                  <a:srgbClr val="A1123F"/>
+                </a:solidFill>
+                <a:latin typeface="Consolas"/>
+              </a:rPr>
+              <a:t>9-open-site-...</a:t>
+            </a:r>
+            <a:r>
+              <a:rPr sz="2000" b="0">
+                <a:solidFill>
+                  <a:srgbClr val="1F2D3A"/>
+                </a:solidFill>
+              </a:rPr>
+              <a:t>, </a:t>
+            </a:r>
+            <a:r>
+              <a:rPr sz="2000" b="0">
+                <a:solidFill>
+                  <a:srgbClr val="A1123F"/>
+                </a:solidFill>
+                <a:latin typeface="Consolas"/>
+              </a:rPr>
+              <a:t>http://localhost</a:t>
+            </a:r>
+            <a:r>
+              <a:rPr sz="2000" b="0">
+                <a:solidFill>
+                  <a:srgbClr val="1F2D3A"/>
+                </a:solidFill>
+              </a:rPr>
+              <a:t> adresinde).</a:t>
             </a:r>
           </a:p>
           <a:p>
@@ -3944,7 +4029,15 @@
                   <a:srgbClr val="006D77"/>
                 </a:solidFill>
               </a:rPr>
-              <a:t>• </a:t>
+              <a:t>2. </a:t>
+            </a:r>
+            <a:r>
+              <a:rPr sz="2000" b="1">
+                <a:solidFill>
+                  <a:srgbClr val="1F2D3A"/>
+                </a:solidFill>
+              </a:rPr>
+              <a:t>Her rapor sayfası:</a:t>
             </a:r>
             <a:r>
               <a:rPr sz="2000" b="0">
@@ -3952,7 +4045,7 @@
                   <a:srgbClr val="1F2D3A"/>
                 </a:solidFill>
               </a:rPr>
-              <a:t>Sertifika zincirinizi nasıl doğruluyorsunuz? Ad denetimi nerede yapılıyor?</a:t>
+              <a:t> testler, kod kapsamı, dokümantasyon kapsamı (Windows ve Linux).</a:t>
             </a:r>
           </a:p>
           <a:p>
@@ -3967,15 +4060,15 @@
                   <a:srgbClr val="006D77"/>
                 </a:solidFill>
               </a:rPr>
-              <a:t>• </a:t>
-            </a:r>
-            <a:r>
-              <a:rPr sz="2000" b="0">
+              <a:t>3. </a:t>
+            </a:r>
+            <a:r>
+              <a:rPr sz="2000" b="1">
                 <a:solidFill>
                   <a:srgbClr val="1F2D3A"/>
                 </a:solidFill>
               </a:rPr>
-              <a:t>İmza doğrulaması başarısızsa ne oluyor? Eski imzalı sürüm yüklenebilir mi?</a:t>
+              <a:t>API belgeleri.</a:t>
             </a:r>
           </a:p>
           <a:p>
@@ -3990,7 +4083,15 @@
                   <a:srgbClr val="006D77"/>
                 </a:solidFill>
               </a:rPr>
-              <a:t>• </a:t>
+              <a:t>4. </a:t>
+            </a:r>
+            <a:r>
+              <a:rPr sz="2000" b="1">
+                <a:solidFill>
+                  <a:srgbClr val="1F2D3A"/>
+                </a:solidFill>
+              </a:rPr>
+              <a:t>`release/` klasörünün</a:t>
             </a:r>
             <a:r>
               <a:rPr sz="2000" b="0">
@@ -3998,7 +4099,7 @@
                   <a:srgbClr val="1F2D3A"/>
                 </a:solidFill>
               </a:rPr>
-              <a:t>Gizlemenin maliyetini ölçtünüz mü? Hangi fonksiyonu neden gizlediniz?</a:t>
+              <a:t> içeriği.</a:t>
             </a:r>
           </a:p>
           <a:p>
@@ -4013,7 +4114,7 @@
                   <a:srgbClr val="006D77"/>
                 </a:solidFill>
               </a:rPr>
-              <a:t>• </a:t>
+              <a:t>5. </a:t>
             </a:r>
             <a:r>
               <a:rPr sz="2000" b="0">
@@ -4021,7 +4122,15 @@
                   <a:srgbClr val="1F2D3A"/>
                 </a:solidFill>
               </a:rPr>
-              <a:t>Uyum matrisinde şu "karşılandı" satırının kanıtı nerede?</a:t>
+              <a:t>Uygulamayı </a:t>
+            </a:r>
+            <a:r>
+              <a:rPr sz="2000" b="1">
+                <a:solidFill>
+                  <a:srgbClr val="1F2D3A"/>
+                </a:solidFill>
+              </a:rPr>
+              <a:t>release arşivinden çalıştırma.</a:t>
             </a:r>
           </a:p>
           <a:p>
@@ -4036,7 +4145,7 @@
                   <a:srgbClr val="006D77"/>
                 </a:solidFill>
               </a:rPr>
-              <a:t>• </a:t>
+              <a:t>6. </a:t>
             </a:r>
             <a:r>
               <a:rPr sz="2000" b="0">
@@ -4044,7 +4153,23 @@
                   <a:srgbClr val="1F2D3A"/>
                 </a:solidFill>
               </a:rPr>
-              <a:t>Hangi gereksinimi devrettiniz, karşı taraf nasıl karşılayacak?</a:t>
+              <a:t>Özel deponuzun </a:t>
+            </a:r>
+            <a:r>
+              <a:rPr sz="2000" b="1">
+                <a:solidFill>
+                  <a:srgbClr val="1F2D3A"/>
+                </a:solidFill>
+              </a:rPr>
+              <a:t>GitHub Release sayfası</a:t>
+            </a:r>
+            <a:r>
+              <a:rPr sz="2000" b="0">
+                <a:solidFill>
+                  <a:srgbClr val="1F2D3A"/>
+                </a:solidFill>
+              </a:rPr>
+              <a:t> (ders sorumlusu collaborator olarak ekli).</a:t>
             </a:r>
           </a:p>
         </p:txBody>
@@ -4187,6 +4312,342 @@
                 </a:solidFill>
               </a:rPr>
               <a:t>11</a:t>
+            </a:r>
+          </a:p>
+        </p:txBody>
+      </p:sp>
+      <p:sp>
+        <p:nvSpPr>
+          <p:cNvPr id="6" name="TextBox 5"/>
+          <p:cNvSpPr txBox="1"/>
+          <p:nvPr/>
+        </p:nvSpPr>
+        <p:spPr>
+          <a:xfrm>
+            <a:off x="640080" y="548640"/>
+            <a:ext cx="10911535" cy="731520"/>
+          </a:xfrm>
+          <a:prstGeom prst="rect">
+            <a:avLst/>
+          </a:prstGeom>
+          <a:noFill/>
+        </p:spPr>
+        <p:txBody>
+          <a:bodyPr wrap="square" lIns="45720" rIns="45720" anchor="ctr">
+            <a:spAutoFit/>
+          </a:bodyPr>
+          <a:lstStyle/>
+          <a:p>
+            <a:r>
+              <a:rPr sz="3000" b="1">
+                <a:solidFill>
+                  <a:srgbClr val="006D77"/>
+                </a:solidFill>
+              </a:rPr>
+              <a:t>Örnek sorular</a:t>
+            </a:r>
+          </a:p>
+        </p:txBody>
+      </p:sp>
+      <p:sp>
+        <p:nvSpPr>
+          <p:cNvPr id="7" name="TextBox 6"/>
+          <p:cNvSpPr txBox="1"/>
+          <p:nvPr/>
+        </p:nvSpPr>
+        <p:spPr>
+          <a:xfrm>
+            <a:off x="640080" y="1325880"/>
+            <a:ext cx="10911535" cy="2346960"/>
+          </a:xfrm>
+          <a:prstGeom prst="rect">
+            <a:avLst/>
+          </a:prstGeom>
+          <a:noFill/>
+        </p:spPr>
+        <p:txBody>
+          <a:bodyPr wrap="square" lIns="45720" rIns="45720">
+            <a:spAutoFit/>
+          </a:bodyPr>
+          <a:lstStyle/>
+          <a:p>
+            <a:pPr>
+              <a:spcAft>
+                <a:spcPts val="300"/>
+              </a:spcAft>
+            </a:pPr>
+            <a:r>
+              <a:rPr sz="2000" b="1">
+                <a:solidFill>
+                  <a:srgbClr val="006D77"/>
+                </a:solidFill>
+              </a:rPr>
+              <a:t>• </a:t>
+            </a:r>
+            <a:r>
+              <a:rPr sz="2000" b="0">
+                <a:solidFill>
+                  <a:srgbClr val="1F2D3A"/>
+                </a:solidFill>
+              </a:rPr>
+              <a:t>Bu anahtar hangi anahtardan türetiliyor, nerede duruyor, ne zaman siliniyor?</a:t>
+            </a:r>
+          </a:p>
+          <a:p>
+            <a:pPr>
+              <a:spcAft>
+                <a:spcPts val="300"/>
+              </a:spcAft>
+            </a:pPr>
+            <a:r>
+              <a:rPr sz="2000" b="1">
+                <a:solidFill>
+                  <a:srgbClr val="006D77"/>
+                </a:solidFill>
+              </a:rPr>
+              <a:t>• </a:t>
+            </a:r>
+            <a:r>
+              <a:rPr sz="2000" b="0">
+                <a:solidFill>
+                  <a:srgbClr val="1F2D3A"/>
+                </a:solidFill>
+              </a:rPr>
+              <a:t>Sertifika zincirinizi nasıl doğruluyorsunuz? Ad denetimi nerede yapılıyor?</a:t>
+            </a:r>
+          </a:p>
+          <a:p>
+            <a:pPr>
+              <a:spcAft>
+                <a:spcPts val="300"/>
+              </a:spcAft>
+            </a:pPr>
+            <a:r>
+              <a:rPr sz="2000" b="1">
+                <a:solidFill>
+                  <a:srgbClr val="006D77"/>
+                </a:solidFill>
+              </a:rPr>
+              <a:t>• </a:t>
+            </a:r>
+            <a:r>
+              <a:rPr sz="2000" b="0">
+                <a:solidFill>
+                  <a:srgbClr val="1F2D3A"/>
+                </a:solidFill>
+              </a:rPr>
+              <a:t>İmza doğrulaması başarısızsa ne oluyor? Eski imzalı sürüm yüklenebilir mi?</a:t>
+            </a:r>
+          </a:p>
+          <a:p>
+            <a:pPr>
+              <a:spcAft>
+                <a:spcPts val="300"/>
+              </a:spcAft>
+            </a:pPr>
+            <a:r>
+              <a:rPr sz="2000" b="1">
+                <a:solidFill>
+                  <a:srgbClr val="006D77"/>
+                </a:solidFill>
+              </a:rPr>
+              <a:t>• </a:t>
+            </a:r>
+            <a:r>
+              <a:rPr sz="2000" b="0">
+                <a:solidFill>
+                  <a:srgbClr val="1F2D3A"/>
+                </a:solidFill>
+              </a:rPr>
+              <a:t>Gizlemenin maliyetini ölçtünüz mü? Hangi fonksiyonu neden gizlediniz?</a:t>
+            </a:r>
+          </a:p>
+          <a:p>
+            <a:pPr>
+              <a:spcAft>
+                <a:spcPts val="300"/>
+              </a:spcAft>
+            </a:pPr>
+            <a:r>
+              <a:rPr sz="2000" b="1">
+                <a:solidFill>
+                  <a:srgbClr val="006D77"/>
+                </a:solidFill>
+              </a:rPr>
+              <a:t>• </a:t>
+            </a:r>
+            <a:r>
+              <a:rPr sz="2000" b="0">
+                <a:solidFill>
+                  <a:srgbClr val="1F2D3A"/>
+                </a:solidFill>
+              </a:rPr>
+              <a:t>Uyum matrisinde şu "karşılandı" satırının kanıtı nerede?</a:t>
+            </a:r>
+          </a:p>
+          <a:p>
+            <a:pPr>
+              <a:spcAft>
+                <a:spcPts val="300"/>
+              </a:spcAft>
+            </a:pPr>
+            <a:r>
+              <a:rPr sz="2000" b="1">
+                <a:solidFill>
+                  <a:srgbClr val="006D77"/>
+                </a:solidFill>
+              </a:rPr>
+              <a:t>• </a:t>
+            </a:r>
+            <a:r>
+              <a:rPr sz="2000" b="0">
+                <a:solidFill>
+                  <a:srgbClr val="1F2D3A"/>
+                </a:solidFill>
+              </a:rPr>
+              <a:t>Hangi gereksinimi devrettiniz, karşı taraf nasıl karşılayacak?</a:t>
+            </a:r>
+          </a:p>
+        </p:txBody>
+      </p:sp>
+    </p:spTree>
+  </p:cSld>
+  <p:clrMapOvr>
+    <a:masterClrMapping/>
+  </p:clrMapOvr>
+</p:sld>
+</file>
+
+<file path=ppt/slides/slide12.xml><?xml version="1.0" encoding="utf-8"?>
+<p:sld xmlns:a="http://schemas.openxmlformats.org/drawingml/2006/main" xmlns:p="http://schemas.openxmlformats.org/presentationml/2006/main" xmlns:r="http://schemas.openxmlformats.org/officeDocument/2006/relationships">
+  <p:cSld>
+    <p:spTree>
+      <p:nvGrpSpPr>
+        <p:cNvPr id="1" name=""/>
+        <p:cNvGrpSpPr/>
+        <p:nvPr/>
+      </p:nvGrpSpPr>
+      <p:grpSpPr/>
+      <p:pic>
+        <p:nvPicPr>
+          <p:cNvPr id="2" name="Picture 1" descr="rteu_logo_kucuk.jpg"/>
+          <p:cNvPicPr>
+            <a:picLocks noChangeAspect="1"/>
+          </p:cNvPicPr>
+          <p:nvPr/>
+        </p:nvPicPr>
+        <p:blipFill>
+          <a:blip r:embed="rId2"/>
+          <a:stretch>
+            <a:fillRect/>
+          </a:stretch>
+        </p:blipFill>
+        <p:spPr>
+          <a:xfrm>
+            <a:off x="640080" y="164592"/>
+            <a:ext cx="242773" cy="329184"/>
+          </a:xfrm>
+          <a:prstGeom prst="rect">
+            <a:avLst/>
+          </a:prstGeom>
+        </p:spPr>
+      </p:pic>
+      <p:sp>
+        <p:nvSpPr>
+          <p:cNvPr id="3" name="TextBox 2"/>
+          <p:cNvSpPr txBox="1"/>
+          <p:nvPr/>
+        </p:nvSpPr>
+        <p:spPr>
+          <a:xfrm>
+            <a:off x="1051560" y="182880"/>
+            <a:ext cx="7315200" cy="320040"/>
+          </a:xfrm>
+          <a:prstGeom prst="rect">
+            <a:avLst/>
+          </a:prstGeom>
+          <a:noFill/>
+        </p:spPr>
+        <p:txBody>
+          <a:bodyPr wrap="square" lIns="45720" rIns="45720">
+            <a:spAutoFit/>
+          </a:bodyPr>
+          <a:lstStyle/>
+          <a:p>
+            <a:r>
+              <a:rPr sz="1100" b="0">
+                <a:solidFill>
+                  <a:srgbClr val="5B6770"/>
+                </a:solidFill>
+              </a:rPr>
+              <a:t>CEN429 Güvenli Programlama · Hafta 15</a:t>
+            </a:r>
+          </a:p>
+        </p:txBody>
+      </p:sp>
+      <p:sp>
+        <p:nvSpPr>
+          <p:cNvPr id="4" name="TextBox 3"/>
+          <p:cNvSpPr txBox="1"/>
+          <p:nvPr/>
+        </p:nvSpPr>
+        <p:spPr>
+          <a:xfrm>
+            <a:off x="640080" y="6446520"/>
+            <a:ext cx="7315200" cy="274320"/>
+          </a:xfrm>
+          <a:prstGeom prst="rect">
+            <a:avLst/>
+          </a:prstGeom>
+          <a:noFill/>
+        </p:spPr>
+        <p:txBody>
+          <a:bodyPr wrap="square" lIns="45720" rIns="45720">
+            <a:spAutoFit/>
+          </a:bodyPr>
+          <a:lstStyle/>
+          <a:p>
+            <a:r>
+              <a:rPr sz="1000" b="0">
+                <a:solidFill>
+                  <a:srgbClr val="5B6770"/>
+                </a:solidFill>
+              </a:rPr>
+              <a:t>RTEÜ Bilgisayar Mühendisliği · 2026-2027 Güz</a:t>
+            </a:r>
+          </a:p>
+        </p:txBody>
+      </p:sp>
+      <p:sp>
+        <p:nvSpPr>
+          <p:cNvPr id="5" name="TextBox 4"/>
+          <p:cNvSpPr txBox="1"/>
+          <p:nvPr/>
+        </p:nvSpPr>
+        <p:spPr>
+          <a:xfrm>
+            <a:off x="10637215" y="6446520"/>
+            <a:ext cx="914400" cy="274320"/>
+          </a:xfrm>
+          <a:prstGeom prst="rect">
+            <a:avLst/>
+          </a:prstGeom>
+          <a:noFill/>
+        </p:spPr>
+        <p:txBody>
+          <a:bodyPr wrap="square" lIns="45720" rIns="45720">
+            <a:spAutoFit/>
+          </a:bodyPr>
+          <a:lstStyle/>
+          <a:p>
+            <a:pPr algn="r"/>
+            <a:r>
+              <a:rPr sz="1000" b="0">
+                <a:solidFill>
+                  <a:srgbClr val="5B6770"/>
+                </a:solidFill>
+              </a:rPr>
+              <a:t>12</a:t>
             </a:r>
           </a:p>
         </p:txBody>
@@ -4598,239 +5059,6 @@
 </p:sld>
 </file>
 
-<file path=ppt/slides/slide12.xml><?xml version="1.0" encoding="utf-8"?>
-<p:sld xmlns:a="http://schemas.openxmlformats.org/drawingml/2006/main" xmlns:p="http://schemas.openxmlformats.org/presentationml/2006/main" xmlns:r="http://schemas.openxmlformats.org/officeDocument/2006/relationships">
-  <p:cSld>
-    <p:spTree>
-      <p:nvGrpSpPr>
-        <p:cNvPr id="1" name=""/>
-        <p:cNvGrpSpPr/>
-        <p:nvPr/>
-      </p:nvGrpSpPr>
-      <p:grpSpPr/>
-      <p:pic>
-        <p:nvPicPr>
-          <p:cNvPr id="2" name="Picture 1" descr="rteu_logo_kucuk.jpg"/>
-          <p:cNvPicPr>
-            <a:picLocks noChangeAspect="1"/>
-          </p:cNvPicPr>
-          <p:nvPr/>
-        </p:nvPicPr>
-        <p:blipFill>
-          <a:blip r:embed="rId2"/>
-          <a:stretch>
-            <a:fillRect/>
-          </a:stretch>
-        </p:blipFill>
-        <p:spPr>
-          <a:xfrm>
-            <a:off x="640080" y="164592"/>
-            <a:ext cx="242773" cy="329184"/>
-          </a:xfrm>
-          <a:prstGeom prst="rect">
-            <a:avLst/>
-          </a:prstGeom>
-        </p:spPr>
-      </p:pic>
-      <p:sp>
-        <p:nvSpPr>
-          <p:cNvPr id="3" name="TextBox 2"/>
-          <p:cNvSpPr txBox="1"/>
-          <p:nvPr/>
-        </p:nvSpPr>
-        <p:spPr>
-          <a:xfrm>
-            <a:off x="1051560" y="182880"/>
-            <a:ext cx="7315200" cy="320040"/>
-          </a:xfrm>
-          <a:prstGeom prst="rect">
-            <a:avLst/>
-          </a:prstGeom>
-          <a:noFill/>
-        </p:spPr>
-        <p:txBody>
-          <a:bodyPr wrap="square" lIns="45720" rIns="45720">
-            <a:spAutoFit/>
-          </a:bodyPr>
-          <a:lstStyle/>
-          <a:p>
-            <a:r>
-              <a:rPr sz="1100" b="0">
-                <a:solidFill>
-                  <a:srgbClr val="5B6770"/>
-                </a:solidFill>
-              </a:rPr>
-              <a:t>CEN429 Güvenli Programlama · Hafta 15</a:t>
-            </a:r>
-          </a:p>
-        </p:txBody>
-      </p:sp>
-      <p:sp>
-        <p:nvSpPr>
-          <p:cNvPr id="4" name="TextBox 3"/>
-          <p:cNvSpPr txBox="1"/>
-          <p:nvPr/>
-        </p:nvSpPr>
-        <p:spPr>
-          <a:xfrm>
-            <a:off x="640080" y="6446520"/>
-            <a:ext cx="7315200" cy="274320"/>
-          </a:xfrm>
-          <a:prstGeom prst="rect">
-            <a:avLst/>
-          </a:prstGeom>
-          <a:noFill/>
-        </p:spPr>
-        <p:txBody>
-          <a:bodyPr wrap="square" lIns="45720" rIns="45720">
-            <a:spAutoFit/>
-          </a:bodyPr>
-          <a:lstStyle/>
-          <a:p>
-            <a:r>
-              <a:rPr sz="1000" b="0">
-                <a:solidFill>
-                  <a:srgbClr val="5B6770"/>
-                </a:solidFill>
-              </a:rPr>
-              <a:t>RTEÜ Bilgisayar Mühendisliği · 2026-2027 Güz</a:t>
-            </a:r>
-          </a:p>
-        </p:txBody>
-      </p:sp>
-      <p:sp>
-        <p:nvSpPr>
-          <p:cNvPr id="5" name="TextBox 4"/>
-          <p:cNvSpPr txBox="1"/>
-          <p:nvPr/>
-        </p:nvSpPr>
-        <p:spPr>
-          <a:xfrm>
-            <a:off x="10637215" y="6446520"/>
-            <a:ext cx="914400" cy="274320"/>
-          </a:xfrm>
-          <a:prstGeom prst="rect">
-            <a:avLst/>
-          </a:prstGeom>
-          <a:noFill/>
-        </p:spPr>
-        <p:txBody>
-          <a:bodyPr wrap="square" lIns="45720" rIns="45720">
-            <a:spAutoFit/>
-          </a:bodyPr>
-          <a:lstStyle/>
-          <a:p>
-            <a:pPr algn="r"/>
-            <a:r>
-              <a:rPr sz="1000" b="0">
-                <a:solidFill>
-                  <a:srgbClr val="5B6770"/>
-                </a:solidFill>
-              </a:rPr>
-              <a:t>12</a:t>
-            </a:r>
-          </a:p>
-        </p:txBody>
-      </p:sp>
-      <p:sp>
-        <p:nvSpPr>
-          <p:cNvPr id="6" name="TextBox 5"/>
-          <p:cNvSpPr txBox="1"/>
-          <p:nvPr/>
-        </p:nvSpPr>
-        <p:spPr>
-          <a:xfrm>
-            <a:off x="640080" y="548640"/>
-            <a:ext cx="10911535" cy="731520"/>
-          </a:xfrm>
-          <a:prstGeom prst="rect">
-            <a:avLst/>
-          </a:prstGeom>
-          <a:noFill/>
-        </p:spPr>
-        <p:txBody>
-          <a:bodyPr wrap="square" lIns="45720" rIns="45720" anchor="ctr">
-            <a:spAutoFit/>
-          </a:bodyPr>
-          <a:lstStyle/>
-          <a:p>
-            <a:r>
-              <a:rPr sz="3000" b="1">
-                <a:solidFill>
-                  <a:srgbClr val="006D77"/>
-                </a:solidFill>
-              </a:rPr>
-              <a:t>Akademik dürüstlük</a:t>
-            </a:r>
-          </a:p>
-        </p:txBody>
-      </p:sp>
-      <p:sp>
-        <p:nvSpPr>
-          <p:cNvPr id="7" name="TextBox 6"/>
-          <p:cNvSpPr txBox="1"/>
-          <p:nvPr/>
-        </p:nvSpPr>
-        <p:spPr>
-          <a:xfrm>
-            <a:off x="640080" y="1325880"/>
-            <a:ext cx="10911535" cy="770128"/>
-          </a:xfrm>
-          <a:prstGeom prst="rect">
-            <a:avLst/>
-          </a:prstGeom>
-          <a:noFill/>
-        </p:spPr>
-        <p:txBody>
-          <a:bodyPr wrap="square" lIns="45720" rIns="45720">
-            <a:spAutoFit/>
-          </a:bodyPr>
-          <a:lstStyle/>
-          <a:p>
-            <a:pPr algn="l"/>
-            <a:r>
-              <a:rPr sz="2000" b="0">
-                <a:solidFill>
-                  <a:srgbClr val="1F2D3A"/>
-                </a:solidFill>
-              </a:rPr>
-              <a:t>İzlencenin "Akademik Dürüstlük" bölümü projede de geçerlidir; teslim edilen her satır açıklanabilmeli, gösterimde takımın her üyesine soru sorulabilir.</a:t>
-            </a:r>
-          </a:p>
-        </p:txBody>
-      </p:sp>
-      <p:pic>
-        <p:nvPicPr>
-          <p:cNvPr id="8" name="Picture 7" descr="h15-04-s16.png"/>
-          <p:cNvPicPr>
-            <a:picLocks noChangeAspect="1"/>
-          </p:cNvPicPr>
-          <p:nvPr/>
-        </p:nvPicPr>
-        <p:blipFill>
-          <a:blip r:embed="rId3"/>
-          <a:stretch>
-            <a:fillRect/>
-          </a:stretch>
-        </p:blipFill>
-        <p:spPr>
-          <a:xfrm>
-            <a:off x="1055461" y="2205736"/>
-            <a:ext cx="10080772" cy="3948176"/>
-          </a:xfrm>
-          <a:prstGeom prst="rect">
-            <a:avLst/>
-          </a:prstGeom>
-        </p:spPr>
-      </p:pic>
-    </p:spTree>
-  </p:cSld>
-  <p:clrMapOvr>
-    <a:masterClrMapping/>
-  </p:clrMapOvr>
-</p:sld>
-</file>
-
 <file path=ppt/slides/slide13.xml><?xml version="1.0" encoding="utf-8"?>
 <p:sld xmlns:a="http://schemas.openxmlformats.org/drawingml/2006/main" xmlns:p="http://schemas.openxmlformats.org/presentationml/2006/main" xmlns:r="http://schemas.openxmlformats.org/officeDocument/2006/relationships">
   <p:cSld>
@@ -4993,7 +5221,7 @@
                   <a:srgbClr val="006D77"/>
                 </a:solidFill>
               </a:rPr>
-              <a:t>Dönem sonunda</a:t>
+              <a:t>Akademik dürüstlük</a:t>
             </a:r>
           </a:p>
         </p:txBody>
@@ -5007,7 +5235,7 @@
         <p:spPr>
           <a:xfrm>
             <a:off x="640080" y="1325880"/>
-            <a:ext cx="10911535" cy="797560"/>
+            <a:ext cx="10911535" cy="770128"/>
           </a:xfrm>
           <a:prstGeom prst="rect">
             <a:avLst/>
@@ -5020,115 +5248,42 @@
           </a:bodyPr>
           <a:lstStyle/>
           <a:p>
-            <a:pPr>
-              <a:spcAft>
-                <a:spcPts val="300"/>
-              </a:spcAft>
-            </a:pPr>
-            <a:r>
-              <a:rPr sz="2000" b="1">
-                <a:solidFill>
-                  <a:srgbClr val="006D77"/>
-                </a:solidFill>
-              </a:rPr>
-              <a:t>• </a:t>
-            </a:r>
+            <a:pPr algn="l"/>
             <a:r>
               <a:rPr sz="2000" b="0">
                 <a:solidFill>
                   <a:srgbClr val="1F2D3A"/>
                 </a:solidFill>
               </a:rPr>
-              <a:t>Kılavuzunuz = sertifikasyon belgelerinin küçük bir modeli → </a:t>
-            </a:r>
-            <a:r>
-              <a:rPr sz="2000" b="1">
-                <a:solidFill>
-                  <a:srgbClr val="1F2D3A"/>
-                </a:solidFill>
-              </a:rPr>
-              <a:t>portfolyo</a:t>
-            </a:r>
-            <a:r>
-              <a:rPr sz="2000" b="0">
-                <a:solidFill>
-                  <a:srgbClr val="1F2D3A"/>
-                </a:solidFill>
-              </a:rPr>
-              <a:t> (gizli bilgi içermediğinden emin olun)</a:t>
-            </a:r>
-          </a:p>
-        </p:txBody>
-      </p:sp>
-      <p:sp>
-        <p:nvSpPr>
-          <p:cNvPr id="8" name="Rectangle 7"/>
-          <p:cNvSpPr/>
+              <a:t>İzlencenin "Akademik Dürüstlük" bölümü projede de geçerlidir; teslim edilen her satır açıklanabilmeli, gösterimde takımın her üyesine soru sorulabilir.</a:t>
+            </a:r>
+          </a:p>
+        </p:txBody>
+      </p:sp>
+      <p:pic>
+        <p:nvPicPr>
+          <p:cNvPr id="8" name="Picture 7" descr="h15-04-s16.png"/>
+          <p:cNvPicPr>
+            <a:picLocks noChangeAspect="1"/>
+          </p:cNvPicPr>
           <p:nvPr/>
-        </p:nvSpPr>
-        <p:spPr>
-          <a:xfrm>
-            <a:off x="640080" y="2233168"/>
-            <a:ext cx="10911535" cy="934719"/>
-          </a:xfrm>
-          <a:prstGeom prst="rect">
-            <a:avLst/>
-          </a:prstGeom>
-          <a:solidFill>
-            <a:srgbClr val="EEF7F8"/>
-          </a:solidFill>
-          <a:ln>
-            <a:solidFill>
-              <a:srgbClr val="006D77"/>
-            </a:solidFill>
-          </a:ln>
-        </p:spPr>
-        <p:style>
-          <a:lnRef idx="1">
-            <a:schemeClr val="accent1"/>
-          </a:lnRef>
-          <a:fillRef idx="3">
-            <a:schemeClr val="accent1"/>
-          </a:fillRef>
-          <a:effectRef idx="2">
-            <a:schemeClr val="accent1"/>
-          </a:effectRef>
-          <a:fontRef idx="minor">
-            <a:schemeClr val="lt1"/>
-          </a:fontRef>
-        </p:style>
-        <p:txBody>
-          <a:bodyPr rtlCol="0" anchor="ctr" wrap="square" lIns="182880"/>
-          <a:lstStyle/>
-          <a:p>
-            <a:pPr algn="l"/>
-            <a:r>
-              <a:rPr sz="2000" b="0">
-                <a:solidFill>
-                  <a:srgbClr val="1F2D3A"/>
-                </a:solidFill>
-              </a:rPr>
-              <a:t>Finalde </a:t>
-            </a:r>
-            <a:r>
-              <a:rPr sz="2000" b="1">
-                <a:solidFill>
-                  <a:srgbClr val="1F2D3A"/>
-                </a:solidFill>
-              </a:rPr>
-              <a:t>sonuç</a:t>
-            </a:r>
-            <a:r>
-              <a:rPr sz="2000" b="0">
-                <a:solidFill>
-                  <a:srgbClr val="1F2D3A"/>
-                </a:solidFill>
-              </a:rPr>
-              <a:t> beklenir: her koruma çalışırken gösterilir, her gereksinim kanıtla bağlanır.</a:t>
-            </a:r>
-          </a:p>
-        </p:txBody>
-      </p:sp>
+        </p:nvPicPr>
+        <p:blipFill>
+          <a:blip r:embed="rId3"/>
+          <a:stretch>
+            <a:fillRect/>
+          </a:stretch>
+        </p:blipFill>
+        <p:spPr>
+          <a:xfrm>
+            <a:off x="1055461" y="2205736"/>
+            <a:ext cx="10080772" cy="3948176"/>
+          </a:xfrm>
+          <a:prstGeom prst="rect">
+            <a:avLst/>
+          </a:prstGeom>
+        </p:spPr>
+      </p:pic>
     </p:spTree>
   </p:cSld>
   <p:clrMapOvr>
@@ -5267,6 +5422,312 @@
                 </a:solidFill>
               </a:rPr>
               <a:t>14</a:t>
+            </a:r>
+          </a:p>
+        </p:txBody>
+      </p:sp>
+      <p:sp>
+        <p:nvSpPr>
+          <p:cNvPr id="6" name="TextBox 5"/>
+          <p:cNvSpPr txBox="1"/>
+          <p:nvPr/>
+        </p:nvSpPr>
+        <p:spPr>
+          <a:xfrm>
+            <a:off x="640080" y="548640"/>
+            <a:ext cx="10911535" cy="731520"/>
+          </a:xfrm>
+          <a:prstGeom prst="rect">
+            <a:avLst/>
+          </a:prstGeom>
+          <a:noFill/>
+        </p:spPr>
+        <p:txBody>
+          <a:bodyPr wrap="square" lIns="45720" rIns="45720" anchor="ctr">
+            <a:spAutoFit/>
+          </a:bodyPr>
+          <a:lstStyle/>
+          <a:p>
+            <a:r>
+              <a:rPr sz="3000" b="1">
+                <a:solidFill>
+                  <a:srgbClr val="006D77"/>
+                </a:solidFill>
+              </a:rPr>
+              <a:t>Dönem sonunda</a:t>
+            </a:r>
+          </a:p>
+        </p:txBody>
+      </p:sp>
+      <p:sp>
+        <p:nvSpPr>
+          <p:cNvPr id="7" name="TextBox 6"/>
+          <p:cNvSpPr txBox="1"/>
+          <p:nvPr/>
+        </p:nvSpPr>
+        <p:spPr>
+          <a:xfrm>
+            <a:off x="640080" y="1325880"/>
+            <a:ext cx="10911535" cy="797560"/>
+          </a:xfrm>
+          <a:prstGeom prst="rect">
+            <a:avLst/>
+          </a:prstGeom>
+          <a:noFill/>
+        </p:spPr>
+        <p:txBody>
+          <a:bodyPr wrap="square" lIns="45720" rIns="45720">
+            <a:spAutoFit/>
+          </a:bodyPr>
+          <a:lstStyle/>
+          <a:p>
+            <a:pPr>
+              <a:spcAft>
+                <a:spcPts val="300"/>
+              </a:spcAft>
+            </a:pPr>
+            <a:r>
+              <a:rPr sz="2000" b="1">
+                <a:solidFill>
+                  <a:srgbClr val="006D77"/>
+                </a:solidFill>
+              </a:rPr>
+              <a:t>• </a:t>
+            </a:r>
+            <a:r>
+              <a:rPr sz="2000" b="0">
+                <a:solidFill>
+                  <a:srgbClr val="1F2D3A"/>
+                </a:solidFill>
+              </a:rPr>
+              <a:t>Kılavuzunuz = sertifikasyon belgelerinin küçük bir modeli → </a:t>
+            </a:r>
+            <a:r>
+              <a:rPr sz="2000" b="1">
+                <a:solidFill>
+                  <a:srgbClr val="1F2D3A"/>
+                </a:solidFill>
+              </a:rPr>
+              <a:t>portfolyo</a:t>
+            </a:r>
+            <a:r>
+              <a:rPr sz="2000" b="0">
+                <a:solidFill>
+                  <a:srgbClr val="1F2D3A"/>
+                </a:solidFill>
+              </a:rPr>
+              <a:t> (gizli bilgi içermediğinden emin olun)</a:t>
+            </a:r>
+          </a:p>
+        </p:txBody>
+      </p:sp>
+      <p:sp>
+        <p:nvSpPr>
+          <p:cNvPr id="8" name="Rectangle 7"/>
+          <p:cNvSpPr/>
+          <p:nvPr/>
+        </p:nvSpPr>
+        <p:spPr>
+          <a:xfrm>
+            <a:off x="640080" y="2233168"/>
+            <a:ext cx="10911535" cy="934719"/>
+          </a:xfrm>
+          <a:prstGeom prst="rect">
+            <a:avLst/>
+          </a:prstGeom>
+          <a:solidFill>
+            <a:srgbClr val="EEF7F8"/>
+          </a:solidFill>
+          <a:ln>
+            <a:solidFill>
+              <a:srgbClr val="006D77"/>
+            </a:solidFill>
+          </a:ln>
+        </p:spPr>
+        <p:style>
+          <a:lnRef idx="1">
+            <a:schemeClr val="accent1"/>
+          </a:lnRef>
+          <a:fillRef idx="3">
+            <a:schemeClr val="accent1"/>
+          </a:fillRef>
+          <a:effectRef idx="2">
+            <a:schemeClr val="accent1"/>
+          </a:effectRef>
+          <a:fontRef idx="minor">
+            <a:schemeClr val="lt1"/>
+          </a:fontRef>
+        </p:style>
+        <p:txBody>
+          <a:bodyPr rtlCol="0" anchor="ctr" wrap="square" lIns="182880"/>
+          <a:lstStyle/>
+          <a:p>
+            <a:pPr algn="l"/>
+            <a:r>
+              <a:rPr sz="2000" b="0">
+                <a:solidFill>
+                  <a:srgbClr val="1F2D3A"/>
+                </a:solidFill>
+              </a:rPr>
+              <a:t>Finalde </a:t>
+            </a:r>
+            <a:r>
+              <a:rPr sz="2000" b="1">
+                <a:solidFill>
+                  <a:srgbClr val="1F2D3A"/>
+                </a:solidFill>
+              </a:rPr>
+              <a:t>sonuç</a:t>
+            </a:r>
+            <a:r>
+              <a:rPr sz="2000" b="0">
+                <a:solidFill>
+                  <a:srgbClr val="1F2D3A"/>
+                </a:solidFill>
+              </a:rPr>
+              <a:t> beklenir: her koruma çalışırken gösterilir, her gereksinim kanıtla bağlanır.</a:t>
+            </a:r>
+          </a:p>
+        </p:txBody>
+      </p:sp>
+    </p:spTree>
+  </p:cSld>
+  <p:clrMapOvr>
+    <a:masterClrMapping/>
+  </p:clrMapOvr>
+</p:sld>
+</file>
+
+<file path=ppt/slides/slide15.xml><?xml version="1.0" encoding="utf-8"?>
+<p:sld xmlns:a="http://schemas.openxmlformats.org/drawingml/2006/main" xmlns:p="http://schemas.openxmlformats.org/presentationml/2006/main" xmlns:r="http://schemas.openxmlformats.org/officeDocument/2006/relationships">
+  <p:cSld>
+    <p:spTree>
+      <p:nvGrpSpPr>
+        <p:cNvPr id="1" name=""/>
+        <p:cNvGrpSpPr/>
+        <p:nvPr/>
+      </p:nvGrpSpPr>
+      <p:grpSpPr/>
+      <p:pic>
+        <p:nvPicPr>
+          <p:cNvPr id="2" name="Picture 1" descr="rteu_logo_kucuk.jpg"/>
+          <p:cNvPicPr>
+            <a:picLocks noChangeAspect="1"/>
+          </p:cNvPicPr>
+          <p:nvPr/>
+        </p:nvPicPr>
+        <p:blipFill>
+          <a:blip r:embed="rId2"/>
+          <a:stretch>
+            <a:fillRect/>
+          </a:stretch>
+        </p:blipFill>
+        <p:spPr>
+          <a:xfrm>
+            <a:off x="640080" y="164592"/>
+            <a:ext cx="242773" cy="329184"/>
+          </a:xfrm>
+          <a:prstGeom prst="rect">
+            <a:avLst/>
+          </a:prstGeom>
+        </p:spPr>
+      </p:pic>
+      <p:sp>
+        <p:nvSpPr>
+          <p:cNvPr id="3" name="TextBox 2"/>
+          <p:cNvSpPr txBox="1"/>
+          <p:nvPr/>
+        </p:nvSpPr>
+        <p:spPr>
+          <a:xfrm>
+            <a:off x="1051560" y="182880"/>
+            <a:ext cx="7315200" cy="320040"/>
+          </a:xfrm>
+          <a:prstGeom prst="rect">
+            <a:avLst/>
+          </a:prstGeom>
+          <a:noFill/>
+        </p:spPr>
+        <p:txBody>
+          <a:bodyPr wrap="square" lIns="45720" rIns="45720">
+            <a:spAutoFit/>
+          </a:bodyPr>
+          <a:lstStyle/>
+          <a:p>
+            <a:r>
+              <a:rPr sz="1100" b="0">
+                <a:solidFill>
+                  <a:srgbClr val="5B6770"/>
+                </a:solidFill>
+              </a:rPr>
+              <a:t>CEN429 Güvenli Programlama · Hafta 15</a:t>
+            </a:r>
+          </a:p>
+        </p:txBody>
+      </p:sp>
+      <p:sp>
+        <p:nvSpPr>
+          <p:cNvPr id="4" name="TextBox 3"/>
+          <p:cNvSpPr txBox="1"/>
+          <p:nvPr/>
+        </p:nvSpPr>
+        <p:spPr>
+          <a:xfrm>
+            <a:off x="640080" y="6446520"/>
+            <a:ext cx="7315200" cy="274320"/>
+          </a:xfrm>
+          <a:prstGeom prst="rect">
+            <a:avLst/>
+          </a:prstGeom>
+          <a:noFill/>
+        </p:spPr>
+        <p:txBody>
+          <a:bodyPr wrap="square" lIns="45720" rIns="45720">
+            <a:spAutoFit/>
+          </a:bodyPr>
+          <a:lstStyle/>
+          <a:p>
+            <a:r>
+              <a:rPr sz="1000" b="0">
+                <a:solidFill>
+                  <a:srgbClr val="5B6770"/>
+                </a:solidFill>
+              </a:rPr>
+              <a:t>RTEÜ Bilgisayar Mühendisliği · 2026-2027 Güz</a:t>
+            </a:r>
+          </a:p>
+        </p:txBody>
+      </p:sp>
+      <p:sp>
+        <p:nvSpPr>
+          <p:cNvPr id="5" name="TextBox 4"/>
+          <p:cNvSpPr txBox="1"/>
+          <p:nvPr/>
+        </p:nvSpPr>
+        <p:spPr>
+          <a:xfrm>
+            <a:off x="10637215" y="6446520"/>
+            <a:ext cx="914400" cy="274320"/>
+          </a:xfrm>
+          <a:prstGeom prst="rect">
+            <a:avLst/>
+          </a:prstGeom>
+          <a:noFill/>
+        </p:spPr>
+        <p:txBody>
+          <a:bodyPr wrap="square" lIns="45720" rIns="45720">
+            <a:spAutoFit/>
+          </a:bodyPr>
+          <a:lstStyle/>
+          <a:p>
+            <a:pPr algn="r"/>
+            <a:r>
+              <a:rPr sz="1000" b="0">
+                <a:solidFill>
+                  <a:srgbClr val="5B6770"/>
+                </a:solidFill>
+              </a:rPr>
+              <a:t>15</a:t>
             </a:r>
           </a:p>
         </p:txBody>
@@ -6397,7 +6858,7 @@
                             <a:srgbClr val="1F2D3A"/>
                           </a:solidFill>
                         </a:rPr>
-                        <a:t>İkili korumalar</a:t>
+                        <a:t>Binary korumalar</a:t>
                       </a:r>
                     </a:p>
                   </a:txBody>
